--- a/docs/presentation/German-Course-AI-Trilingual.pptx
+++ b/docs/presentation/German-Course-AI-Trilingual.pptx
@@ -2,18 +2,18 @@
 <file path=ppt/presentation.xml><?xml version="1.0" encoding="utf-8"?>
 <p:presentation xmlns:p="http://schemas.openxmlformats.org/presentationml/2006/main">
   <p:sldMasterIdLst>
-    <p:sldMasterId xmlns:r="http://schemas.openxmlformats.org/officeDocument/2006/relationships" id="2147483648" r:id="R50089299b57a401e"/>
+    <p:sldMasterId xmlns:r="http://schemas.openxmlformats.org/officeDocument/2006/relationships" id="2147483648" r:id="R925416c520d144d7"/>
   </p:sldMasterIdLst>
   <p:notesMasterIdLst>
-    <p:notesMasterId xmlns:r="http://schemas.openxmlformats.org/officeDocument/2006/relationships" r:id="R73aa674088a34719"/>
+    <p:notesMasterId xmlns:r="http://schemas.openxmlformats.org/officeDocument/2006/relationships" r:id="R944f634b67534c4b"/>
   </p:notesMasterIdLst>
   <p:sldIdLst>
-    <p:sldId xmlns:r="http://schemas.openxmlformats.org/officeDocument/2006/relationships" id="256" r:id="R16e7261788684942"/>
-    <p:sldId xmlns:r="http://schemas.openxmlformats.org/officeDocument/2006/relationships" id="257" r:id="R528cc220f1ac4477"/>
-    <p:sldId xmlns:r="http://schemas.openxmlformats.org/officeDocument/2006/relationships" id="258" r:id="R82d53c9db81c4cb1"/>
-    <p:sldId xmlns:r="http://schemas.openxmlformats.org/officeDocument/2006/relationships" id="259" r:id="R536bd6fd730c4868"/>
-    <p:sldId xmlns:r="http://schemas.openxmlformats.org/officeDocument/2006/relationships" id="260" r:id="R5df2d9b80d564d24"/>
-    <p:sldId xmlns:r="http://schemas.openxmlformats.org/officeDocument/2006/relationships" id="261" r:id="R3f5ea4dde0af4b47"/>
+    <p:sldId xmlns:r="http://schemas.openxmlformats.org/officeDocument/2006/relationships" id="256" r:id="R6c47d783ae2549ee"/>
+    <p:sldId xmlns:r="http://schemas.openxmlformats.org/officeDocument/2006/relationships" id="257" r:id="R1ff21c9a833d428b"/>
+    <p:sldId xmlns:r="http://schemas.openxmlformats.org/officeDocument/2006/relationships" id="258" r:id="Rea0b44f9643f49fe"/>
+    <p:sldId xmlns:r="http://schemas.openxmlformats.org/officeDocument/2006/relationships" id="259" r:id="R25588092b3cc4d92"/>
+    <p:sldId xmlns:r="http://schemas.openxmlformats.org/officeDocument/2006/relationships" id="260" r:id="Rb6535701c7294d2e"/>
+    <p:sldId xmlns:r="http://schemas.openxmlformats.org/officeDocument/2006/relationships" id="261" r:id="R350b568ab17c4af3"/>
   </p:sldIdLst>
   <p:sldSz cx="12192000" cy="6858000"/>
   <p:notesSz cx="6858000" cy="9144000"/>
@@ -937,6 +937,11 @@
           </a:p>
           <a:p xmlns:a="http://schemas.openxmlformats.org/drawingml/2006/main">
             <a:r>
+              <a:t>- https://github.com/Azizsekerdil/GermanCourseAI/releases/tag/v1.0.0</a:t>
+            </a:r>
+          </a:p>
+          <a:p xmlns:a="http://schemas.openxmlformats.org/drawingml/2006/main">
+            <a:r>
               <a:t>[/Sources]</a:t>
             </a:r>
           </a:p>
@@ -1005,7 +1010,7 @@
   </p:cSld>
   <p:clrMap bg1="lt1" tx1="dk1" bg2="lt2" tx2="dk2" accent1="accent1" accent2="accent2" accent3="accent3" accent4="accent4" accent5="accent5" accent6="accent6" hlink="hlink" folHlink="folHlink"/>
   <p:sldLayoutIdLst>
-    <p:sldLayoutId xmlns:r="http://schemas.openxmlformats.org/officeDocument/2006/relationships" id="2147483649" r:id="Rfc865ebd5cc24468"/>
+    <p:sldLayoutId xmlns:r="http://schemas.openxmlformats.org/officeDocument/2006/relationships" id="2147483649" r:id="R7874d5378f794973"/>
   </p:sldLayoutIdLst>
   <p:txStyles>
     <p:titleStyle>
@@ -1556,7 +1561,7 @@
           <p:cNvPr id="13" name="box-1">
             <a:extLst xmlns:a="http://schemas.openxmlformats.org/drawingml/2006/main">
               <a:ext uri="{FF2B5EF4-FFF2-40B4-BE49-F238E27FC236}">
-                <a16:creationId xmlns:a16="http://schemas.microsoft.com/office/drawing/2014/main" id="{139C1B21-9F8D-4E4E-9520-5F2E6ED4986C}"/>
+                <a16:creationId xmlns:a16="http://schemas.microsoft.com/office/drawing/2014/main" id="{CCA520DB-A332-41F7-B660-CFF11DEDF158}"/>
               </a:ext>
             </a:extLst>
           </p:cNvPr>
@@ -1589,7 +1594,7 @@
           <p:cNvPr id="2" name="text-2">
             <a:extLst xmlns:a="http://schemas.openxmlformats.org/drawingml/2006/main">
               <a:ext uri="{FF2B5EF4-FFF2-40B4-BE49-F238E27FC236}">
-                <a16:creationId xmlns:a16="http://schemas.microsoft.com/office/drawing/2014/main" id="{CC5361F4-933E-4085-9150-F7019530D06C}"/>
+                <a16:creationId xmlns:a16="http://schemas.microsoft.com/office/drawing/2014/main" id="{61267023-FF07-4D30-B45A-971BFFA33FFF}"/>
               </a:ext>
             </a:extLst>
           </p:cNvPr>
@@ -1645,7 +1650,7 @@
           <p:cNvPr id="3" name="text-3">
             <a:extLst xmlns:a="http://schemas.openxmlformats.org/drawingml/2006/main">
               <a:ext uri="{FF2B5EF4-FFF2-40B4-BE49-F238E27FC236}">
-                <a16:creationId xmlns:a16="http://schemas.microsoft.com/office/drawing/2014/main" id="{4EDAC175-15AE-489F-A1FB-B8B3C326D7E1}"/>
+                <a16:creationId xmlns:a16="http://schemas.microsoft.com/office/drawing/2014/main" id="{5F5650EC-2956-424B-98BE-C4FDEBEB4BF6}"/>
               </a:ext>
             </a:extLst>
           </p:cNvPr>
@@ -1701,7 +1706,7 @@
           <p:cNvPr id="4" name="text-4">
             <a:extLst xmlns:a="http://schemas.openxmlformats.org/drawingml/2006/main">
               <a:ext uri="{FF2B5EF4-FFF2-40B4-BE49-F238E27FC236}">
-                <a16:creationId xmlns:a16="http://schemas.microsoft.com/office/drawing/2014/main" id="{863BC0B5-6D2F-4EB8-B686-EA165F9D9B88}"/>
+                <a16:creationId xmlns:a16="http://schemas.microsoft.com/office/drawing/2014/main" id="{042E64A7-98FE-49AE-9A1B-16A457068F73}"/>
               </a:ext>
             </a:extLst>
           </p:cNvPr>
@@ -1757,7 +1762,7 @@
           <p:cNvPr id="5" name="text-5">
             <a:extLst xmlns:a="http://schemas.openxmlformats.org/drawingml/2006/main">
               <a:ext uri="{FF2B5EF4-FFF2-40B4-BE49-F238E27FC236}">
-                <a16:creationId xmlns:a16="http://schemas.microsoft.com/office/drawing/2014/main" id="{2D4DC81A-C104-4B1C-924F-33D17A05312E}"/>
+                <a16:creationId xmlns:a16="http://schemas.microsoft.com/office/drawing/2014/main" id="{586042F5-9CD0-4F69-85E0-DF4959003A4C}"/>
               </a:ext>
             </a:extLst>
           </p:cNvPr>
@@ -1813,7 +1818,7 @@
           <p:cNvPr id="6" name="text-6">
             <a:extLst xmlns:a="http://schemas.openxmlformats.org/drawingml/2006/main">
               <a:ext uri="{FF2B5EF4-FFF2-40B4-BE49-F238E27FC236}">
-                <a16:creationId xmlns:a16="http://schemas.microsoft.com/office/drawing/2014/main" id="{FF3667E2-4B93-4190-B260-F81B87ECE30A}"/>
+                <a16:creationId xmlns:a16="http://schemas.microsoft.com/office/drawing/2014/main" id="{8C84A7AA-014B-42A5-B22A-1C726A25EA4B}"/>
               </a:ext>
             </a:extLst>
           </p:cNvPr>
@@ -1869,7 +1874,7 @@
           <p:cNvPr id="7" name="text-7">
             <a:extLst xmlns:a="http://schemas.openxmlformats.org/drawingml/2006/main">
               <a:ext uri="{FF2B5EF4-FFF2-40B4-BE49-F238E27FC236}">
-                <a16:creationId xmlns:a16="http://schemas.microsoft.com/office/drawing/2014/main" id="{9679CAF3-7109-40AC-9C1B-B65F9D4138E3}"/>
+                <a16:creationId xmlns:a16="http://schemas.microsoft.com/office/drawing/2014/main" id="{48E8C130-6CBB-45CB-A523-736875386D9F}"/>
               </a:ext>
             </a:extLst>
           </p:cNvPr>
@@ -1925,7 +1930,7 @@
           <p:cNvPr id="8" name="text-8">
             <a:extLst xmlns:a="http://schemas.openxmlformats.org/drawingml/2006/main">
               <a:ext uri="{FF2B5EF4-FFF2-40B4-BE49-F238E27FC236}">
-                <a16:creationId xmlns:a16="http://schemas.microsoft.com/office/drawing/2014/main" id="{B231AC5C-C408-4641-A2C8-4A8F3E1FFAF7}"/>
+                <a16:creationId xmlns:a16="http://schemas.microsoft.com/office/drawing/2014/main" id="{F2015877-5EB1-4595-8497-8687C7D635D5}"/>
               </a:ext>
             </a:extLst>
           </p:cNvPr>
@@ -1981,7 +1986,7 @@
           <p:cNvPr id="9" name="text-9">
             <a:extLst xmlns:a="http://schemas.openxmlformats.org/drawingml/2006/main">
               <a:ext uri="{FF2B5EF4-FFF2-40B4-BE49-F238E27FC236}">
-                <a16:creationId xmlns:a16="http://schemas.microsoft.com/office/drawing/2014/main" id="{8DE7905E-FD01-4D4D-A813-36DEB3274B0F}"/>
+                <a16:creationId xmlns:a16="http://schemas.microsoft.com/office/drawing/2014/main" id="{5D61D76D-4253-434E-89EE-5C3ADCFD35F8}"/>
               </a:ext>
             </a:extLst>
           </p:cNvPr>
@@ -2037,7 +2042,7 @@
           <p:cNvPr id="10" name="box-10">
             <a:extLst xmlns:a="http://schemas.openxmlformats.org/drawingml/2006/main">
               <a:ext uri="{FF2B5EF4-FFF2-40B4-BE49-F238E27FC236}">
-                <a16:creationId xmlns:a16="http://schemas.microsoft.com/office/drawing/2014/main" id="{D56071B0-EAEE-4B97-9A34-188AE4680E82}"/>
+                <a16:creationId xmlns:a16="http://schemas.microsoft.com/office/drawing/2014/main" id="{11615049-7E32-496D-87D3-B30F9F4094A0}"/>
               </a:ext>
             </a:extLst>
           </p:cNvPr>
@@ -2074,7 +2079,7 @@
           <p:nvPr/>
         </p:nvPicPr>
         <p:blipFill>
-          <a:blip xmlns:r="http://schemas.openxmlformats.org/officeDocument/2006/relationships" xmlns:a="http://schemas.openxmlformats.org/drawingml/2006/main" r:embed="R72289274b5e64b96"/>
+          <a:blip xmlns:r="http://schemas.openxmlformats.org/officeDocument/2006/relationships" xmlns:a="http://schemas.openxmlformats.org/drawingml/2006/main" r:embed="R93e3aa85f4464eb3"/>
           <a:stretch xmlns:a="http://schemas.openxmlformats.org/drawingml/2006/main"/>
         </p:blipFill>
         <p:spPr>
@@ -2092,7 +2097,7 @@
           <p:cNvPr id="12" name="text-11">
             <a:extLst xmlns:a="http://schemas.openxmlformats.org/drawingml/2006/main">
               <a:ext uri="{FF2B5EF4-FFF2-40B4-BE49-F238E27FC236}">
-                <a16:creationId xmlns:a16="http://schemas.microsoft.com/office/drawing/2014/main" id="{8532823E-EAFF-4D78-9CDA-6A8C6B621EBA}"/>
+                <a16:creationId xmlns:a16="http://schemas.microsoft.com/office/drawing/2014/main" id="{282CCCFB-42C9-4AD4-93AD-0D5A8DC0D5FB}"/>
               </a:ext>
             </a:extLst>
           </p:cNvPr>
@@ -2138,7 +2143,7 @@
                 <a:ea typeface="Arial"/>
                 <a:cs typeface="Arial"/>
               </a:rPr>
-              <a:t>Windows · Python · SQLite</a:t>
+              <a:t>Windows x64 · macOS arm64</a:t>
             </a:r>
           </a:p>
         </p:txBody>
@@ -2146,7 +2151,7 @@
     </p:spTree>
     <p:extLst>
       <p:ext uri="{BB962C8B-B14F-4D97-AF65-F5344CB8AC3E}">
-        <p14:creationId xmlns:p14="http://schemas.microsoft.com/office/powerpoint/2010/main" val="1061628849"/>
+        <p14:creationId xmlns:p14="http://schemas.microsoft.com/office/powerpoint/2010/main" val="541527519"/>
       </p:ext>
     </p:extLst>
   </p:cSld>
@@ -2177,7 +2182,7 @@
           <p:cNvPr id="14" name="box-12">
             <a:extLst xmlns:a="http://schemas.openxmlformats.org/drawingml/2006/main">
               <a:ext uri="{FF2B5EF4-FFF2-40B4-BE49-F238E27FC236}">
-                <a16:creationId xmlns:a16="http://schemas.microsoft.com/office/drawing/2014/main" id="{6BA5CB82-C4DE-431C-85D1-A00813C24E62}"/>
+                <a16:creationId xmlns:a16="http://schemas.microsoft.com/office/drawing/2014/main" id="{AFEF2905-D59A-4C8E-9642-78744B99A926}"/>
               </a:ext>
             </a:extLst>
           </p:cNvPr>
@@ -2210,7 +2215,7 @@
           <p:cNvPr id="2" name="text-13">
             <a:extLst xmlns:a="http://schemas.openxmlformats.org/drawingml/2006/main">
               <a:ext uri="{FF2B5EF4-FFF2-40B4-BE49-F238E27FC236}">
-                <a16:creationId xmlns:a16="http://schemas.microsoft.com/office/drawing/2014/main" id="{37F8E4AF-EB7A-41C5-8EE5-0D824CBD8728}"/>
+                <a16:creationId xmlns:a16="http://schemas.microsoft.com/office/drawing/2014/main" id="{E068ACAA-2AC7-4966-AB0B-AC7EF187E773}"/>
               </a:ext>
             </a:extLst>
           </p:cNvPr>
@@ -2266,7 +2271,7 @@
           <p:cNvPr id="3" name="text-14">
             <a:extLst xmlns:a="http://schemas.openxmlformats.org/drawingml/2006/main">
               <a:ext uri="{FF2B5EF4-FFF2-40B4-BE49-F238E27FC236}">
-                <a16:creationId xmlns:a16="http://schemas.microsoft.com/office/drawing/2014/main" id="{50772582-9454-430C-A87C-D320296D424E}"/>
+                <a16:creationId xmlns:a16="http://schemas.microsoft.com/office/drawing/2014/main" id="{3A11917C-1F2E-46A8-9F3B-AF5196D36FC6}"/>
               </a:ext>
             </a:extLst>
           </p:cNvPr>
@@ -2322,7 +2327,7 @@
           <p:cNvPr id="4" name="text-15">
             <a:extLst xmlns:a="http://schemas.openxmlformats.org/drawingml/2006/main">
               <a:ext uri="{FF2B5EF4-FFF2-40B4-BE49-F238E27FC236}">
-                <a16:creationId xmlns:a16="http://schemas.microsoft.com/office/drawing/2014/main" id="{8894CEA1-B95B-44B3-8CDF-2F4574619A0F}"/>
+                <a16:creationId xmlns:a16="http://schemas.microsoft.com/office/drawing/2014/main" id="{82C2B217-191A-472A-95F1-3E59E762CEAA}"/>
               </a:ext>
             </a:extLst>
           </p:cNvPr>
@@ -2378,7 +2383,7 @@
           <p:cNvPr id="5" name="text-16">
             <a:extLst xmlns:a="http://schemas.openxmlformats.org/drawingml/2006/main">
               <a:ext uri="{FF2B5EF4-FFF2-40B4-BE49-F238E27FC236}">
-                <a16:creationId xmlns:a16="http://schemas.microsoft.com/office/drawing/2014/main" id="{485ADA50-925A-4F35-8C54-08B3CDC09C5A}"/>
+                <a16:creationId xmlns:a16="http://schemas.microsoft.com/office/drawing/2014/main" id="{40D8EADA-8A26-4008-AD0A-7CF9BBDF468A}"/>
               </a:ext>
             </a:extLst>
           </p:cNvPr>
@@ -2434,7 +2439,7 @@
           <p:cNvPr id="6" name="text-17">
             <a:extLst xmlns:a="http://schemas.openxmlformats.org/drawingml/2006/main">
               <a:ext uri="{FF2B5EF4-FFF2-40B4-BE49-F238E27FC236}">
-                <a16:creationId xmlns:a16="http://schemas.microsoft.com/office/drawing/2014/main" id="{E6D481B7-0256-4171-99CC-C95FFAB7B91F}"/>
+                <a16:creationId xmlns:a16="http://schemas.microsoft.com/office/drawing/2014/main" id="{8E7E55F7-5932-4DD8-B536-EC1D65EF3104}"/>
               </a:ext>
             </a:extLst>
           </p:cNvPr>
@@ -2490,7 +2495,7 @@
           <p:cNvPr id="7" name="box-18">
             <a:extLst xmlns:a="http://schemas.openxmlformats.org/drawingml/2006/main">
               <a:ext uri="{FF2B5EF4-FFF2-40B4-BE49-F238E27FC236}">
-                <a16:creationId xmlns:a16="http://schemas.microsoft.com/office/drawing/2014/main" id="{67A04007-D882-4C7F-AABF-2C0EDCA44B2B}"/>
+                <a16:creationId xmlns:a16="http://schemas.microsoft.com/office/drawing/2014/main" id="{B2CFFD31-0883-412C-B5AC-9909650F42B7}"/>
               </a:ext>
             </a:extLst>
           </p:cNvPr>
@@ -2523,7 +2528,7 @@
           <p:cNvPr id="8" name="text-19">
             <a:extLst xmlns:a="http://schemas.openxmlformats.org/drawingml/2006/main">
               <a:ext uri="{FF2B5EF4-FFF2-40B4-BE49-F238E27FC236}">
-                <a16:creationId xmlns:a16="http://schemas.microsoft.com/office/drawing/2014/main" id="{18EDB591-F019-4C9B-9B1C-7C62264849AA}"/>
+                <a16:creationId xmlns:a16="http://schemas.microsoft.com/office/drawing/2014/main" id="{07F811D6-4351-4FF5-80D0-6FE0FF10C337}"/>
               </a:ext>
             </a:extLst>
           </p:cNvPr>
@@ -2579,7 +2584,7 @@
           <p:cNvPr id="9" name="text-20">
             <a:extLst xmlns:a="http://schemas.openxmlformats.org/drawingml/2006/main">
               <a:ext uri="{FF2B5EF4-FFF2-40B4-BE49-F238E27FC236}">
-                <a16:creationId xmlns:a16="http://schemas.microsoft.com/office/drawing/2014/main" id="{39843D61-9FE8-43C9-9A4A-7420D05A6C44}"/>
+                <a16:creationId xmlns:a16="http://schemas.microsoft.com/office/drawing/2014/main" id="{9D730B93-8FEC-4B9F-AB35-4E89C8198E2A}"/>
               </a:ext>
             </a:extLst>
           </p:cNvPr>
@@ -2635,7 +2640,7 @@
           <p:cNvPr id="10" name="text-21">
             <a:extLst xmlns:a="http://schemas.openxmlformats.org/drawingml/2006/main">
               <a:ext uri="{FF2B5EF4-FFF2-40B4-BE49-F238E27FC236}">
-                <a16:creationId xmlns:a16="http://schemas.microsoft.com/office/drawing/2014/main" id="{31E89790-02BD-41B8-87A6-2C339AB94FC1}"/>
+                <a16:creationId xmlns:a16="http://schemas.microsoft.com/office/drawing/2014/main" id="{8CEB4B68-030C-44F6-91DA-0F0A0822BD0D}"/>
               </a:ext>
             </a:extLst>
           </p:cNvPr>
@@ -2691,7 +2696,7 @@
           <p:cNvPr id="11" name="box-22">
             <a:extLst xmlns:a="http://schemas.openxmlformats.org/drawingml/2006/main">
               <a:ext uri="{FF2B5EF4-FFF2-40B4-BE49-F238E27FC236}">
-                <a16:creationId xmlns:a16="http://schemas.microsoft.com/office/drawing/2014/main" id="{2899F56B-F5F1-486D-8416-3329F3FA3222}"/>
+                <a16:creationId xmlns:a16="http://schemas.microsoft.com/office/drawing/2014/main" id="{8F44A2E7-9BD6-4079-937A-CFA7ACF00E92}"/>
               </a:ext>
             </a:extLst>
           </p:cNvPr>
@@ -2728,7 +2733,7 @@
           <p:nvPr/>
         </p:nvPicPr>
         <p:blipFill>
-          <a:blip xmlns:r="http://schemas.openxmlformats.org/officeDocument/2006/relationships" xmlns:a="http://schemas.openxmlformats.org/drawingml/2006/main" r:embed="R0f3e55033af64b3d"/>
+          <a:blip xmlns:r="http://schemas.openxmlformats.org/officeDocument/2006/relationships" xmlns:a="http://schemas.openxmlformats.org/drawingml/2006/main" r:embed="R44bebcc1930c4710"/>
           <a:stretch xmlns:a="http://schemas.openxmlformats.org/drawingml/2006/main"/>
         </p:blipFill>
         <p:spPr>
@@ -2746,7 +2751,7 @@
           <p:cNvPr id="13" name="text-23">
             <a:extLst xmlns:a="http://schemas.openxmlformats.org/drawingml/2006/main">
               <a:ext uri="{FF2B5EF4-FFF2-40B4-BE49-F238E27FC236}">
-                <a16:creationId xmlns:a16="http://schemas.microsoft.com/office/drawing/2014/main" id="{6298E69B-4AF4-4BEF-AE8B-C9E425D7BE87}"/>
+                <a16:creationId xmlns:a16="http://schemas.microsoft.com/office/drawing/2014/main" id="{7E92A051-BBE5-4809-9D28-826C05728046}"/>
               </a:ext>
             </a:extLst>
           </p:cNvPr>
@@ -2800,7 +2805,7 @@
     </p:spTree>
     <p:extLst>
       <p:ext uri="{BB962C8B-B14F-4D97-AF65-F5344CB8AC3E}">
-        <p14:creationId xmlns:p14="http://schemas.microsoft.com/office/powerpoint/2010/main" val="1116104727"/>
+        <p14:creationId xmlns:p14="http://schemas.microsoft.com/office/powerpoint/2010/main" val="2022796525"/>
       </p:ext>
     </p:extLst>
   </p:cSld>
@@ -2831,7 +2836,7 @@
           <p:cNvPr id="19" name="box-24">
             <a:extLst xmlns:a="http://schemas.openxmlformats.org/drawingml/2006/main">
               <a:ext uri="{FF2B5EF4-FFF2-40B4-BE49-F238E27FC236}">
-                <a16:creationId xmlns:a16="http://schemas.microsoft.com/office/drawing/2014/main" id="{785C1A73-BFDE-4131-9B76-79A0F2AF4CF5}"/>
+                <a16:creationId xmlns:a16="http://schemas.microsoft.com/office/drawing/2014/main" id="{794C1A4F-076D-4BE6-81E4-8BA499BBAE67}"/>
               </a:ext>
             </a:extLst>
           </p:cNvPr>
@@ -2864,7 +2869,7 @@
           <p:cNvPr id="2" name="text-25">
             <a:extLst xmlns:a="http://schemas.openxmlformats.org/drawingml/2006/main">
               <a:ext uri="{FF2B5EF4-FFF2-40B4-BE49-F238E27FC236}">
-                <a16:creationId xmlns:a16="http://schemas.microsoft.com/office/drawing/2014/main" id="{0D7087E7-F568-4559-8C03-EA7EF678BC83}"/>
+                <a16:creationId xmlns:a16="http://schemas.microsoft.com/office/drawing/2014/main" id="{5B442726-6168-4B1F-A5C8-009AA4F375E6}"/>
               </a:ext>
             </a:extLst>
           </p:cNvPr>
@@ -2920,7 +2925,7 @@
           <p:cNvPr id="3" name="text-26">
             <a:extLst xmlns:a="http://schemas.openxmlformats.org/drawingml/2006/main">
               <a:ext uri="{FF2B5EF4-FFF2-40B4-BE49-F238E27FC236}">
-                <a16:creationId xmlns:a16="http://schemas.microsoft.com/office/drawing/2014/main" id="{E31C89F9-005B-46C1-AF94-04D1D0F458C1}"/>
+                <a16:creationId xmlns:a16="http://schemas.microsoft.com/office/drawing/2014/main" id="{49FDF277-6683-4DA2-B0B5-AB7B708EB39A}"/>
               </a:ext>
             </a:extLst>
           </p:cNvPr>
@@ -2976,7 +2981,7 @@
           <p:cNvPr id="4" name="text-27">
             <a:extLst xmlns:a="http://schemas.openxmlformats.org/drawingml/2006/main">
               <a:ext uri="{FF2B5EF4-FFF2-40B4-BE49-F238E27FC236}">
-                <a16:creationId xmlns:a16="http://schemas.microsoft.com/office/drawing/2014/main" id="{EF1B1B87-1448-48EF-81C1-140BCD9A727E}"/>
+                <a16:creationId xmlns:a16="http://schemas.microsoft.com/office/drawing/2014/main" id="{2D867B5F-D3E3-4936-980D-876BFB52AE82}"/>
               </a:ext>
             </a:extLst>
           </p:cNvPr>
@@ -3032,7 +3037,7 @@
           <p:cNvPr id="5" name="text-28">
             <a:extLst xmlns:a="http://schemas.openxmlformats.org/drawingml/2006/main">
               <a:ext uri="{FF2B5EF4-FFF2-40B4-BE49-F238E27FC236}">
-                <a16:creationId xmlns:a16="http://schemas.microsoft.com/office/drawing/2014/main" id="{1FD0BCC0-9E9C-4637-800F-ABCEB0CB8691}"/>
+                <a16:creationId xmlns:a16="http://schemas.microsoft.com/office/drawing/2014/main" id="{C83BDE62-72E9-4CEE-818F-AB747E5EA0C5}"/>
               </a:ext>
             </a:extLst>
           </p:cNvPr>
@@ -3088,7 +3093,7 @@
           <p:cNvPr id="6" name="text-29">
             <a:extLst xmlns:a="http://schemas.openxmlformats.org/drawingml/2006/main">
               <a:ext uri="{FF2B5EF4-FFF2-40B4-BE49-F238E27FC236}">
-                <a16:creationId xmlns:a16="http://schemas.microsoft.com/office/drawing/2014/main" id="{0CCEB4AA-BCD1-4CC9-BD39-A2FCBE651B3D}"/>
+                <a16:creationId xmlns:a16="http://schemas.microsoft.com/office/drawing/2014/main" id="{8CFA9AFF-E82F-4DD3-919D-D5CD2DDAE6A8}"/>
               </a:ext>
             </a:extLst>
           </p:cNvPr>
@@ -3144,7 +3149,7 @@
           <p:cNvPr id="7" name="box-30">
             <a:extLst xmlns:a="http://schemas.openxmlformats.org/drawingml/2006/main">
               <a:ext uri="{FF2B5EF4-FFF2-40B4-BE49-F238E27FC236}">
-                <a16:creationId xmlns:a16="http://schemas.microsoft.com/office/drawing/2014/main" id="{DD5AD303-7742-4B16-BD0F-E57D4FD0E769}"/>
+                <a16:creationId xmlns:a16="http://schemas.microsoft.com/office/drawing/2014/main" id="{80698B3A-CC96-4BA6-A786-5114C9042D35}"/>
               </a:ext>
             </a:extLst>
           </p:cNvPr>
@@ -3177,7 +3182,7 @@
           <p:cNvPr id="8" name="text-31">
             <a:extLst xmlns:a="http://schemas.openxmlformats.org/drawingml/2006/main">
               <a:ext uri="{FF2B5EF4-FFF2-40B4-BE49-F238E27FC236}">
-                <a16:creationId xmlns:a16="http://schemas.microsoft.com/office/drawing/2014/main" id="{65EC0C35-C1F4-4C6F-B41C-C9D0082A5E7E}"/>
+                <a16:creationId xmlns:a16="http://schemas.microsoft.com/office/drawing/2014/main" id="{A46491DA-C0FD-4E3B-B343-D06A0B896BE2}"/>
               </a:ext>
             </a:extLst>
           </p:cNvPr>
@@ -3233,7 +3238,7 @@
           <p:cNvPr id="9" name="text-32">
             <a:extLst xmlns:a="http://schemas.openxmlformats.org/drawingml/2006/main">
               <a:ext uri="{FF2B5EF4-FFF2-40B4-BE49-F238E27FC236}">
-                <a16:creationId xmlns:a16="http://schemas.microsoft.com/office/drawing/2014/main" id="{2AFA887A-A4D5-4A91-9AEF-16011EA22015}"/>
+                <a16:creationId xmlns:a16="http://schemas.microsoft.com/office/drawing/2014/main" id="{82E94A7E-D0E1-42F3-8EA7-9173E17E74E9}"/>
               </a:ext>
             </a:extLst>
           </p:cNvPr>
@@ -3289,7 +3294,7 @@
           <p:cNvPr id="10" name="text-33">
             <a:extLst xmlns:a="http://schemas.openxmlformats.org/drawingml/2006/main">
               <a:ext uri="{FF2B5EF4-FFF2-40B4-BE49-F238E27FC236}">
-                <a16:creationId xmlns:a16="http://schemas.microsoft.com/office/drawing/2014/main" id="{15A42E34-8285-4C3A-8EB0-576142CCE61A}"/>
+                <a16:creationId xmlns:a16="http://schemas.microsoft.com/office/drawing/2014/main" id="{18AD1510-EF5B-4248-B561-A34A8D57249D}"/>
               </a:ext>
             </a:extLst>
           </p:cNvPr>
@@ -3345,7 +3350,7 @@
           <p:cNvPr id="11" name="box-34">
             <a:extLst xmlns:a="http://schemas.openxmlformats.org/drawingml/2006/main">
               <a:ext uri="{FF2B5EF4-FFF2-40B4-BE49-F238E27FC236}">
-                <a16:creationId xmlns:a16="http://schemas.microsoft.com/office/drawing/2014/main" id="{98015508-5830-434C-849C-5569682FD405}"/>
+                <a16:creationId xmlns:a16="http://schemas.microsoft.com/office/drawing/2014/main" id="{869F3B1B-6B84-4A71-938C-547B5B365D26}"/>
               </a:ext>
             </a:extLst>
           </p:cNvPr>
@@ -3378,7 +3383,7 @@
           <p:cNvPr id="12" name="text-35">
             <a:extLst xmlns:a="http://schemas.openxmlformats.org/drawingml/2006/main">
               <a:ext uri="{FF2B5EF4-FFF2-40B4-BE49-F238E27FC236}">
-                <a16:creationId xmlns:a16="http://schemas.microsoft.com/office/drawing/2014/main" id="{01EDE3CE-087F-4BF3-B0CA-F341FF5DBB6D}"/>
+                <a16:creationId xmlns:a16="http://schemas.microsoft.com/office/drawing/2014/main" id="{BCD1F13A-BA37-4E2B-8549-383615414E30}"/>
               </a:ext>
             </a:extLst>
           </p:cNvPr>
@@ -3434,7 +3439,7 @@
           <p:cNvPr id="13" name="text-36">
             <a:extLst xmlns:a="http://schemas.openxmlformats.org/drawingml/2006/main">
               <a:ext uri="{FF2B5EF4-FFF2-40B4-BE49-F238E27FC236}">
-                <a16:creationId xmlns:a16="http://schemas.microsoft.com/office/drawing/2014/main" id="{A4C5D945-B0FE-4193-A339-9841409080B2}"/>
+                <a16:creationId xmlns:a16="http://schemas.microsoft.com/office/drawing/2014/main" id="{DE09831D-6F19-4048-96BF-0EA3D445F070}"/>
               </a:ext>
             </a:extLst>
           </p:cNvPr>
@@ -3490,7 +3495,7 @@
           <p:cNvPr id="14" name="text-37">
             <a:extLst xmlns:a="http://schemas.openxmlformats.org/drawingml/2006/main">
               <a:ext uri="{FF2B5EF4-FFF2-40B4-BE49-F238E27FC236}">
-                <a16:creationId xmlns:a16="http://schemas.microsoft.com/office/drawing/2014/main" id="{3A421B5B-CFAC-4F74-860C-F6DC462F1E6D}"/>
+                <a16:creationId xmlns:a16="http://schemas.microsoft.com/office/drawing/2014/main" id="{58518209-6109-4951-82D6-E69CA41B8243}"/>
               </a:ext>
             </a:extLst>
           </p:cNvPr>
@@ -3546,7 +3551,7 @@
           <p:cNvPr id="15" name="box-38">
             <a:extLst xmlns:a="http://schemas.openxmlformats.org/drawingml/2006/main">
               <a:ext uri="{FF2B5EF4-FFF2-40B4-BE49-F238E27FC236}">
-                <a16:creationId xmlns:a16="http://schemas.microsoft.com/office/drawing/2014/main" id="{5B3464BE-3E99-4A2F-BE99-0345620DA956}"/>
+                <a16:creationId xmlns:a16="http://schemas.microsoft.com/office/drawing/2014/main" id="{0DE4E7F9-6407-4AC8-AC6C-85CEC5FB865F}"/>
               </a:ext>
             </a:extLst>
           </p:cNvPr>
@@ -3579,7 +3584,7 @@
           <p:cNvPr id="16" name="text-39">
             <a:extLst xmlns:a="http://schemas.openxmlformats.org/drawingml/2006/main">
               <a:ext uri="{FF2B5EF4-FFF2-40B4-BE49-F238E27FC236}">
-                <a16:creationId xmlns:a16="http://schemas.microsoft.com/office/drawing/2014/main" id="{39B57AF5-14A9-44FE-AFA1-FB879E727568}"/>
+                <a16:creationId xmlns:a16="http://schemas.microsoft.com/office/drawing/2014/main" id="{94346061-2019-44CA-88E3-8D60A0266F29}"/>
               </a:ext>
             </a:extLst>
           </p:cNvPr>
@@ -3635,7 +3640,7 @@
           <p:cNvPr id="17" name="text-40">
             <a:extLst xmlns:a="http://schemas.openxmlformats.org/drawingml/2006/main">
               <a:ext uri="{FF2B5EF4-FFF2-40B4-BE49-F238E27FC236}">
-                <a16:creationId xmlns:a16="http://schemas.microsoft.com/office/drawing/2014/main" id="{6211E0DA-3DA2-4258-B41F-8E59D48F078B}"/>
+                <a16:creationId xmlns:a16="http://schemas.microsoft.com/office/drawing/2014/main" id="{BD7A2075-A05F-478E-A810-0356E7C78E10}"/>
               </a:ext>
             </a:extLst>
           </p:cNvPr>
@@ -3691,7 +3696,7 @@
           <p:cNvPr id="18" name="text-41">
             <a:extLst xmlns:a="http://schemas.openxmlformats.org/drawingml/2006/main">
               <a:ext uri="{FF2B5EF4-FFF2-40B4-BE49-F238E27FC236}">
-                <a16:creationId xmlns:a16="http://schemas.microsoft.com/office/drawing/2014/main" id="{756113A7-D82A-4A4F-B738-2E181BDCF493}"/>
+                <a16:creationId xmlns:a16="http://schemas.microsoft.com/office/drawing/2014/main" id="{2E32DF77-2D8F-45EB-B24F-BD78DEED0678}"/>
               </a:ext>
             </a:extLst>
           </p:cNvPr>
@@ -3745,7 +3750,7 @@
     </p:spTree>
     <p:extLst>
       <p:ext uri="{BB962C8B-B14F-4D97-AF65-F5344CB8AC3E}">
-        <p14:creationId xmlns:p14="http://schemas.microsoft.com/office/powerpoint/2010/main" val="629333680"/>
+        <p14:creationId xmlns:p14="http://schemas.microsoft.com/office/powerpoint/2010/main" val="1134542902"/>
       </p:ext>
     </p:extLst>
   </p:cSld>
@@ -3776,7 +3781,7 @@
           <p:cNvPr id="18" name="box-42">
             <a:extLst xmlns:a="http://schemas.openxmlformats.org/drawingml/2006/main">
               <a:ext uri="{FF2B5EF4-FFF2-40B4-BE49-F238E27FC236}">
-                <a16:creationId xmlns:a16="http://schemas.microsoft.com/office/drawing/2014/main" id="{BBF8F542-F407-48E0-9EA1-9755DDF7839E}"/>
+                <a16:creationId xmlns:a16="http://schemas.microsoft.com/office/drawing/2014/main" id="{67F0E3EF-91C9-476C-B381-3137217139E1}"/>
               </a:ext>
             </a:extLst>
           </p:cNvPr>
@@ -3809,7 +3814,7 @@
           <p:cNvPr id="2" name="text-43">
             <a:extLst xmlns:a="http://schemas.openxmlformats.org/drawingml/2006/main">
               <a:ext uri="{FF2B5EF4-FFF2-40B4-BE49-F238E27FC236}">
-                <a16:creationId xmlns:a16="http://schemas.microsoft.com/office/drawing/2014/main" id="{964B489B-3097-4938-8D73-BF5E64B74167}"/>
+                <a16:creationId xmlns:a16="http://schemas.microsoft.com/office/drawing/2014/main" id="{6FB4FDCF-2193-4093-BDD3-756379C376BC}"/>
               </a:ext>
             </a:extLst>
           </p:cNvPr>
@@ -3865,7 +3870,7 @@
           <p:cNvPr id="3" name="text-44">
             <a:extLst xmlns:a="http://schemas.openxmlformats.org/drawingml/2006/main">
               <a:ext uri="{FF2B5EF4-FFF2-40B4-BE49-F238E27FC236}">
-                <a16:creationId xmlns:a16="http://schemas.microsoft.com/office/drawing/2014/main" id="{BEFE49F0-26BF-455A-89EF-4D3B73DF038F}"/>
+                <a16:creationId xmlns:a16="http://schemas.microsoft.com/office/drawing/2014/main" id="{368E7495-94F6-49FD-96E3-427E82810D89}"/>
               </a:ext>
             </a:extLst>
           </p:cNvPr>
@@ -3921,7 +3926,7 @@
           <p:cNvPr id="4" name="text-45">
             <a:extLst xmlns:a="http://schemas.openxmlformats.org/drawingml/2006/main">
               <a:ext uri="{FF2B5EF4-FFF2-40B4-BE49-F238E27FC236}">
-                <a16:creationId xmlns:a16="http://schemas.microsoft.com/office/drawing/2014/main" id="{2225137A-3D7F-4E04-A8EF-1E3017366419}"/>
+                <a16:creationId xmlns:a16="http://schemas.microsoft.com/office/drawing/2014/main" id="{8BF8A537-760A-438F-8121-04C216AB84CB}"/>
               </a:ext>
             </a:extLst>
           </p:cNvPr>
@@ -3977,7 +3982,7 @@
           <p:cNvPr id="5" name="text-46">
             <a:extLst xmlns:a="http://schemas.openxmlformats.org/drawingml/2006/main">
               <a:ext uri="{FF2B5EF4-FFF2-40B4-BE49-F238E27FC236}">
-                <a16:creationId xmlns:a16="http://schemas.microsoft.com/office/drawing/2014/main" id="{1021882F-BD72-4E59-A583-5E24BF8E7223}"/>
+                <a16:creationId xmlns:a16="http://schemas.microsoft.com/office/drawing/2014/main" id="{7AFDD9D2-C5B1-457C-86DE-2DCDF5587F61}"/>
               </a:ext>
             </a:extLst>
           </p:cNvPr>
@@ -4033,7 +4038,7 @@
           <p:cNvPr id="6" name="box-47">
             <a:extLst xmlns:a="http://schemas.openxmlformats.org/drawingml/2006/main">
               <a:ext uri="{FF2B5EF4-FFF2-40B4-BE49-F238E27FC236}">
-                <a16:creationId xmlns:a16="http://schemas.microsoft.com/office/drawing/2014/main" id="{E35444BD-BF71-442A-ABA8-1DB509690504}"/>
+                <a16:creationId xmlns:a16="http://schemas.microsoft.com/office/drawing/2014/main" id="{DA4ACD0C-DF6C-44F1-976C-C9BB2CE4339A}"/>
               </a:ext>
             </a:extLst>
           </p:cNvPr>
@@ -4066,7 +4071,7 @@
           <p:cNvPr id="7" name="text-48">
             <a:extLst xmlns:a="http://schemas.openxmlformats.org/drawingml/2006/main">
               <a:ext uri="{FF2B5EF4-FFF2-40B4-BE49-F238E27FC236}">
-                <a16:creationId xmlns:a16="http://schemas.microsoft.com/office/drawing/2014/main" id="{0E4C7119-177B-411C-9FF2-3E3173FC94F8}"/>
+                <a16:creationId xmlns:a16="http://schemas.microsoft.com/office/drawing/2014/main" id="{1139617D-2B9B-4015-B912-DB6C8E880E9F}"/>
               </a:ext>
             </a:extLst>
           </p:cNvPr>
@@ -4122,7 +4127,7 @@
           <p:cNvPr id="8" name="text-49">
             <a:extLst xmlns:a="http://schemas.openxmlformats.org/drawingml/2006/main">
               <a:ext uri="{FF2B5EF4-FFF2-40B4-BE49-F238E27FC236}">
-                <a16:creationId xmlns:a16="http://schemas.microsoft.com/office/drawing/2014/main" id="{B6E7277E-FAE5-43B5-AB7F-1D289EC171EA}"/>
+                <a16:creationId xmlns:a16="http://schemas.microsoft.com/office/drawing/2014/main" id="{B792D042-789E-48F8-A6F9-C394C3C41D06}"/>
               </a:ext>
             </a:extLst>
           </p:cNvPr>
@@ -4178,7 +4183,7 @@
           <p:cNvPr id="9" name="box-50">
             <a:extLst xmlns:a="http://schemas.openxmlformats.org/drawingml/2006/main">
               <a:ext uri="{FF2B5EF4-FFF2-40B4-BE49-F238E27FC236}">
-                <a16:creationId xmlns:a16="http://schemas.microsoft.com/office/drawing/2014/main" id="{1BC37BA5-BD0B-4450-B8C6-2B9CDF22D46B}"/>
+                <a16:creationId xmlns:a16="http://schemas.microsoft.com/office/drawing/2014/main" id="{27B1A7F3-AE4B-4B1B-A203-0FC4D146ABFE}"/>
               </a:ext>
             </a:extLst>
           </p:cNvPr>
@@ -4211,7 +4216,7 @@
           <p:cNvPr id="10" name="text-51">
             <a:extLst xmlns:a="http://schemas.openxmlformats.org/drawingml/2006/main">
               <a:ext uri="{FF2B5EF4-FFF2-40B4-BE49-F238E27FC236}">
-                <a16:creationId xmlns:a16="http://schemas.microsoft.com/office/drawing/2014/main" id="{10423DCE-94A9-4C2A-BF7C-90864CA92BDE}"/>
+                <a16:creationId xmlns:a16="http://schemas.microsoft.com/office/drawing/2014/main" id="{2926012E-BE38-4530-A396-2F5D2A42B3EB}"/>
               </a:ext>
             </a:extLst>
           </p:cNvPr>
@@ -4267,7 +4272,7 @@
           <p:cNvPr id="11" name="text-52">
             <a:extLst xmlns:a="http://schemas.openxmlformats.org/drawingml/2006/main">
               <a:ext uri="{FF2B5EF4-FFF2-40B4-BE49-F238E27FC236}">
-                <a16:creationId xmlns:a16="http://schemas.microsoft.com/office/drawing/2014/main" id="{E610272D-B74B-4FB1-AEEC-70A9C8091998}"/>
+                <a16:creationId xmlns:a16="http://schemas.microsoft.com/office/drawing/2014/main" id="{A74348C3-3CC1-4910-8789-5A8DC359E6D6}"/>
               </a:ext>
             </a:extLst>
           </p:cNvPr>
@@ -4323,7 +4328,7 @@
           <p:cNvPr id="12" name="box-53">
             <a:extLst xmlns:a="http://schemas.openxmlformats.org/drawingml/2006/main">
               <a:ext uri="{FF2B5EF4-FFF2-40B4-BE49-F238E27FC236}">
-                <a16:creationId xmlns:a16="http://schemas.microsoft.com/office/drawing/2014/main" id="{B80C276B-CD09-431C-8144-E900A38645CA}"/>
+                <a16:creationId xmlns:a16="http://schemas.microsoft.com/office/drawing/2014/main" id="{EF42DFD7-6833-4A54-A9D4-AD081BC9FCFD}"/>
               </a:ext>
             </a:extLst>
           </p:cNvPr>
@@ -4356,7 +4361,7 @@
           <p:cNvPr id="13" name="text-54">
             <a:extLst xmlns:a="http://schemas.openxmlformats.org/drawingml/2006/main">
               <a:ext uri="{FF2B5EF4-FFF2-40B4-BE49-F238E27FC236}">
-                <a16:creationId xmlns:a16="http://schemas.microsoft.com/office/drawing/2014/main" id="{C78B6E05-2B64-4598-96D4-615D97E7847E}"/>
+                <a16:creationId xmlns:a16="http://schemas.microsoft.com/office/drawing/2014/main" id="{8525FDE6-EB1D-453D-9896-CA66C88604A1}"/>
               </a:ext>
             </a:extLst>
           </p:cNvPr>
@@ -4412,7 +4417,7 @@
           <p:cNvPr id="14" name="text-55">
             <a:extLst xmlns:a="http://schemas.openxmlformats.org/drawingml/2006/main">
               <a:ext uri="{FF2B5EF4-FFF2-40B4-BE49-F238E27FC236}">
-                <a16:creationId xmlns:a16="http://schemas.microsoft.com/office/drawing/2014/main" id="{FC33718F-5EC2-43B4-AE5D-A4059474CCF2}"/>
+                <a16:creationId xmlns:a16="http://schemas.microsoft.com/office/drawing/2014/main" id="{75802C17-A084-4E44-B950-88D0732340D6}"/>
               </a:ext>
             </a:extLst>
           </p:cNvPr>
@@ -4468,7 +4473,7 @@
           <p:cNvPr id="15" name="box-56">
             <a:extLst xmlns:a="http://schemas.openxmlformats.org/drawingml/2006/main">
               <a:ext uri="{FF2B5EF4-FFF2-40B4-BE49-F238E27FC236}">
-                <a16:creationId xmlns:a16="http://schemas.microsoft.com/office/drawing/2014/main" id="{00891825-ED6E-4753-BD22-0011C7773E48}"/>
+                <a16:creationId xmlns:a16="http://schemas.microsoft.com/office/drawing/2014/main" id="{A4999BE6-9176-4A24-81D7-ECA4E970ECD8}"/>
               </a:ext>
             </a:extLst>
           </p:cNvPr>
@@ -4501,7 +4506,7 @@
           <p:cNvPr id="16" name="text-57">
             <a:extLst xmlns:a="http://schemas.openxmlformats.org/drawingml/2006/main">
               <a:ext uri="{FF2B5EF4-FFF2-40B4-BE49-F238E27FC236}">
-                <a16:creationId xmlns:a16="http://schemas.microsoft.com/office/drawing/2014/main" id="{9593AD3F-EA37-45C0-B58B-FD5C5CF6D016}"/>
+                <a16:creationId xmlns:a16="http://schemas.microsoft.com/office/drawing/2014/main" id="{52A3737A-1EA2-46A1-969A-702905503905}"/>
               </a:ext>
             </a:extLst>
           </p:cNvPr>
@@ -4557,7 +4562,7 @@
           <p:cNvPr id="17" name="text-58">
             <a:extLst xmlns:a="http://schemas.openxmlformats.org/drawingml/2006/main">
               <a:ext uri="{FF2B5EF4-FFF2-40B4-BE49-F238E27FC236}">
-                <a16:creationId xmlns:a16="http://schemas.microsoft.com/office/drawing/2014/main" id="{9C0B2FC0-80D8-414F-B64C-788A5790D831}"/>
+                <a16:creationId xmlns:a16="http://schemas.microsoft.com/office/drawing/2014/main" id="{604865D1-C0D9-41B4-A656-487064A1035A}"/>
               </a:ext>
             </a:extLst>
           </p:cNvPr>
@@ -4611,7 +4616,7 @@
     </p:spTree>
     <p:extLst>
       <p:ext uri="{BB962C8B-B14F-4D97-AF65-F5344CB8AC3E}">
-        <p14:creationId xmlns:p14="http://schemas.microsoft.com/office/powerpoint/2010/main" val="2143948592"/>
+        <p14:creationId xmlns:p14="http://schemas.microsoft.com/office/powerpoint/2010/main" val="876660766"/>
       </p:ext>
     </p:extLst>
   </p:cSld>
@@ -4642,7 +4647,7 @@
           <p:cNvPr id="21" name="box-59">
             <a:extLst xmlns:a="http://schemas.openxmlformats.org/drawingml/2006/main">
               <a:ext uri="{FF2B5EF4-FFF2-40B4-BE49-F238E27FC236}">
-                <a16:creationId xmlns:a16="http://schemas.microsoft.com/office/drawing/2014/main" id="{CDC52F53-0815-4D53-99B3-492C96519D8A}"/>
+                <a16:creationId xmlns:a16="http://schemas.microsoft.com/office/drawing/2014/main" id="{FB473E37-7B85-4869-B0AF-A8E7AD8F4AC3}"/>
               </a:ext>
             </a:extLst>
           </p:cNvPr>
@@ -4675,7 +4680,7 @@
           <p:cNvPr id="2" name="text-60">
             <a:extLst xmlns:a="http://schemas.openxmlformats.org/drawingml/2006/main">
               <a:ext uri="{FF2B5EF4-FFF2-40B4-BE49-F238E27FC236}">
-                <a16:creationId xmlns:a16="http://schemas.microsoft.com/office/drawing/2014/main" id="{2B16D6E0-349C-4A63-88B9-D0AD92E8349D}"/>
+                <a16:creationId xmlns:a16="http://schemas.microsoft.com/office/drawing/2014/main" id="{223E0C47-A24D-4117-90B9-FB0DBA8CE697}"/>
               </a:ext>
             </a:extLst>
           </p:cNvPr>
@@ -4731,7 +4736,7 @@
           <p:cNvPr id="3" name="text-61">
             <a:extLst xmlns:a="http://schemas.openxmlformats.org/drawingml/2006/main">
               <a:ext uri="{FF2B5EF4-FFF2-40B4-BE49-F238E27FC236}">
-                <a16:creationId xmlns:a16="http://schemas.microsoft.com/office/drawing/2014/main" id="{8D1E7A65-F793-426E-90A6-6A32CAD10D37}"/>
+                <a16:creationId xmlns:a16="http://schemas.microsoft.com/office/drawing/2014/main" id="{A8144FDD-C565-47CD-84A5-CC8899056F7E}"/>
               </a:ext>
             </a:extLst>
           </p:cNvPr>
@@ -4787,7 +4792,7 @@
           <p:cNvPr id="4" name="text-62">
             <a:extLst xmlns:a="http://schemas.openxmlformats.org/drawingml/2006/main">
               <a:ext uri="{FF2B5EF4-FFF2-40B4-BE49-F238E27FC236}">
-                <a16:creationId xmlns:a16="http://schemas.microsoft.com/office/drawing/2014/main" id="{36316339-69E2-45B3-A7FE-1D24A553328E}"/>
+                <a16:creationId xmlns:a16="http://schemas.microsoft.com/office/drawing/2014/main" id="{14AB353F-4279-4C0E-A7A1-6D26AA6B5C57}"/>
               </a:ext>
             </a:extLst>
           </p:cNvPr>
@@ -4843,7 +4848,7 @@
           <p:cNvPr id="5" name="text-63">
             <a:extLst xmlns:a="http://schemas.openxmlformats.org/drawingml/2006/main">
               <a:ext uri="{FF2B5EF4-FFF2-40B4-BE49-F238E27FC236}">
-                <a16:creationId xmlns:a16="http://schemas.microsoft.com/office/drawing/2014/main" id="{D32BE33D-BED4-414D-9FCA-D5AC48CBC959}"/>
+                <a16:creationId xmlns:a16="http://schemas.microsoft.com/office/drawing/2014/main" id="{D878E27B-5862-4659-A742-4917FF7E75B4}"/>
               </a:ext>
             </a:extLst>
           </p:cNvPr>
@@ -4899,7 +4904,7 @@
           <p:cNvPr id="6" name="box-64">
             <a:extLst xmlns:a="http://schemas.openxmlformats.org/drawingml/2006/main">
               <a:ext uri="{FF2B5EF4-FFF2-40B4-BE49-F238E27FC236}">
-                <a16:creationId xmlns:a16="http://schemas.microsoft.com/office/drawing/2014/main" id="{3167286F-5955-46C4-9D3A-FD6273D97153}"/>
+                <a16:creationId xmlns:a16="http://schemas.microsoft.com/office/drawing/2014/main" id="{A7B7C423-B128-4B70-B1B3-3BD6B2FB60F9}"/>
               </a:ext>
             </a:extLst>
           </p:cNvPr>
@@ -4932,7 +4937,7 @@
           <p:cNvPr id="7" name="dot-65">
             <a:extLst xmlns:a="http://schemas.openxmlformats.org/drawingml/2006/main">
               <a:ext uri="{FF2B5EF4-FFF2-40B4-BE49-F238E27FC236}">
-                <a16:creationId xmlns:a16="http://schemas.microsoft.com/office/drawing/2014/main" id="{23C29A9D-74C3-4E73-B7AA-5F30AF8E5643}"/>
+                <a16:creationId xmlns:a16="http://schemas.microsoft.com/office/drawing/2014/main" id="{F517A83B-C1E7-4668-8199-B82C431AF16E}"/>
               </a:ext>
             </a:extLst>
           </p:cNvPr>
@@ -4963,7 +4968,7 @@
           <p:cNvPr id="8" name="text-66">
             <a:extLst xmlns:a="http://schemas.openxmlformats.org/drawingml/2006/main">
               <a:ext uri="{FF2B5EF4-FFF2-40B4-BE49-F238E27FC236}">
-                <a16:creationId xmlns:a16="http://schemas.microsoft.com/office/drawing/2014/main" id="{4C0B7532-569F-4DA5-A49D-22D9BADDED19}"/>
+                <a16:creationId xmlns:a16="http://schemas.microsoft.com/office/drawing/2014/main" id="{46E7FC02-7F62-4A18-AD02-07B874F84597}"/>
               </a:ext>
             </a:extLst>
           </p:cNvPr>
@@ -5019,7 +5024,7 @@
           <p:cNvPr id="9" name="text-67">
             <a:extLst xmlns:a="http://schemas.openxmlformats.org/drawingml/2006/main">
               <a:ext uri="{FF2B5EF4-FFF2-40B4-BE49-F238E27FC236}">
-                <a16:creationId xmlns:a16="http://schemas.microsoft.com/office/drawing/2014/main" id="{F6C43AF8-BEAB-4843-8EF3-D3C057910912}"/>
+                <a16:creationId xmlns:a16="http://schemas.microsoft.com/office/drawing/2014/main" id="{DE3B1ED9-BB49-474A-8C6A-DBCFFF19D0F0}"/>
               </a:ext>
             </a:extLst>
           </p:cNvPr>
@@ -5075,7 +5080,7 @@
           <p:cNvPr id="10" name="text-68">
             <a:extLst xmlns:a="http://schemas.openxmlformats.org/drawingml/2006/main">
               <a:ext uri="{FF2B5EF4-FFF2-40B4-BE49-F238E27FC236}">
-                <a16:creationId xmlns:a16="http://schemas.microsoft.com/office/drawing/2014/main" id="{39A3C2EF-5E90-4F61-9765-2E60F4BCB749}"/>
+                <a16:creationId xmlns:a16="http://schemas.microsoft.com/office/drawing/2014/main" id="{F00CC188-D5AC-4DEC-A471-54A91E82C336}"/>
               </a:ext>
             </a:extLst>
           </p:cNvPr>
@@ -5131,7 +5136,7 @@
           <p:cNvPr id="11" name="dot-69">
             <a:extLst xmlns:a="http://schemas.openxmlformats.org/drawingml/2006/main">
               <a:ext uri="{FF2B5EF4-FFF2-40B4-BE49-F238E27FC236}">
-                <a16:creationId xmlns:a16="http://schemas.microsoft.com/office/drawing/2014/main" id="{A256F181-DA1A-4C54-B5E6-B3234102579A}"/>
+                <a16:creationId xmlns:a16="http://schemas.microsoft.com/office/drawing/2014/main" id="{9E1C1005-C29B-481C-A93B-2EF692AA2CE4}"/>
               </a:ext>
             </a:extLst>
           </p:cNvPr>
@@ -5162,7 +5167,7 @@
           <p:cNvPr id="12" name="text-70">
             <a:extLst xmlns:a="http://schemas.openxmlformats.org/drawingml/2006/main">
               <a:ext uri="{FF2B5EF4-FFF2-40B4-BE49-F238E27FC236}">
-                <a16:creationId xmlns:a16="http://schemas.microsoft.com/office/drawing/2014/main" id="{E1C0027F-322E-4D91-84F2-C27E74C5D076}"/>
+                <a16:creationId xmlns:a16="http://schemas.microsoft.com/office/drawing/2014/main" id="{5AF22C96-9D87-4684-BB0A-875A0059229B}"/>
               </a:ext>
             </a:extLst>
           </p:cNvPr>
@@ -5218,7 +5223,7 @@
           <p:cNvPr id="13" name="text-71">
             <a:extLst xmlns:a="http://schemas.openxmlformats.org/drawingml/2006/main">
               <a:ext uri="{FF2B5EF4-FFF2-40B4-BE49-F238E27FC236}">
-                <a16:creationId xmlns:a16="http://schemas.microsoft.com/office/drawing/2014/main" id="{A59CADED-6F62-4CD7-B5C4-11CF7A6C2759}"/>
+                <a16:creationId xmlns:a16="http://schemas.microsoft.com/office/drawing/2014/main" id="{F7D1BB8C-0D7F-489E-ACA1-957BDEB2DD2D}"/>
               </a:ext>
             </a:extLst>
           </p:cNvPr>
@@ -5274,7 +5279,7 @@
           <p:cNvPr id="14" name="text-72">
             <a:extLst xmlns:a="http://schemas.openxmlformats.org/drawingml/2006/main">
               <a:ext uri="{FF2B5EF4-FFF2-40B4-BE49-F238E27FC236}">
-                <a16:creationId xmlns:a16="http://schemas.microsoft.com/office/drawing/2014/main" id="{0249D5E8-5E03-4496-B435-71669E1A67BE}"/>
+                <a16:creationId xmlns:a16="http://schemas.microsoft.com/office/drawing/2014/main" id="{3CD65CA8-7104-4B14-BAE4-78B910D85FAC}"/>
               </a:ext>
             </a:extLst>
           </p:cNvPr>
@@ -5330,7 +5335,7 @@
           <p:cNvPr id="15" name="dot-73">
             <a:extLst xmlns:a="http://schemas.openxmlformats.org/drawingml/2006/main">
               <a:ext uri="{FF2B5EF4-FFF2-40B4-BE49-F238E27FC236}">
-                <a16:creationId xmlns:a16="http://schemas.microsoft.com/office/drawing/2014/main" id="{524D57E7-7418-40A1-B0EF-A045AF90D50E}"/>
+                <a16:creationId xmlns:a16="http://schemas.microsoft.com/office/drawing/2014/main" id="{4CEA908C-C365-441C-BC65-D8FEB3997ED3}"/>
               </a:ext>
             </a:extLst>
           </p:cNvPr>
@@ -5361,7 +5366,7 @@
           <p:cNvPr id="16" name="text-74">
             <a:extLst xmlns:a="http://schemas.openxmlformats.org/drawingml/2006/main">
               <a:ext uri="{FF2B5EF4-FFF2-40B4-BE49-F238E27FC236}">
-                <a16:creationId xmlns:a16="http://schemas.microsoft.com/office/drawing/2014/main" id="{44DBF1DD-6026-46EB-8BE3-2FE75C7B75AD}"/>
+                <a16:creationId xmlns:a16="http://schemas.microsoft.com/office/drawing/2014/main" id="{76173E55-15FD-4468-9B12-E131A3A4FCC5}"/>
               </a:ext>
             </a:extLst>
           </p:cNvPr>
@@ -5417,7 +5422,7 @@
           <p:cNvPr id="17" name="text-75">
             <a:extLst xmlns:a="http://schemas.openxmlformats.org/drawingml/2006/main">
               <a:ext uri="{FF2B5EF4-FFF2-40B4-BE49-F238E27FC236}">
-                <a16:creationId xmlns:a16="http://schemas.microsoft.com/office/drawing/2014/main" id="{105AC89A-2EE1-4F5C-9075-A6D5E7CC1B39}"/>
+                <a16:creationId xmlns:a16="http://schemas.microsoft.com/office/drawing/2014/main" id="{9B8C1274-37A2-4AA0-80CA-7D87EF825D71}"/>
               </a:ext>
             </a:extLst>
           </p:cNvPr>
@@ -5473,7 +5478,7 @@
           <p:cNvPr id="18" name="text-76">
             <a:extLst xmlns:a="http://schemas.openxmlformats.org/drawingml/2006/main">
               <a:ext uri="{FF2B5EF4-FFF2-40B4-BE49-F238E27FC236}">
-                <a16:creationId xmlns:a16="http://schemas.microsoft.com/office/drawing/2014/main" id="{4FF73705-EDA9-4364-9C29-9FB3792CEFC5}"/>
+                <a16:creationId xmlns:a16="http://schemas.microsoft.com/office/drawing/2014/main" id="{08535279-17D2-43FC-AF99-84D77E38C720}"/>
               </a:ext>
             </a:extLst>
           </p:cNvPr>
@@ -5529,7 +5534,7 @@
           <p:cNvPr id="19" name="box-77">
             <a:extLst xmlns:a="http://schemas.openxmlformats.org/drawingml/2006/main">
               <a:ext uri="{FF2B5EF4-FFF2-40B4-BE49-F238E27FC236}">
-                <a16:creationId xmlns:a16="http://schemas.microsoft.com/office/drawing/2014/main" id="{4C600D6B-1326-49B0-A82B-565B07487405}"/>
+                <a16:creationId xmlns:a16="http://schemas.microsoft.com/office/drawing/2014/main" id="{45051014-7F20-4542-B8BD-1F642F59DD7C}"/>
               </a:ext>
             </a:extLst>
           </p:cNvPr>
@@ -5562,7 +5567,7 @@
           <p:cNvPr id="20" name="text-78">
             <a:extLst xmlns:a="http://schemas.openxmlformats.org/drawingml/2006/main">
               <a:ext uri="{FF2B5EF4-FFF2-40B4-BE49-F238E27FC236}">
-                <a16:creationId xmlns:a16="http://schemas.microsoft.com/office/drawing/2014/main" id="{87FB96E6-2CC0-4C42-96D7-7F90F3A2D901}"/>
+                <a16:creationId xmlns:a16="http://schemas.microsoft.com/office/drawing/2014/main" id="{225F76A9-BA29-453D-8954-CBDCD6629610}"/>
               </a:ext>
             </a:extLst>
           </p:cNvPr>
@@ -5616,7 +5621,7 @@
     </p:spTree>
     <p:extLst>
       <p:ext uri="{BB962C8B-B14F-4D97-AF65-F5344CB8AC3E}">
-        <p14:creationId xmlns:p14="http://schemas.microsoft.com/office/powerpoint/2010/main" val="1522194945"/>
+        <p14:creationId xmlns:p14="http://schemas.microsoft.com/office/powerpoint/2010/main" val="1384107082"/>
       </p:ext>
     </p:extLst>
   </p:cSld>
@@ -5644,10 +5649,10 @@
       </p:grpSpPr>
       <p:sp>
         <p:nvSpPr>
-          <p:cNvPr id="15" name="box-79">
-            <a:extLst xmlns:a="http://schemas.openxmlformats.org/drawingml/2006/main">
-              <a:ext uri="{FF2B5EF4-FFF2-40B4-BE49-F238E27FC236}">
-                <a16:creationId xmlns:a16="http://schemas.microsoft.com/office/drawing/2014/main" id="{DE7D0D61-9E38-4130-A1FF-DFD2215F5F2C}"/>
+          <p:cNvPr id="18" name="box-79">
+            <a:extLst xmlns:a="http://schemas.openxmlformats.org/drawingml/2006/main">
+              <a:ext uri="{FF2B5EF4-FFF2-40B4-BE49-F238E27FC236}">
+                <a16:creationId xmlns:a16="http://schemas.microsoft.com/office/drawing/2014/main" id="{ED610AAA-7DEF-4AB3-9F83-5E66D11239E1}"/>
               </a:ext>
             </a:extLst>
           </p:cNvPr>
@@ -5680,7 +5685,7 @@
           <p:cNvPr id="2" name="text-80">
             <a:extLst xmlns:a="http://schemas.openxmlformats.org/drawingml/2006/main">
               <a:ext uri="{FF2B5EF4-FFF2-40B4-BE49-F238E27FC236}">
-                <a16:creationId xmlns:a16="http://schemas.microsoft.com/office/drawing/2014/main" id="{894F8F5C-8CE0-4163-9281-EBF4BB5D9916}"/>
+                <a16:creationId xmlns:a16="http://schemas.microsoft.com/office/drawing/2014/main" id="{655FFB04-5677-4211-B205-184E7D4C1C95}"/>
               </a:ext>
             </a:extLst>
           </p:cNvPr>
@@ -5736,7 +5741,7 @@
           <p:cNvPr id="3" name="text-81">
             <a:extLst xmlns:a="http://schemas.openxmlformats.org/drawingml/2006/main">
               <a:ext uri="{FF2B5EF4-FFF2-40B4-BE49-F238E27FC236}">
-                <a16:creationId xmlns:a16="http://schemas.microsoft.com/office/drawing/2014/main" id="{3B15F3D2-31E8-4D7D-9DFE-7619BB17E4EE}"/>
+                <a16:creationId xmlns:a16="http://schemas.microsoft.com/office/drawing/2014/main" id="{856CFA1C-567D-4035-96C5-5CD47C3FDE31}"/>
               </a:ext>
             </a:extLst>
           </p:cNvPr>
@@ -5792,7 +5797,7 @@
           <p:cNvPr id="4" name="text-82">
             <a:extLst xmlns:a="http://schemas.openxmlformats.org/drawingml/2006/main">
               <a:ext uri="{FF2B5EF4-FFF2-40B4-BE49-F238E27FC236}">
-                <a16:creationId xmlns:a16="http://schemas.microsoft.com/office/drawing/2014/main" id="{AD261D4E-1470-4D9E-91D7-ADE96E797F87}"/>
+                <a16:creationId xmlns:a16="http://schemas.microsoft.com/office/drawing/2014/main" id="{D31A45CD-77EB-428A-A2D3-1A0860BC8CC5}"/>
               </a:ext>
             </a:extLst>
           </p:cNvPr>
@@ -5848,7 +5853,7 @@
           <p:cNvPr id="5" name="text-83">
             <a:extLst xmlns:a="http://schemas.openxmlformats.org/drawingml/2006/main">
               <a:ext uri="{FF2B5EF4-FFF2-40B4-BE49-F238E27FC236}">
-                <a16:creationId xmlns:a16="http://schemas.microsoft.com/office/drawing/2014/main" id="{60E33097-20B9-43D0-BA57-C6C446237E8B}"/>
+                <a16:creationId xmlns:a16="http://schemas.microsoft.com/office/drawing/2014/main" id="{D2565E15-6485-4EE3-ADE9-5D9D78EF59E6}"/>
               </a:ext>
             </a:extLst>
           </p:cNvPr>
@@ -5904,7 +5909,7 @@
           <p:cNvPr id="6" name="text-84">
             <a:extLst xmlns:a="http://schemas.openxmlformats.org/drawingml/2006/main">
               <a:ext uri="{FF2B5EF4-FFF2-40B4-BE49-F238E27FC236}">
-                <a16:creationId xmlns:a16="http://schemas.microsoft.com/office/drawing/2014/main" id="{4DA00D95-779E-43C4-82DD-8513EC9CD51E}"/>
+                <a16:creationId xmlns:a16="http://schemas.microsoft.com/office/drawing/2014/main" id="{AB1F2B34-7745-4BB7-B399-715B1C9D2FD1}"/>
               </a:ext>
             </a:extLst>
           </p:cNvPr>
@@ -5960,7 +5965,7 @@
           <p:cNvPr id="7" name="text-85">
             <a:extLst xmlns:a="http://schemas.openxmlformats.org/drawingml/2006/main">
               <a:ext uri="{FF2B5EF4-FFF2-40B4-BE49-F238E27FC236}">
-                <a16:creationId xmlns:a16="http://schemas.microsoft.com/office/drawing/2014/main" id="{F5C55E1F-9DFC-4CE4-A0F0-9580E8CCFCA2}"/>
+                <a16:creationId xmlns:a16="http://schemas.microsoft.com/office/drawing/2014/main" id="{7C6852D6-BE50-4CCA-9307-771B952D9869}"/>
               </a:ext>
             </a:extLst>
           </p:cNvPr>
@@ -6016,7 +6021,7 @@
           <p:cNvPr id="8" name="text-86">
             <a:extLst xmlns:a="http://schemas.openxmlformats.org/drawingml/2006/main">
               <a:ext uri="{FF2B5EF4-FFF2-40B4-BE49-F238E27FC236}">
-                <a16:creationId xmlns:a16="http://schemas.microsoft.com/office/drawing/2014/main" id="{48B8FE2A-BD14-4766-A0D5-602F5126D6EA}"/>
+                <a16:creationId xmlns:a16="http://schemas.microsoft.com/office/drawing/2014/main" id="{23686F73-6D27-4AE3-8D7A-D99FF3B6AD65}"/>
               </a:ext>
             </a:extLst>
           </p:cNvPr>
@@ -6072,7 +6077,7 @@
           <p:cNvPr id="9" name="text-87">
             <a:extLst xmlns:a="http://schemas.openxmlformats.org/drawingml/2006/main">
               <a:ext uri="{FF2B5EF4-FFF2-40B4-BE49-F238E27FC236}">
-                <a16:creationId xmlns:a16="http://schemas.microsoft.com/office/drawing/2014/main" id="{6E4E02FA-E5A2-4110-9712-D5A799A7EACD}"/>
+                <a16:creationId xmlns:a16="http://schemas.microsoft.com/office/drawing/2014/main" id="{F1D98C32-1C27-429A-AD0D-6DEF8ECA28B4}"/>
               </a:ext>
             </a:extLst>
           </p:cNvPr>
@@ -6128,7 +6133,7 @@
           <p:cNvPr id="10" name="text-88">
             <a:extLst xmlns:a="http://schemas.openxmlformats.org/drawingml/2006/main">
               <a:ext uri="{FF2B5EF4-FFF2-40B4-BE49-F238E27FC236}">
-                <a16:creationId xmlns:a16="http://schemas.microsoft.com/office/drawing/2014/main" id="{37A5BA4D-8565-4B54-AFB7-F34BB2D63680}"/>
+                <a16:creationId xmlns:a16="http://schemas.microsoft.com/office/drawing/2014/main" id="{9B19AF61-CE77-49EC-B95E-13B345066EF3}"/>
               </a:ext>
             </a:extLst>
           </p:cNvPr>
@@ -6230,7 +6235,7 @@
           <p:cNvPr id="11" name="text-89">
             <a:extLst xmlns:a="http://schemas.openxmlformats.org/drawingml/2006/main">
               <a:ext uri="{FF2B5EF4-FFF2-40B4-BE49-F238E27FC236}">
-                <a16:creationId xmlns:a16="http://schemas.microsoft.com/office/drawing/2014/main" id="{DCC6D4BF-B6F0-47EA-ABF0-C2D610964DB2}"/>
+                <a16:creationId xmlns:a16="http://schemas.microsoft.com/office/drawing/2014/main" id="{9ED7C3EF-D217-48AB-9080-976A3EB0054B}"/>
               </a:ext>
             </a:extLst>
           </p:cNvPr>
@@ -6332,7 +6337,7 @@
           <p:cNvPr id="12" name="text-90">
             <a:extLst xmlns:a="http://schemas.openxmlformats.org/drawingml/2006/main">
               <a:ext uri="{FF2B5EF4-FFF2-40B4-BE49-F238E27FC236}">
-                <a16:creationId xmlns:a16="http://schemas.microsoft.com/office/drawing/2014/main" id="{D2BB7972-5B4E-49D9-BD57-A77958E841B3}"/>
+                <a16:creationId xmlns:a16="http://schemas.microsoft.com/office/drawing/2014/main" id="{F879CB93-B650-4AF6-B75B-EA13866CC955}"/>
               </a:ext>
             </a:extLst>
           </p:cNvPr>
@@ -6434,7 +6439,7 @@
           <p:cNvPr id="13" name="box-91">
             <a:extLst xmlns:a="http://schemas.openxmlformats.org/drawingml/2006/main">
               <a:ext uri="{FF2B5EF4-FFF2-40B4-BE49-F238E27FC236}">
-                <a16:creationId xmlns:a16="http://schemas.microsoft.com/office/drawing/2014/main" id="{86B9DACC-BD94-43A4-87B9-D0FD40B70969}"/>
+                <a16:creationId xmlns:a16="http://schemas.microsoft.com/office/drawing/2014/main" id="{51698320-5E90-4905-B035-C349A076CE8E}"/>
               </a:ext>
             </a:extLst>
           </p:cNvPr>
@@ -6467,35 +6472,35 @@
           <p:cNvPr id="14" name="text-92">
             <a:extLst xmlns:a="http://schemas.openxmlformats.org/drawingml/2006/main">
               <a:ext uri="{FF2B5EF4-FFF2-40B4-BE49-F238E27FC236}">
-                <a16:creationId xmlns:a16="http://schemas.microsoft.com/office/drawing/2014/main" id="{035ADF0B-1EA4-4D97-BF8E-E64E747F635C}"/>
-              </a:ext>
-            </a:extLst>
-          </p:cNvPr>
-          <p:cNvSpPr>
-            <a:spLocks xmlns:a="http://schemas.openxmlformats.org/drawingml/2006/main" noGrp="1"/>
-          </p:cNvSpPr>
-          <p:nvPr/>
-        </p:nvSpPr>
-        <p:spPr>
-          <a:xfrm xmlns:a="http://schemas.openxmlformats.org/drawingml/2006/main">
-            <a:off x="400050" y="5810250"/>
-            <a:ext cx="10668000" cy="514350"/>
-          </a:xfrm>
-          <a:prstGeom xmlns:a="http://schemas.openxmlformats.org/drawingml/2006/main" prst="rect">
-            <a:avLst/>
-          </a:prstGeom>
-          <a:noFill xmlns:a="http://schemas.openxmlformats.org/drawingml/2006/main"/>
-          <a:ln xmlns:a="http://schemas.openxmlformats.org/drawingml/2006/main" w="0">
-            <a:noFill/>
-            <a:prstDash val="solid"/>
-          </a:ln>
-        </p:spPr>
-        <p:txBody>
-          <a:bodyPr xmlns:a="http://schemas.openxmlformats.org/drawingml/2006/main" anchor="t"/>
-          <a:lstStyle xmlns:a="http://schemas.openxmlformats.org/drawingml/2006/main"/>
-          <a:p xmlns:a="http://schemas.openxmlformats.org/drawingml/2006/main">
-            <a:pPr algn="l">
-              <a:defRPr sz="1200" b="1">
+                <a16:creationId xmlns:a16="http://schemas.microsoft.com/office/drawing/2014/main" id="{4712D08C-8188-44F1-B727-F8EE034E16EC}"/>
+              </a:ext>
+            </a:extLst>
+          </p:cNvPr>
+          <p:cNvSpPr>
+            <a:spLocks xmlns:a="http://schemas.openxmlformats.org/drawingml/2006/main" noGrp="1"/>
+          </p:cNvSpPr>
+          <p:nvPr/>
+        </p:nvSpPr>
+        <p:spPr>
+          <a:xfrm xmlns:a="http://schemas.openxmlformats.org/drawingml/2006/main">
+            <a:off x="400050" y="5715000"/>
+            <a:ext cx="10668000" cy="209550"/>
+          </a:xfrm>
+          <a:prstGeom xmlns:a="http://schemas.openxmlformats.org/drawingml/2006/main" prst="rect">
+            <a:avLst/>
+          </a:prstGeom>
+          <a:noFill xmlns:a="http://schemas.openxmlformats.org/drawingml/2006/main"/>
+          <a:ln xmlns:a="http://schemas.openxmlformats.org/drawingml/2006/main" w="0">
+            <a:noFill/>
+            <a:prstDash val="solid"/>
+          </a:ln>
+        </p:spPr>
+        <p:txBody>
+          <a:bodyPr xmlns:a="http://schemas.openxmlformats.org/drawingml/2006/main" anchor="t"/>
+          <a:lstStyle xmlns:a="http://schemas.openxmlformats.org/drawingml/2006/main"/>
+          <a:p xmlns:a="http://schemas.openxmlformats.org/drawingml/2006/main">
+            <a:pPr algn="l">
+              <a:defRPr sz="1050" b="1">
                 <a:solidFill>
                   <a:srgbClr val="111111"/>
                 </a:solidFill>
@@ -6505,7 +6510,7 @@
               </a:defRPr>
             </a:pPr>
             <a:r>
-              <a:rPr sz="1200" b="1">
+              <a:rPr sz="1050" b="1">
                 <a:solidFill>
                   <a:srgbClr val="111111"/>
                 </a:solidFill>
@@ -6514,6 +6519,174 @@
                 <a:cs typeface="Arial"/>
               </a:rPr>
               <a:t>EXE + source + docs + private GitHub + trilingual deck · EXE + kaynak + belgeler + özel GitHub + üç dilli sunum</a:t>
+            </a:r>
+          </a:p>
+        </p:txBody>
+      </p:sp>
+      <p:sp>
+        <p:nvSpPr>
+          <p:cNvPr id="15" name="text-93">
+            <a:extLst xmlns:a="http://schemas.openxmlformats.org/drawingml/2006/main">
+              <a:ext uri="{FF2B5EF4-FFF2-40B4-BE49-F238E27FC236}">
+                <a16:creationId xmlns:a16="http://schemas.microsoft.com/office/drawing/2014/main" id="{1153917D-7FBF-49B2-A6C8-774A2C08CF48}"/>
+              </a:ext>
+            </a:extLst>
+          </p:cNvPr>
+          <p:cNvSpPr>
+            <a:spLocks xmlns:a="http://schemas.openxmlformats.org/drawingml/2006/main" noGrp="1"/>
+          </p:cNvSpPr>
+          <p:nvPr/>
+        </p:nvSpPr>
+        <p:spPr>
+          <a:xfrm xmlns:a="http://schemas.openxmlformats.org/drawingml/2006/main">
+            <a:off x="400050" y="5962650"/>
+            <a:ext cx="10668000" cy="209550"/>
+          </a:xfrm>
+          <a:prstGeom xmlns:a="http://schemas.openxmlformats.org/drawingml/2006/main" prst="rect">
+            <a:avLst/>
+          </a:prstGeom>
+          <a:noFill xmlns:a="http://schemas.openxmlformats.org/drawingml/2006/main"/>
+          <a:ln xmlns:a="http://schemas.openxmlformats.org/drawingml/2006/main" w="0">
+            <a:noFill/>
+            <a:prstDash val="solid"/>
+          </a:ln>
+        </p:spPr>
+        <p:txBody>
+          <a:bodyPr xmlns:a="http://schemas.openxmlformats.org/drawingml/2006/main" anchor="t"/>
+          <a:lstStyle xmlns:a="http://schemas.openxmlformats.org/drawingml/2006/main"/>
+          <a:p xmlns:a="http://schemas.openxmlformats.org/drawingml/2006/main">
+            <a:pPr algn="l">
+              <a:defRPr sz="1050" b="1">
+                <a:solidFill>
+                  <a:srgbClr val="9A6500"/>
+                </a:solidFill>
+                <a:latin typeface="Arial"/>
+                <a:ea typeface="Arial"/>
+                <a:cs typeface="Arial"/>
+              </a:defRPr>
+            </a:pPr>
+            <a:r>
+              <a:rPr sz="1050" b="1">
+                <a:solidFill>
+                  <a:srgbClr val="9A6500"/>
+                </a:solidFill>
+                <a:latin typeface="Arial"/>
+                <a:ea typeface="Arial"/>
+                <a:cs typeface="Arial"/>
+              </a:rPr>
+              <a:t>Windows 10/11 (x64) + macOS (Apple Silicon) — İndirme: github.com/Azizsekerdil/GermanCourseAI/releases (v1.0.0) · (özel repo)</a:t>
+            </a:r>
+          </a:p>
+        </p:txBody>
+      </p:sp>
+      <p:sp>
+        <p:nvSpPr>
+          <p:cNvPr id="16" name="text-94">
+            <a:extLst xmlns:a="http://schemas.openxmlformats.org/drawingml/2006/main">
+              <a:ext uri="{FF2B5EF4-FFF2-40B4-BE49-F238E27FC236}">
+                <a16:creationId xmlns:a16="http://schemas.microsoft.com/office/drawing/2014/main" id="{C3B2AE6C-212B-4397-A727-EFBB23489BF7}"/>
+              </a:ext>
+            </a:extLst>
+          </p:cNvPr>
+          <p:cNvSpPr>
+            <a:spLocks xmlns:a="http://schemas.openxmlformats.org/drawingml/2006/main" noGrp="1"/>
+          </p:cNvSpPr>
+          <p:nvPr/>
+        </p:nvSpPr>
+        <p:spPr>
+          <a:xfrm xmlns:a="http://schemas.openxmlformats.org/drawingml/2006/main">
+            <a:off x="400050" y="6191250"/>
+            <a:ext cx="10668000" cy="190500"/>
+          </a:xfrm>
+          <a:prstGeom xmlns:a="http://schemas.openxmlformats.org/drawingml/2006/main" prst="rect">
+            <a:avLst/>
+          </a:prstGeom>
+          <a:noFill xmlns:a="http://schemas.openxmlformats.org/drawingml/2006/main"/>
+          <a:ln xmlns:a="http://schemas.openxmlformats.org/drawingml/2006/main" w="0">
+            <a:noFill/>
+            <a:prstDash val="solid"/>
+          </a:ln>
+        </p:spPr>
+        <p:txBody>
+          <a:bodyPr xmlns:a="http://schemas.openxmlformats.org/drawingml/2006/main" anchor="t"/>
+          <a:lstStyle xmlns:a="http://schemas.openxmlformats.org/drawingml/2006/main"/>
+          <a:p xmlns:a="http://schemas.openxmlformats.org/drawingml/2006/main">
+            <a:pPr algn="l">
+              <a:defRPr sz="975" b="0">
+                <a:solidFill>
+                  <a:srgbClr val="5D6470"/>
+                </a:solidFill>
+                <a:latin typeface="Arial"/>
+                <a:ea typeface="Arial"/>
+                <a:cs typeface="Arial"/>
+              </a:defRPr>
+            </a:pPr>
+            <a:r>
+              <a:rPr sz="975" b="0">
+                <a:solidFill>
+                  <a:srgbClr val="5D6470"/>
+                </a:solidFill>
+                <a:latin typeface="Arial"/>
+                <a:ea typeface="Arial"/>
+                <a:cs typeface="Arial"/>
+              </a:rPr>
+              <a:t>Windows 10/11 (x64) &amp; macOS (Apple Silicon) — Download: GitHub Releases (v1.0.0)</a:t>
+            </a:r>
+          </a:p>
+        </p:txBody>
+      </p:sp>
+      <p:sp>
+        <p:nvSpPr>
+          <p:cNvPr id="17" name="text-95">
+            <a:extLst xmlns:a="http://schemas.openxmlformats.org/drawingml/2006/main">
+              <a:ext uri="{FF2B5EF4-FFF2-40B4-BE49-F238E27FC236}">
+                <a16:creationId xmlns:a16="http://schemas.microsoft.com/office/drawing/2014/main" id="{9F84A400-C90D-47D7-8BDC-72084F38780A}"/>
+              </a:ext>
+            </a:extLst>
+          </p:cNvPr>
+          <p:cNvSpPr>
+            <a:spLocks xmlns:a="http://schemas.openxmlformats.org/drawingml/2006/main" noGrp="1"/>
+          </p:cNvSpPr>
+          <p:nvPr/>
+        </p:nvSpPr>
+        <p:spPr>
+          <a:xfrm xmlns:a="http://schemas.openxmlformats.org/drawingml/2006/main">
+            <a:off x="400050" y="6400800"/>
+            <a:ext cx="10668000" cy="190500"/>
+          </a:xfrm>
+          <a:prstGeom xmlns:a="http://schemas.openxmlformats.org/drawingml/2006/main" prst="rect">
+            <a:avLst/>
+          </a:prstGeom>
+          <a:noFill xmlns:a="http://schemas.openxmlformats.org/drawingml/2006/main"/>
+          <a:ln xmlns:a="http://schemas.openxmlformats.org/drawingml/2006/main" w="0">
+            <a:noFill/>
+            <a:prstDash val="solid"/>
+          </a:ln>
+        </p:spPr>
+        <p:txBody>
+          <a:bodyPr xmlns:a="http://schemas.openxmlformats.org/drawingml/2006/main" anchor="t"/>
+          <a:lstStyle xmlns:a="http://schemas.openxmlformats.org/drawingml/2006/main"/>
+          <a:p xmlns:a="http://schemas.openxmlformats.org/drawingml/2006/main">
+            <a:pPr algn="l">
+              <a:defRPr sz="900" b="0">
+                <a:solidFill>
+                  <a:srgbClr val="5D6470"/>
+                </a:solidFill>
+                <a:latin typeface="Arial"/>
+                <a:ea typeface="Arial"/>
+                <a:cs typeface="Arial"/>
+              </a:defRPr>
+            </a:pPr>
+            <a:r>
+              <a:rPr sz="900" b="0">
+                <a:solidFill>
+                  <a:srgbClr val="5D6470"/>
+                </a:solidFill>
+                <a:latin typeface="Arial"/>
+                <a:ea typeface="Arial"/>
+                <a:cs typeface="Arial"/>
+              </a:rPr>
+              <a:t>macOS paketi Apple Silicon (arm64) içindir ve notarize edilmemiştir; ilk açılışta sağ tık → Aç. / Not notarized; first launch: right-click → Open.</a:t>
             </a:r>
           </a:p>
         </p:txBody>
@@ -6521,7 +6694,7 @@
     </p:spTree>
     <p:extLst>
       <p:ext uri="{BB962C8B-B14F-4D97-AF65-F5344CB8AC3E}">
-        <p14:creationId xmlns:p14="http://schemas.microsoft.com/office/powerpoint/2010/main" val="1341667284"/>
+        <p14:creationId xmlns:p14="http://schemas.microsoft.com/office/powerpoint/2010/main" val="1056817073"/>
       </p:ext>
     </p:extLst>
   </p:cSld>

--- a/docs/presentation/German-Course-AI-Trilingual.pptx
+++ b/docs/presentation/German-Course-AI-Trilingual.pptx
@@ -2,18 +2,18 @@
 <file path=ppt/presentation.xml><?xml version="1.0" encoding="utf-8"?>
 <p:presentation xmlns:p="http://schemas.openxmlformats.org/presentationml/2006/main">
   <p:sldMasterIdLst>
-    <p:sldMasterId xmlns:r="http://schemas.openxmlformats.org/officeDocument/2006/relationships" id="2147483648" r:id="R925416c520d144d7"/>
+    <p:sldMasterId xmlns:r="http://schemas.openxmlformats.org/officeDocument/2006/relationships" id="2147483648" r:id="Rbd43e295a9674cb8"/>
   </p:sldMasterIdLst>
   <p:notesMasterIdLst>
-    <p:notesMasterId xmlns:r="http://schemas.openxmlformats.org/officeDocument/2006/relationships" r:id="R944f634b67534c4b"/>
+    <p:notesMasterId xmlns:r="http://schemas.openxmlformats.org/officeDocument/2006/relationships" r:id="Rd8bc9dd3271643e2"/>
   </p:notesMasterIdLst>
   <p:sldIdLst>
-    <p:sldId xmlns:r="http://schemas.openxmlformats.org/officeDocument/2006/relationships" id="256" r:id="R6c47d783ae2549ee"/>
-    <p:sldId xmlns:r="http://schemas.openxmlformats.org/officeDocument/2006/relationships" id="257" r:id="R1ff21c9a833d428b"/>
-    <p:sldId xmlns:r="http://schemas.openxmlformats.org/officeDocument/2006/relationships" id="258" r:id="Rea0b44f9643f49fe"/>
-    <p:sldId xmlns:r="http://schemas.openxmlformats.org/officeDocument/2006/relationships" id="259" r:id="R25588092b3cc4d92"/>
-    <p:sldId xmlns:r="http://schemas.openxmlformats.org/officeDocument/2006/relationships" id="260" r:id="Rb6535701c7294d2e"/>
-    <p:sldId xmlns:r="http://schemas.openxmlformats.org/officeDocument/2006/relationships" id="261" r:id="R350b568ab17c4af3"/>
+    <p:sldId xmlns:r="http://schemas.openxmlformats.org/officeDocument/2006/relationships" id="256" r:id="R094b538f0e0a4cb6"/>
+    <p:sldId xmlns:r="http://schemas.openxmlformats.org/officeDocument/2006/relationships" id="257" r:id="R02f827ab557249fa"/>
+    <p:sldId xmlns:r="http://schemas.openxmlformats.org/officeDocument/2006/relationships" id="258" r:id="R91fdfa594b25460e"/>
+    <p:sldId xmlns:r="http://schemas.openxmlformats.org/officeDocument/2006/relationships" id="259" r:id="R439e9f595e1f426a"/>
+    <p:sldId xmlns:r="http://schemas.openxmlformats.org/officeDocument/2006/relationships" id="260" r:id="R23d5cc8c62ab4666"/>
+    <p:sldId xmlns:r="http://schemas.openxmlformats.org/officeDocument/2006/relationships" id="261" r:id="R1b58d015e9274aca"/>
   </p:sldIdLst>
   <p:sldSz cx="12192000" cy="6858000"/>
   <p:notesSz cx="6858000" cy="9144000"/>
@@ -1010,7 +1010,7 @@
   </p:cSld>
   <p:clrMap bg1="lt1" tx1="dk1" bg2="lt2" tx2="dk2" accent1="accent1" accent2="accent2" accent3="accent3" accent4="accent4" accent5="accent5" accent6="accent6" hlink="hlink" folHlink="folHlink"/>
   <p:sldLayoutIdLst>
-    <p:sldLayoutId xmlns:r="http://schemas.openxmlformats.org/officeDocument/2006/relationships" id="2147483649" r:id="R7874d5378f794973"/>
+    <p:sldLayoutId xmlns:r="http://schemas.openxmlformats.org/officeDocument/2006/relationships" id="2147483649" r:id="R58a114006b0a47c3"/>
   </p:sldLayoutIdLst>
   <p:txStyles>
     <p:titleStyle>
@@ -1561,7 +1561,7 @@
           <p:cNvPr id="13" name="box-1">
             <a:extLst xmlns:a="http://schemas.openxmlformats.org/drawingml/2006/main">
               <a:ext uri="{FF2B5EF4-FFF2-40B4-BE49-F238E27FC236}">
-                <a16:creationId xmlns:a16="http://schemas.microsoft.com/office/drawing/2014/main" id="{CCA520DB-A332-41F7-B660-CFF11DEDF158}"/>
+                <a16:creationId xmlns:a16="http://schemas.microsoft.com/office/drawing/2014/main" id="{BD025786-6C25-47CC-A5F0-C8E285B14334}"/>
               </a:ext>
             </a:extLst>
           </p:cNvPr>
@@ -1594,7 +1594,7 @@
           <p:cNvPr id="2" name="text-2">
             <a:extLst xmlns:a="http://schemas.openxmlformats.org/drawingml/2006/main">
               <a:ext uri="{FF2B5EF4-FFF2-40B4-BE49-F238E27FC236}">
-                <a16:creationId xmlns:a16="http://schemas.microsoft.com/office/drawing/2014/main" id="{61267023-FF07-4D30-B45A-971BFFA33FFF}"/>
+                <a16:creationId xmlns:a16="http://schemas.microsoft.com/office/drawing/2014/main" id="{1F52B061-E2DA-44FB-99DC-0535120771CC}"/>
               </a:ext>
             </a:extLst>
           </p:cNvPr>
@@ -1650,7 +1650,7 @@
           <p:cNvPr id="3" name="text-3">
             <a:extLst xmlns:a="http://schemas.openxmlformats.org/drawingml/2006/main">
               <a:ext uri="{FF2B5EF4-FFF2-40B4-BE49-F238E27FC236}">
-                <a16:creationId xmlns:a16="http://schemas.microsoft.com/office/drawing/2014/main" id="{5F5650EC-2956-424B-98BE-C4FDEBEB4BF6}"/>
+                <a16:creationId xmlns:a16="http://schemas.microsoft.com/office/drawing/2014/main" id="{E03511C0-E60F-4506-AC66-63E8E3E426A6}"/>
               </a:ext>
             </a:extLst>
           </p:cNvPr>
@@ -1706,7 +1706,7 @@
           <p:cNvPr id="4" name="text-4">
             <a:extLst xmlns:a="http://schemas.openxmlformats.org/drawingml/2006/main">
               <a:ext uri="{FF2B5EF4-FFF2-40B4-BE49-F238E27FC236}">
-                <a16:creationId xmlns:a16="http://schemas.microsoft.com/office/drawing/2014/main" id="{042E64A7-98FE-49AE-9A1B-16A457068F73}"/>
+                <a16:creationId xmlns:a16="http://schemas.microsoft.com/office/drawing/2014/main" id="{476A2E35-FF67-44ED-AEF4-78EEA11C3AC2}"/>
               </a:ext>
             </a:extLst>
           </p:cNvPr>
@@ -1762,7 +1762,7 @@
           <p:cNvPr id="5" name="text-5">
             <a:extLst xmlns:a="http://schemas.openxmlformats.org/drawingml/2006/main">
               <a:ext uri="{FF2B5EF4-FFF2-40B4-BE49-F238E27FC236}">
-                <a16:creationId xmlns:a16="http://schemas.microsoft.com/office/drawing/2014/main" id="{586042F5-9CD0-4F69-85E0-DF4959003A4C}"/>
+                <a16:creationId xmlns:a16="http://schemas.microsoft.com/office/drawing/2014/main" id="{4DA3AA05-FBBE-4EFA-8F43-723A69B41226}"/>
               </a:ext>
             </a:extLst>
           </p:cNvPr>
@@ -1818,7 +1818,7 @@
           <p:cNvPr id="6" name="text-6">
             <a:extLst xmlns:a="http://schemas.openxmlformats.org/drawingml/2006/main">
               <a:ext uri="{FF2B5EF4-FFF2-40B4-BE49-F238E27FC236}">
-                <a16:creationId xmlns:a16="http://schemas.microsoft.com/office/drawing/2014/main" id="{8C84A7AA-014B-42A5-B22A-1C726A25EA4B}"/>
+                <a16:creationId xmlns:a16="http://schemas.microsoft.com/office/drawing/2014/main" id="{3CC5B6E1-1E9B-447C-A270-D11598FDD8CF}"/>
               </a:ext>
             </a:extLst>
           </p:cNvPr>
@@ -1874,7 +1874,7 @@
           <p:cNvPr id="7" name="text-7">
             <a:extLst xmlns:a="http://schemas.openxmlformats.org/drawingml/2006/main">
               <a:ext uri="{FF2B5EF4-FFF2-40B4-BE49-F238E27FC236}">
-                <a16:creationId xmlns:a16="http://schemas.microsoft.com/office/drawing/2014/main" id="{48E8C130-6CBB-45CB-A523-736875386D9F}"/>
+                <a16:creationId xmlns:a16="http://schemas.microsoft.com/office/drawing/2014/main" id="{CBCE2E5B-9DA5-4FD2-99F1-C10A4147C454}"/>
               </a:ext>
             </a:extLst>
           </p:cNvPr>
@@ -1930,7 +1930,7 @@
           <p:cNvPr id="8" name="text-8">
             <a:extLst xmlns:a="http://schemas.openxmlformats.org/drawingml/2006/main">
               <a:ext uri="{FF2B5EF4-FFF2-40B4-BE49-F238E27FC236}">
-                <a16:creationId xmlns:a16="http://schemas.microsoft.com/office/drawing/2014/main" id="{F2015877-5EB1-4595-8497-8687C7D635D5}"/>
+                <a16:creationId xmlns:a16="http://schemas.microsoft.com/office/drawing/2014/main" id="{E72332B6-54AB-4FD6-A089-9BC32E9975B5}"/>
               </a:ext>
             </a:extLst>
           </p:cNvPr>
@@ -1986,7 +1986,7 @@
           <p:cNvPr id="9" name="text-9">
             <a:extLst xmlns:a="http://schemas.openxmlformats.org/drawingml/2006/main">
               <a:ext uri="{FF2B5EF4-FFF2-40B4-BE49-F238E27FC236}">
-                <a16:creationId xmlns:a16="http://schemas.microsoft.com/office/drawing/2014/main" id="{5D61D76D-4253-434E-89EE-5C3ADCFD35F8}"/>
+                <a16:creationId xmlns:a16="http://schemas.microsoft.com/office/drawing/2014/main" id="{10AD1910-823E-4EA0-87F7-D1F92F5C86F0}"/>
               </a:ext>
             </a:extLst>
           </p:cNvPr>
@@ -2042,7 +2042,7 @@
           <p:cNvPr id="10" name="box-10">
             <a:extLst xmlns:a="http://schemas.openxmlformats.org/drawingml/2006/main">
               <a:ext uri="{FF2B5EF4-FFF2-40B4-BE49-F238E27FC236}">
-                <a16:creationId xmlns:a16="http://schemas.microsoft.com/office/drawing/2014/main" id="{11615049-7E32-496D-87D3-B30F9F4094A0}"/>
+                <a16:creationId xmlns:a16="http://schemas.microsoft.com/office/drawing/2014/main" id="{C61DB1B5-436B-41F9-9871-100BE711F74C}"/>
               </a:ext>
             </a:extLst>
           </p:cNvPr>
@@ -2079,7 +2079,7 @@
           <p:nvPr/>
         </p:nvPicPr>
         <p:blipFill>
-          <a:blip xmlns:r="http://schemas.openxmlformats.org/officeDocument/2006/relationships" xmlns:a="http://schemas.openxmlformats.org/drawingml/2006/main" r:embed="R93e3aa85f4464eb3"/>
+          <a:blip xmlns:r="http://schemas.openxmlformats.org/officeDocument/2006/relationships" xmlns:a="http://schemas.openxmlformats.org/drawingml/2006/main" r:embed="R3d35d683b58a4c02"/>
           <a:stretch xmlns:a="http://schemas.openxmlformats.org/drawingml/2006/main"/>
         </p:blipFill>
         <p:spPr>
@@ -2097,7 +2097,7 @@
           <p:cNvPr id="12" name="text-11">
             <a:extLst xmlns:a="http://schemas.openxmlformats.org/drawingml/2006/main">
               <a:ext uri="{FF2B5EF4-FFF2-40B4-BE49-F238E27FC236}">
-                <a16:creationId xmlns:a16="http://schemas.microsoft.com/office/drawing/2014/main" id="{282CCCFB-42C9-4AD4-93AD-0D5A8DC0D5FB}"/>
+                <a16:creationId xmlns:a16="http://schemas.microsoft.com/office/drawing/2014/main" id="{66E07B7C-169D-4C0A-A15F-EEEA1BD6BA71}"/>
               </a:ext>
             </a:extLst>
           </p:cNvPr>
@@ -2151,7 +2151,7 @@
     </p:spTree>
     <p:extLst>
       <p:ext uri="{BB962C8B-B14F-4D97-AF65-F5344CB8AC3E}">
-        <p14:creationId xmlns:p14="http://schemas.microsoft.com/office/powerpoint/2010/main" val="541527519"/>
+        <p14:creationId xmlns:p14="http://schemas.microsoft.com/office/powerpoint/2010/main" val="30447237"/>
       </p:ext>
     </p:extLst>
   </p:cSld>
@@ -2182,7 +2182,7 @@
           <p:cNvPr id="14" name="box-12">
             <a:extLst xmlns:a="http://schemas.openxmlformats.org/drawingml/2006/main">
               <a:ext uri="{FF2B5EF4-FFF2-40B4-BE49-F238E27FC236}">
-                <a16:creationId xmlns:a16="http://schemas.microsoft.com/office/drawing/2014/main" id="{AFEF2905-D59A-4C8E-9642-78744B99A926}"/>
+                <a16:creationId xmlns:a16="http://schemas.microsoft.com/office/drawing/2014/main" id="{5FEAAD70-FE91-412E-8250-EA29A9F0317D}"/>
               </a:ext>
             </a:extLst>
           </p:cNvPr>
@@ -2215,7 +2215,7 @@
           <p:cNvPr id="2" name="text-13">
             <a:extLst xmlns:a="http://schemas.openxmlformats.org/drawingml/2006/main">
               <a:ext uri="{FF2B5EF4-FFF2-40B4-BE49-F238E27FC236}">
-                <a16:creationId xmlns:a16="http://schemas.microsoft.com/office/drawing/2014/main" id="{E068ACAA-2AC7-4966-AB0B-AC7EF187E773}"/>
+                <a16:creationId xmlns:a16="http://schemas.microsoft.com/office/drawing/2014/main" id="{255F1637-D4E0-4E03-B7C1-AC5AB66B50B7}"/>
               </a:ext>
             </a:extLst>
           </p:cNvPr>
@@ -2271,7 +2271,7 @@
           <p:cNvPr id="3" name="text-14">
             <a:extLst xmlns:a="http://schemas.openxmlformats.org/drawingml/2006/main">
               <a:ext uri="{FF2B5EF4-FFF2-40B4-BE49-F238E27FC236}">
-                <a16:creationId xmlns:a16="http://schemas.microsoft.com/office/drawing/2014/main" id="{3A11917C-1F2E-46A8-9F3B-AF5196D36FC6}"/>
+                <a16:creationId xmlns:a16="http://schemas.microsoft.com/office/drawing/2014/main" id="{F6D83F94-B08A-4AAC-80DB-839A2B1DA196}"/>
               </a:ext>
             </a:extLst>
           </p:cNvPr>
@@ -2327,7 +2327,7 @@
           <p:cNvPr id="4" name="text-15">
             <a:extLst xmlns:a="http://schemas.openxmlformats.org/drawingml/2006/main">
               <a:ext uri="{FF2B5EF4-FFF2-40B4-BE49-F238E27FC236}">
-                <a16:creationId xmlns:a16="http://schemas.microsoft.com/office/drawing/2014/main" id="{82C2B217-191A-472A-95F1-3E59E762CEAA}"/>
+                <a16:creationId xmlns:a16="http://schemas.microsoft.com/office/drawing/2014/main" id="{77648BCF-3DD1-4310-909F-8F5554DE3282}"/>
               </a:ext>
             </a:extLst>
           </p:cNvPr>
@@ -2383,7 +2383,7 @@
           <p:cNvPr id="5" name="text-16">
             <a:extLst xmlns:a="http://schemas.openxmlformats.org/drawingml/2006/main">
               <a:ext uri="{FF2B5EF4-FFF2-40B4-BE49-F238E27FC236}">
-                <a16:creationId xmlns:a16="http://schemas.microsoft.com/office/drawing/2014/main" id="{40D8EADA-8A26-4008-AD0A-7CF9BBDF468A}"/>
+                <a16:creationId xmlns:a16="http://schemas.microsoft.com/office/drawing/2014/main" id="{83A79BEF-C93E-4BC0-8D40-F3D41E321B88}"/>
               </a:ext>
             </a:extLst>
           </p:cNvPr>
@@ -2439,7 +2439,7 @@
           <p:cNvPr id="6" name="text-17">
             <a:extLst xmlns:a="http://schemas.openxmlformats.org/drawingml/2006/main">
               <a:ext uri="{FF2B5EF4-FFF2-40B4-BE49-F238E27FC236}">
-                <a16:creationId xmlns:a16="http://schemas.microsoft.com/office/drawing/2014/main" id="{8E7E55F7-5932-4DD8-B536-EC1D65EF3104}"/>
+                <a16:creationId xmlns:a16="http://schemas.microsoft.com/office/drawing/2014/main" id="{11AF26BA-C96F-4335-8D3E-5F3402D80638}"/>
               </a:ext>
             </a:extLst>
           </p:cNvPr>
@@ -2495,7 +2495,7 @@
           <p:cNvPr id="7" name="box-18">
             <a:extLst xmlns:a="http://schemas.openxmlformats.org/drawingml/2006/main">
               <a:ext uri="{FF2B5EF4-FFF2-40B4-BE49-F238E27FC236}">
-                <a16:creationId xmlns:a16="http://schemas.microsoft.com/office/drawing/2014/main" id="{B2CFFD31-0883-412C-B5AC-9909650F42B7}"/>
+                <a16:creationId xmlns:a16="http://schemas.microsoft.com/office/drawing/2014/main" id="{04067BA7-DAF1-4359-88C5-48D4E5C62001}"/>
               </a:ext>
             </a:extLst>
           </p:cNvPr>
@@ -2528,7 +2528,7 @@
           <p:cNvPr id="8" name="text-19">
             <a:extLst xmlns:a="http://schemas.openxmlformats.org/drawingml/2006/main">
               <a:ext uri="{FF2B5EF4-FFF2-40B4-BE49-F238E27FC236}">
-                <a16:creationId xmlns:a16="http://schemas.microsoft.com/office/drawing/2014/main" id="{07F811D6-4351-4FF5-80D0-6FE0FF10C337}"/>
+                <a16:creationId xmlns:a16="http://schemas.microsoft.com/office/drawing/2014/main" id="{C8FCCA59-4EAF-4CBD-A7BA-931FF8EBA3E5}"/>
               </a:ext>
             </a:extLst>
           </p:cNvPr>
@@ -2574,7 +2574,7 @@
                 <a:ea typeface="Arial"/>
                 <a:cs typeface="Arial"/>
               </a:rPr>
-              <a:t>17 Bereiche verbinden Wiederholung, Wortschatz, Prüfung, Grammatik und Praxis in einem ruhigen Windows-Arbeitsraum.</a:t>
+              <a:t>18 Bereiche verbinden Wiederholung, Wortschatz, ein zweisprachiges Wörterbuch DE-EN, Prüfung, Grammatik und Praxis in einem ruhigen Windows-Arbeitsraum.</a:t>
             </a:r>
           </a:p>
         </p:txBody>
@@ -2584,7 +2584,7 @@
           <p:cNvPr id="9" name="text-20">
             <a:extLst xmlns:a="http://schemas.openxmlformats.org/drawingml/2006/main">
               <a:ext uri="{FF2B5EF4-FFF2-40B4-BE49-F238E27FC236}">
-                <a16:creationId xmlns:a16="http://schemas.microsoft.com/office/drawing/2014/main" id="{9D730B93-8FEC-4B9F-AB35-4E89C8198E2A}"/>
+                <a16:creationId xmlns:a16="http://schemas.microsoft.com/office/drawing/2014/main" id="{F50F33E0-329E-4298-AA50-3CE468BD7C15}"/>
               </a:ext>
             </a:extLst>
           </p:cNvPr>
@@ -2640,7 +2640,7 @@
           <p:cNvPr id="10" name="text-21">
             <a:extLst xmlns:a="http://schemas.openxmlformats.org/drawingml/2006/main">
               <a:ext uri="{FF2B5EF4-FFF2-40B4-BE49-F238E27FC236}">
-                <a16:creationId xmlns:a16="http://schemas.microsoft.com/office/drawing/2014/main" id="{8CEB4B68-030C-44F6-91DA-0F0A0822BD0D}"/>
+                <a16:creationId xmlns:a16="http://schemas.microsoft.com/office/drawing/2014/main" id="{46324EEC-29AF-488A-AE28-7DDA587D8680}"/>
               </a:ext>
             </a:extLst>
           </p:cNvPr>
@@ -2696,7 +2696,7 @@
           <p:cNvPr id="11" name="box-22">
             <a:extLst xmlns:a="http://schemas.openxmlformats.org/drawingml/2006/main">
               <a:ext uri="{FF2B5EF4-FFF2-40B4-BE49-F238E27FC236}">
-                <a16:creationId xmlns:a16="http://schemas.microsoft.com/office/drawing/2014/main" id="{8F44A2E7-9BD6-4079-937A-CFA7ACF00E92}"/>
+                <a16:creationId xmlns:a16="http://schemas.microsoft.com/office/drawing/2014/main" id="{CECD7995-7AE5-4E2F-A66A-EFD490C0CE25}"/>
               </a:ext>
             </a:extLst>
           </p:cNvPr>
@@ -2733,7 +2733,7 @@
           <p:nvPr/>
         </p:nvPicPr>
         <p:blipFill>
-          <a:blip xmlns:r="http://schemas.openxmlformats.org/officeDocument/2006/relationships" xmlns:a="http://schemas.openxmlformats.org/drawingml/2006/main" r:embed="R44bebcc1930c4710"/>
+          <a:blip xmlns:r="http://schemas.openxmlformats.org/officeDocument/2006/relationships" xmlns:a="http://schemas.openxmlformats.org/drawingml/2006/main" r:embed="Reb50836f06df44e9"/>
           <a:stretch xmlns:a="http://schemas.openxmlformats.org/drawingml/2006/main"/>
         </p:blipFill>
         <p:spPr>
@@ -2751,7 +2751,7 @@
           <p:cNvPr id="13" name="text-23">
             <a:extLst xmlns:a="http://schemas.openxmlformats.org/drawingml/2006/main">
               <a:ext uri="{FF2B5EF4-FFF2-40B4-BE49-F238E27FC236}">
-                <a16:creationId xmlns:a16="http://schemas.microsoft.com/office/drawing/2014/main" id="{7E92A051-BBE5-4809-9D28-826C05728046}"/>
+                <a16:creationId xmlns:a16="http://schemas.microsoft.com/office/drawing/2014/main" id="{4BC43FC3-81E4-4A37-8CD1-28178D87A4CF}"/>
               </a:ext>
             </a:extLst>
           </p:cNvPr>
@@ -2805,7 +2805,7 @@
     </p:spTree>
     <p:extLst>
       <p:ext uri="{BB962C8B-B14F-4D97-AF65-F5344CB8AC3E}">
-        <p14:creationId xmlns:p14="http://schemas.microsoft.com/office/powerpoint/2010/main" val="2022796525"/>
+        <p14:creationId xmlns:p14="http://schemas.microsoft.com/office/powerpoint/2010/main" val="600625755"/>
       </p:ext>
     </p:extLst>
   </p:cSld>
@@ -2836,7 +2836,7 @@
           <p:cNvPr id="19" name="box-24">
             <a:extLst xmlns:a="http://schemas.openxmlformats.org/drawingml/2006/main">
               <a:ext uri="{FF2B5EF4-FFF2-40B4-BE49-F238E27FC236}">
-                <a16:creationId xmlns:a16="http://schemas.microsoft.com/office/drawing/2014/main" id="{794C1A4F-076D-4BE6-81E4-8BA499BBAE67}"/>
+                <a16:creationId xmlns:a16="http://schemas.microsoft.com/office/drawing/2014/main" id="{745715F3-DE9A-48C2-B66C-96A476A54715}"/>
               </a:ext>
             </a:extLst>
           </p:cNvPr>
@@ -2869,7 +2869,7 @@
           <p:cNvPr id="2" name="text-25">
             <a:extLst xmlns:a="http://schemas.openxmlformats.org/drawingml/2006/main">
               <a:ext uri="{FF2B5EF4-FFF2-40B4-BE49-F238E27FC236}">
-                <a16:creationId xmlns:a16="http://schemas.microsoft.com/office/drawing/2014/main" id="{5B442726-6168-4B1F-A5C8-009AA4F375E6}"/>
+                <a16:creationId xmlns:a16="http://schemas.microsoft.com/office/drawing/2014/main" id="{19A687DA-52B2-43E1-8A5E-05A06428D305}"/>
               </a:ext>
             </a:extLst>
           </p:cNvPr>
@@ -2925,7 +2925,7 @@
           <p:cNvPr id="3" name="text-26">
             <a:extLst xmlns:a="http://schemas.openxmlformats.org/drawingml/2006/main">
               <a:ext uri="{FF2B5EF4-FFF2-40B4-BE49-F238E27FC236}">
-                <a16:creationId xmlns:a16="http://schemas.microsoft.com/office/drawing/2014/main" id="{49FDF277-6683-4DA2-B0B5-AB7B708EB39A}"/>
+                <a16:creationId xmlns:a16="http://schemas.microsoft.com/office/drawing/2014/main" id="{0983BFA4-D022-4E81-8A99-0B51E0778FDF}"/>
               </a:ext>
             </a:extLst>
           </p:cNvPr>
@@ -2981,7 +2981,7 @@
           <p:cNvPr id="4" name="text-27">
             <a:extLst xmlns:a="http://schemas.openxmlformats.org/drawingml/2006/main">
               <a:ext uri="{FF2B5EF4-FFF2-40B4-BE49-F238E27FC236}">
-                <a16:creationId xmlns:a16="http://schemas.microsoft.com/office/drawing/2014/main" id="{2D867B5F-D3E3-4936-980D-876BFB52AE82}"/>
+                <a16:creationId xmlns:a16="http://schemas.microsoft.com/office/drawing/2014/main" id="{1CACEE5B-FA8F-480E-9331-BC77FF8A0713}"/>
               </a:ext>
             </a:extLst>
           </p:cNvPr>
@@ -3037,7 +3037,7 @@
           <p:cNvPr id="5" name="text-28">
             <a:extLst xmlns:a="http://schemas.openxmlformats.org/drawingml/2006/main">
               <a:ext uri="{FF2B5EF4-FFF2-40B4-BE49-F238E27FC236}">
-                <a16:creationId xmlns:a16="http://schemas.microsoft.com/office/drawing/2014/main" id="{C83BDE62-72E9-4CEE-818F-AB747E5EA0C5}"/>
+                <a16:creationId xmlns:a16="http://schemas.microsoft.com/office/drawing/2014/main" id="{143349AE-F1CF-45AF-A549-F068E33FB3DA}"/>
               </a:ext>
             </a:extLst>
           </p:cNvPr>
@@ -3093,7 +3093,7 @@
           <p:cNvPr id="6" name="text-29">
             <a:extLst xmlns:a="http://schemas.openxmlformats.org/drawingml/2006/main">
               <a:ext uri="{FF2B5EF4-FFF2-40B4-BE49-F238E27FC236}">
-                <a16:creationId xmlns:a16="http://schemas.microsoft.com/office/drawing/2014/main" id="{8CFA9AFF-E82F-4DD3-919D-D5CD2DDAE6A8}"/>
+                <a16:creationId xmlns:a16="http://schemas.microsoft.com/office/drawing/2014/main" id="{86AA954F-4D28-4170-825F-2F0134BEE582}"/>
               </a:ext>
             </a:extLst>
           </p:cNvPr>
@@ -3149,7 +3149,7 @@
           <p:cNvPr id="7" name="box-30">
             <a:extLst xmlns:a="http://schemas.openxmlformats.org/drawingml/2006/main">
               <a:ext uri="{FF2B5EF4-FFF2-40B4-BE49-F238E27FC236}">
-                <a16:creationId xmlns:a16="http://schemas.microsoft.com/office/drawing/2014/main" id="{80698B3A-CC96-4BA6-A786-5114C9042D35}"/>
+                <a16:creationId xmlns:a16="http://schemas.microsoft.com/office/drawing/2014/main" id="{3A98FDE9-4E43-490F-ABE7-58292EBA83B6}"/>
               </a:ext>
             </a:extLst>
           </p:cNvPr>
@@ -3182,7 +3182,7 @@
           <p:cNvPr id="8" name="text-31">
             <a:extLst xmlns:a="http://schemas.openxmlformats.org/drawingml/2006/main">
               <a:ext uri="{FF2B5EF4-FFF2-40B4-BE49-F238E27FC236}">
-                <a16:creationId xmlns:a16="http://schemas.microsoft.com/office/drawing/2014/main" id="{A46491DA-C0FD-4E3B-B343-D06A0B896BE2}"/>
+                <a16:creationId xmlns:a16="http://schemas.microsoft.com/office/drawing/2014/main" id="{F5FAB578-268D-4DD7-AAE6-576CE3CF9EED}"/>
               </a:ext>
             </a:extLst>
           </p:cNvPr>
@@ -3238,7 +3238,7 @@
           <p:cNvPr id="9" name="text-32">
             <a:extLst xmlns:a="http://schemas.openxmlformats.org/drawingml/2006/main">
               <a:ext uri="{FF2B5EF4-FFF2-40B4-BE49-F238E27FC236}">
-                <a16:creationId xmlns:a16="http://schemas.microsoft.com/office/drawing/2014/main" id="{82E94A7E-D0E1-42F3-8EA7-9173E17E74E9}"/>
+                <a16:creationId xmlns:a16="http://schemas.microsoft.com/office/drawing/2014/main" id="{313CE2A0-013F-4D4A-B87B-8D397DE93C91}"/>
               </a:ext>
             </a:extLst>
           </p:cNvPr>
@@ -3294,7 +3294,7 @@
           <p:cNvPr id="10" name="text-33">
             <a:extLst xmlns:a="http://schemas.openxmlformats.org/drawingml/2006/main">
               <a:ext uri="{FF2B5EF4-FFF2-40B4-BE49-F238E27FC236}">
-                <a16:creationId xmlns:a16="http://schemas.microsoft.com/office/drawing/2014/main" id="{18AD1510-EF5B-4248-B561-A34A8D57249D}"/>
+                <a16:creationId xmlns:a16="http://schemas.microsoft.com/office/drawing/2014/main" id="{56DB5CB0-E68A-4AA1-B2BF-D6430C303489}"/>
               </a:ext>
             </a:extLst>
           </p:cNvPr>
@@ -3350,7 +3350,7 @@
           <p:cNvPr id="11" name="box-34">
             <a:extLst xmlns:a="http://schemas.openxmlformats.org/drawingml/2006/main">
               <a:ext uri="{FF2B5EF4-FFF2-40B4-BE49-F238E27FC236}">
-                <a16:creationId xmlns:a16="http://schemas.microsoft.com/office/drawing/2014/main" id="{869F3B1B-6B84-4A71-938C-547B5B365D26}"/>
+                <a16:creationId xmlns:a16="http://schemas.microsoft.com/office/drawing/2014/main" id="{975AABAC-176A-4C8A-B012-5768692C523A}"/>
               </a:ext>
             </a:extLst>
           </p:cNvPr>
@@ -3383,7 +3383,7 @@
           <p:cNvPr id="12" name="text-35">
             <a:extLst xmlns:a="http://schemas.openxmlformats.org/drawingml/2006/main">
               <a:ext uri="{FF2B5EF4-FFF2-40B4-BE49-F238E27FC236}">
-                <a16:creationId xmlns:a16="http://schemas.microsoft.com/office/drawing/2014/main" id="{BCD1F13A-BA37-4E2B-8549-383615414E30}"/>
+                <a16:creationId xmlns:a16="http://schemas.microsoft.com/office/drawing/2014/main" id="{D4CD2609-E7FC-4364-B621-E2FCF038A09D}"/>
               </a:ext>
             </a:extLst>
           </p:cNvPr>
@@ -3439,7 +3439,7 @@
           <p:cNvPr id="13" name="text-36">
             <a:extLst xmlns:a="http://schemas.openxmlformats.org/drawingml/2006/main">
               <a:ext uri="{FF2B5EF4-FFF2-40B4-BE49-F238E27FC236}">
-                <a16:creationId xmlns:a16="http://schemas.microsoft.com/office/drawing/2014/main" id="{DE09831D-6F19-4048-96BF-0EA3D445F070}"/>
+                <a16:creationId xmlns:a16="http://schemas.microsoft.com/office/drawing/2014/main" id="{7E775B3E-6795-4995-9D1E-868F919E7371}"/>
               </a:ext>
             </a:extLst>
           </p:cNvPr>
@@ -3485,7 +3485,7 @@
                 <a:ea typeface="Arial"/>
                 <a:cs typeface="Arial"/>
               </a:rPr>
-              <a:t>160 A1 entries, strict spelling, exams, favorites and mistakes share one SQLite record.</a:t>
+              <a:t>160 A1 entries, a 1,260-entry DE-EN dictionary, strict spelling, exams, favorites and mistakes share one SQLite record.</a:t>
             </a:r>
           </a:p>
         </p:txBody>
@@ -3495,7 +3495,7 @@
           <p:cNvPr id="14" name="text-37">
             <a:extLst xmlns:a="http://schemas.openxmlformats.org/drawingml/2006/main">
               <a:ext uri="{FF2B5EF4-FFF2-40B4-BE49-F238E27FC236}">
-                <a16:creationId xmlns:a16="http://schemas.microsoft.com/office/drawing/2014/main" id="{58518209-6109-4951-82D6-E69CA41B8243}"/>
+                <a16:creationId xmlns:a16="http://schemas.microsoft.com/office/drawing/2014/main" id="{2206685E-001E-4D2B-9A10-2C2BCFB15CEE}"/>
               </a:ext>
             </a:extLst>
           </p:cNvPr>
@@ -3551,7 +3551,7 @@
           <p:cNvPr id="15" name="box-38">
             <a:extLst xmlns:a="http://schemas.openxmlformats.org/drawingml/2006/main">
               <a:ext uri="{FF2B5EF4-FFF2-40B4-BE49-F238E27FC236}">
-                <a16:creationId xmlns:a16="http://schemas.microsoft.com/office/drawing/2014/main" id="{0DE4E7F9-6407-4AC8-AC6C-85CEC5FB865F}"/>
+                <a16:creationId xmlns:a16="http://schemas.microsoft.com/office/drawing/2014/main" id="{BA97ECE1-9815-4389-8BAE-623E2904208B}"/>
               </a:ext>
             </a:extLst>
           </p:cNvPr>
@@ -3584,7 +3584,7 @@
           <p:cNvPr id="16" name="text-39">
             <a:extLst xmlns:a="http://schemas.openxmlformats.org/drawingml/2006/main">
               <a:ext uri="{FF2B5EF4-FFF2-40B4-BE49-F238E27FC236}">
-                <a16:creationId xmlns:a16="http://schemas.microsoft.com/office/drawing/2014/main" id="{94346061-2019-44CA-88E3-8D60A0266F29}"/>
+                <a16:creationId xmlns:a16="http://schemas.microsoft.com/office/drawing/2014/main" id="{B9C9039C-5D48-49E2-9366-E7A57552DD0B}"/>
               </a:ext>
             </a:extLst>
           </p:cNvPr>
@@ -3640,7 +3640,7 @@
           <p:cNvPr id="17" name="text-40">
             <a:extLst xmlns:a="http://schemas.openxmlformats.org/drawingml/2006/main">
               <a:ext uri="{FF2B5EF4-FFF2-40B4-BE49-F238E27FC236}">
-                <a16:creationId xmlns:a16="http://schemas.microsoft.com/office/drawing/2014/main" id="{BD7A2075-A05F-478E-A810-0356E7C78E10}"/>
+                <a16:creationId xmlns:a16="http://schemas.microsoft.com/office/drawing/2014/main" id="{DE079705-456B-4EFD-A68E-F6871E46C95A}"/>
               </a:ext>
             </a:extLst>
           </p:cNvPr>
@@ -3696,7 +3696,7 @@
           <p:cNvPr id="18" name="text-41">
             <a:extLst xmlns:a="http://schemas.openxmlformats.org/drawingml/2006/main">
               <a:ext uri="{FF2B5EF4-FFF2-40B4-BE49-F238E27FC236}">
-                <a16:creationId xmlns:a16="http://schemas.microsoft.com/office/drawing/2014/main" id="{2E32DF77-2D8F-45EB-B24F-BD78DEED0678}"/>
+                <a16:creationId xmlns:a16="http://schemas.microsoft.com/office/drawing/2014/main" id="{6F2FE22C-5D60-4635-BAAE-B1C378AED884}"/>
               </a:ext>
             </a:extLst>
           </p:cNvPr>
@@ -3750,7 +3750,7 @@
     </p:spTree>
     <p:extLst>
       <p:ext uri="{BB962C8B-B14F-4D97-AF65-F5344CB8AC3E}">
-        <p14:creationId xmlns:p14="http://schemas.microsoft.com/office/powerpoint/2010/main" val="1134542902"/>
+        <p14:creationId xmlns:p14="http://schemas.microsoft.com/office/powerpoint/2010/main" val="1436768494"/>
       </p:ext>
     </p:extLst>
   </p:cSld>
@@ -3781,7 +3781,7 @@
           <p:cNvPr id="18" name="box-42">
             <a:extLst xmlns:a="http://schemas.openxmlformats.org/drawingml/2006/main">
               <a:ext uri="{FF2B5EF4-FFF2-40B4-BE49-F238E27FC236}">
-                <a16:creationId xmlns:a16="http://schemas.microsoft.com/office/drawing/2014/main" id="{67F0E3EF-91C9-476C-B381-3137217139E1}"/>
+                <a16:creationId xmlns:a16="http://schemas.microsoft.com/office/drawing/2014/main" id="{9A49CECE-053E-413F-BE68-EB98269DC560}"/>
               </a:ext>
             </a:extLst>
           </p:cNvPr>
@@ -3814,7 +3814,7 @@
           <p:cNvPr id="2" name="text-43">
             <a:extLst xmlns:a="http://schemas.openxmlformats.org/drawingml/2006/main">
               <a:ext uri="{FF2B5EF4-FFF2-40B4-BE49-F238E27FC236}">
-                <a16:creationId xmlns:a16="http://schemas.microsoft.com/office/drawing/2014/main" id="{6FB4FDCF-2193-4093-BDD3-756379C376BC}"/>
+                <a16:creationId xmlns:a16="http://schemas.microsoft.com/office/drawing/2014/main" id="{F01ECE95-D0FC-4043-B0A2-8100311E9321}"/>
               </a:ext>
             </a:extLst>
           </p:cNvPr>
@@ -3870,7 +3870,7 @@
           <p:cNvPr id="3" name="text-44">
             <a:extLst xmlns:a="http://schemas.openxmlformats.org/drawingml/2006/main">
               <a:ext uri="{FF2B5EF4-FFF2-40B4-BE49-F238E27FC236}">
-                <a16:creationId xmlns:a16="http://schemas.microsoft.com/office/drawing/2014/main" id="{368E7495-94F6-49FD-96E3-427E82810D89}"/>
+                <a16:creationId xmlns:a16="http://schemas.microsoft.com/office/drawing/2014/main" id="{36890FB4-048D-46EE-9EB7-1A2F60D044F4}"/>
               </a:ext>
             </a:extLst>
           </p:cNvPr>
@@ -3926,7 +3926,7 @@
           <p:cNvPr id="4" name="text-45">
             <a:extLst xmlns:a="http://schemas.openxmlformats.org/drawingml/2006/main">
               <a:ext uri="{FF2B5EF4-FFF2-40B4-BE49-F238E27FC236}">
-                <a16:creationId xmlns:a16="http://schemas.microsoft.com/office/drawing/2014/main" id="{8BF8A537-760A-438F-8121-04C216AB84CB}"/>
+                <a16:creationId xmlns:a16="http://schemas.microsoft.com/office/drawing/2014/main" id="{9250F9EF-5094-4C4D-8BA8-1FB5A03D3C99}"/>
               </a:ext>
             </a:extLst>
           </p:cNvPr>
@@ -3982,7 +3982,7 @@
           <p:cNvPr id="5" name="text-46">
             <a:extLst xmlns:a="http://schemas.openxmlformats.org/drawingml/2006/main">
               <a:ext uri="{FF2B5EF4-FFF2-40B4-BE49-F238E27FC236}">
-                <a16:creationId xmlns:a16="http://schemas.microsoft.com/office/drawing/2014/main" id="{7AFDD9D2-C5B1-457C-86DE-2DCDF5587F61}"/>
+                <a16:creationId xmlns:a16="http://schemas.microsoft.com/office/drawing/2014/main" id="{F094DCFC-6B32-4FED-86F9-F40C8B5C5873}"/>
               </a:ext>
             </a:extLst>
           </p:cNvPr>
@@ -4038,7 +4038,7 @@
           <p:cNvPr id="6" name="box-47">
             <a:extLst xmlns:a="http://schemas.openxmlformats.org/drawingml/2006/main">
               <a:ext uri="{FF2B5EF4-FFF2-40B4-BE49-F238E27FC236}">
-                <a16:creationId xmlns:a16="http://schemas.microsoft.com/office/drawing/2014/main" id="{DA4ACD0C-DF6C-44F1-976C-C9BB2CE4339A}"/>
+                <a16:creationId xmlns:a16="http://schemas.microsoft.com/office/drawing/2014/main" id="{990C520E-607D-4773-A1CC-469184FF66BE}"/>
               </a:ext>
             </a:extLst>
           </p:cNvPr>
@@ -4071,7 +4071,7 @@
           <p:cNvPr id="7" name="text-48">
             <a:extLst xmlns:a="http://schemas.openxmlformats.org/drawingml/2006/main">
               <a:ext uri="{FF2B5EF4-FFF2-40B4-BE49-F238E27FC236}">
-                <a16:creationId xmlns:a16="http://schemas.microsoft.com/office/drawing/2014/main" id="{1139617D-2B9B-4015-B912-DB6C8E880E9F}"/>
+                <a16:creationId xmlns:a16="http://schemas.microsoft.com/office/drawing/2014/main" id="{B4D9FC9E-4437-4BB5-B530-0CE4E1F82D51}"/>
               </a:ext>
             </a:extLst>
           </p:cNvPr>
@@ -4127,7 +4127,7 @@
           <p:cNvPr id="8" name="text-49">
             <a:extLst xmlns:a="http://schemas.openxmlformats.org/drawingml/2006/main">
               <a:ext uri="{FF2B5EF4-FFF2-40B4-BE49-F238E27FC236}">
-                <a16:creationId xmlns:a16="http://schemas.microsoft.com/office/drawing/2014/main" id="{B792D042-789E-48F8-A6F9-C394C3C41D06}"/>
+                <a16:creationId xmlns:a16="http://schemas.microsoft.com/office/drawing/2014/main" id="{E0EC76BB-899B-401A-97A3-B8E149D343B3}"/>
               </a:ext>
             </a:extLst>
           </p:cNvPr>
@@ -4183,7 +4183,7 @@
           <p:cNvPr id="9" name="box-50">
             <a:extLst xmlns:a="http://schemas.openxmlformats.org/drawingml/2006/main">
               <a:ext uri="{FF2B5EF4-FFF2-40B4-BE49-F238E27FC236}">
-                <a16:creationId xmlns:a16="http://schemas.microsoft.com/office/drawing/2014/main" id="{27B1A7F3-AE4B-4B1B-A203-0FC4D146ABFE}"/>
+                <a16:creationId xmlns:a16="http://schemas.microsoft.com/office/drawing/2014/main" id="{8839ADEE-2B21-491E-8619-5BF633260228}"/>
               </a:ext>
             </a:extLst>
           </p:cNvPr>
@@ -4216,7 +4216,7 @@
           <p:cNvPr id="10" name="text-51">
             <a:extLst xmlns:a="http://schemas.openxmlformats.org/drawingml/2006/main">
               <a:ext uri="{FF2B5EF4-FFF2-40B4-BE49-F238E27FC236}">
-                <a16:creationId xmlns:a16="http://schemas.microsoft.com/office/drawing/2014/main" id="{2926012E-BE38-4530-A396-2F5D2A42B3EB}"/>
+                <a16:creationId xmlns:a16="http://schemas.microsoft.com/office/drawing/2014/main" id="{0A86C5E1-60B3-428C-8D03-31F298A28FAC}"/>
               </a:ext>
             </a:extLst>
           </p:cNvPr>
@@ -4272,7 +4272,7 @@
           <p:cNvPr id="11" name="text-52">
             <a:extLst xmlns:a="http://schemas.openxmlformats.org/drawingml/2006/main">
               <a:ext uri="{FF2B5EF4-FFF2-40B4-BE49-F238E27FC236}">
-                <a16:creationId xmlns:a16="http://schemas.microsoft.com/office/drawing/2014/main" id="{A74348C3-3CC1-4910-8789-5A8DC359E6D6}"/>
+                <a16:creationId xmlns:a16="http://schemas.microsoft.com/office/drawing/2014/main" id="{2317AE37-C2FE-45C1-93B0-58D662D94F72}"/>
               </a:ext>
             </a:extLst>
           </p:cNvPr>
@@ -4328,7 +4328,7 @@
           <p:cNvPr id="12" name="box-53">
             <a:extLst xmlns:a="http://schemas.openxmlformats.org/drawingml/2006/main">
               <a:ext uri="{FF2B5EF4-FFF2-40B4-BE49-F238E27FC236}">
-                <a16:creationId xmlns:a16="http://schemas.microsoft.com/office/drawing/2014/main" id="{EF42DFD7-6833-4A54-A9D4-AD081BC9FCFD}"/>
+                <a16:creationId xmlns:a16="http://schemas.microsoft.com/office/drawing/2014/main" id="{E27B6F67-FF6C-4135-A2C9-19A2E98A07D3}"/>
               </a:ext>
             </a:extLst>
           </p:cNvPr>
@@ -4361,7 +4361,7 @@
           <p:cNvPr id="13" name="text-54">
             <a:extLst xmlns:a="http://schemas.openxmlformats.org/drawingml/2006/main">
               <a:ext uri="{FF2B5EF4-FFF2-40B4-BE49-F238E27FC236}">
-                <a16:creationId xmlns:a16="http://schemas.microsoft.com/office/drawing/2014/main" id="{8525FDE6-EB1D-453D-9896-CA66C88604A1}"/>
+                <a16:creationId xmlns:a16="http://schemas.microsoft.com/office/drawing/2014/main" id="{4433BAE4-6AAC-4398-B4A8-2EC983A585CA}"/>
               </a:ext>
             </a:extLst>
           </p:cNvPr>
@@ -4417,7 +4417,7 @@
           <p:cNvPr id="14" name="text-55">
             <a:extLst xmlns:a="http://schemas.openxmlformats.org/drawingml/2006/main">
               <a:ext uri="{FF2B5EF4-FFF2-40B4-BE49-F238E27FC236}">
-                <a16:creationId xmlns:a16="http://schemas.microsoft.com/office/drawing/2014/main" id="{75802C17-A084-4E44-B950-88D0732340D6}"/>
+                <a16:creationId xmlns:a16="http://schemas.microsoft.com/office/drawing/2014/main" id="{B2EA36EB-7FC3-4824-84AC-D319FFC41AF6}"/>
               </a:ext>
             </a:extLst>
           </p:cNvPr>
@@ -4473,7 +4473,7 @@
           <p:cNvPr id="15" name="box-56">
             <a:extLst xmlns:a="http://schemas.openxmlformats.org/drawingml/2006/main">
               <a:ext uri="{FF2B5EF4-FFF2-40B4-BE49-F238E27FC236}">
-                <a16:creationId xmlns:a16="http://schemas.microsoft.com/office/drawing/2014/main" id="{A4999BE6-9176-4A24-81D7-ECA4E970ECD8}"/>
+                <a16:creationId xmlns:a16="http://schemas.microsoft.com/office/drawing/2014/main" id="{11207B2D-848D-4A11-80AC-1EBE7A537478}"/>
               </a:ext>
             </a:extLst>
           </p:cNvPr>
@@ -4506,7 +4506,7 @@
           <p:cNvPr id="16" name="text-57">
             <a:extLst xmlns:a="http://schemas.openxmlformats.org/drawingml/2006/main">
               <a:ext uri="{FF2B5EF4-FFF2-40B4-BE49-F238E27FC236}">
-                <a16:creationId xmlns:a16="http://schemas.microsoft.com/office/drawing/2014/main" id="{52A3737A-1EA2-46A1-969A-702905503905}"/>
+                <a16:creationId xmlns:a16="http://schemas.microsoft.com/office/drawing/2014/main" id="{BC366D09-5D23-4DBC-8ACD-F8C05C308303}"/>
               </a:ext>
             </a:extLst>
           </p:cNvPr>
@@ -4552,7 +4552,7 @@
                 <a:ea typeface="Arial"/>
                 <a:cs typeface="Arial"/>
               </a:rPr>
-              <a:t>Ich heiße Alex.</a:t>
+              <a:t>Häuser → das Haus</a:t>
             </a:r>
           </a:p>
         </p:txBody>
@@ -4562,7 +4562,7 @@
           <p:cNvPr id="17" name="text-58">
             <a:extLst xmlns:a="http://schemas.openxmlformats.org/drawingml/2006/main">
               <a:ext uri="{FF2B5EF4-FFF2-40B4-BE49-F238E27FC236}">
-                <a16:creationId xmlns:a16="http://schemas.microsoft.com/office/drawing/2014/main" id="{604865D1-C0D9-41B4-A656-487064A1035A}"/>
+                <a16:creationId xmlns:a16="http://schemas.microsoft.com/office/drawing/2014/main" id="{42F29645-C2BE-4BD4-867C-69F7ABC6888B}"/>
               </a:ext>
             </a:extLst>
           </p:cNvPr>
@@ -4608,7 +4608,7 @@
                 <a:ea typeface="Arial"/>
                 <a:cs typeface="Arial"/>
               </a:rPr>
-              <a:t>Yazım ve ses eşleşir · spelling meets sound · Schrift trifft Laut</a:t>
+              <a:t>Sözlük çoğuldan tekili bulur · dictionary resolves plurals · Wörterbuch findet den Singular</a:t>
             </a:r>
           </a:p>
         </p:txBody>
@@ -4616,7 +4616,7 @@
     </p:spTree>
     <p:extLst>
       <p:ext uri="{BB962C8B-B14F-4D97-AF65-F5344CB8AC3E}">
-        <p14:creationId xmlns:p14="http://schemas.microsoft.com/office/powerpoint/2010/main" val="876660766"/>
+        <p14:creationId xmlns:p14="http://schemas.microsoft.com/office/powerpoint/2010/main" val="1753609021"/>
       </p:ext>
     </p:extLst>
   </p:cSld>
@@ -4647,7 +4647,7 @@
           <p:cNvPr id="21" name="box-59">
             <a:extLst xmlns:a="http://schemas.openxmlformats.org/drawingml/2006/main">
               <a:ext uri="{FF2B5EF4-FFF2-40B4-BE49-F238E27FC236}">
-                <a16:creationId xmlns:a16="http://schemas.microsoft.com/office/drawing/2014/main" id="{FB473E37-7B85-4869-B0AF-A8E7AD8F4AC3}"/>
+                <a16:creationId xmlns:a16="http://schemas.microsoft.com/office/drawing/2014/main" id="{711CA2BA-6826-4594-8293-E92E72FE380E}"/>
               </a:ext>
             </a:extLst>
           </p:cNvPr>
@@ -4680,7 +4680,7 @@
           <p:cNvPr id="2" name="text-60">
             <a:extLst xmlns:a="http://schemas.openxmlformats.org/drawingml/2006/main">
               <a:ext uri="{FF2B5EF4-FFF2-40B4-BE49-F238E27FC236}">
-                <a16:creationId xmlns:a16="http://schemas.microsoft.com/office/drawing/2014/main" id="{223E0C47-A24D-4117-90B9-FB0DBA8CE697}"/>
+                <a16:creationId xmlns:a16="http://schemas.microsoft.com/office/drawing/2014/main" id="{A29DC29D-33AF-4D8A-B4AC-696A2765F002}"/>
               </a:ext>
             </a:extLst>
           </p:cNvPr>
@@ -4736,7 +4736,7 @@
           <p:cNvPr id="3" name="text-61">
             <a:extLst xmlns:a="http://schemas.openxmlformats.org/drawingml/2006/main">
               <a:ext uri="{FF2B5EF4-FFF2-40B4-BE49-F238E27FC236}">
-                <a16:creationId xmlns:a16="http://schemas.microsoft.com/office/drawing/2014/main" id="{A8144FDD-C565-47CD-84A5-CC8899056F7E}"/>
+                <a16:creationId xmlns:a16="http://schemas.microsoft.com/office/drawing/2014/main" id="{A75D78A3-9D18-4CC5-8E99-25A7C77B6B0C}"/>
               </a:ext>
             </a:extLst>
           </p:cNvPr>
@@ -4792,7 +4792,7 @@
           <p:cNvPr id="4" name="text-62">
             <a:extLst xmlns:a="http://schemas.openxmlformats.org/drawingml/2006/main">
               <a:ext uri="{FF2B5EF4-FFF2-40B4-BE49-F238E27FC236}">
-                <a16:creationId xmlns:a16="http://schemas.microsoft.com/office/drawing/2014/main" id="{14AB353F-4279-4C0E-A7A1-6D26AA6B5C57}"/>
+                <a16:creationId xmlns:a16="http://schemas.microsoft.com/office/drawing/2014/main" id="{62082AC5-78A8-49C3-99BE-D91ECAABF410}"/>
               </a:ext>
             </a:extLst>
           </p:cNvPr>
@@ -4848,7 +4848,7 @@
           <p:cNvPr id="5" name="text-63">
             <a:extLst xmlns:a="http://schemas.openxmlformats.org/drawingml/2006/main">
               <a:ext uri="{FF2B5EF4-FFF2-40B4-BE49-F238E27FC236}">
-                <a16:creationId xmlns:a16="http://schemas.microsoft.com/office/drawing/2014/main" id="{D878E27B-5862-4659-A742-4917FF7E75B4}"/>
+                <a16:creationId xmlns:a16="http://schemas.microsoft.com/office/drawing/2014/main" id="{D998DB1F-68F7-460E-96D0-93B08A1CF49A}"/>
               </a:ext>
             </a:extLst>
           </p:cNvPr>
@@ -4904,7 +4904,7 @@
           <p:cNvPr id="6" name="box-64">
             <a:extLst xmlns:a="http://schemas.openxmlformats.org/drawingml/2006/main">
               <a:ext uri="{FF2B5EF4-FFF2-40B4-BE49-F238E27FC236}">
-                <a16:creationId xmlns:a16="http://schemas.microsoft.com/office/drawing/2014/main" id="{A7B7C423-B128-4B70-B1B3-3BD6B2FB60F9}"/>
+                <a16:creationId xmlns:a16="http://schemas.microsoft.com/office/drawing/2014/main" id="{E79DB1BB-8361-44F5-827F-43E67A2E292F}"/>
               </a:ext>
             </a:extLst>
           </p:cNvPr>
@@ -4937,7 +4937,7 @@
           <p:cNvPr id="7" name="dot-65">
             <a:extLst xmlns:a="http://schemas.openxmlformats.org/drawingml/2006/main">
               <a:ext uri="{FF2B5EF4-FFF2-40B4-BE49-F238E27FC236}">
-                <a16:creationId xmlns:a16="http://schemas.microsoft.com/office/drawing/2014/main" id="{F517A83B-C1E7-4668-8199-B82C431AF16E}"/>
+                <a16:creationId xmlns:a16="http://schemas.microsoft.com/office/drawing/2014/main" id="{4473D131-EE77-48ED-8C2F-A1B139BDB775}"/>
               </a:ext>
             </a:extLst>
           </p:cNvPr>
@@ -4968,7 +4968,7 @@
           <p:cNvPr id="8" name="text-66">
             <a:extLst xmlns:a="http://schemas.openxmlformats.org/drawingml/2006/main">
               <a:ext uri="{FF2B5EF4-FFF2-40B4-BE49-F238E27FC236}">
-                <a16:creationId xmlns:a16="http://schemas.microsoft.com/office/drawing/2014/main" id="{46E7FC02-7F62-4A18-AD02-07B874F84597}"/>
+                <a16:creationId xmlns:a16="http://schemas.microsoft.com/office/drawing/2014/main" id="{EC02141A-05E4-46DF-9C19-DD47195D3F8B}"/>
               </a:ext>
             </a:extLst>
           </p:cNvPr>
@@ -5024,7 +5024,7 @@
           <p:cNvPr id="9" name="text-67">
             <a:extLst xmlns:a="http://schemas.openxmlformats.org/drawingml/2006/main">
               <a:ext uri="{FF2B5EF4-FFF2-40B4-BE49-F238E27FC236}">
-                <a16:creationId xmlns:a16="http://schemas.microsoft.com/office/drawing/2014/main" id="{DE3B1ED9-BB49-474A-8C6A-DBCFFF19D0F0}"/>
+                <a16:creationId xmlns:a16="http://schemas.microsoft.com/office/drawing/2014/main" id="{D771F8D1-2DAE-49C3-AFAB-0F1755EAAA5B}"/>
               </a:ext>
             </a:extLst>
           </p:cNvPr>
@@ -5080,7 +5080,7 @@
           <p:cNvPr id="10" name="text-68">
             <a:extLst xmlns:a="http://schemas.openxmlformats.org/drawingml/2006/main">
               <a:ext uri="{FF2B5EF4-FFF2-40B4-BE49-F238E27FC236}">
-                <a16:creationId xmlns:a16="http://schemas.microsoft.com/office/drawing/2014/main" id="{F00CC188-D5AC-4DEC-A471-54A91E82C336}"/>
+                <a16:creationId xmlns:a16="http://schemas.microsoft.com/office/drawing/2014/main" id="{265CEFF7-5241-4732-BE56-6DD2BA590B02}"/>
               </a:ext>
             </a:extLst>
           </p:cNvPr>
@@ -5136,7 +5136,7 @@
           <p:cNvPr id="11" name="dot-69">
             <a:extLst xmlns:a="http://schemas.openxmlformats.org/drawingml/2006/main">
               <a:ext uri="{FF2B5EF4-FFF2-40B4-BE49-F238E27FC236}">
-                <a16:creationId xmlns:a16="http://schemas.microsoft.com/office/drawing/2014/main" id="{9E1C1005-C29B-481C-A93B-2EF692AA2CE4}"/>
+                <a16:creationId xmlns:a16="http://schemas.microsoft.com/office/drawing/2014/main" id="{7475A7BF-4FEE-48CF-9464-5DD610514D9C}"/>
               </a:ext>
             </a:extLst>
           </p:cNvPr>
@@ -5167,7 +5167,7 @@
           <p:cNvPr id="12" name="text-70">
             <a:extLst xmlns:a="http://schemas.openxmlformats.org/drawingml/2006/main">
               <a:ext uri="{FF2B5EF4-FFF2-40B4-BE49-F238E27FC236}">
-                <a16:creationId xmlns:a16="http://schemas.microsoft.com/office/drawing/2014/main" id="{5AF22C96-9D87-4684-BB0A-875A0059229B}"/>
+                <a16:creationId xmlns:a16="http://schemas.microsoft.com/office/drawing/2014/main" id="{5530697F-73F3-419E-ABF9-7F46EE5A0160}"/>
               </a:ext>
             </a:extLst>
           </p:cNvPr>
@@ -5223,7 +5223,7 @@
           <p:cNvPr id="13" name="text-71">
             <a:extLst xmlns:a="http://schemas.openxmlformats.org/drawingml/2006/main">
               <a:ext uri="{FF2B5EF4-FFF2-40B4-BE49-F238E27FC236}">
-                <a16:creationId xmlns:a16="http://schemas.microsoft.com/office/drawing/2014/main" id="{F7D1BB8C-0D7F-489E-ACA1-957BDEB2DD2D}"/>
+                <a16:creationId xmlns:a16="http://schemas.microsoft.com/office/drawing/2014/main" id="{B8A3846B-24E5-44A6-9E55-861F8EF8FE7A}"/>
               </a:ext>
             </a:extLst>
           </p:cNvPr>
@@ -5279,7 +5279,7 @@
           <p:cNvPr id="14" name="text-72">
             <a:extLst xmlns:a="http://schemas.openxmlformats.org/drawingml/2006/main">
               <a:ext uri="{FF2B5EF4-FFF2-40B4-BE49-F238E27FC236}">
-                <a16:creationId xmlns:a16="http://schemas.microsoft.com/office/drawing/2014/main" id="{3CD65CA8-7104-4B14-BAE4-78B910D85FAC}"/>
+                <a16:creationId xmlns:a16="http://schemas.microsoft.com/office/drawing/2014/main" id="{5B8748CB-BBFF-4B6B-8FDE-E2A69B33E304}"/>
               </a:ext>
             </a:extLst>
           </p:cNvPr>
@@ -5335,7 +5335,7 @@
           <p:cNvPr id="15" name="dot-73">
             <a:extLst xmlns:a="http://schemas.openxmlformats.org/drawingml/2006/main">
               <a:ext uri="{FF2B5EF4-FFF2-40B4-BE49-F238E27FC236}">
-                <a16:creationId xmlns:a16="http://schemas.microsoft.com/office/drawing/2014/main" id="{4CEA908C-C365-441C-BC65-D8FEB3997ED3}"/>
+                <a16:creationId xmlns:a16="http://schemas.microsoft.com/office/drawing/2014/main" id="{02DBDE38-F6F4-4C55-92F7-8EB4590168DA}"/>
               </a:ext>
             </a:extLst>
           </p:cNvPr>
@@ -5366,7 +5366,7 @@
           <p:cNvPr id="16" name="text-74">
             <a:extLst xmlns:a="http://schemas.openxmlformats.org/drawingml/2006/main">
               <a:ext uri="{FF2B5EF4-FFF2-40B4-BE49-F238E27FC236}">
-                <a16:creationId xmlns:a16="http://schemas.microsoft.com/office/drawing/2014/main" id="{76173E55-15FD-4468-9B12-E131A3A4FCC5}"/>
+                <a16:creationId xmlns:a16="http://schemas.microsoft.com/office/drawing/2014/main" id="{4EAC44E4-47B2-4530-A587-BC94888AA2E8}"/>
               </a:ext>
             </a:extLst>
           </p:cNvPr>
@@ -5422,7 +5422,7 @@
           <p:cNvPr id="17" name="text-75">
             <a:extLst xmlns:a="http://schemas.openxmlformats.org/drawingml/2006/main">
               <a:ext uri="{FF2B5EF4-FFF2-40B4-BE49-F238E27FC236}">
-                <a16:creationId xmlns:a16="http://schemas.microsoft.com/office/drawing/2014/main" id="{9B8C1274-37A2-4AA0-80CA-7D87EF825D71}"/>
+                <a16:creationId xmlns:a16="http://schemas.microsoft.com/office/drawing/2014/main" id="{DE5B697C-942B-4A8A-B12B-B767E6541043}"/>
               </a:ext>
             </a:extLst>
           </p:cNvPr>
@@ -5478,7 +5478,7 @@
           <p:cNvPr id="18" name="text-76">
             <a:extLst xmlns:a="http://schemas.openxmlformats.org/drawingml/2006/main">
               <a:ext uri="{FF2B5EF4-FFF2-40B4-BE49-F238E27FC236}">
-                <a16:creationId xmlns:a16="http://schemas.microsoft.com/office/drawing/2014/main" id="{08535279-17D2-43FC-AF99-84D77E38C720}"/>
+                <a16:creationId xmlns:a16="http://schemas.microsoft.com/office/drawing/2014/main" id="{230EAA8E-ED5B-4163-98E4-27244338A127}"/>
               </a:ext>
             </a:extLst>
           </p:cNvPr>
@@ -5534,7 +5534,7 @@
           <p:cNvPr id="19" name="box-77">
             <a:extLst xmlns:a="http://schemas.openxmlformats.org/drawingml/2006/main">
               <a:ext uri="{FF2B5EF4-FFF2-40B4-BE49-F238E27FC236}">
-                <a16:creationId xmlns:a16="http://schemas.microsoft.com/office/drawing/2014/main" id="{45051014-7F20-4542-B8BD-1F642F59DD7C}"/>
+                <a16:creationId xmlns:a16="http://schemas.microsoft.com/office/drawing/2014/main" id="{475294D5-DAF7-4510-B28D-C2E688217CA9}"/>
               </a:ext>
             </a:extLst>
           </p:cNvPr>
@@ -5567,7 +5567,7 @@
           <p:cNvPr id="20" name="text-78">
             <a:extLst xmlns:a="http://schemas.openxmlformats.org/drawingml/2006/main">
               <a:ext uri="{FF2B5EF4-FFF2-40B4-BE49-F238E27FC236}">
-                <a16:creationId xmlns:a16="http://schemas.microsoft.com/office/drawing/2014/main" id="{225F76A9-BA29-453D-8954-CBDCD6629610}"/>
+                <a16:creationId xmlns:a16="http://schemas.microsoft.com/office/drawing/2014/main" id="{E7E13599-4CD1-46A2-8CD3-3275896FF247}"/>
               </a:ext>
             </a:extLst>
           </p:cNvPr>
@@ -5621,7 +5621,7 @@
     </p:spTree>
     <p:extLst>
       <p:ext uri="{BB962C8B-B14F-4D97-AF65-F5344CB8AC3E}">
-        <p14:creationId xmlns:p14="http://schemas.microsoft.com/office/powerpoint/2010/main" val="1384107082"/>
+        <p14:creationId xmlns:p14="http://schemas.microsoft.com/office/powerpoint/2010/main" val="394195540"/>
       </p:ext>
     </p:extLst>
   </p:cSld>
@@ -5652,7 +5652,7 @@
           <p:cNvPr id="18" name="box-79">
             <a:extLst xmlns:a="http://schemas.openxmlformats.org/drawingml/2006/main">
               <a:ext uri="{FF2B5EF4-FFF2-40B4-BE49-F238E27FC236}">
-                <a16:creationId xmlns:a16="http://schemas.microsoft.com/office/drawing/2014/main" id="{ED610AAA-7DEF-4AB3-9F83-5E66D11239E1}"/>
+                <a16:creationId xmlns:a16="http://schemas.microsoft.com/office/drawing/2014/main" id="{455A9B25-E43B-41DA-8A53-98CFA3C491A7}"/>
               </a:ext>
             </a:extLst>
           </p:cNvPr>
@@ -5685,7 +5685,7 @@
           <p:cNvPr id="2" name="text-80">
             <a:extLst xmlns:a="http://schemas.openxmlformats.org/drawingml/2006/main">
               <a:ext uri="{FF2B5EF4-FFF2-40B4-BE49-F238E27FC236}">
-                <a16:creationId xmlns:a16="http://schemas.microsoft.com/office/drawing/2014/main" id="{655FFB04-5677-4211-B205-184E7D4C1C95}"/>
+                <a16:creationId xmlns:a16="http://schemas.microsoft.com/office/drawing/2014/main" id="{A99BF37C-D547-41FD-88F4-7F425D5D9613}"/>
               </a:ext>
             </a:extLst>
           </p:cNvPr>
@@ -5741,7 +5741,7 @@
           <p:cNvPr id="3" name="text-81">
             <a:extLst xmlns:a="http://schemas.openxmlformats.org/drawingml/2006/main">
               <a:ext uri="{FF2B5EF4-FFF2-40B4-BE49-F238E27FC236}">
-                <a16:creationId xmlns:a16="http://schemas.microsoft.com/office/drawing/2014/main" id="{856CFA1C-567D-4035-96C5-5CD47C3FDE31}"/>
+                <a16:creationId xmlns:a16="http://schemas.microsoft.com/office/drawing/2014/main" id="{756ECBBD-B037-45E3-91E6-2290849923C9}"/>
               </a:ext>
             </a:extLst>
           </p:cNvPr>
@@ -5797,7 +5797,7 @@
           <p:cNvPr id="4" name="text-82">
             <a:extLst xmlns:a="http://schemas.openxmlformats.org/drawingml/2006/main">
               <a:ext uri="{FF2B5EF4-FFF2-40B4-BE49-F238E27FC236}">
-                <a16:creationId xmlns:a16="http://schemas.microsoft.com/office/drawing/2014/main" id="{D31A45CD-77EB-428A-A2D3-1A0860BC8CC5}"/>
+                <a16:creationId xmlns:a16="http://schemas.microsoft.com/office/drawing/2014/main" id="{0212001F-FEE5-429B-987D-9F1FE28DF7F7}"/>
               </a:ext>
             </a:extLst>
           </p:cNvPr>
@@ -5853,7 +5853,7 @@
           <p:cNvPr id="5" name="text-83">
             <a:extLst xmlns:a="http://schemas.openxmlformats.org/drawingml/2006/main">
               <a:ext uri="{FF2B5EF4-FFF2-40B4-BE49-F238E27FC236}">
-                <a16:creationId xmlns:a16="http://schemas.microsoft.com/office/drawing/2014/main" id="{D2565E15-6485-4EE3-ADE9-5D9D78EF59E6}"/>
+                <a16:creationId xmlns:a16="http://schemas.microsoft.com/office/drawing/2014/main" id="{9AECB58E-53C3-424C-ADD2-88FD1B464136}"/>
               </a:ext>
             </a:extLst>
           </p:cNvPr>
@@ -5909,7 +5909,7 @@
           <p:cNvPr id="6" name="text-84">
             <a:extLst xmlns:a="http://schemas.openxmlformats.org/drawingml/2006/main">
               <a:ext uri="{FF2B5EF4-FFF2-40B4-BE49-F238E27FC236}">
-                <a16:creationId xmlns:a16="http://schemas.microsoft.com/office/drawing/2014/main" id="{AB1F2B34-7745-4BB7-B399-715B1C9D2FD1}"/>
+                <a16:creationId xmlns:a16="http://schemas.microsoft.com/office/drawing/2014/main" id="{D1D4913D-8319-4B93-9EFA-ABFAAE10A3FA}"/>
               </a:ext>
             </a:extLst>
           </p:cNvPr>
@@ -5965,7 +5965,7 @@
           <p:cNvPr id="7" name="text-85">
             <a:extLst xmlns:a="http://schemas.openxmlformats.org/drawingml/2006/main">
               <a:ext uri="{FF2B5EF4-FFF2-40B4-BE49-F238E27FC236}">
-                <a16:creationId xmlns:a16="http://schemas.microsoft.com/office/drawing/2014/main" id="{7C6852D6-BE50-4CCA-9307-771B952D9869}"/>
+                <a16:creationId xmlns:a16="http://schemas.microsoft.com/office/drawing/2014/main" id="{3BCF9A6E-EEA4-4B48-A4B3-925BD1CDB2AC}"/>
               </a:ext>
             </a:extLst>
           </p:cNvPr>
@@ -6021,7 +6021,7 @@
           <p:cNvPr id="8" name="text-86">
             <a:extLst xmlns:a="http://schemas.openxmlformats.org/drawingml/2006/main">
               <a:ext uri="{FF2B5EF4-FFF2-40B4-BE49-F238E27FC236}">
-                <a16:creationId xmlns:a16="http://schemas.microsoft.com/office/drawing/2014/main" id="{23686F73-6D27-4AE3-8D7A-D99FF3B6AD65}"/>
+                <a16:creationId xmlns:a16="http://schemas.microsoft.com/office/drawing/2014/main" id="{F1389FF6-726D-4F04-A211-575F59EDA0DD}"/>
               </a:ext>
             </a:extLst>
           </p:cNvPr>
@@ -6067,7 +6067,7 @@
                 <a:ea typeface="Arial"/>
                 <a:cs typeface="Arial"/>
               </a:rPr>
-              <a:t>29 / 29</a:t>
+              <a:t>37 / 37</a:t>
             </a:r>
           </a:p>
         </p:txBody>
@@ -6077,7 +6077,7 @@
           <p:cNvPr id="9" name="text-87">
             <a:extLst xmlns:a="http://schemas.openxmlformats.org/drawingml/2006/main">
               <a:ext uri="{FF2B5EF4-FFF2-40B4-BE49-F238E27FC236}">
-                <a16:creationId xmlns:a16="http://schemas.microsoft.com/office/drawing/2014/main" id="{F1D98C32-1C27-429A-AD0D-6DEF8ECA28B4}"/>
+                <a16:creationId xmlns:a16="http://schemas.microsoft.com/office/drawing/2014/main" id="{BDCAA7ED-C32E-4808-BE15-1ED317B8E66F}"/>
               </a:ext>
             </a:extLst>
           </p:cNvPr>
@@ -6123,7 +6123,7 @@
                 <a:ea typeface="Arial"/>
                 <a:cs typeface="Arial"/>
               </a:rPr>
-              <a:t>17</a:t>
+              <a:t>18</a:t>
             </a:r>
           </a:p>
         </p:txBody>
@@ -6133,7 +6133,7 @@
           <p:cNvPr id="10" name="text-88">
             <a:extLst xmlns:a="http://schemas.openxmlformats.org/drawingml/2006/main">
               <a:ext uri="{FF2B5EF4-FFF2-40B4-BE49-F238E27FC236}">
-                <a16:creationId xmlns:a16="http://schemas.microsoft.com/office/drawing/2014/main" id="{9B19AF61-CE77-49EC-B95E-13B345066EF3}"/>
+                <a16:creationId xmlns:a16="http://schemas.microsoft.com/office/drawing/2014/main" id="{4CC679DE-917F-4448-8EB3-B978D4C1CD3C}"/>
               </a:ext>
             </a:extLst>
           </p:cNvPr>
@@ -6235,7 +6235,7 @@
           <p:cNvPr id="11" name="text-89">
             <a:extLst xmlns:a="http://schemas.openxmlformats.org/drawingml/2006/main">
               <a:ext uri="{FF2B5EF4-FFF2-40B4-BE49-F238E27FC236}">
-                <a16:creationId xmlns:a16="http://schemas.microsoft.com/office/drawing/2014/main" id="{9ED7C3EF-D217-48AB-9080-976A3EB0054B}"/>
+                <a16:creationId xmlns:a16="http://schemas.microsoft.com/office/drawing/2014/main" id="{6EFAD34B-1CF6-4255-989C-1F284B0C8282}"/>
               </a:ext>
             </a:extLst>
           </p:cNvPr>
@@ -6337,7 +6337,7 @@
           <p:cNvPr id="12" name="text-90">
             <a:extLst xmlns:a="http://schemas.openxmlformats.org/drawingml/2006/main">
               <a:ext uri="{FF2B5EF4-FFF2-40B4-BE49-F238E27FC236}">
-                <a16:creationId xmlns:a16="http://schemas.microsoft.com/office/drawing/2014/main" id="{F879CB93-B650-4AF6-B75B-EA13866CC955}"/>
+                <a16:creationId xmlns:a16="http://schemas.microsoft.com/office/drawing/2014/main" id="{FA52ABFD-2DF6-4114-8BA3-0FD7BBB22E4B}"/>
               </a:ext>
             </a:extLst>
           </p:cNvPr>
@@ -6439,7 +6439,7 @@
           <p:cNvPr id="13" name="box-91">
             <a:extLst xmlns:a="http://schemas.openxmlformats.org/drawingml/2006/main">
               <a:ext uri="{FF2B5EF4-FFF2-40B4-BE49-F238E27FC236}">
-                <a16:creationId xmlns:a16="http://schemas.microsoft.com/office/drawing/2014/main" id="{51698320-5E90-4905-B035-C349A076CE8E}"/>
+                <a16:creationId xmlns:a16="http://schemas.microsoft.com/office/drawing/2014/main" id="{6ED0AE9B-C67E-4861-B2CD-00462E7D68BF}"/>
               </a:ext>
             </a:extLst>
           </p:cNvPr>
@@ -6472,7 +6472,7 @@
           <p:cNvPr id="14" name="text-92">
             <a:extLst xmlns:a="http://schemas.openxmlformats.org/drawingml/2006/main">
               <a:ext uri="{FF2B5EF4-FFF2-40B4-BE49-F238E27FC236}">
-                <a16:creationId xmlns:a16="http://schemas.microsoft.com/office/drawing/2014/main" id="{4712D08C-8188-44F1-B727-F8EE034E16EC}"/>
+                <a16:creationId xmlns:a16="http://schemas.microsoft.com/office/drawing/2014/main" id="{E8DBBFCA-717C-4DB0-B85F-D96EA825642D}"/>
               </a:ext>
             </a:extLst>
           </p:cNvPr>
@@ -6528,7 +6528,7 @@
           <p:cNvPr id="15" name="text-93">
             <a:extLst xmlns:a="http://schemas.openxmlformats.org/drawingml/2006/main">
               <a:ext uri="{FF2B5EF4-FFF2-40B4-BE49-F238E27FC236}">
-                <a16:creationId xmlns:a16="http://schemas.microsoft.com/office/drawing/2014/main" id="{1153917D-7FBF-49B2-A6C8-774A2C08CF48}"/>
+                <a16:creationId xmlns:a16="http://schemas.microsoft.com/office/drawing/2014/main" id="{B28C4DE0-4656-4860-A780-B2966A5C475B}"/>
               </a:ext>
             </a:extLst>
           </p:cNvPr>
@@ -6584,7 +6584,7 @@
           <p:cNvPr id="16" name="text-94">
             <a:extLst xmlns:a="http://schemas.openxmlformats.org/drawingml/2006/main">
               <a:ext uri="{FF2B5EF4-FFF2-40B4-BE49-F238E27FC236}">
-                <a16:creationId xmlns:a16="http://schemas.microsoft.com/office/drawing/2014/main" id="{C3B2AE6C-212B-4397-A727-EFBB23489BF7}"/>
+                <a16:creationId xmlns:a16="http://schemas.microsoft.com/office/drawing/2014/main" id="{43344592-54B1-4083-821C-8E206D6C0509}"/>
               </a:ext>
             </a:extLst>
           </p:cNvPr>
@@ -6640,7 +6640,7 @@
           <p:cNvPr id="17" name="text-95">
             <a:extLst xmlns:a="http://schemas.openxmlformats.org/drawingml/2006/main">
               <a:ext uri="{FF2B5EF4-FFF2-40B4-BE49-F238E27FC236}">
-                <a16:creationId xmlns:a16="http://schemas.microsoft.com/office/drawing/2014/main" id="{9F84A400-C90D-47D7-8BDC-72084F38780A}"/>
+                <a16:creationId xmlns:a16="http://schemas.microsoft.com/office/drawing/2014/main" id="{A90367EF-B46F-4D3A-BF7C-48E42D7E0579}"/>
               </a:ext>
             </a:extLst>
           </p:cNvPr>
@@ -6694,7 +6694,7 @@
     </p:spTree>
     <p:extLst>
       <p:ext uri="{BB962C8B-B14F-4D97-AF65-F5344CB8AC3E}">
-        <p14:creationId xmlns:p14="http://schemas.microsoft.com/office/powerpoint/2010/main" val="1056817073"/>
+        <p14:creationId xmlns:p14="http://schemas.microsoft.com/office/powerpoint/2010/main" val="1694482741"/>
       </p:ext>
     </p:extLst>
   </p:cSld>

--- a/docs/presentation/German-Course-AI-Trilingual.pptx
+++ b/docs/presentation/German-Course-AI-Trilingual.pptx
@@ -2,18 +2,18 @@
 <file path=ppt/presentation.xml><?xml version="1.0" encoding="utf-8"?>
 <p:presentation xmlns:p="http://schemas.openxmlformats.org/presentationml/2006/main">
   <p:sldMasterIdLst>
-    <p:sldMasterId xmlns:r="http://schemas.openxmlformats.org/officeDocument/2006/relationships" id="2147483648" r:id="Rbd43e295a9674cb8"/>
+    <p:sldMasterId xmlns:r="http://schemas.openxmlformats.org/officeDocument/2006/relationships" id="2147483648" r:id="Rc3df0e42064342b9"/>
   </p:sldMasterIdLst>
   <p:notesMasterIdLst>
-    <p:notesMasterId xmlns:r="http://schemas.openxmlformats.org/officeDocument/2006/relationships" r:id="Rd8bc9dd3271643e2"/>
+    <p:notesMasterId xmlns:r="http://schemas.openxmlformats.org/officeDocument/2006/relationships" r:id="R82cdf530aaf7448f"/>
   </p:notesMasterIdLst>
   <p:sldIdLst>
-    <p:sldId xmlns:r="http://schemas.openxmlformats.org/officeDocument/2006/relationships" id="256" r:id="R094b538f0e0a4cb6"/>
-    <p:sldId xmlns:r="http://schemas.openxmlformats.org/officeDocument/2006/relationships" id="257" r:id="R02f827ab557249fa"/>
-    <p:sldId xmlns:r="http://schemas.openxmlformats.org/officeDocument/2006/relationships" id="258" r:id="R91fdfa594b25460e"/>
-    <p:sldId xmlns:r="http://schemas.openxmlformats.org/officeDocument/2006/relationships" id="259" r:id="R439e9f595e1f426a"/>
-    <p:sldId xmlns:r="http://schemas.openxmlformats.org/officeDocument/2006/relationships" id="260" r:id="R23d5cc8c62ab4666"/>
-    <p:sldId xmlns:r="http://schemas.openxmlformats.org/officeDocument/2006/relationships" id="261" r:id="R1b58d015e9274aca"/>
+    <p:sldId xmlns:r="http://schemas.openxmlformats.org/officeDocument/2006/relationships" id="256" r:id="Rab34e6e2d78247be"/>
+    <p:sldId xmlns:r="http://schemas.openxmlformats.org/officeDocument/2006/relationships" id="257" r:id="Rd0d7c0a2e05c41b2"/>
+    <p:sldId xmlns:r="http://schemas.openxmlformats.org/officeDocument/2006/relationships" id="258" r:id="R80bc1a4d68da4fc8"/>
+    <p:sldId xmlns:r="http://schemas.openxmlformats.org/officeDocument/2006/relationships" id="259" r:id="R725555172403485a"/>
+    <p:sldId xmlns:r="http://schemas.openxmlformats.org/officeDocument/2006/relationships" id="260" r:id="R6f02a740011246fe"/>
+    <p:sldId xmlns:r="http://schemas.openxmlformats.org/officeDocument/2006/relationships" id="261" r:id="R126b4f48316841f2"/>
   </p:sldIdLst>
   <p:sldSz cx="12192000" cy="6858000"/>
   <p:notesSz cx="6858000" cy="9144000"/>
@@ -937,7 +937,7 @@
           </a:p>
           <a:p xmlns:a="http://schemas.openxmlformats.org/drawingml/2006/main">
             <a:r>
-              <a:t>- https://github.com/Azizsekerdil/GermanCourseAI/releases/tag/v1.0.0</a:t>
+              <a:t>- https://github.com/Azizsekerdil/GermanCourseAI/releases/tag/v1.1.0</a:t>
             </a:r>
           </a:p>
           <a:p xmlns:a="http://schemas.openxmlformats.org/drawingml/2006/main">
@@ -1010,7 +1010,7 @@
   </p:cSld>
   <p:clrMap bg1="lt1" tx1="dk1" bg2="lt2" tx2="dk2" accent1="accent1" accent2="accent2" accent3="accent3" accent4="accent4" accent5="accent5" accent6="accent6" hlink="hlink" folHlink="folHlink"/>
   <p:sldLayoutIdLst>
-    <p:sldLayoutId xmlns:r="http://schemas.openxmlformats.org/officeDocument/2006/relationships" id="2147483649" r:id="R58a114006b0a47c3"/>
+    <p:sldLayoutId xmlns:r="http://schemas.openxmlformats.org/officeDocument/2006/relationships" id="2147483649" r:id="R75e5fe666c17482d"/>
   </p:sldLayoutIdLst>
   <p:txStyles>
     <p:titleStyle>
@@ -1561,7 +1561,7 @@
           <p:cNvPr id="13" name="box-1">
             <a:extLst xmlns:a="http://schemas.openxmlformats.org/drawingml/2006/main">
               <a:ext uri="{FF2B5EF4-FFF2-40B4-BE49-F238E27FC236}">
-                <a16:creationId xmlns:a16="http://schemas.microsoft.com/office/drawing/2014/main" id="{BD025786-6C25-47CC-A5F0-C8E285B14334}"/>
+                <a16:creationId xmlns:a16="http://schemas.microsoft.com/office/drawing/2014/main" id="{60E84CDA-2483-4BA7-A69D-C329A21487F8}"/>
               </a:ext>
             </a:extLst>
           </p:cNvPr>
@@ -1594,7 +1594,7 @@
           <p:cNvPr id="2" name="text-2">
             <a:extLst xmlns:a="http://schemas.openxmlformats.org/drawingml/2006/main">
               <a:ext uri="{FF2B5EF4-FFF2-40B4-BE49-F238E27FC236}">
-                <a16:creationId xmlns:a16="http://schemas.microsoft.com/office/drawing/2014/main" id="{1F52B061-E2DA-44FB-99DC-0535120771CC}"/>
+                <a16:creationId xmlns:a16="http://schemas.microsoft.com/office/drawing/2014/main" id="{91162354-2712-47C6-B1E2-3121544DFABD}"/>
               </a:ext>
             </a:extLst>
           </p:cNvPr>
@@ -1650,7 +1650,7 @@
           <p:cNvPr id="3" name="text-3">
             <a:extLst xmlns:a="http://schemas.openxmlformats.org/drawingml/2006/main">
               <a:ext uri="{FF2B5EF4-FFF2-40B4-BE49-F238E27FC236}">
-                <a16:creationId xmlns:a16="http://schemas.microsoft.com/office/drawing/2014/main" id="{E03511C0-E60F-4506-AC66-63E8E3E426A6}"/>
+                <a16:creationId xmlns:a16="http://schemas.microsoft.com/office/drawing/2014/main" id="{FCE31A98-B259-4ACA-AC75-176F6F269A3A}"/>
               </a:ext>
             </a:extLst>
           </p:cNvPr>
@@ -1706,7 +1706,7 @@
           <p:cNvPr id="4" name="text-4">
             <a:extLst xmlns:a="http://schemas.openxmlformats.org/drawingml/2006/main">
               <a:ext uri="{FF2B5EF4-FFF2-40B4-BE49-F238E27FC236}">
-                <a16:creationId xmlns:a16="http://schemas.microsoft.com/office/drawing/2014/main" id="{476A2E35-FF67-44ED-AEF4-78EEA11C3AC2}"/>
+                <a16:creationId xmlns:a16="http://schemas.microsoft.com/office/drawing/2014/main" id="{243CFE09-5027-487B-8D4F-3D2F33DE68DC}"/>
               </a:ext>
             </a:extLst>
           </p:cNvPr>
@@ -1762,7 +1762,7 @@
           <p:cNvPr id="5" name="text-5">
             <a:extLst xmlns:a="http://schemas.openxmlformats.org/drawingml/2006/main">
               <a:ext uri="{FF2B5EF4-FFF2-40B4-BE49-F238E27FC236}">
-                <a16:creationId xmlns:a16="http://schemas.microsoft.com/office/drawing/2014/main" id="{4DA3AA05-FBBE-4EFA-8F43-723A69B41226}"/>
+                <a16:creationId xmlns:a16="http://schemas.microsoft.com/office/drawing/2014/main" id="{9744BF8E-9EC6-43D3-8136-668ED4B37498}"/>
               </a:ext>
             </a:extLst>
           </p:cNvPr>
@@ -1818,7 +1818,7 @@
           <p:cNvPr id="6" name="text-6">
             <a:extLst xmlns:a="http://schemas.openxmlformats.org/drawingml/2006/main">
               <a:ext uri="{FF2B5EF4-FFF2-40B4-BE49-F238E27FC236}">
-                <a16:creationId xmlns:a16="http://schemas.microsoft.com/office/drawing/2014/main" id="{3CC5B6E1-1E9B-447C-A270-D11598FDD8CF}"/>
+                <a16:creationId xmlns:a16="http://schemas.microsoft.com/office/drawing/2014/main" id="{84D42F99-0C16-44CA-BA33-626FB22EC341}"/>
               </a:ext>
             </a:extLst>
           </p:cNvPr>
@@ -1874,7 +1874,7 @@
           <p:cNvPr id="7" name="text-7">
             <a:extLst xmlns:a="http://schemas.openxmlformats.org/drawingml/2006/main">
               <a:ext uri="{FF2B5EF4-FFF2-40B4-BE49-F238E27FC236}">
-                <a16:creationId xmlns:a16="http://schemas.microsoft.com/office/drawing/2014/main" id="{CBCE2E5B-9DA5-4FD2-99F1-C10A4147C454}"/>
+                <a16:creationId xmlns:a16="http://schemas.microsoft.com/office/drawing/2014/main" id="{74856780-70B7-4AE3-9252-91A452A03643}"/>
               </a:ext>
             </a:extLst>
           </p:cNvPr>
@@ -1930,7 +1930,7 @@
           <p:cNvPr id="8" name="text-8">
             <a:extLst xmlns:a="http://schemas.openxmlformats.org/drawingml/2006/main">
               <a:ext uri="{FF2B5EF4-FFF2-40B4-BE49-F238E27FC236}">
-                <a16:creationId xmlns:a16="http://schemas.microsoft.com/office/drawing/2014/main" id="{E72332B6-54AB-4FD6-A089-9BC32E9975B5}"/>
+                <a16:creationId xmlns:a16="http://schemas.microsoft.com/office/drawing/2014/main" id="{27E066C9-D23B-40B0-BDBD-4C9994D7A9A9}"/>
               </a:ext>
             </a:extLst>
           </p:cNvPr>
@@ -1986,7 +1986,7 @@
           <p:cNvPr id="9" name="text-9">
             <a:extLst xmlns:a="http://schemas.openxmlformats.org/drawingml/2006/main">
               <a:ext uri="{FF2B5EF4-FFF2-40B4-BE49-F238E27FC236}">
-                <a16:creationId xmlns:a16="http://schemas.microsoft.com/office/drawing/2014/main" id="{10AD1910-823E-4EA0-87F7-D1F92F5C86F0}"/>
+                <a16:creationId xmlns:a16="http://schemas.microsoft.com/office/drawing/2014/main" id="{07CCC132-E112-43E9-B254-03CF3A48DE4E}"/>
               </a:ext>
             </a:extLst>
           </p:cNvPr>
@@ -2042,7 +2042,7 @@
           <p:cNvPr id="10" name="box-10">
             <a:extLst xmlns:a="http://schemas.openxmlformats.org/drawingml/2006/main">
               <a:ext uri="{FF2B5EF4-FFF2-40B4-BE49-F238E27FC236}">
-                <a16:creationId xmlns:a16="http://schemas.microsoft.com/office/drawing/2014/main" id="{C61DB1B5-436B-41F9-9871-100BE711F74C}"/>
+                <a16:creationId xmlns:a16="http://schemas.microsoft.com/office/drawing/2014/main" id="{83B89148-4383-4AFD-B9AD-97B6E2FA76D0}"/>
               </a:ext>
             </a:extLst>
           </p:cNvPr>
@@ -2079,7 +2079,7 @@
           <p:nvPr/>
         </p:nvPicPr>
         <p:blipFill>
-          <a:blip xmlns:r="http://schemas.openxmlformats.org/officeDocument/2006/relationships" xmlns:a="http://schemas.openxmlformats.org/drawingml/2006/main" r:embed="R3d35d683b58a4c02"/>
+          <a:blip xmlns:r="http://schemas.openxmlformats.org/officeDocument/2006/relationships" xmlns:a="http://schemas.openxmlformats.org/drawingml/2006/main" r:embed="Rf54c785962df4348"/>
           <a:stretch xmlns:a="http://schemas.openxmlformats.org/drawingml/2006/main"/>
         </p:blipFill>
         <p:spPr>
@@ -2097,7 +2097,7 @@
           <p:cNvPr id="12" name="text-11">
             <a:extLst xmlns:a="http://schemas.openxmlformats.org/drawingml/2006/main">
               <a:ext uri="{FF2B5EF4-FFF2-40B4-BE49-F238E27FC236}">
-                <a16:creationId xmlns:a16="http://schemas.microsoft.com/office/drawing/2014/main" id="{66E07B7C-169D-4C0A-A15F-EEEA1BD6BA71}"/>
+                <a16:creationId xmlns:a16="http://schemas.microsoft.com/office/drawing/2014/main" id="{494973DF-FA58-4A46-9B03-F83A595301F9}"/>
               </a:ext>
             </a:extLst>
           </p:cNvPr>
@@ -2151,7 +2151,7 @@
     </p:spTree>
     <p:extLst>
       <p:ext uri="{BB962C8B-B14F-4D97-AF65-F5344CB8AC3E}">
-        <p14:creationId xmlns:p14="http://schemas.microsoft.com/office/powerpoint/2010/main" val="30447237"/>
+        <p14:creationId xmlns:p14="http://schemas.microsoft.com/office/powerpoint/2010/main" val="633749461"/>
       </p:ext>
     </p:extLst>
   </p:cSld>
@@ -2182,7 +2182,7 @@
           <p:cNvPr id="14" name="box-12">
             <a:extLst xmlns:a="http://schemas.openxmlformats.org/drawingml/2006/main">
               <a:ext uri="{FF2B5EF4-FFF2-40B4-BE49-F238E27FC236}">
-                <a16:creationId xmlns:a16="http://schemas.microsoft.com/office/drawing/2014/main" id="{5FEAAD70-FE91-412E-8250-EA29A9F0317D}"/>
+                <a16:creationId xmlns:a16="http://schemas.microsoft.com/office/drawing/2014/main" id="{3B7E770B-4E20-4D7B-9A06-B093FA6FD7C4}"/>
               </a:ext>
             </a:extLst>
           </p:cNvPr>
@@ -2215,7 +2215,7 @@
           <p:cNvPr id="2" name="text-13">
             <a:extLst xmlns:a="http://schemas.openxmlformats.org/drawingml/2006/main">
               <a:ext uri="{FF2B5EF4-FFF2-40B4-BE49-F238E27FC236}">
-                <a16:creationId xmlns:a16="http://schemas.microsoft.com/office/drawing/2014/main" id="{255F1637-D4E0-4E03-B7C1-AC5AB66B50B7}"/>
+                <a16:creationId xmlns:a16="http://schemas.microsoft.com/office/drawing/2014/main" id="{89016389-903B-4E4B-B1D6-8D2904C61FEE}"/>
               </a:ext>
             </a:extLst>
           </p:cNvPr>
@@ -2271,7 +2271,7 @@
           <p:cNvPr id="3" name="text-14">
             <a:extLst xmlns:a="http://schemas.openxmlformats.org/drawingml/2006/main">
               <a:ext uri="{FF2B5EF4-FFF2-40B4-BE49-F238E27FC236}">
-                <a16:creationId xmlns:a16="http://schemas.microsoft.com/office/drawing/2014/main" id="{F6D83F94-B08A-4AAC-80DB-839A2B1DA196}"/>
+                <a16:creationId xmlns:a16="http://schemas.microsoft.com/office/drawing/2014/main" id="{BC19D17F-30D5-42D7-8BBB-D6C3DED0A3B3}"/>
               </a:ext>
             </a:extLst>
           </p:cNvPr>
@@ -2327,7 +2327,7 @@
           <p:cNvPr id="4" name="text-15">
             <a:extLst xmlns:a="http://schemas.openxmlformats.org/drawingml/2006/main">
               <a:ext uri="{FF2B5EF4-FFF2-40B4-BE49-F238E27FC236}">
-                <a16:creationId xmlns:a16="http://schemas.microsoft.com/office/drawing/2014/main" id="{77648BCF-3DD1-4310-909F-8F5554DE3282}"/>
+                <a16:creationId xmlns:a16="http://schemas.microsoft.com/office/drawing/2014/main" id="{16DADF3D-055F-4749-B620-8E3B53C6AD9D}"/>
               </a:ext>
             </a:extLst>
           </p:cNvPr>
@@ -2383,7 +2383,7 @@
           <p:cNvPr id="5" name="text-16">
             <a:extLst xmlns:a="http://schemas.openxmlformats.org/drawingml/2006/main">
               <a:ext uri="{FF2B5EF4-FFF2-40B4-BE49-F238E27FC236}">
-                <a16:creationId xmlns:a16="http://schemas.microsoft.com/office/drawing/2014/main" id="{83A79BEF-C93E-4BC0-8D40-F3D41E321B88}"/>
+                <a16:creationId xmlns:a16="http://schemas.microsoft.com/office/drawing/2014/main" id="{322AACEA-3C71-4C75-9323-C4D8B6BBA156}"/>
               </a:ext>
             </a:extLst>
           </p:cNvPr>
@@ -2439,7 +2439,7 @@
           <p:cNvPr id="6" name="text-17">
             <a:extLst xmlns:a="http://schemas.openxmlformats.org/drawingml/2006/main">
               <a:ext uri="{FF2B5EF4-FFF2-40B4-BE49-F238E27FC236}">
-                <a16:creationId xmlns:a16="http://schemas.microsoft.com/office/drawing/2014/main" id="{11AF26BA-C96F-4335-8D3E-5F3402D80638}"/>
+                <a16:creationId xmlns:a16="http://schemas.microsoft.com/office/drawing/2014/main" id="{C4F30ABC-63F3-4A03-ABF7-77B656F833B6}"/>
               </a:ext>
             </a:extLst>
           </p:cNvPr>
@@ -2495,7 +2495,7 @@
           <p:cNvPr id="7" name="box-18">
             <a:extLst xmlns:a="http://schemas.openxmlformats.org/drawingml/2006/main">
               <a:ext uri="{FF2B5EF4-FFF2-40B4-BE49-F238E27FC236}">
-                <a16:creationId xmlns:a16="http://schemas.microsoft.com/office/drawing/2014/main" id="{04067BA7-DAF1-4359-88C5-48D4E5C62001}"/>
+                <a16:creationId xmlns:a16="http://schemas.microsoft.com/office/drawing/2014/main" id="{6B686A1D-3EBF-4DDE-8121-DAC0B4C14D5A}"/>
               </a:ext>
             </a:extLst>
           </p:cNvPr>
@@ -2528,7 +2528,7 @@
           <p:cNvPr id="8" name="text-19">
             <a:extLst xmlns:a="http://schemas.openxmlformats.org/drawingml/2006/main">
               <a:ext uri="{FF2B5EF4-FFF2-40B4-BE49-F238E27FC236}">
-                <a16:creationId xmlns:a16="http://schemas.microsoft.com/office/drawing/2014/main" id="{C8FCCA59-4EAF-4CBD-A7BA-931FF8EBA3E5}"/>
+                <a16:creationId xmlns:a16="http://schemas.microsoft.com/office/drawing/2014/main" id="{AA755804-B2F9-4A2E-B632-BEBB7859BE2E}"/>
               </a:ext>
             </a:extLst>
           </p:cNvPr>
@@ -2584,7 +2584,7 @@
           <p:cNvPr id="9" name="text-20">
             <a:extLst xmlns:a="http://schemas.openxmlformats.org/drawingml/2006/main">
               <a:ext uri="{FF2B5EF4-FFF2-40B4-BE49-F238E27FC236}">
-                <a16:creationId xmlns:a16="http://schemas.microsoft.com/office/drawing/2014/main" id="{F50F33E0-329E-4298-AA50-3CE468BD7C15}"/>
+                <a16:creationId xmlns:a16="http://schemas.microsoft.com/office/drawing/2014/main" id="{0568CF9E-C889-4923-8811-26D25142CBC5}"/>
               </a:ext>
             </a:extLst>
           </p:cNvPr>
@@ -2640,7 +2640,7 @@
           <p:cNvPr id="10" name="text-21">
             <a:extLst xmlns:a="http://schemas.openxmlformats.org/drawingml/2006/main">
               <a:ext uri="{FF2B5EF4-FFF2-40B4-BE49-F238E27FC236}">
-                <a16:creationId xmlns:a16="http://schemas.microsoft.com/office/drawing/2014/main" id="{46324EEC-29AF-488A-AE28-7DDA587D8680}"/>
+                <a16:creationId xmlns:a16="http://schemas.microsoft.com/office/drawing/2014/main" id="{3065FC34-2AD4-4CED-AEB9-6E42A9207642}"/>
               </a:ext>
             </a:extLst>
           </p:cNvPr>
@@ -2696,7 +2696,7 @@
           <p:cNvPr id="11" name="box-22">
             <a:extLst xmlns:a="http://schemas.openxmlformats.org/drawingml/2006/main">
               <a:ext uri="{FF2B5EF4-FFF2-40B4-BE49-F238E27FC236}">
-                <a16:creationId xmlns:a16="http://schemas.microsoft.com/office/drawing/2014/main" id="{CECD7995-7AE5-4E2F-A66A-EFD490C0CE25}"/>
+                <a16:creationId xmlns:a16="http://schemas.microsoft.com/office/drawing/2014/main" id="{4CC32900-600D-4282-8D5B-A13758810808}"/>
               </a:ext>
             </a:extLst>
           </p:cNvPr>
@@ -2733,7 +2733,7 @@
           <p:nvPr/>
         </p:nvPicPr>
         <p:blipFill>
-          <a:blip xmlns:r="http://schemas.openxmlformats.org/officeDocument/2006/relationships" xmlns:a="http://schemas.openxmlformats.org/drawingml/2006/main" r:embed="Reb50836f06df44e9"/>
+          <a:blip xmlns:r="http://schemas.openxmlformats.org/officeDocument/2006/relationships" xmlns:a="http://schemas.openxmlformats.org/drawingml/2006/main" r:embed="R380cf1f110a145fb"/>
           <a:stretch xmlns:a="http://schemas.openxmlformats.org/drawingml/2006/main"/>
         </p:blipFill>
         <p:spPr>
@@ -2751,7 +2751,7 @@
           <p:cNvPr id="13" name="text-23">
             <a:extLst xmlns:a="http://schemas.openxmlformats.org/drawingml/2006/main">
               <a:ext uri="{FF2B5EF4-FFF2-40B4-BE49-F238E27FC236}">
-                <a16:creationId xmlns:a16="http://schemas.microsoft.com/office/drawing/2014/main" id="{4BC43FC3-81E4-4A37-8CD1-28178D87A4CF}"/>
+                <a16:creationId xmlns:a16="http://schemas.microsoft.com/office/drawing/2014/main" id="{A7F657A2-4A46-4E09-8DFF-D372A645B7AE}"/>
               </a:ext>
             </a:extLst>
           </p:cNvPr>
@@ -2805,7 +2805,7 @@
     </p:spTree>
     <p:extLst>
       <p:ext uri="{BB962C8B-B14F-4D97-AF65-F5344CB8AC3E}">
-        <p14:creationId xmlns:p14="http://schemas.microsoft.com/office/powerpoint/2010/main" val="600625755"/>
+        <p14:creationId xmlns:p14="http://schemas.microsoft.com/office/powerpoint/2010/main" val="1422485868"/>
       </p:ext>
     </p:extLst>
   </p:cSld>
@@ -2836,7 +2836,7 @@
           <p:cNvPr id="19" name="box-24">
             <a:extLst xmlns:a="http://schemas.openxmlformats.org/drawingml/2006/main">
               <a:ext uri="{FF2B5EF4-FFF2-40B4-BE49-F238E27FC236}">
-                <a16:creationId xmlns:a16="http://schemas.microsoft.com/office/drawing/2014/main" id="{745715F3-DE9A-48C2-B66C-96A476A54715}"/>
+                <a16:creationId xmlns:a16="http://schemas.microsoft.com/office/drawing/2014/main" id="{943E1645-AE52-4A29-BB6B-FF8A004E8922}"/>
               </a:ext>
             </a:extLst>
           </p:cNvPr>
@@ -2869,7 +2869,7 @@
           <p:cNvPr id="2" name="text-25">
             <a:extLst xmlns:a="http://schemas.openxmlformats.org/drawingml/2006/main">
               <a:ext uri="{FF2B5EF4-FFF2-40B4-BE49-F238E27FC236}">
-                <a16:creationId xmlns:a16="http://schemas.microsoft.com/office/drawing/2014/main" id="{19A687DA-52B2-43E1-8A5E-05A06428D305}"/>
+                <a16:creationId xmlns:a16="http://schemas.microsoft.com/office/drawing/2014/main" id="{7C7134F1-A8C7-4AFB-8B28-2F8234A1F16C}"/>
               </a:ext>
             </a:extLst>
           </p:cNvPr>
@@ -2925,7 +2925,7 @@
           <p:cNvPr id="3" name="text-26">
             <a:extLst xmlns:a="http://schemas.openxmlformats.org/drawingml/2006/main">
               <a:ext uri="{FF2B5EF4-FFF2-40B4-BE49-F238E27FC236}">
-                <a16:creationId xmlns:a16="http://schemas.microsoft.com/office/drawing/2014/main" id="{0983BFA4-D022-4E81-8A99-0B51E0778FDF}"/>
+                <a16:creationId xmlns:a16="http://schemas.microsoft.com/office/drawing/2014/main" id="{EF3DCF60-B307-4B4D-81C3-C349685EFC6A}"/>
               </a:ext>
             </a:extLst>
           </p:cNvPr>
@@ -2981,7 +2981,7 @@
           <p:cNvPr id="4" name="text-27">
             <a:extLst xmlns:a="http://schemas.openxmlformats.org/drawingml/2006/main">
               <a:ext uri="{FF2B5EF4-FFF2-40B4-BE49-F238E27FC236}">
-                <a16:creationId xmlns:a16="http://schemas.microsoft.com/office/drawing/2014/main" id="{1CACEE5B-FA8F-480E-9331-BC77FF8A0713}"/>
+                <a16:creationId xmlns:a16="http://schemas.microsoft.com/office/drawing/2014/main" id="{ECB3A8EF-F9E2-4E9E-86C7-E4AE38F02406}"/>
               </a:ext>
             </a:extLst>
           </p:cNvPr>
@@ -3037,7 +3037,7 @@
           <p:cNvPr id="5" name="text-28">
             <a:extLst xmlns:a="http://schemas.openxmlformats.org/drawingml/2006/main">
               <a:ext uri="{FF2B5EF4-FFF2-40B4-BE49-F238E27FC236}">
-                <a16:creationId xmlns:a16="http://schemas.microsoft.com/office/drawing/2014/main" id="{143349AE-F1CF-45AF-A549-F068E33FB3DA}"/>
+                <a16:creationId xmlns:a16="http://schemas.microsoft.com/office/drawing/2014/main" id="{ED077FD1-F991-4063-96C8-E9186895AAA6}"/>
               </a:ext>
             </a:extLst>
           </p:cNvPr>
@@ -3093,7 +3093,7 @@
           <p:cNvPr id="6" name="text-29">
             <a:extLst xmlns:a="http://schemas.openxmlformats.org/drawingml/2006/main">
               <a:ext uri="{FF2B5EF4-FFF2-40B4-BE49-F238E27FC236}">
-                <a16:creationId xmlns:a16="http://schemas.microsoft.com/office/drawing/2014/main" id="{86AA954F-4D28-4170-825F-2F0134BEE582}"/>
+                <a16:creationId xmlns:a16="http://schemas.microsoft.com/office/drawing/2014/main" id="{6751435A-A35C-4058-BCF4-1AEEFD8C27D4}"/>
               </a:ext>
             </a:extLst>
           </p:cNvPr>
@@ -3149,7 +3149,7 @@
           <p:cNvPr id="7" name="box-30">
             <a:extLst xmlns:a="http://schemas.openxmlformats.org/drawingml/2006/main">
               <a:ext uri="{FF2B5EF4-FFF2-40B4-BE49-F238E27FC236}">
-                <a16:creationId xmlns:a16="http://schemas.microsoft.com/office/drawing/2014/main" id="{3A98FDE9-4E43-490F-ABE7-58292EBA83B6}"/>
+                <a16:creationId xmlns:a16="http://schemas.microsoft.com/office/drawing/2014/main" id="{AE12F696-82E6-428C-8271-95724CBA197A}"/>
               </a:ext>
             </a:extLst>
           </p:cNvPr>
@@ -3182,7 +3182,7 @@
           <p:cNvPr id="8" name="text-31">
             <a:extLst xmlns:a="http://schemas.openxmlformats.org/drawingml/2006/main">
               <a:ext uri="{FF2B5EF4-FFF2-40B4-BE49-F238E27FC236}">
-                <a16:creationId xmlns:a16="http://schemas.microsoft.com/office/drawing/2014/main" id="{F5FAB578-268D-4DD7-AAE6-576CE3CF9EED}"/>
+                <a16:creationId xmlns:a16="http://schemas.microsoft.com/office/drawing/2014/main" id="{3856C250-7106-47B3-8D2D-8C19457E5272}"/>
               </a:ext>
             </a:extLst>
           </p:cNvPr>
@@ -3238,7 +3238,7 @@
           <p:cNvPr id="9" name="text-32">
             <a:extLst xmlns:a="http://schemas.openxmlformats.org/drawingml/2006/main">
               <a:ext uri="{FF2B5EF4-FFF2-40B4-BE49-F238E27FC236}">
-                <a16:creationId xmlns:a16="http://schemas.microsoft.com/office/drawing/2014/main" id="{313CE2A0-013F-4D4A-B87B-8D397DE93C91}"/>
+                <a16:creationId xmlns:a16="http://schemas.microsoft.com/office/drawing/2014/main" id="{74457DEF-6EB0-4F9E-8E2C-B60A0F3A3EFF}"/>
               </a:ext>
             </a:extLst>
           </p:cNvPr>
@@ -3294,7 +3294,7 @@
           <p:cNvPr id="10" name="text-33">
             <a:extLst xmlns:a="http://schemas.openxmlformats.org/drawingml/2006/main">
               <a:ext uri="{FF2B5EF4-FFF2-40B4-BE49-F238E27FC236}">
-                <a16:creationId xmlns:a16="http://schemas.microsoft.com/office/drawing/2014/main" id="{56DB5CB0-E68A-4AA1-B2BF-D6430C303489}"/>
+                <a16:creationId xmlns:a16="http://schemas.microsoft.com/office/drawing/2014/main" id="{E0DB7838-EF24-44E1-B81B-0037CD409262}"/>
               </a:ext>
             </a:extLst>
           </p:cNvPr>
@@ -3350,7 +3350,7 @@
           <p:cNvPr id="11" name="box-34">
             <a:extLst xmlns:a="http://schemas.openxmlformats.org/drawingml/2006/main">
               <a:ext uri="{FF2B5EF4-FFF2-40B4-BE49-F238E27FC236}">
-                <a16:creationId xmlns:a16="http://schemas.microsoft.com/office/drawing/2014/main" id="{975AABAC-176A-4C8A-B012-5768692C523A}"/>
+                <a16:creationId xmlns:a16="http://schemas.microsoft.com/office/drawing/2014/main" id="{A8EB057F-9F1F-4DE6-AD6B-C3F1874661DC}"/>
               </a:ext>
             </a:extLst>
           </p:cNvPr>
@@ -3383,7 +3383,7 @@
           <p:cNvPr id="12" name="text-35">
             <a:extLst xmlns:a="http://schemas.openxmlformats.org/drawingml/2006/main">
               <a:ext uri="{FF2B5EF4-FFF2-40B4-BE49-F238E27FC236}">
-                <a16:creationId xmlns:a16="http://schemas.microsoft.com/office/drawing/2014/main" id="{D4CD2609-E7FC-4364-B621-E2FCF038A09D}"/>
+                <a16:creationId xmlns:a16="http://schemas.microsoft.com/office/drawing/2014/main" id="{3601A569-4C64-4FE3-9787-F20BCC4F6ECD}"/>
               </a:ext>
             </a:extLst>
           </p:cNvPr>
@@ -3439,7 +3439,7 @@
           <p:cNvPr id="13" name="text-36">
             <a:extLst xmlns:a="http://schemas.openxmlformats.org/drawingml/2006/main">
               <a:ext uri="{FF2B5EF4-FFF2-40B4-BE49-F238E27FC236}">
-                <a16:creationId xmlns:a16="http://schemas.microsoft.com/office/drawing/2014/main" id="{7E775B3E-6795-4995-9D1E-868F919E7371}"/>
+                <a16:creationId xmlns:a16="http://schemas.microsoft.com/office/drawing/2014/main" id="{B673AA3A-46F8-4978-B790-FDD53C996D1E}"/>
               </a:ext>
             </a:extLst>
           </p:cNvPr>
@@ -3495,7 +3495,7 @@
           <p:cNvPr id="14" name="text-37">
             <a:extLst xmlns:a="http://schemas.openxmlformats.org/drawingml/2006/main">
               <a:ext uri="{FF2B5EF4-FFF2-40B4-BE49-F238E27FC236}">
-                <a16:creationId xmlns:a16="http://schemas.microsoft.com/office/drawing/2014/main" id="{2206685E-001E-4D2B-9A10-2C2BCFB15CEE}"/>
+                <a16:creationId xmlns:a16="http://schemas.microsoft.com/office/drawing/2014/main" id="{F6FCED6C-AFC8-4336-8814-6F718BB1D947}"/>
               </a:ext>
             </a:extLst>
           </p:cNvPr>
@@ -3551,7 +3551,7 @@
           <p:cNvPr id="15" name="box-38">
             <a:extLst xmlns:a="http://schemas.openxmlformats.org/drawingml/2006/main">
               <a:ext uri="{FF2B5EF4-FFF2-40B4-BE49-F238E27FC236}">
-                <a16:creationId xmlns:a16="http://schemas.microsoft.com/office/drawing/2014/main" id="{BA97ECE1-9815-4389-8BAE-623E2904208B}"/>
+                <a16:creationId xmlns:a16="http://schemas.microsoft.com/office/drawing/2014/main" id="{BD95697C-B12B-4674-A1F3-BFC039420D24}"/>
               </a:ext>
             </a:extLst>
           </p:cNvPr>
@@ -3584,7 +3584,7 @@
           <p:cNvPr id="16" name="text-39">
             <a:extLst xmlns:a="http://schemas.openxmlformats.org/drawingml/2006/main">
               <a:ext uri="{FF2B5EF4-FFF2-40B4-BE49-F238E27FC236}">
-                <a16:creationId xmlns:a16="http://schemas.microsoft.com/office/drawing/2014/main" id="{B9C9039C-5D48-49E2-9366-E7A57552DD0B}"/>
+                <a16:creationId xmlns:a16="http://schemas.microsoft.com/office/drawing/2014/main" id="{B1E1E57D-6335-4A7D-BE1C-D271D2CB9088}"/>
               </a:ext>
             </a:extLst>
           </p:cNvPr>
@@ -3640,7 +3640,7 @@
           <p:cNvPr id="17" name="text-40">
             <a:extLst xmlns:a="http://schemas.openxmlformats.org/drawingml/2006/main">
               <a:ext uri="{FF2B5EF4-FFF2-40B4-BE49-F238E27FC236}">
-                <a16:creationId xmlns:a16="http://schemas.microsoft.com/office/drawing/2014/main" id="{DE079705-456B-4EFD-A68E-F6871E46C95A}"/>
+                <a16:creationId xmlns:a16="http://schemas.microsoft.com/office/drawing/2014/main" id="{C3973787-5AC2-4D69-B139-B3D3A7B83C19}"/>
               </a:ext>
             </a:extLst>
           </p:cNvPr>
@@ -3696,7 +3696,7 @@
           <p:cNvPr id="18" name="text-41">
             <a:extLst xmlns:a="http://schemas.openxmlformats.org/drawingml/2006/main">
               <a:ext uri="{FF2B5EF4-FFF2-40B4-BE49-F238E27FC236}">
-                <a16:creationId xmlns:a16="http://schemas.microsoft.com/office/drawing/2014/main" id="{6F2FE22C-5D60-4635-BAAE-B1C378AED884}"/>
+                <a16:creationId xmlns:a16="http://schemas.microsoft.com/office/drawing/2014/main" id="{23FD175E-2C1E-40B6-A6AE-4B6B6CFEC2CC}"/>
               </a:ext>
             </a:extLst>
           </p:cNvPr>
@@ -3750,7 +3750,7 @@
     </p:spTree>
     <p:extLst>
       <p:ext uri="{BB962C8B-B14F-4D97-AF65-F5344CB8AC3E}">
-        <p14:creationId xmlns:p14="http://schemas.microsoft.com/office/powerpoint/2010/main" val="1436768494"/>
+        <p14:creationId xmlns:p14="http://schemas.microsoft.com/office/powerpoint/2010/main" val="620517035"/>
       </p:ext>
     </p:extLst>
   </p:cSld>
@@ -3781,7 +3781,7 @@
           <p:cNvPr id="18" name="box-42">
             <a:extLst xmlns:a="http://schemas.openxmlformats.org/drawingml/2006/main">
               <a:ext uri="{FF2B5EF4-FFF2-40B4-BE49-F238E27FC236}">
-                <a16:creationId xmlns:a16="http://schemas.microsoft.com/office/drawing/2014/main" id="{9A49CECE-053E-413F-BE68-EB98269DC560}"/>
+                <a16:creationId xmlns:a16="http://schemas.microsoft.com/office/drawing/2014/main" id="{7E981942-C320-4258-9E78-F7EFAEF1F2BE}"/>
               </a:ext>
             </a:extLst>
           </p:cNvPr>
@@ -3814,7 +3814,7 @@
           <p:cNvPr id="2" name="text-43">
             <a:extLst xmlns:a="http://schemas.openxmlformats.org/drawingml/2006/main">
               <a:ext uri="{FF2B5EF4-FFF2-40B4-BE49-F238E27FC236}">
-                <a16:creationId xmlns:a16="http://schemas.microsoft.com/office/drawing/2014/main" id="{F01ECE95-D0FC-4043-B0A2-8100311E9321}"/>
+                <a16:creationId xmlns:a16="http://schemas.microsoft.com/office/drawing/2014/main" id="{30CD9EC4-A691-4317-99FC-131124C18C78}"/>
               </a:ext>
             </a:extLst>
           </p:cNvPr>
@@ -3870,7 +3870,7 @@
           <p:cNvPr id="3" name="text-44">
             <a:extLst xmlns:a="http://schemas.openxmlformats.org/drawingml/2006/main">
               <a:ext uri="{FF2B5EF4-FFF2-40B4-BE49-F238E27FC236}">
-                <a16:creationId xmlns:a16="http://schemas.microsoft.com/office/drawing/2014/main" id="{36890FB4-048D-46EE-9EB7-1A2F60D044F4}"/>
+                <a16:creationId xmlns:a16="http://schemas.microsoft.com/office/drawing/2014/main" id="{0090CD20-49BB-4940-A075-5A3F658F6F81}"/>
               </a:ext>
             </a:extLst>
           </p:cNvPr>
@@ -3926,7 +3926,7 @@
           <p:cNvPr id="4" name="text-45">
             <a:extLst xmlns:a="http://schemas.openxmlformats.org/drawingml/2006/main">
               <a:ext uri="{FF2B5EF4-FFF2-40B4-BE49-F238E27FC236}">
-                <a16:creationId xmlns:a16="http://schemas.microsoft.com/office/drawing/2014/main" id="{9250F9EF-5094-4C4D-8BA8-1FB5A03D3C99}"/>
+                <a16:creationId xmlns:a16="http://schemas.microsoft.com/office/drawing/2014/main" id="{353774AE-06D0-466C-866A-644C367CF008}"/>
               </a:ext>
             </a:extLst>
           </p:cNvPr>
@@ -3982,7 +3982,7 @@
           <p:cNvPr id="5" name="text-46">
             <a:extLst xmlns:a="http://schemas.openxmlformats.org/drawingml/2006/main">
               <a:ext uri="{FF2B5EF4-FFF2-40B4-BE49-F238E27FC236}">
-                <a16:creationId xmlns:a16="http://schemas.microsoft.com/office/drawing/2014/main" id="{F094DCFC-6B32-4FED-86F9-F40C8B5C5873}"/>
+                <a16:creationId xmlns:a16="http://schemas.microsoft.com/office/drawing/2014/main" id="{2B7519C6-15B7-4B96-9FC7-AE3F8F2F2D31}"/>
               </a:ext>
             </a:extLst>
           </p:cNvPr>
@@ -4038,7 +4038,7 @@
           <p:cNvPr id="6" name="box-47">
             <a:extLst xmlns:a="http://schemas.openxmlformats.org/drawingml/2006/main">
               <a:ext uri="{FF2B5EF4-FFF2-40B4-BE49-F238E27FC236}">
-                <a16:creationId xmlns:a16="http://schemas.microsoft.com/office/drawing/2014/main" id="{990C520E-607D-4773-A1CC-469184FF66BE}"/>
+                <a16:creationId xmlns:a16="http://schemas.microsoft.com/office/drawing/2014/main" id="{74566E6C-236B-4CC3-916D-46B99670C5DC}"/>
               </a:ext>
             </a:extLst>
           </p:cNvPr>
@@ -4071,7 +4071,7 @@
           <p:cNvPr id="7" name="text-48">
             <a:extLst xmlns:a="http://schemas.openxmlformats.org/drawingml/2006/main">
               <a:ext uri="{FF2B5EF4-FFF2-40B4-BE49-F238E27FC236}">
-                <a16:creationId xmlns:a16="http://schemas.microsoft.com/office/drawing/2014/main" id="{B4D9FC9E-4437-4BB5-B530-0CE4E1F82D51}"/>
+                <a16:creationId xmlns:a16="http://schemas.microsoft.com/office/drawing/2014/main" id="{22DE2E25-1B31-4DFF-8BBA-648F8726231E}"/>
               </a:ext>
             </a:extLst>
           </p:cNvPr>
@@ -4127,7 +4127,7 @@
           <p:cNvPr id="8" name="text-49">
             <a:extLst xmlns:a="http://schemas.openxmlformats.org/drawingml/2006/main">
               <a:ext uri="{FF2B5EF4-FFF2-40B4-BE49-F238E27FC236}">
-                <a16:creationId xmlns:a16="http://schemas.microsoft.com/office/drawing/2014/main" id="{E0EC76BB-899B-401A-97A3-B8E149D343B3}"/>
+                <a16:creationId xmlns:a16="http://schemas.microsoft.com/office/drawing/2014/main" id="{8B5CB087-C51A-41B5-ADE0-8E63966D84E7}"/>
               </a:ext>
             </a:extLst>
           </p:cNvPr>
@@ -4183,7 +4183,7 @@
           <p:cNvPr id="9" name="box-50">
             <a:extLst xmlns:a="http://schemas.openxmlformats.org/drawingml/2006/main">
               <a:ext uri="{FF2B5EF4-FFF2-40B4-BE49-F238E27FC236}">
-                <a16:creationId xmlns:a16="http://schemas.microsoft.com/office/drawing/2014/main" id="{8839ADEE-2B21-491E-8619-5BF633260228}"/>
+                <a16:creationId xmlns:a16="http://schemas.microsoft.com/office/drawing/2014/main" id="{851A69E4-E758-4992-92A6-A6EFE47CC204}"/>
               </a:ext>
             </a:extLst>
           </p:cNvPr>
@@ -4216,7 +4216,7 @@
           <p:cNvPr id="10" name="text-51">
             <a:extLst xmlns:a="http://schemas.openxmlformats.org/drawingml/2006/main">
               <a:ext uri="{FF2B5EF4-FFF2-40B4-BE49-F238E27FC236}">
-                <a16:creationId xmlns:a16="http://schemas.microsoft.com/office/drawing/2014/main" id="{0A86C5E1-60B3-428C-8D03-31F298A28FAC}"/>
+                <a16:creationId xmlns:a16="http://schemas.microsoft.com/office/drawing/2014/main" id="{1828B18D-EDCA-4F21-A9DD-A811BA430D19}"/>
               </a:ext>
             </a:extLst>
           </p:cNvPr>
@@ -4272,7 +4272,7 @@
           <p:cNvPr id="11" name="text-52">
             <a:extLst xmlns:a="http://schemas.openxmlformats.org/drawingml/2006/main">
               <a:ext uri="{FF2B5EF4-FFF2-40B4-BE49-F238E27FC236}">
-                <a16:creationId xmlns:a16="http://schemas.microsoft.com/office/drawing/2014/main" id="{2317AE37-C2FE-45C1-93B0-58D662D94F72}"/>
+                <a16:creationId xmlns:a16="http://schemas.microsoft.com/office/drawing/2014/main" id="{2CAABE89-A1C7-4263-9275-0DB09EB77F09}"/>
               </a:ext>
             </a:extLst>
           </p:cNvPr>
@@ -4328,7 +4328,7 @@
           <p:cNvPr id="12" name="box-53">
             <a:extLst xmlns:a="http://schemas.openxmlformats.org/drawingml/2006/main">
               <a:ext uri="{FF2B5EF4-FFF2-40B4-BE49-F238E27FC236}">
-                <a16:creationId xmlns:a16="http://schemas.microsoft.com/office/drawing/2014/main" id="{E27B6F67-FF6C-4135-A2C9-19A2E98A07D3}"/>
+                <a16:creationId xmlns:a16="http://schemas.microsoft.com/office/drawing/2014/main" id="{FA602EC5-81DC-449D-BE46-A67E8EE7CE66}"/>
               </a:ext>
             </a:extLst>
           </p:cNvPr>
@@ -4361,7 +4361,7 @@
           <p:cNvPr id="13" name="text-54">
             <a:extLst xmlns:a="http://schemas.openxmlformats.org/drawingml/2006/main">
               <a:ext uri="{FF2B5EF4-FFF2-40B4-BE49-F238E27FC236}">
-                <a16:creationId xmlns:a16="http://schemas.microsoft.com/office/drawing/2014/main" id="{4433BAE4-6AAC-4398-B4A8-2EC983A585CA}"/>
+                <a16:creationId xmlns:a16="http://schemas.microsoft.com/office/drawing/2014/main" id="{DA92A6E9-BFE8-4ADB-AE14-004E39DF76B5}"/>
               </a:ext>
             </a:extLst>
           </p:cNvPr>
@@ -4417,7 +4417,7 @@
           <p:cNvPr id="14" name="text-55">
             <a:extLst xmlns:a="http://schemas.openxmlformats.org/drawingml/2006/main">
               <a:ext uri="{FF2B5EF4-FFF2-40B4-BE49-F238E27FC236}">
-                <a16:creationId xmlns:a16="http://schemas.microsoft.com/office/drawing/2014/main" id="{B2EA36EB-7FC3-4824-84AC-D319FFC41AF6}"/>
+                <a16:creationId xmlns:a16="http://schemas.microsoft.com/office/drawing/2014/main" id="{94931C97-DB30-4C61-8436-518E09EC99B7}"/>
               </a:ext>
             </a:extLst>
           </p:cNvPr>
@@ -4473,7 +4473,7 @@
           <p:cNvPr id="15" name="box-56">
             <a:extLst xmlns:a="http://schemas.openxmlformats.org/drawingml/2006/main">
               <a:ext uri="{FF2B5EF4-FFF2-40B4-BE49-F238E27FC236}">
-                <a16:creationId xmlns:a16="http://schemas.microsoft.com/office/drawing/2014/main" id="{11207B2D-848D-4A11-80AC-1EBE7A537478}"/>
+                <a16:creationId xmlns:a16="http://schemas.microsoft.com/office/drawing/2014/main" id="{E494B4F7-C2D4-4B62-B849-F2BF4689B889}"/>
               </a:ext>
             </a:extLst>
           </p:cNvPr>
@@ -4506,7 +4506,7 @@
           <p:cNvPr id="16" name="text-57">
             <a:extLst xmlns:a="http://schemas.openxmlformats.org/drawingml/2006/main">
               <a:ext uri="{FF2B5EF4-FFF2-40B4-BE49-F238E27FC236}">
-                <a16:creationId xmlns:a16="http://schemas.microsoft.com/office/drawing/2014/main" id="{BC366D09-5D23-4DBC-8ACD-F8C05C308303}"/>
+                <a16:creationId xmlns:a16="http://schemas.microsoft.com/office/drawing/2014/main" id="{DA3BEE73-D124-4B40-A892-7D233EB19464}"/>
               </a:ext>
             </a:extLst>
           </p:cNvPr>
@@ -4562,7 +4562,7 @@
           <p:cNvPr id="17" name="text-58">
             <a:extLst xmlns:a="http://schemas.openxmlformats.org/drawingml/2006/main">
               <a:ext uri="{FF2B5EF4-FFF2-40B4-BE49-F238E27FC236}">
-                <a16:creationId xmlns:a16="http://schemas.microsoft.com/office/drawing/2014/main" id="{42F29645-C2BE-4BD4-867C-69F7ABC6888B}"/>
+                <a16:creationId xmlns:a16="http://schemas.microsoft.com/office/drawing/2014/main" id="{2B1A9361-254C-49BA-87BB-109053AFC2F8}"/>
               </a:ext>
             </a:extLst>
           </p:cNvPr>
@@ -4616,7 +4616,7 @@
     </p:spTree>
     <p:extLst>
       <p:ext uri="{BB962C8B-B14F-4D97-AF65-F5344CB8AC3E}">
-        <p14:creationId xmlns:p14="http://schemas.microsoft.com/office/powerpoint/2010/main" val="1753609021"/>
+        <p14:creationId xmlns:p14="http://schemas.microsoft.com/office/powerpoint/2010/main" val="1419821640"/>
       </p:ext>
     </p:extLst>
   </p:cSld>
@@ -4647,7 +4647,7 @@
           <p:cNvPr id="21" name="box-59">
             <a:extLst xmlns:a="http://schemas.openxmlformats.org/drawingml/2006/main">
               <a:ext uri="{FF2B5EF4-FFF2-40B4-BE49-F238E27FC236}">
-                <a16:creationId xmlns:a16="http://schemas.microsoft.com/office/drawing/2014/main" id="{711CA2BA-6826-4594-8293-E92E72FE380E}"/>
+                <a16:creationId xmlns:a16="http://schemas.microsoft.com/office/drawing/2014/main" id="{EFABBF47-78FA-499B-8B99-F7AE37EEC006}"/>
               </a:ext>
             </a:extLst>
           </p:cNvPr>
@@ -4680,7 +4680,7 @@
           <p:cNvPr id="2" name="text-60">
             <a:extLst xmlns:a="http://schemas.openxmlformats.org/drawingml/2006/main">
               <a:ext uri="{FF2B5EF4-FFF2-40B4-BE49-F238E27FC236}">
-                <a16:creationId xmlns:a16="http://schemas.microsoft.com/office/drawing/2014/main" id="{A29DC29D-33AF-4D8A-B4AC-696A2765F002}"/>
+                <a16:creationId xmlns:a16="http://schemas.microsoft.com/office/drawing/2014/main" id="{A42CD519-A78B-45D3-9411-3B3C5339AC93}"/>
               </a:ext>
             </a:extLst>
           </p:cNvPr>
@@ -4736,7 +4736,7 @@
           <p:cNvPr id="3" name="text-61">
             <a:extLst xmlns:a="http://schemas.openxmlformats.org/drawingml/2006/main">
               <a:ext uri="{FF2B5EF4-FFF2-40B4-BE49-F238E27FC236}">
-                <a16:creationId xmlns:a16="http://schemas.microsoft.com/office/drawing/2014/main" id="{A75D78A3-9D18-4CC5-8E99-25A7C77B6B0C}"/>
+                <a16:creationId xmlns:a16="http://schemas.microsoft.com/office/drawing/2014/main" id="{AC5D2B91-A98C-427F-B9F5-83B0C000439E}"/>
               </a:ext>
             </a:extLst>
           </p:cNvPr>
@@ -4792,7 +4792,7 @@
           <p:cNvPr id="4" name="text-62">
             <a:extLst xmlns:a="http://schemas.openxmlformats.org/drawingml/2006/main">
               <a:ext uri="{FF2B5EF4-FFF2-40B4-BE49-F238E27FC236}">
-                <a16:creationId xmlns:a16="http://schemas.microsoft.com/office/drawing/2014/main" id="{62082AC5-78A8-49C3-99BE-D91ECAABF410}"/>
+                <a16:creationId xmlns:a16="http://schemas.microsoft.com/office/drawing/2014/main" id="{FB519E1E-4529-4F05-8623-1366BF2A7128}"/>
               </a:ext>
             </a:extLst>
           </p:cNvPr>
@@ -4848,7 +4848,7 @@
           <p:cNvPr id="5" name="text-63">
             <a:extLst xmlns:a="http://schemas.openxmlformats.org/drawingml/2006/main">
               <a:ext uri="{FF2B5EF4-FFF2-40B4-BE49-F238E27FC236}">
-                <a16:creationId xmlns:a16="http://schemas.microsoft.com/office/drawing/2014/main" id="{D998DB1F-68F7-460E-96D0-93B08A1CF49A}"/>
+                <a16:creationId xmlns:a16="http://schemas.microsoft.com/office/drawing/2014/main" id="{3DFFFBE2-57FE-4C2D-87F5-3EF38EFB7BCF}"/>
               </a:ext>
             </a:extLst>
           </p:cNvPr>
@@ -4904,7 +4904,7 @@
           <p:cNvPr id="6" name="box-64">
             <a:extLst xmlns:a="http://schemas.openxmlformats.org/drawingml/2006/main">
               <a:ext uri="{FF2B5EF4-FFF2-40B4-BE49-F238E27FC236}">
-                <a16:creationId xmlns:a16="http://schemas.microsoft.com/office/drawing/2014/main" id="{E79DB1BB-8361-44F5-827F-43E67A2E292F}"/>
+                <a16:creationId xmlns:a16="http://schemas.microsoft.com/office/drawing/2014/main" id="{E6E2586F-FA23-4DA8-817D-179AC1AC6991}"/>
               </a:ext>
             </a:extLst>
           </p:cNvPr>
@@ -4937,7 +4937,7 @@
           <p:cNvPr id="7" name="dot-65">
             <a:extLst xmlns:a="http://schemas.openxmlformats.org/drawingml/2006/main">
               <a:ext uri="{FF2B5EF4-FFF2-40B4-BE49-F238E27FC236}">
-                <a16:creationId xmlns:a16="http://schemas.microsoft.com/office/drawing/2014/main" id="{4473D131-EE77-48ED-8C2F-A1B139BDB775}"/>
+                <a16:creationId xmlns:a16="http://schemas.microsoft.com/office/drawing/2014/main" id="{2E11607D-5B2E-47FB-AE14-D5432D3A6B83}"/>
               </a:ext>
             </a:extLst>
           </p:cNvPr>
@@ -4968,7 +4968,7 @@
           <p:cNvPr id="8" name="text-66">
             <a:extLst xmlns:a="http://schemas.openxmlformats.org/drawingml/2006/main">
               <a:ext uri="{FF2B5EF4-FFF2-40B4-BE49-F238E27FC236}">
-                <a16:creationId xmlns:a16="http://schemas.microsoft.com/office/drawing/2014/main" id="{EC02141A-05E4-46DF-9C19-DD47195D3F8B}"/>
+                <a16:creationId xmlns:a16="http://schemas.microsoft.com/office/drawing/2014/main" id="{5C1630E7-4328-4BB9-AF8C-C307CD66F84E}"/>
               </a:ext>
             </a:extLst>
           </p:cNvPr>
@@ -5024,7 +5024,7 @@
           <p:cNvPr id="9" name="text-67">
             <a:extLst xmlns:a="http://schemas.openxmlformats.org/drawingml/2006/main">
               <a:ext uri="{FF2B5EF4-FFF2-40B4-BE49-F238E27FC236}">
-                <a16:creationId xmlns:a16="http://schemas.microsoft.com/office/drawing/2014/main" id="{D771F8D1-2DAE-49C3-AFAB-0F1755EAAA5B}"/>
+                <a16:creationId xmlns:a16="http://schemas.microsoft.com/office/drawing/2014/main" id="{7540D09C-AD8B-49AD-B321-73190E790F2B}"/>
               </a:ext>
             </a:extLst>
           </p:cNvPr>
@@ -5080,7 +5080,7 @@
           <p:cNvPr id="10" name="text-68">
             <a:extLst xmlns:a="http://schemas.openxmlformats.org/drawingml/2006/main">
               <a:ext uri="{FF2B5EF4-FFF2-40B4-BE49-F238E27FC236}">
-                <a16:creationId xmlns:a16="http://schemas.microsoft.com/office/drawing/2014/main" id="{265CEFF7-5241-4732-BE56-6DD2BA590B02}"/>
+                <a16:creationId xmlns:a16="http://schemas.microsoft.com/office/drawing/2014/main" id="{E8CD00E2-9D2C-4A24-A431-2F48BFA5C892}"/>
               </a:ext>
             </a:extLst>
           </p:cNvPr>
@@ -5136,7 +5136,7 @@
           <p:cNvPr id="11" name="dot-69">
             <a:extLst xmlns:a="http://schemas.openxmlformats.org/drawingml/2006/main">
               <a:ext uri="{FF2B5EF4-FFF2-40B4-BE49-F238E27FC236}">
-                <a16:creationId xmlns:a16="http://schemas.microsoft.com/office/drawing/2014/main" id="{7475A7BF-4FEE-48CF-9464-5DD610514D9C}"/>
+                <a16:creationId xmlns:a16="http://schemas.microsoft.com/office/drawing/2014/main" id="{5588B9F4-A645-4A32-9BBA-BD99A11DF35F}"/>
               </a:ext>
             </a:extLst>
           </p:cNvPr>
@@ -5167,7 +5167,7 @@
           <p:cNvPr id="12" name="text-70">
             <a:extLst xmlns:a="http://schemas.openxmlformats.org/drawingml/2006/main">
               <a:ext uri="{FF2B5EF4-FFF2-40B4-BE49-F238E27FC236}">
-                <a16:creationId xmlns:a16="http://schemas.microsoft.com/office/drawing/2014/main" id="{5530697F-73F3-419E-ABF9-7F46EE5A0160}"/>
+                <a16:creationId xmlns:a16="http://schemas.microsoft.com/office/drawing/2014/main" id="{369A2C51-E9F9-4999-A45A-5F6F1A3B1500}"/>
               </a:ext>
             </a:extLst>
           </p:cNvPr>
@@ -5223,7 +5223,7 @@
           <p:cNvPr id="13" name="text-71">
             <a:extLst xmlns:a="http://schemas.openxmlformats.org/drawingml/2006/main">
               <a:ext uri="{FF2B5EF4-FFF2-40B4-BE49-F238E27FC236}">
-                <a16:creationId xmlns:a16="http://schemas.microsoft.com/office/drawing/2014/main" id="{B8A3846B-24E5-44A6-9E55-861F8EF8FE7A}"/>
+                <a16:creationId xmlns:a16="http://schemas.microsoft.com/office/drawing/2014/main" id="{C8BCCEEE-8210-412B-BFCE-EA185A2BDE34}"/>
               </a:ext>
             </a:extLst>
           </p:cNvPr>
@@ -5269,7 +5269,7 @@
                 <a:ea typeface="Arial"/>
                 <a:cs typeface="Arial"/>
               </a:rPr>
-              <a:t>LM Studio</a:t>
+              <a:t>LM Studio / alt. uç</a:t>
             </a:r>
           </a:p>
         </p:txBody>
@@ -5279,7 +5279,7 @@
           <p:cNvPr id="14" name="text-72">
             <a:extLst xmlns:a="http://schemas.openxmlformats.org/drawingml/2006/main">
               <a:ext uri="{FF2B5EF4-FFF2-40B4-BE49-F238E27FC236}">
-                <a16:creationId xmlns:a16="http://schemas.microsoft.com/office/drawing/2014/main" id="{5B8748CB-BBFF-4B6B-8FDE-E2A69B33E304}"/>
+                <a16:creationId xmlns:a16="http://schemas.microsoft.com/office/drawing/2014/main" id="{DA6D9F14-2407-44F8-A2D3-4BF03348C1EB}"/>
               </a:ext>
             </a:extLst>
           </p:cNvPr>
@@ -5325,7 +5325,7 @@
                 <a:ea typeface="Arial"/>
                 <a:cs typeface="Arial"/>
               </a:rPr>
-              <a:t>İstek yalnızca yerel uç noktaya gider; bağlantı yoksa akış güvenle kapanır.</a:t>
+              <a:t>Önce yerel LM Studio; isteğe bağlı NVIDIA NIM veya özel OpenAI uyumlu uç. API anahtarı diske yazılmaz.</a:t>
             </a:r>
           </a:p>
         </p:txBody>
@@ -5335,7 +5335,7 @@
           <p:cNvPr id="15" name="dot-73">
             <a:extLst xmlns:a="http://schemas.openxmlformats.org/drawingml/2006/main">
               <a:ext uri="{FF2B5EF4-FFF2-40B4-BE49-F238E27FC236}">
-                <a16:creationId xmlns:a16="http://schemas.microsoft.com/office/drawing/2014/main" id="{02DBDE38-F6F4-4C55-92F7-8EB4590168DA}"/>
+                <a16:creationId xmlns:a16="http://schemas.microsoft.com/office/drawing/2014/main" id="{0817B2CA-FB61-4C5E-88E5-AE55C1B76A3A}"/>
               </a:ext>
             </a:extLst>
           </p:cNvPr>
@@ -5366,7 +5366,7 @@
           <p:cNvPr id="16" name="text-74">
             <a:extLst xmlns:a="http://schemas.openxmlformats.org/drawingml/2006/main">
               <a:ext uri="{FF2B5EF4-FFF2-40B4-BE49-F238E27FC236}">
-                <a16:creationId xmlns:a16="http://schemas.microsoft.com/office/drawing/2014/main" id="{4EAC44E4-47B2-4530-A587-BC94888AA2E8}"/>
+                <a16:creationId xmlns:a16="http://schemas.microsoft.com/office/drawing/2014/main" id="{638DAE33-A9FA-4B29-9086-A71203406D1E}"/>
               </a:ext>
             </a:extLst>
           </p:cNvPr>
@@ -5422,7 +5422,7 @@
           <p:cNvPr id="17" name="text-75">
             <a:extLst xmlns:a="http://schemas.openxmlformats.org/drawingml/2006/main">
               <a:ext uri="{FF2B5EF4-FFF2-40B4-BE49-F238E27FC236}">
-                <a16:creationId xmlns:a16="http://schemas.microsoft.com/office/drawing/2014/main" id="{DE5B697C-942B-4A8A-B12B-B767E6541043}"/>
+                <a16:creationId xmlns:a16="http://schemas.microsoft.com/office/drawing/2014/main" id="{B4F622A5-7BFD-4C27-B84E-0B65C1DB02E8}"/>
               </a:ext>
             </a:extLst>
           </p:cNvPr>
@@ -5478,7 +5478,7 @@
           <p:cNvPr id="18" name="text-76">
             <a:extLst xmlns:a="http://schemas.openxmlformats.org/drawingml/2006/main">
               <a:ext uri="{FF2B5EF4-FFF2-40B4-BE49-F238E27FC236}">
-                <a16:creationId xmlns:a16="http://schemas.microsoft.com/office/drawing/2014/main" id="{230EAA8E-ED5B-4163-98E4-27244338A127}"/>
+                <a16:creationId xmlns:a16="http://schemas.microsoft.com/office/drawing/2014/main" id="{81849F7A-D721-403D-AE51-CD6483CD9DA8}"/>
               </a:ext>
             </a:extLst>
           </p:cNvPr>
@@ -5534,7 +5534,7 @@
           <p:cNvPr id="19" name="box-77">
             <a:extLst xmlns:a="http://schemas.openxmlformats.org/drawingml/2006/main">
               <a:ext uri="{FF2B5EF4-FFF2-40B4-BE49-F238E27FC236}">
-                <a16:creationId xmlns:a16="http://schemas.microsoft.com/office/drawing/2014/main" id="{475294D5-DAF7-4510-B28D-C2E688217CA9}"/>
+                <a16:creationId xmlns:a16="http://schemas.microsoft.com/office/drawing/2014/main" id="{7442B0B6-FDFC-4AEC-8D0F-9CB83FD66D10}"/>
               </a:ext>
             </a:extLst>
           </p:cNvPr>
@@ -5567,7 +5567,7 @@
           <p:cNvPr id="20" name="text-78">
             <a:extLst xmlns:a="http://schemas.openxmlformats.org/drawingml/2006/main">
               <a:ext uri="{FF2B5EF4-FFF2-40B4-BE49-F238E27FC236}">
-                <a16:creationId xmlns:a16="http://schemas.microsoft.com/office/drawing/2014/main" id="{E7E13599-4CD1-46A2-8CD3-3275896FF247}"/>
+                <a16:creationId xmlns:a16="http://schemas.microsoft.com/office/drawing/2014/main" id="{00E03B86-B50A-40B4-A369-2F95930B5F90}"/>
               </a:ext>
             </a:extLst>
           </p:cNvPr>
@@ -5621,7 +5621,7 @@
     </p:spTree>
     <p:extLst>
       <p:ext uri="{BB962C8B-B14F-4D97-AF65-F5344CB8AC3E}">
-        <p14:creationId xmlns:p14="http://schemas.microsoft.com/office/powerpoint/2010/main" val="394195540"/>
+        <p14:creationId xmlns:p14="http://schemas.microsoft.com/office/powerpoint/2010/main" val="24272866"/>
       </p:ext>
     </p:extLst>
   </p:cSld>
@@ -5652,7 +5652,7 @@
           <p:cNvPr id="18" name="box-79">
             <a:extLst xmlns:a="http://schemas.openxmlformats.org/drawingml/2006/main">
               <a:ext uri="{FF2B5EF4-FFF2-40B4-BE49-F238E27FC236}">
-                <a16:creationId xmlns:a16="http://schemas.microsoft.com/office/drawing/2014/main" id="{455A9B25-E43B-41DA-8A53-98CFA3C491A7}"/>
+                <a16:creationId xmlns:a16="http://schemas.microsoft.com/office/drawing/2014/main" id="{8FBEF8DC-6887-44E8-B0E3-48D8B032B860}"/>
               </a:ext>
             </a:extLst>
           </p:cNvPr>
@@ -5685,7 +5685,7 @@
           <p:cNvPr id="2" name="text-80">
             <a:extLst xmlns:a="http://schemas.openxmlformats.org/drawingml/2006/main">
               <a:ext uri="{FF2B5EF4-FFF2-40B4-BE49-F238E27FC236}">
-                <a16:creationId xmlns:a16="http://schemas.microsoft.com/office/drawing/2014/main" id="{A99BF37C-D547-41FD-88F4-7F425D5D9613}"/>
+                <a16:creationId xmlns:a16="http://schemas.microsoft.com/office/drawing/2014/main" id="{A0DB2917-D20F-4567-915B-740D059001C6}"/>
               </a:ext>
             </a:extLst>
           </p:cNvPr>
@@ -5741,7 +5741,7 @@
           <p:cNvPr id="3" name="text-81">
             <a:extLst xmlns:a="http://schemas.openxmlformats.org/drawingml/2006/main">
               <a:ext uri="{FF2B5EF4-FFF2-40B4-BE49-F238E27FC236}">
-                <a16:creationId xmlns:a16="http://schemas.microsoft.com/office/drawing/2014/main" id="{756ECBBD-B037-45E3-91E6-2290849923C9}"/>
+                <a16:creationId xmlns:a16="http://schemas.microsoft.com/office/drawing/2014/main" id="{A3D8948C-AA32-4C5E-B124-156B90FEB3F6}"/>
               </a:ext>
             </a:extLst>
           </p:cNvPr>
@@ -5797,7 +5797,7 @@
           <p:cNvPr id="4" name="text-82">
             <a:extLst xmlns:a="http://schemas.openxmlformats.org/drawingml/2006/main">
               <a:ext uri="{FF2B5EF4-FFF2-40B4-BE49-F238E27FC236}">
-                <a16:creationId xmlns:a16="http://schemas.microsoft.com/office/drawing/2014/main" id="{0212001F-FEE5-429B-987D-9F1FE28DF7F7}"/>
+                <a16:creationId xmlns:a16="http://schemas.microsoft.com/office/drawing/2014/main" id="{CCB92C04-27E5-480B-B0A7-B0764B95CD6F}"/>
               </a:ext>
             </a:extLst>
           </p:cNvPr>
@@ -5853,7 +5853,7 @@
           <p:cNvPr id="5" name="text-83">
             <a:extLst xmlns:a="http://schemas.openxmlformats.org/drawingml/2006/main">
               <a:ext uri="{FF2B5EF4-FFF2-40B4-BE49-F238E27FC236}">
-                <a16:creationId xmlns:a16="http://schemas.microsoft.com/office/drawing/2014/main" id="{9AECB58E-53C3-424C-ADD2-88FD1B464136}"/>
+                <a16:creationId xmlns:a16="http://schemas.microsoft.com/office/drawing/2014/main" id="{0439FE51-DB95-465C-83BD-62254ED32AAC}"/>
               </a:ext>
             </a:extLst>
           </p:cNvPr>
@@ -5909,7 +5909,7 @@
           <p:cNvPr id="6" name="text-84">
             <a:extLst xmlns:a="http://schemas.openxmlformats.org/drawingml/2006/main">
               <a:ext uri="{FF2B5EF4-FFF2-40B4-BE49-F238E27FC236}">
-                <a16:creationId xmlns:a16="http://schemas.microsoft.com/office/drawing/2014/main" id="{D1D4913D-8319-4B93-9EFA-ABFAAE10A3FA}"/>
+                <a16:creationId xmlns:a16="http://schemas.microsoft.com/office/drawing/2014/main" id="{13416E18-271B-4022-9CEA-BF4689CE3975}"/>
               </a:ext>
             </a:extLst>
           </p:cNvPr>
@@ -5965,7 +5965,7 @@
           <p:cNvPr id="7" name="text-85">
             <a:extLst xmlns:a="http://schemas.openxmlformats.org/drawingml/2006/main">
               <a:ext uri="{FF2B5EF4-FFF2-40B4-BE49-F238E27FC236}">
-                <a16:creationId xmlns:a16="http://schemas.microsoft.com/office/drawing/2014/main" id="{3BCF9A6E-EEA4-4B48-A4B3-925BD1CDB2AC}"/>
+                <a16:creationId xmlns:a16="http://schemas.microsoft.com/office/drawing/2014/main" id="{A630F12E-52D5-4B4A-8183-053E937DCBD5}"/>
               </a:ext>
             </a:extLst>
           </p:cNvPr>
@@ -6021,7 +6021,7 @@
           <p:cNvPr id="8" name="text-86">
             <a:extLst xmlns:a="http://schemas.openxmlformats.org/drawingml/2006/main">
               <a:ext uri="{FF2B5EF4-FFF2-40B4-BE49-F238E27FC236}">
-                <a16:creationId xmlns:a16="http://schemas.microsoft.com/office/drawing/2014/main" id="{F1389FF6-726D-4F04-A211-575F59EDA0DD}"/>
+                <a16:creationId xmlns:a16="http://schemas.microsoft.com/office/drawing/2014/main" id="{A886E92A-63A9-4C85-93A1-606D62F32B64}"/>
               </a:ext>
             </a:extLst>
           </p:cNvPr>
@@ -6067,7 +6067,7 @@
                 <a:ea typeface="Arial"/>
                 <a:cs typeface="Arial"/>
               </a:rPr>
-              <a:t>37 / 37</a:t>
+              <a:t>62 / 62</a:t>
             </a:r>
           </a:p>
         </p:txBody>
@@ -6077,7 +6077,7 @@
           <p:cNvPr id="9" name="text-87">
             <a:extLst xmlns:a="http://schemas.openxmlformats.org/drawingml/2006/main">
               <a:ext uri="{FF2B5EF4-FFF2-40B4-BE49-F238E27FC236}">
-                <a16:creationId xmlns:a16="http://schemas.microsoft.com/office/drawing/2014/main" id="{BDCAA7ED-C32E-4808-BE15-1ED317B8E66F}"/>
+                <a16:creationId xmlns:a16="http://schemas.microsoft.com/office/drawing/2014/main" id="{9CFCBADE-6F24-4659-B390-2A4B31F50A99}"/>
               </a:ext>
             </a:extLst>
           </p:cNvPr>
@@ -6133,7 +6133,7 @@
           <p:cNvPr id="10" name="text-88">
             <a:extLst xmlns:a="http://schemas.openxmlformats.org/drawingml/2006/main">
               <a:ext uri="{FF2B5EF4-FFF2-40B4-BE49-F238E27FC236}">
-                <a16:creationId xmlns:a16="http://schemas.microsoft.com/office/drawing/2014/main" id="{4CC679DE-917F-4448-8EB3-B978D4C1CD3C}"/>
+                <a16:creationId xmlns:a16="http://schemas.microsoft.com/office/drawing/2014/main" id="{52023EF2-CD78-499F-BD26-CB8B262C224C}"/>
               </a:ext>
             </a:extLst>
           </p:cNvPr>
@@ -6235,7 +6235,7 @@
           <p:cNvPr id="11" name="text-89">
             <a:extLst xmlns:a="http://schemas.openxmlformats.org/drawingml/2006/main">
               <a:ext uri="{FF2B5EF4-FFF2-40B4-BE49-F238E27FC236}">
-                <a16:creationId xmlns:a16="http://schemas.microsoft.com/office/drawing/2014/main" id="{6EFAD34B-1CF6-4255-989C-1F284B0C8282}"/>
+                <a16:creationId xmlns:a16="http://schemas.microsoft.com/office/drawing/2014/main" id="{38A0AF63-011E-4CFA-8D65-A42E74890E04}"/>
               </a:ext>
             </a:extLst>
           </p:cNvPr>
@@ -6337,7 +6337,7 @@
           <p:cNvPr id="12" name="text-90">
             <a:extLst xmlns:a="http://schemas.openxmlformats.org/drawingml/2006/main">
               <a:ext uri="{FF2B5EF4-FFF2-40B4-BE49-F238E27FC236}">
-                <a16:creationId xmlns:a16="http://schemas.microsoft.com/office/drawing/2014/main" id="{FA52ABFD-2DF6-4114-8BA3-0FD7BBB22E4B}"/>
+                <a16:creationId xmlns:a16="http://schemas.microsoft.com/office/drawing/2014/main" id="{CEBB8790-CFFB-4728-A8B2-77CC68890EC1}"/>
               </a:ext>
             </a:extLst>
           </p:cNvPr>
@@ -6439,7 +6439,7 @@
           <p:cNvPr id="13" name="box-91">
             <a:extLst xmlns:a="http://schemas.openxmlformats.org/drawingml/2006/main">
               <a:ext uri="{FF2B5EF4-FFF2-40B4-BE49-F238E27FC236}">
-                <a16:creationId xmlns:a16="http://schemas.microsoft.com/office/drawing/2014/main" id="{6ED0AE9B-C67E-4861-B2CD-00462E7D68BF}"/>
+                <a16:creationId xmlns:a16="http://schemas.microsoft.com/office/drawing/2014/main" id="{7DFC9F29-B2E6-496A-8D65-48381A89DBA2}"/>
               </a:ext>
             </a:extLst>
           </p:cNvPr>
@@ -6472,7 +6472,7 @@
           <p:cNvPr id="14" name="text-92">
             <a:extLst xmlns:a="http://schemas.openxmlformats.org/drawingml/2006/main">
               <a:ext uri="{FF2B5EF4-FFF2-40B4-BE49-F238E27FC236}">
-                <a16:creationId xmlns:a16="http://schemas.microsoft.com/office/drawing/2014/main" id="{E8DBBFCA-717C-4DB0-B85F-D96EA825642D}"/>
+                <a16:creationId xmlns:a16="http://schemas.microsoft.com/office/drawing/2014/main" id="{7911B511-86C3-439E-8558-18D721D792BD}"/>
               </a:ext>
             </a:extLst>
           </p:cNvPr>
@@ -6528,7 +6528,7 @@
           <p:cNvPr id="15" name="text-93">
             <a:extLst xmlns:a="http://schemas.openxmlformats.org/drawingml/2006/main">
               <a:ext uri="{FF2B5EF4-FFF2-40B4-BE49-F238E27FC236}">
-                <a16:creationId xmlns:a16="http://schemas.microsoft.com/office/drawing/2014/main" id="{B28C4DE0-4656-4860-A780-B2966A5C475B}"/>
+                <a16:creationId xmlns:a16="http://schemas.microsoft.com/office/drawing/2014/main" id="{2C584703-6F1A-4976-98C1-7524A165A06D}"/>
               </a:ext>
             </a:extLst>
           </p:cNvPr>
@@ -6574,7 +6574,7 @@
                 <a:ea typeface="Arial"/>
                 <a:cs typeface="Arial"/>
               </a:rPr>
-              <a:t>Windows 10/11 (x64) + macOS (Apple Silicon) — İndirme: github.com/Azizsekerdil/GermanCourseAI/releases (v1.0.0) · (özel repo)</a:t>
+              <a:t>Windows 10/11 (x64) + macOS (Apple Silicon) — İndirme: github.com/Azizsekerdil/GermanCourseAI/releases (v1.1.0) · (özel repo)</a:t>
             </a:r>
           </a:p>
         </p:txBody>
@@ -6584,7 +6584,7 @@
           <p:cNvPr id="16" name="text-94">
             <a:extLst xmlns:a="http://schemas.openxmlformats.org/drawingml/2006/main">
               <a:ext uri="{FF2B5EF4-FFF2-40B4-BE49-F238E27FC236}">
-                <a16:creationId xmlns:a16="http://schemas.microsoft.com/office/drawing/2014/main" id="{43344592-54B1-4083-821C-8E206D6C0509}"/>
+                <a16:creationId xmlns:a16="http://schemas.microsoft.com/office/drawing/2014/main" id="{C4682A17-8C90-473F-A47F-B18A8E1D31AA}"/>
               </a:ext>
             </a:extLst>
           </p:cNvPr>
@@ -6630,7 +6630,7 @@
                 <a:ea typeface="Arial"/>
                 <a:cs typeface="Arial"/>
               </a:rPr>
-              <a:t>Windows 10/11 (x64) &amp; macOS (Apple Silicon) — Download: GitHub Releases (v1.0.0)</a:t>
+              <a:t>Windows 10/11 (x64) &amp; macOS (Apple Silicon) — Download: GitHub Releases (v1.1.0)</a:t>
             </a:r>
           </a:p>
         </p:txBody>
@@ -6640,7 +6640,7 @@
           <p:cNvPr id="17" name="text-95">
             <a:extLst xmlns:a="http://schemas.openxmlformats.org/drawingml/2006/main">
               <a:ext uri="{FF2B5EF4-FFF2-40B4-BE49-F238E27FC236}">
-                <a16:creationId xmlns:a16="http://schemas.microsoft.com/office/drawing/2014/main" id="{A90367EF-B46F-4D3A-BF7C-48E42D7E0579}"/>
+                <a16:creationId xmlns:a16="http://schemas.microsoft.com/office/drawing/2014/main" id="{CCD9FD5C-AAD9-4C61-858D-E4E76559ACF4}"/>
               </a:ext>
             </a:extLst>
           </p:cNvPr>
@@ -6694,7 +6694,7 @@
     </p:spTree>
     <p:extLst>
       <p:ext uri="{BB962C8B-B14F-4D97-AF65-F5344CB8AC3E}">
-        <p14:creationId xmlns:p14="http://schemas.microsoft.com/office/powerpoint/2010/main" val="1694482741"/>
+        <p14:creationId xmlns:p14="http://schemas.microsoft.com/office/powerpoint/2010/main" val="398875267"/>
       </p:ext>
     </p:extLst>
   </p:cSld>

--- a/docs/presentation/German-Course-AI-Trilingual.pptx
+++ b/docs/presentation/German-Course-AI-Trilingual.pptx
@@ -2,18 +2,18 @@
 <file path=ppt/presentation.xml><?xml version="1.0" encoding="utf-8"?>
 <p:presentation xmlns:p="http://schemas.openxmlformats.org/presentationml/2006/main">
   <p:sldMasterIdLst>
-    <p:sldMasterId xmlns:r="http://schemas.openxmlformats.org/officeDocument/2006/relationships" id="2147483648" r:id="Rc3df0e42064342b9"/>
+    <p:sldMasterId xmlns:r="http://schemas.openxmlformats.org/officeDocument/2006/relationships" id="2147483648" r:id="R548600bc01cf4bbc"/>
   </p:sldMasterIdLst>
   <p:notesMasterIdLst>
-    <p:notesMasterId xmlns:r="http://schemas.openxmlformats.org/officeDocument/2006/relationships" r:id="R82cdf530aaf7448f"/>
+    <p:notesMasterId xmlns:r="http://schemas.openxmlformats.org/officeDocument/2006/relationships" r:id="Rf16d9462a49748c4"/>
   </p:notesMasterIdLst>
   <p:sldIdLst>
-    <p:sldId xmlns:r="http://schemas.openxmlformats.org/officeDocument/2006/relationships" id="256" r:id="Rab34e6e2d78247be"/>
-    <p:sldId xmlns:r="http://schemas.openxmlformats.org/officeDocument/2006/relationships" id="257" r:id="Rd0d7c0a2e05c41b2"/>
-    <p:sldId xmlns:r="http://schemas.openxmlformats.org/officeDocument/2006/relationships" id="258" r:id="R80bc1a4d68da4fc8"/>
-    <p:sldId xmlns:r="http://schemas.openxmlformats.org/officeDocument/2006/relationships" id="259" r:id="R725555172403485a"/>
-    <p:sldId xmlns:r="http://schemas.openxmlformats.org/officeDocument/2006/relationships" id="260" r:id="R6f02a740011246fe"/>
-    <p:sldId xmlns:r="http://schemas.openxmlformats.org/officeDocument/2006/relationships" id="261" r:id="R126b4f48316841f2"/>
+    <p:sldId xmlns:r="http://schemas.openxmlformats.org/officeDocument/2006/relationships" id="256" r:id="R22c3de62b0b34407"/>
+    <p:sldId xmlns:r="http://schemas.openxmlformats.org/officeDocument/2006/relationships" id="257" r:id="Rb8089c1bdb9846a8"/>
+    <p:sldId xmlns:r="http://schemas.openxmlformats.org/officeDocument/2006/relationships" id="258" r:id="R8e569ab685254e3c"/>
+    <p:sldId xmlns:r="http://schemas.openxmlformats.org/officeDocument/2006/relationships" id="259" r:id="R98b2cd1ea51946bd"/>
+    <p:sldId xmlns:r="http://schemas.openxmlformats.org/officeDocument/2006/relationships" id="260" r:id="R425b055be4ff453f"/>
+    <p:sldId xmlns:r="http://schemas.openxmlformats.org/officeDocument/2006/relationships" id="261" r:id="Rb97bfcfaceab4b04"/>
   </p:sldIdLst>
   <p:sldSz cx="12192000" cy="6858000"/>
   <p:notesSz cx="6858000" cy="9144000"/>
@@ -937,7 +937,7 @@
           </a:p>
           <a:p xmlns:a="http://schemas.openxmlformats.org/drawingml/2006/main">
             <a:r>
-              <a:t>- https://github.com/Azizsekerdil/GermanCourseAI/releases/tag/v1.1.0</a:t>
+              <a:t>- https://github.com/Azizsekerdil/GermanCourseAI/releases/tag/v1.1.1</a:t>
             </a:r>
           </a:p>
           <a:p xmlns:a="http://schemas.openxmlformats.org/drawingml/2006/main">
@@ -1010,7 +1010,7 @@
   </p:cSld>
   <p:clrMap bg1="lt1" tx1="dk1" bg2="lt2" tx2="dk2" accent1="accent1" accent2="accent2" accent3="accent3" accent4="accent4" accent5="accent5" accent6="accent6" hlink="hlink" folHlink="folHlink"/>
   <p:sldLayoutIdLst>
-    <p:sldLayoutId xmlns:r="http://schemas.openxmlformats.org/officeDocument/2006/relationships" id="2147483649" r:id="R75e5fe666c17482d"/>
+    <p:sldLayoutId xmlns:r="http://schemas.openxmlformats.org/officeDocument/2006/relationships" id="2147483649" r:id="Rc10bdf3010b74189"/>
   </p:sldLayoutIdLst>
   <p:txStyles>
     <p:titleStyle>
@@ -1561,7 +1561,7 @@
           <p:cNvPr id="13" name="box-1">
             <a:extLst xmlns:a="http://schemas.openxmlformats.org/drawingml/2006/main">
               <a:ext uri="{FF2B5EF4-FFF2-40B4-BE49-F238E27FC236}">
-                <a16:creationId xmlns:a16="http://schemas.microsoft.com/office/drawing/2014/main" id="{60E84CDA-2483-4BA7-A69D-C329A21487F8}"/>
+                <a16:creationId xmlns:a16="http://schemas.microsoft.com/office/drawing/2014/main" id="{81F360CB-F245-47C0-BF1C-6838DDFB7D75}"/>
               </a:ext>
             </a:extLst>
           </p:cNvPr>
@@ -1594,7 +1594,7 @@
           <p:cNvPr id="2" name="text-2">
             <a:extLst xmlns:a="http://schemas.openxmlformats.org/drawingml/2006/main">
               <a:ext uri="{FF2B5EF4-FFF2-40B4-BE49-F238E27FC236}">
-                <a16:creationId xmlns:a16="http://schemas.microsoft.com/office/drawing/2014/main" id="{91162354-2712-47C6-B1E2-3121544DFABD}"/>
+                <a16:creationId xmlns:a16="http://schemas.microsoft.com/office/drawing/2014/main" id="{EB0525FE-B9EF-4F56-94E3-D3253F03DD7B}"/>
               </a:ext>
             </a:extLst>
           </p:cNvPr>
@@ -1650,7 +1650,7 @@
           <p:cNvPr id="3" name="text-3">
             <a:extLst xmlns:a="http://schemas.openxmlformats.org/drawingml/2006/main">
               <a:ext uri="{FF2B5EF4-FFF2-40B4-BE49-F238E27FC236}">
-                <a16:creationId xmlns:a16="http://schemas.microsoft.com/office/drawing/2014/main" id="{FCE31A98-B259-4ACA-AC75-176F6F269A3A}"/>
+                <a16:creationId xmlns:a16="http://schemas.microsoft.com/office/drawing/2014/main" id="{8C381A21-F824-4D19-9B2B-7F2B1A5905C1}"/>
               </a:ext>
             </a:extLst>
           </p:cNvPr>
@@ -1706,7 +1706,7 @@
           <p:cNvPr id="4" name="text-4">
             <a:extLst xmlns:a="http://schemas.openxmlformats.org/drawingml/2006/main">
               <a:ext uri="{FF2B5EF4-FFF2-40B4-BE49-F238E27FC236}">
-                <a16:creationId xmlns:a16="http://schemas.microsoft.com/office/drawing/2014/main" id="{243CFE09-5027-487B-8D4F-3D2F33DE68DC}"/>
+                <a16:creationId xmlns:a16="http://schemas.microsoft.com/office/drawing/2014/main" id="{DC8C4126-1AE8-4567-8CFC-630A510F50AB}"/>
               </a:ext>
             </a:extLst>
           </p:cNvPr>
@@ -1762,7 +1762,7 @@
           <p:cNvPr id="5" name="text-5">
             <a:extLst xmlns:a="http://schemas.openxmlformats.org/drawingml/2006/main">
               <a:ext uri="{FF2B5EF4-FFF2-40B4-BE49-F238E27FC236}">
-                <a16:creationId xmlns:a16="http://schemas.microsoft.com/office/drawing/2014/main" id="{9744BF8E-9EC6-43D3-8136-668ED4B37498}"/>
+                <a16:creationId xmlns:a16="http://schemas.microsoft.com/office/drawing/2014/main" id="{D2B01093-D142-4E98-A5DA-392F0727C86B}"/>
               </a:ext>
             </a:extLst>
           </p:cNvPr>
@@ -1818,7 +1818,7 @@
           <p:cNvPr id="6" name="text-6">
             <a:extLst xmlns:a="http://schemas.openxmlformats.org/drawingml/2006/main">
               <a:ext uri="{FF2B5EF4-FFF2-40B4-BE49-F238E27FC236}">
-                <a16:creationId xmlns:a16="http://schemas.microsoft.com/office/drawing/2014/main" id="{84D42F99-0C16-44CA-BA33-626FB22EC341}"/>
+                <a16:creationId xmlns:a16="http://schemas.microsoft.com/office/drawing/2014/main" id="{E0CC9E1D-3FF3-4A82-9A63-0833341457C4}"/>
               </a:ext>
             </a:extLst>
           </p:cNvPr>
@@ -1874,7 +1874,7 @@
           <p:cNvPr id="7" name="text-7">
             <a:extLst xmlns:a="http://schemas.openxmlformats.org/drawingml/2006/main">
               <a:ext uri="{FF2B5EF4-FFF2-40B4-BE49-F238E27FC236}">
-                <a16:creationId xmlns:a16="http://schemas.microsoft.com/office/drawing/2014/main" id="{74856780-70B7-4AE3-9252-91A452A03643}"/>
+                <a16:creationId xmlns:a16="http://schemas.microsoft.com/office/drawing/2014/main" id="{9DBF5995-F3CD-497F-8764-AF2CC67B860E}"/>
               </a:ext>
             </a:extLst>
           </p:cNvPr>
@@ -1930,7 +1930,7 @@
           <p:cNvPr id="8" name="text-8">
             <a:extLst xmlns:a="http://schemas.openxmlformats.org/drawingml/2006/main">
               <a:ext uri="{FF2B5EF4-FFF2-40B4-BE49-F238E27FC236}">
-                <a16:creationId xmlns:a16="http://schemas.microsoft.com/office/drawing/2014/main" id="{27E066C9-D23B-40B0-BDBD-4C9994D7A9A9}"/>
+                <a16:creationId xmlns:a16="http://schemas.microsoft.com/office/drawing/2014/main" id="{E0CCFBD0-B7F1-488D-8576-764C8F14AC4D}"/>
               </a:ext>
             </a:extLst>
           </p:cNvPr>
@@ -1986,7 +1986,7 @@
           <p:cNvPr id="9" name="text-9">
             <a:extLst xmlns:a="http://schemas.openxmlformats.org/drawingml/2006/main">
               <a:ext uri="{FF2B5EF4-FFF2-40B4-BE49-F238E27FC236}">
-                <a16:creationId xmlns:a16="http://schemas.microsoft.com/office/drawing/2014/main" id="{07CCC132-E112-43E9-B254-03CF3A48DE4E}"/>
+                <a16:creationId xmlns:a16="http://schemas.microsoft.com/office/drawing/2014/main" id="{6C285D98-1C64-4C9D-AEF2-5878AF3E037F}"/>
               </a:ext>
             </a:extLst>
           </p:cNvPr>
@@ -2042,7 +2042,7 @@
           <p:cNvPr id="10" name="box-10">
             <a:extLst xmlns:a="http://schemas.openxmlformats.org/drawingml/2006/main">
               <a:ext uri="{FF2B5EF4-FFF2-40B4-BE49-F238E27FC236}">
-                <a16:creationId xmlns:a16="http://schemas.microsoft.com/office/drawing/2014/main" id="{83B89148-4383-4AFD-B9AD-97B6E2FA76D0}"/>
+                <a16:creationId xmlns:a16="http://schemas.microsoft.com/office/drawing/2014/main" id="{E449ED2E-2A73-4A37-841E-FD2C170BAD88}"/>
               </a:ext>
             </a:extLst>
           </p:cNvPr>
@@ -2079,7 +2079,7 @@
           <p:nvPr/>
         </p:nvPicPr>
         <p:blipFill>
-          <a:blip xmlns:r="http://schemas.openxmlformats.org/officeDocument/2006/relationships" xmlns:a="http://schemas.openxmlformats.org/drawingml/2006/main" r:embed="Rf54c785962df4348"/>
+          <a:blip xmlns:r="http://schemas.openxmlformats.org/officeDocument/2006/relationships" xmlns:a="http://schemas.openxmlformats.org/drawingml/2006/main" r:embed="Rc2c8495a8d724b27"/>
           <a:stretch xmlns:a="http://schemas.openxmlformats.org/drawingml/2006/main"/>
         </p:blipFill>
         <p:spPr>
@@ -2097,7 +2097,7 @@
           <p:cNvPr id="12" name="text-11">
             <a:extLst xmlns:a="http://schemas.openxmlformats.org/drawingml/2006/main">
               <a:ext uri="{FF2B5EF4-FFF2-40B4-BE49-F238E27FC236}">
-                <a16:creationId xmlns:a16="http://schemas.microsoft.com/office/drawing/2014/main" id="{494973DF-FA58-4A46-9B03-F83A595301F9}"/>
+                <a16:creationId xmlns:a16="http://schemas.microsoft.com/office/drawing/2014/main" id="{FE8EA043-F475-4F84-B0BB-0323BCD078EE}"/>
               </a:ext>
             </a:extLst>
           </p:cNvPr>
@@ -2151,7 +2151,7 @@
     </p:spTree>
     <p:extLst>
       <p:ext uri="{BB962C8B-B14F-4D97-AF65-F5344CB8AC3E}">
-        <p14:creationId xmlns:p14="http://schemas.microsoft.com/office/powerpoint/2010/main" val="633749461"/>
+        <p14:creationId xmlns:p14="http://schemas.microsoft.com/office/powerpoint/2010/main" val="783359272"/>
       </p:ext>
     </p:extLst>
   </p:cSld>
@@ -2182,7 +2182,7 @@
           <p:cNvPr id="14" name="box-12">
             <a:extLst xmlns:a="http://schemas.openxmlformats.org/drawingml/2006/main">
               <a:ext uri="{FF2B5EF4-FFF2-40B4-BE49-F238E27FC236}">
-                <a16:creationId xmlns:a16="http://schemas.microsoft.com/office/drawing/2014/main" id="{3B7E770B-4E20-4D7B-9A06-B093FA6FD7C4}"/>
+                <a16:creationId xmlns:a16="http://schemas.microsoft.com/office/drawing/2014/main" id="{5576D728-0841-4339-A34A-BCEF51E102DD}"/>
               </a:ext>
             </a:extLst>
           </p:cNvPr>
@@ -2215,7 +2215,7 @@
           <p:cNvPr id="2" name="text-13">
             <a:extLst xmlns:a="http://schemas.openxmlformats.org/drawingml/2006/main">
               <a:ext uri="{FF2B5EF4-FFF2-40B4-BE49-F238E27FC236}">
-                <a16:creationId xmlns:a16="http://schemas.microsoft.com/office/drawing/2014/main" id="{89016389-903B-4E4B-B1D6-8D2904C61FEE}"/>
+                <a16:creationId xmlns:a16="http://schemas.microsoft.com/office/drawing/2014/main" id="{22A6F555-0A0C-4874-8BD9-4F97AE325476}"/>
               </a:ext>
             </a:extLst>
           </p:cNvPr>
@@ -2271,7 +2271,7 @@
           <p:cNvPr id="3" name="text-14">
             <a:extLst xmlns:a="http://schemas.openxmlformats.org/drawingml/2006/main">
               <a:ext uri="{FF2B5EF4-FFF2-40B4-BE49-F238E27FC236}">
-                <a16:creationId xmlns:a16="http://schemas.microsoft.com/office/drawing/2014/main" id="{BC19D17F-30D5-42D7-8BBB-D6C3DED0A3B3}"/>
+                <a16:creationId xmlns:a16="http://schemas.microsoft.com/office/drawing/2014/main" id="{A6F3167B-D030-4FC2-BCBE-638C2A41942C}"/>
               </a:ext>
             </a:extLst>
           </p:cNvPr>
@@ -2327,7 +2327,7 @@
           <p:cNvPr id="4" name="text-15">
             <a:extLst xmlns:a="http://schemas.openxmlformats.org/drawingml/2006/main">
               <a:ext uri="{FF2B5EF4-FFF2-40B4-BE49-F238E27FC236}">
-                <a16:creationId xmlns:a16="http://schemas.microsoft.com/office/drawing/2014/main" id="{16DADF3D-055F-4749-B620-8E3B53C6AD9D}"/>
+                <a16:creationId xmlns:a16="http://schemas.microsoft.com/office/drawing/2014/main" id="{443D4EA4-6168-4240-AD82-F2BC42FD5806}"/>
               </a:ext>
             </a:extLst>
           </p:cNvPr>
@@ -2383,7 +2383,7 @@
           <p:cNvPr id="5" name="text-16">
             <a:extLst xmlns:a="http://schemas.openxmlformats.org/drawingml/2006/main">
               <a:ext uri="{FF2B5EF4-FFF2-40B4-BE49-F238E27FC236}">
-                <a16:creationId xmlns:a16="http://schemas.microsoft.com/office/drawing/2014/main" id="{322AACEA-3C71-4C75-9323-C4D8B6BBA156}"/>
+                <a16:creationId xmlns:a16="http://schemas.microsoft.com/office/drawing/2014/main" id="{BCA46E20-5155-48B9-B930-6C434EAABC52}"/>
               </a:ext>
             </a:extLst>
           </p:cNvPr>
@@ -2439,7 +2439,7 @@
           <p:cNvPr id="6" name="text-17">
             <a:extLst xmlns:a="http://schemas.openxmlformats.org/drawingml/2006/main">
               <a:ext uri="{FF2B5EF4-FFF2-40B4-BE49-F238E27FC236}">
-                <a16:creationId xmlns:a16="http://schemas.microsoft.com/office/drawing/2014/main" id="{C4F30ABC-63F3-4A03-ABF7-77B656F833B6}"/>
+                <a16:creationId xmlns:a16="http://schemas.microsoft.com/office/drawing/2014/main" id="{CBB092C5-C263-422D-94FF-C3E1177DA2F2}"/>
               </a:ext>
             </a:extLst>
           </p:cNvPr>
@@ -2495,7 +2495,7 @@
           <p:cNvPr id="7" name="box-18">
             <a:extLst xmlns:a="http://schemas.openxmlformats.org/drawingml/2006/main">
               <a:ext uri="{FF2B5EF4-FFF2-40B4-BE49-F238E27FC236}">
-                <a16:creationId xmlns:a16="http://schemas.microsoft.com/office/drawing/2014/main" id="{6B686A1D-3EBF-4DDE-8121-DAC0B4C14D5A}"/>
+                <a16:creationId xmlns:a16="http://schemas.microsoft.com/office/drawing/2014/main" id="{3DB9ECEC-2D33-4B99-B799-21E29F1E9958}"/>
               </a:ext>
             </a:extLst>
           </p:cNvPr>
@@ -2528,7 +2528,7 @@
           <p:cNvPr id="8" name="text-19">
             <a:extLst xmlns:a="http://schemas.openxmlformats.org/drawingml/2006/main">
               <a:ext uri="{FF2B5EF4-FFF2-40B4-BE49-F238E27FC236}">
-                <a16:creationId xmlns:a16="http://schemas.microsoft.com/office/drawing/2014/main" id="{AA755804-B2F9-4A2E-B632-BEBB7859BE2E}"/>
+                <a16:creationId xmlns:a16="http://schemas.microsoft.com/office/drawing/2014/main" id="{34195245-61CA-47F1-80FC-37C8DC147836}"/>
               </a:ext>
             </a:extLst>
           </p:cNvPr>
@@ -2584,7 +2584,7 @@
           <p:cNvPr id="9" name="text-20">
             <a:extLst xmlns:a="http://schemas.openxmlformats.org/drawingml/2006/main">
               <a:ext uri="{FF2B5EF4-FFF2-40B4-BE49-F238E27FC236}">
-                <a16:creationId xmlns:a16="http://schemas.microsoft.com/office/drawing/2014/main" id="{0568CF9E-C889-4923-8811-26D25142CBC5}"/>
+                <a16:creationId xmlns:a16="http://schemas.microsoft.com/office/drawing/2014/main" id="{A8611AF0-D060-4414-B3E0-E2FCE5737D1E}"/>
               </a:ext>
             </a:extLst>
           </p:cNvPr>
@@ -2640,7 +2640,7 @@
           <p:cNvPr id="10" name="text-21">
             <a:extLst xmlns:a="http://schemas.openxmlformats.org/drawingml/2006/main">
               <a:ext uri="{FF2B5EF4-FFF2-40B4-BE49-F238E27FC236}">
-                <a16:creationId xmlns:a16="http://schemas.microsoft.com/office/drawing/2014/main" id="{3065FC34-2AD4-4CED-AEB9-6E42A9207642}"/>
+                <a16:creationId xmlns:a16="http://schemas.microsoft.com/office/drawing/2014/main" id="{C91E01AD-DDC5-4017-8A2F-55101A6D70F9}"/>
               </a:ext>
             </a:extLst>
           </p:cNvPr>
@@ -2696,7 +2696,7 @@
           <p:cNvPr id="11" name="box-22">
             <a:extLst xmlns:a="http://schemas.openxmlformats.org/drawingml/2006/main">
               <a:ext uri="{FF2B5EF4-FFF2-40B4-BE49-F238E27FC236}">
-                <a16:creationId xmlns:a16="http://schemas.microsoft.com/office/drawing/2014/main" id="{4CC32900-600D-4282-8D5B-A13758810808}"/>
+                <a16:creationId xmlns:a16="http://schemas.microsoft.com/office/drawing/2014/main" id="{0F39A7B5-4590-4761-BF05-A4517B7CF578}"/>
               </a:ext>
             </a:extLst>
           </p:cNvPr>
@@ -2733,7 +2733,7 @@
           <p:nvPr/>
         </p:nvPicPr>
         <p:blipFill>
-          <a:blip xmlns:r="http://schemas.openxmlformats.org/officeDocument/2006/relationships" xmlns:a="http://schemas.openxmlformats.org/drawingml/2006/main" r:embed="R380cf1f110a145fb"/>
+          <a:blip xmlns:r="http://schemas.openxmlformats.org/officeDocument/2006/relationships" xmlns:a="http://schemas.openxmlformats.org/drawingml/2006/main" r:embed="R0c35db834f2048f5"/>
           <a:stretch xmlns:a="http://schemas.openxmlformats.org/drawingml/2006/main"/>
         </p:blipFill>
         <p:spPr>
@@ -2751,7 +2751,7 @@
           <p:cNvPr id="13" name="text-23">
             <a:extLst xmlns:a="http://schemas.openxmlformats.org/drawingml/2006/main">
               <a:ext uri="{FF2B5EF4-FFF2-40B4-BE49-F238E27FC236}">
-                <a16:creationId xmlns:a16="http://schemas.microsoft.com/office/drawing/2014/main" id="{A7F657A2-4A46-4E09-8DFF-D372A645B7AE}"/>
+                <a16:creationId xmlns:a16="http://schemas.microsoft.com/office/drawing/2014/main" id="{A58C3669-9383-4E7E-B900-DFF7357DBCE5}"/>
               </a:ext>
             </a:extLst>
           </p:cNvPr>
@@ -2805,7 +2805,7 @@
     </p:spTree>
     <p:extLst>
       <p:ext uri="{BB962C8B-B14F-4D97-AF65-F5344CB8AC3E}">
-        <p14:creationId xmlns:p14="http://schemas.microsoft.com/office/powerpoint/2010/main" val="1422485868"/>
+        <p14:creationId xmlns:p14="http://schemas.microsoft.com/office/powerpoint/2010/main" val="609993174"/>
       </p:ext>
     </p:extLst>
   </p:cSld>
@@ -2836,7 +2836,7 @@
           <p:cNvPr id="19" name="box-24">
             <a:extLst xmlns:a="http://schemas.openxmlformats.org/drawingml/2006/main">
               <a:ext uri="{FF2B5EF4-FFF2-40B4-BE49-F238E27FC236}">
-                <a16:creationId xmlns:a16="http://schemas.microsoft.com/office/drawing/2014/main" id="{943E1645-AE52-4A29-BB6B-FF8A004E8922}"/>
+                <a16:creationId xmlns:a16="http://schemas.microsoft.com/office/drawing/2014/main" id="{6FB6DBE0-82D5-4D64-8ED5-B48CC2A9EB28}"/>
               </a:ext>
             </a:extLst>
           </p:cNvPr>
@@ -2869,7 +2869,7 @@
           <p:cNvPr id="2" name="text-25">
             <a:extLst xmlns:a="http://schemas.openxmlformats.org/drawingml/2006/main">
               <a:ext uri="{FF2B5EF4-FFF2-40B4-BE49-F238E27FC236}">
-                <a16:creationId xmlns:a16="http://schemas.microsoft.com/office/drawing/2014/main" id="{7C7134F1-A8C7-4AFB-8B28-2F8234A1F16C}"/>
+                <a16:creationId xmlns:a16="http://schemas.microsoft.com/office/drawing/2014/main" id="{B4954BA7-7071-4656-89BF-41FEBCE51999}"/>
               </a:ext>
             </a:extLst>
           </p:cNvPr>
@@ -2925,7 +2925,7 @@
           <p:cNvPr id="3" name="text-26">
             <a:extLst xmlns:a="http://schemas.openxmlformats.org/drawingml/2006/main">
               <a:ext uri="{FF2B5EF4-FFF2-40B4-BE49-F238E27FC236}">
-                <a16:creationId xmlns:a16="http://schemas.microsoft.com/office/drawing/2014/main" id="{EF3DCF60-B307-4B4D-81C3-C349685EFC6A}"/>
+                <a16:creationId xmlns:a16="http://schemas.microsoft.com/office/drawing/2014/main" id="{A0910647-0F3E-418D-B2B3-25F1420BCCF4}"/>
               </a:ext>
             </a:extLst>
           </p:cNvPr>
@@ -2981,7 +2981,7 @@
           <p:cNvPr id="4" name="text-27">
             <a:extLst xmlns:a="http://schemas.openxmlformats.org/drawingml/2006/main">
               <a:ext uri="{FF2B5EF4-FFF2-40B4-BE49-F238E27FC236}">
-                <a16:creationId xmlns:a16="http://schemas.microsoft.com/office/drawing/2014/main" id="{ECB3A8EF-F9E2-4E9E-86C7-E4AE38F02406}"/>
+                <a16:creationId xmlns:a16="http://schemas.microsoft.com/office/drawing/2014/main" id="{537B9348-3368-4D45-B079-497BACE86840}"/>
               </a:ext>
             </a:extLst>
           </p:cNvPr>
@@ -3037,7 +3037,7 @@
           <p:cNvPr id="5" name="text-28">
             <a:extLst xmlns:a="http://schemas.openxmlformats.org/drawingml/2006/main">
               <a:ext uri="{FF2B5EF4-FFF2-40B4-BE49-F238E27FC236}">
-                <a16:creationId xmlns:a16="http://schemas.microsoft.com/office/drawing/2014/main" id="{ED077FD1-F991-4063-96C8-E9186895AAA6}"/>
+                <a16:creationId xmlns:a16="http://schemas.microsoft.com/office/drawing/2014/main" id="{C732B4A5-D049-4A7A-AC0A-DEA684D95987}"/>
               </a:ext>
             </a:extLst>
           </p:cNvPr>
@@ -3093,7 +3093,7 @@
           <p:cNvPr id="6" name="text-29">
             <a:extLst xmlns:a="http://schemas.openxmlformats.org/drawingml/2006/main">
               <a:ext uri="{FF2B5EF4-FFF2-40B4-BE49-F238E27FC236}">
-                <a16:creationId xmlns:a16="http://schemas.microsoft.com/office/drawing/2014/main" id="{6751435A-A35C-4058-BCF4-1AEEFD8C27D4}"/>
+                <a16:creationId xmlns:a16="http://schemas.microsoft.com/office/drawing/2014/main" id="{E946BCDC-708D-4EDD-B088-38A38A74F002}"/>
               </a:ext>
             </a:extLst>
           </p:cNvPr>
@@ -3149,7 +3149,7 @@
           <p:cNvPr id="7" name="box-30">
             <a:extLst xmlns:a="http://schemas.openxmlformats.org/drawingml/2006/main">
               <a:ext uri="{FF2B5EF4-FFF2-40B4-BE49-F238E27FC236}">
-                <a16:creationId xmlns:a16="http://schemas.microsoft.com/office/drawing/2014/main" id="{AE12F696-82E6-428C-8271-95724CBA197A}"/>
+                <a16:creationId xmlns:a16="http://schemas.microsoft.com/office/drawing/2014/main" id="{608D1953-C335-4654-AC1E-A7ABC7714801}"/>
               </a:ext>
             </a:extLst>
           </p:cNvPr>
@@ -3182,7 +3182,7 @@
           <p:cNvPr id="8" name="text-31">
             <a:extLst xmlns:a="http://schemas.openxmlformats.org/drawingml/2006/main">
               <a:ext uri="{FF2B5EF4-FFF2-40B4-BE49-F238E27FC236}">
-                <a16:creationId xmlns:a16="http://schemas.microsoft.com/office/drawing/2014/main" id="{3856C250-7106-47B3-8D2D-8C19457E5272}"/>
+                <a16:creationId xmlns:a16="http://schemas.microsoft.com/office/drawing/2014/main" id="{160EC7DA-4FDB-4ACD-8007-DE0D96EB284B}"/>
               </a:ext>
             </a:extLst>
           </p:cNvPr>
@@ -3238,7 +3238,7 @@
           <p:cNvPr id="9" name="text-32">
             <a:extLst xmlns:a="http://schemas.openxmlformats.org/drawingml/2006/main">
               <a:ext uri="{FF2B5EF4-FFF2-40B4-BE49-F238E27FC236}">
-                <a16:creationId xmlns:a16="http://schemas.microsoft.com/office/drawing/2014/main" id="{74457DEF-6EB0-4F9E-8E2C-B60A0F3A3EFF}"/>
+                <a16:creationId xmlns:a16="http://schemas.microsoft.com/office/drawing/2014/main" id="{319F383F-646D-4C09-9B98-DD78EF58342C}"/>
               </a:ext>
             </a:extLst>
           </p:cNvPr>
@@ -3294,7 +3294,7 @@
           <p:cNvPr id="10" name="text-33">
             <a:extLst xmlns:a="http://schemas.openxmlformats.org/drawingml/2006/main">
               <a:ext uri="{FF2B5EF4-FFF2-40B4-BE49-F238E27FC236}">
-                <a16:creationId xmlns:a16="http://schemas.microsoft.com/office/drawing/2014/main" id="{E0DB7838-EF24-44E1-B81B-0037CD409262}"/>
+                <a16:creationId xmlns:a16="http://schemas.microsoft.com/office/drawing/2014/main" id="{62BF7118-48EF-4694-98E9-E14F052E9195}"/>
               </a:ext>
             </a:extLst>
           </p:cNvPr>
@@ -3350,7 +3350,7 @@
           <p:cNvPr id="11" name="box-34">
             <a:extLst xmlns:a="http://schemas.openxmlformats.org/drawingml/2006/main">
               <a:ext uri="{FF2B5EF4-FFF2-40B4-BE49-F238E27FC236}">
-                <a16:creationId xmlns:a16="http://schemas.microsoft.com/office/drawing/2014/main" id="{A8EB057F-9F1F-4DE6-AD6B-C3F1874661DC}"/>
+                <a16:creationId xmlns:a16="http://schemas.microsoft.com/office/drawing/2014/main" id="{96CEB6BA-6696-4003-B163-DD2DC3EC64E9}"/>
               </a:ext>
             </a:extLst>
           </p:cNvPr>
@@ -3383,7 +3383,7 @@
           <p:cNvPr id="12" name="text-35">
             <a:extLst xmlns:a="http://schemas.openxmlformats.org/drawingml/2006/main">
               <a:ext uri="{FF2B5EF4-FFF2-40B4-BE49-F238E27FC236}">
-                <a16:creationId xmlns:a16="http://schemas.microsoft.com/office/drawing/2014/main" id="{3601A569-4C64-4FE3-9787-F20BCC4F6ECD}"/>
+                <a16:creationId xmlns:a16="http://schemas.microsoft.com/office/drawing/2014/main" id="{A33B70D7-4BDF-455B-A60B-CD99CF166604}"/>
               </a:ext>
             </a:extLst>
           </p:cNvPr>
@@ -3439,7 +3439,7 @@
           <p:cNvPr id="13" name="text-36">
             <a:extLst xmlns:a="http://schemas.openxmlformats.org/drawingml/2006/main">
               <a:ext uri="{FF2B5EF4-FFF2-40B4-BE49-F238E27FC236}">
-                <a16:creationId xmlns:a16="http://schemas.microsoft.com/office/drawing/2014/main" id="{B673AA3A-46F8-4978-B790-FDD53C996D1E}"/>
+                <a16:creationId xmlns:a16="http://schemas.microsoft.com/office/drawing/2014/main" id="{F40D4C2C-C5D2-48E1-9F75-BA59443C1551}"/>
               </a:ext>
             </a:extLst>
           </p:cNvPr>
@@ -3495,7 +3495,7 @@
           <p:cNvPr id="14" name="text-37">
             <a:extLst xmlns:a="http://schemas.openxmlformats.org/drawingml/2006/main">
               <a:ext uri="{FF2B5EF4-FFF2-40B4-BE49-F238E27FC236}">
-                <a16:creationId xmlns:a16="http://schemas.microsoft.com/office/drawing/2014/main" id="{F6FCED6C-AFC8-4336-8814-6F718BB1D947}"/>
+                <a16:creationId xmlns:a16="http://schemas.microsoft.com/office/drawing/2014/main" id="{6629592E-453F-44C7-ADEA-47135C01EF47}"/>
               </a:ext>
             </a:extLst>
           </p:cNvPr>
@@ -3551,7 +3551,7 @@
           <p:cNvPr id="15" name="box-38">
             <a:extLst xmlns:a="http://schemas.openxmlformats.org/drawingml/2006/main">
               <a:ext uri="{FF2B5EF4-FFF2-40B4-BE49-F238E27FC236}">
-                <a16:creationId xmlns:a16="http://schemas.microsoft.com/office/drawing/2014/main" id="{BD95697C-B12B-4674-A1F3-BFC039420D24}"/>
+                <a16:creationId xmlns:a16="http://schemas.microsoft.com/office/drawing/2014/main" id="{8FC5A985-9A64-4F4D-9277-542E4D3F239F}"/>
               </a:ext>
             </a:extLst>
           </p:cNvPr>
@@ -3584,7 +3584,7 @@
           <p:cNvPr id="16" name="text-39">
             <a:extLst xmlns:a="http://schemas.openxmlformats.org/drawingml/2006/main">
               <a:ext uri="{FF2B5EF4-FFF2-40B4-BE49-F238E27FC236}">
-                <a16:creationId xmlns:a16="http://schemas.microsoft.com/office/drawing/2014/main" id="{B1E1E57D-6335-4A7D-BE1C-D271D2CB9088}"/>
+                <a16:creationId xmlns:a16="http://schemas.microsoft.com/office/drawing/2014/main" id="{836C5D1A-9B89-466B-BF2C-E1FCCA46206E}"/>
               </a:ext>
             </a:extLst>
           </p:cNvPr>
@@ -3640,7 +3640,7 @@
           <p:cNvPr id="17" name="text-40">
             <a:extLst xmlns:a="http://schemas.openxmlformats.org/drawingml/2006/main">
               <a:ext uri="{FF2B5EF4-FFF2-40B4-BE49-F238E27FC236}">
-                <a16:creationId xmlns:a16="http://schemas.microsoft.com/office/drawing/2014/main" id="{C3973787-5AC2-4D69-B139-B3D3A7B83C19}"/>
+                <a16:creationId xmlns:a16="http://schemas.microsoft.com/office/drawing/2014/main" id="{FD0220FF-A81F-4F79-BCDC-4BFE9D075615}"/>
               </a:ext>
             </a:extLst>
           </p:cNvPr>
@@ -3696,7 +3696,7 @@
           <p:cNvPr id="18" name="text-41">
             <a:extLst xmlns:a="http://schemas.openxmlformats.org/drawingml/2006/main">
               <a:ext uri="{FF2B5EF4-FFF2-40B4-BE49-F238E27FC236}">
-                <a16:creationId xmlns:a16="http://schemas.microsoft.com/office/drawing/2014/main" id="{23FD175E-2C1E-40B6-A6AE-4B6B6CFEC2CC}"/>
+                <a16:creationId xmlns:a16="http://schemas.microsoft.com/office/drawing/2014/main" id="{017FFD23-C791-4595-98FD-89BC5B398B97}"/>
               </a:ext>
             </a:extLst>
           </p:cNvPr>
@@ -3750,7 +3750,7 @@
     </p:spTree>
     <p:extLst>
       <p:ext uri="{BB962C8B-B14F-4D97-AF65-F5344CB8AC3E}">
-        <p14:creationId xmlns:p14="http://schemas.microsoft.com/office/powerpoint/2010/main" val="620517035"/>
+        <p14:creationId xmlns:p14="http://schemas.microsoft.com/office/powerpoint/2010/main" val="1473192633"/>
       </p:ext>
     </p:extLst>
   </p:cSld>
@@ -3781,7 +3781,7 @@
           <p:cNvPr id="18" name="box-42">
             <a:extLst xmlns:a="http://schemas.openxmlformats.org/drawingml/2006/main">
               <a:ext uri="{FF2B5EF4-FFF2-40B4-BE49-F238E27FC236}">
-                <a16:creationId xmlns:a16="http://schemas.microsoft.com/office/drawing/2014/main" id="{7E981942-C320-4258-9E78-F7EFAEF1F2BE}"/>
+                <a16:creationId xmlns:a16="http://schemas.microsoft.com/office/drawing/2014/main" id="{F1EA8EE1-1BA4-4BB7-BFE4-4E4FDB342FFD}"/>
               </a:ext>
             </a:extLst>
           </p:cNvPr>
@@ -3814,7 +3814,7 @@
           <p:cNvPr id="2" name="text-43">
             <a:extLst xmlns:a="http://schemas.openxmlformats.org/drawingml/2006/main">
               <a:ext uri="{FF2B5EF4-FFF2-40B4-BE49-F238E27FC236}">
-                <a16:creationId xmlns:a16="http://schemas.microsoft.com/office/drawing/2014/main" id="{30CD9EC4-A691-4317-99FC-131124C18C78}"/>
+                <a16:creationId xmlns:a16="http://schemas.microsoft.com/office/drawing/2014/main" id="{73A78BEF-41F4-4101-8384-C4CBB469883D}"/>
               </a:ext>
             </a:extLst>
           </p:cNvPr>
@@ -3870,7 +3870,7 @@
           <p:cNvPr id="3" name="text-44">
             <a:extLst xmlns:a="http://schemas.openxmlformats.org/drawingml/2006/main">
               <a:ext uri="{FF2B5EF4-FFF2-40B4-BE49-F238E27FC236}">
-                <a16:creationId xmlns:a16="http://schemas.microsoft.com/office/drawing/2014/main" id="{0090CD20-49BB-4940-A075-5A3F658F6F81}"/>
+                <a16:creationId xmlns:a16="http://schemas.microsoft.com/office/drawing/2014/main" id="{B1C29325-E632-47AB-A551-D1BDB5A1C943}"/>
               </a:ext>
             </a:extLst>
           </p:cNvPr>
@@ -3926,7 +3926,7 @@
           <p:cNvPr id="4" name="text-45">
             <a:extLst xmlns:a="http://schemas.openxmlformats.org/drawingml/2006/main">
               <a:ext uri="{FF2B5EF4-FFF2-40B4-BE49-F238E27FC236}">
-                <a16:creationId xmlns:a16="http://schemas.microsoft.com/office/drawing/2014/main" id="{353774AE-06D0-466C-866A-644C367CF008}"/>
+                <a16:creationId xmlns:a16="http://schemas.microsoft.com/office/drawing/2014/main" id="{3384D07F-C00D-457E-B818-513D13ED5985}"/>
               </a:ext>
             </a:extLst>
           </p:cNvPr>
@@ -3982,7 +3982,7 @@
           <p:cNvPr id="5" name="text-46">
             <a:extLst xmlns:a="http://schemas.openxmlformats.org/drawingml/2006/main">
               <a:ext uri="{FF2B5EF4-FFF2-40B4-BE49-F238E27FC236}">
-                <a16:creationId xmlns:a16="http://schemas.microsoft.com/office/drawing/2014/main" id="{2B7519C6-15B7-4B96-9FC7-AE3F8F2F2D31}"/>
+                <a16:creationId xmlns:a16="http://schemas.microsoft.com/office/drawing/2014/main" id="{47E2A02E-02EF-40E3-ABC3-F716E7773EB4}"/>
               </a:ext>
             </a:extLst>
           </p:cNvPr>
@@ -4038,7 +4038,7 @@
           <p:cNvPr id="6" name="box-47">
             <a:extLst xmlns:a="http://schemas.openxmlformats.org/drawingml/2006/main">
               <a:ext uri="{FF2B5EF4-FFF2-40B4-BE49-F238E27FC236}">
-                <a16:creationId xmlns:a16="http://schemas.microsoft.com/office/drawing/2014/main" id="{74566E6C-236B-4CC3-916D-46B99670C5DC}"/>
+                <a16:creationId xmlns:a16="http://schemas.microsoft.com/office/drawing/2014/main" id="{0F9FD743-CE34-4C36-B9BA-FC0C52B9A14D}"/>
               </a:ext>
             </a:extLst>
           </p:cNvPr>
@@ -4071,7 +4071,7 @@
           <p:cNvPr id="7" name="text-48">
             <a:extLst xmlns:a="http://schemas.openxmlformats.org/drawingml/2006/main">
               <a:ext uri="{FF2B5EF4-FFF2-40B4-BE49-F238E27FC236}">
-                <a16:creationId xmlns:a16="http://schemas.microsoft.com/office/drawing/2014/main" id="{22DE2E25-1B31-4DFF-8BBA-648F8726231E}"/>
+                <a16:creationId xmlns:a16="http://schemas.microsoft.com/office/drawing/2014/main" id="{6A7A53CF-A6A3-42E6-8256-6B999B3AD7CF}"/>
               </a:ext>
             </a:extLst>
           </p:cNvPr>
@@ -4127,7 +4127,7 @@
           <p:cNvPr id="8" name="text-49">
             <a:extLst xmlns:a="http://schemas.openxmlformats.org/drawingml/2006/main">
               <a:ext uri="{FF2B5EF4-FFF2-40B4-BE49-F238E27FC236}">
-                <a16:creationId xmlns:a16="http://schemas.microsoft.com/office/drawing/2014/main" id="{8B5CB087-C51A-41B5-ADE0-8E63966D84E7}"/>
+                <a16:creationId xmlns:a16="http://schemas.microsoft.com/office/drawing/2014/main" id="{5FF2C07A-97A6-4AAC-902F-D74599A5757E}"/>
               </a:ext>
             </a:extLst>
           </p:cNvPr>
@@ -4183,7 +4183,7 @@
           <p:cNvPr id="9" name="box-50">
             <a:extLst xmlns:a="http://schemas.openxmlformats.org/drawingml/2006/main">
               <a:ext uri="{FF2B5EF4-FFF2-40B4-BE49-F238E27FC236}">
-                <a16:creationId xmlns:a16="http://schemas.microsoft.com/office/drawing/2014/main" id="{851A69E4-E758-4992-92A6-A6EFE47CC204}"/>
+                <a16:creationId xmlns:a16="http://schemas.microsoft.com/office/drawing/2014/main" id="{C31B7107-251C-4712-9393-F636DA907733}"/>
               </a:ext>
             </a:extLst>
           </p:cNvPr>
@@ -4216,7 +4216,7 @@
           <p:cNvPr id="10" name="text-51">
             <a:extLst xmlns:a="http://schemas.openxmlformats.org/drawingml/2006/main">
               <a:ext uri="{FF2B5EF4-FFF2-40B4-BE49-F238E27FC236}">
-                <a16:creationId xmlns:a16="http://schemas.microsoft.com/office/drawing/2014/main" id="{1828B18D-EDCA-4F21-A9DD-A811BA430D19}"/>
+                <a16:creationId xmlns:a16="http://schemas.microsoft.com/office/drawing/2014/main" id="{668A5964-D75C-4559-A853-F573077B5937}"/>
               </a:ext>
             </a:extLst>
           </p:cNvPr>
@@ -4272,7 +4272,7 @@
           <p:cNvPr id="11" name="text-52">
             <a:extLst xmlns:a="http://schemas.openxmlformats.org/drawingml/2006/main">
               <a:ext uri="{FF2B5EF4-FFF2-40B4-BE49-F238E27FC236}">
-                <a16:creationId xmlns:a16="http://schemas.microsoft.com/office/drawing/2014/main" id="{2CAABE89-A1C7-4263-9275-0DB09EB77F09}"/>
+                <a16:creationId xmlns:a16="http://schemas.microsoft.com/office/drawing/2014/main" id="{146FFFC5-0DE8-49F6-B26B-3A063C2D5913}"/>
               </a:ext>
             </a:extLst>
           </p:cNvPr>
@@ -4328,7 +4328,7 @@
           <p:cNvPr id="12" name="box-53">
             <a:extLst xmlns:a="http://schemas.openxmlformats.org/drawingml/2006/main">
               <a:ext uri="{FF2B5EF4-FFF2-40B4-BE49-F238E27FC236}">
-                <a16:creationId xmlns:a16="http://schemas.microsoft.com/office/drawing/2014/main" id="{FA602EC5-81DC-449D-BE46-A67E8EE7CE66}"/>
+                <a16:creationId xmlns:a16="http://schemas.microsoft.com/office/drawing/2014/main" id="{9EBB08A0-B35E-4C63-BB90-CB2B08A5C2B2}"/>
               </a:ext>
             </a:extLst>
           </p:cNvPr>
@@ -4361,7 +4361,7 @@
           <p:cNvPr id="13" name="text-54">
             <a:extLst xmlns:a="http://schemas.openxmlformats.org/drawingml/2006/main">
               <a:ext uri="{FF2B5EF4-FFF2-40B4-BE49-F238E27FC236}">
-                <a16:creationId xmlns:a16="http://schemas.microsoft.com/office/drawing/2014/main" id="{DA92A6E9-BFE8-4ADB-AE14-004E39DF76B5}"/>
+                <a16:creationId xmlns:a16="http://schemas.microsoft.com/office/drawing/2014/main" id="{F1F5444E-E382-49FF-B749-94130EFAB7D4}"/>
               </a:ext>
             </a:extLst>
           </p:cNvPr>
@@ -4417,7 +4417,7 @@
           <p:cNvPr id="14" name="text-55">
             <a:extLst xmlns:a="http://schemas.openxmlformats.org/drawingml/2006/main">
               <a:ext uri="{FF2B5EF4-FFF2-40B4-BE49-F238E27FC236}">
-                <a16:creationId xmlns:a16="http://schemas.microsoft.com/office/drawing/2014/main" id="{94931C97-DB30-4C61-8436-518E09EC99B7}"/>
+                <a16:creationId xmlns:a16="http://schemas.microsoft.com/office/drawing/2014/main" id="{3CE32CD1-AD16-4749-AFF1-8FAF1A014F84}"/>
               </a:ext>
             </a:extLst>
           </p:cNvPr>
@@ -4473,7 +4473,7 @@
           <p:cNvPr id="15" name="box-56">
             <a:extLst xmlns:a="http://schemas.openxmlformats.org/drawingml/2006/main">
               <a:ext uri="{FF2B5EF4-FFF2-40B4-BE49-F238E27FC236}">
-                <a16:creationId xmlns:a16="http://schemas.microsoft.com/office/drawing/2014/main" id="{E494B4F7-C2D4-4B62-B849-F2BF4689B889}"/>
+                <a16:creationId xmlns:a16="http://schemas.microsoft.com/office/drawing/2014/main" id="{15C21E6E-4812-4CB0-9144-C9B8956E0620}"/>
               </a:ext>
             </a:extLst>
           </p:cNvPr>
@@ -4506,7 +4506,7 @@
           <p:cNvPr id="16" name="text-57">
             <a:extLst xmlns:a="http://schemas.openxmlformats.org/drawingml/2006/main">
               <a:ext uri="{FF2B5EF4-FFF2-40B4-BE49-F238E27FC236}">
-                <a16:creationId xmlns:a16="http://schemas.microsoft.com/office/drawing/2014/main" id="{DA3BEE73-D124-4B40-A892-7D233EB19464}"/>
+                <a16:creationId xmlns:a16="http://schemas.microsoft.com/office/drawing/2014/main" id="{FDCAEB70-D605-46B9-8BB8-4DC6CFDB4B66}"/>
               </a:ext>
             </a:extLst>
           </p:cNvPr>
@@ -4562,7 +4562,7 @@
           <p:cNvPr id="17" name="text-58">
             <a:extLst xmlns:a="http://schemas.openxmlformats.org/drawingml/2006/main">
               <a:ext uri="{FF2B5EF4-FFF2-40B4-BE49-F238E27FC236}">
-                <a16:creationId xmlns:a16="http://schemas.microsoft.com/office/drawing/2014/main" id="{2B1A9361-254C-49BA-87BB-109053AFC2F8}"/>
+                <a16:creationId xmlns:a16="http://schemas.microsoft.com/office/drawing/2014/main" id="{F42E5636-71E0-42B0-9E7A-D010A3029FBD}"/>
               </a:ext>
             </a:extLst>
           </p:cNvPr>
@@ -4616,7 +4616,7 @@
     </p:spTree>
     <p:extLst>
       <p:ext uri="{BB962C8B-B14F-4D97-AF65-F5344CB8AC3E}">
-        <p14:creationId xmlns:p14="http://schemas.microsoft.com/office/powerpoint/2010/main" val="1419821640"/>
+        <p14:creationId xmlns:p14="http://schemas.microsoft.com/office/powerpoint/2010/main" val="1289268093"/>
       </p:ext>
     </p:extLst>
   </p:cSld>
@@ -4647,7 +4647,7 @@
           <p:cNvPr id="21" name="box-59">
             <a:extLst xmlns:a="http://schemas.openxmlformats.org/drawingml/2006/main">
               <a:ext uri="{FF2B5EF4-FFF2-40B4-BE49-F238E27FC236}">
-                <a16:creationId xmlns:a16="http://schemas.microsoft.com/office/drawing/2014/main" id="{EFABBF47-78FA-499B-8B99-F7AE37EEC006}"/>
+                <a16:creationId xmlns:a16="http://schemas.microsoft.com/office/drawing/2014/main" id="{2D13435A-2ED0-4CCD-8538-F1D6B4FE3BB8}"/>
               </a:ext>
             </a:extLst>
           </p:cNvPr>
@@ -4680,7 +4680,7 @@
           <p:cNvPr id="2" name="text-60">
             <a:extLst xmlns:a="http://schemas.openxmlformats.org/drawingml/2006/main">
               <a:ext uri="{FF2B5EF4-FFF2-40B4-BE49-F238E27FC236}">
-                <a16:creationId xmlns:a16="http://schemas.microsoft.com/office/drawing/2014/main" id="{A42CD519-A78B-45D3-9411-3B3C5339AC93}"/>
+                <a16:creationId xmlns:a16="http://schemas.microsoft.com/office/drawing/2014/main" id="{DB47F362-F6A5-49CC-AA41-8B521F4D4410}"/>
               </a:ext>
             </a:extLst>
           </p:cNvPr>
@@ -4736,7 +4736,7 @@
           <p:cNvPr id="3" name="text-61">
             <a:extLst xmlns:a="http://schemas.openxmlformats.org/drawingml/2006/main">
               <a:ext uri="{FF2B5EF4-FFF2-40B4-BE49-F238E27FC236}">
-                <a16:creationId xmlns:a16="http://schemas.microsoft.com/office/drawing/2014/main" id="{AC5D2B91-A98C-427F-B9F5-83B0C000439E}"/>
+                <a16:creationId xmlns:a16="http://schemas.microsoft.com/office/drawing/2014/main" id="{0795BA14-26A4-432B-9999-C6B7674F2972}"/>
               </a:ext>
             </a:extLst>
           </p:cNvPr>
@@ -4792,7 +4792,7 @@
           <p:cNvPr id="4" name="text-62">
             <a:extLst xmlns:a="http://schemas.openxmlformats.org/drawingml/2006/main">
               <a:ext uri="{FF2B5EF4-FFF2-40B4-BE49-F238E27FC236}">
-                <a16:creationId xmlns:a16="http://schemas.microsoft.com/office/drawing/2014/main" id="{FB519E1E-4529-4F05-8623-1366BF2A7128}"/>
+                <a16:creationId xmlns:a16="http://schemas.microsoft.com/office/drawing/2014/main" id="{064DD05F-1241-48E6-BC98-7C1462FF463B}"/>
               </a:ext>
             </a:extLst>
           </p:cNvPr>
@@ -4848,7 +4848,7 @@
           <p:cNvPr id="5" name="text-63">
             <a:extLst xmlns:a="http://schemas.openxmlformats.org/drawingml/2006/main">
               <a:ext uri="{FF2B5EF4-FFF2-40B4-BE49-F238E27FC236}">
-                <a16:creationId xmlns:a16="http://schemas.microsoft.com/office/drawing/2014/main" id="{3DFFFBE2-57FE-4C2D-87F5-3EF38EFB7BCF}"/>
+                <a16:creationId xmlns:a16="http://schemas.microsoft.com/office/drawing/2014/main" id="{C98DEFCF-E1F8-4C76-B816-B0F38B042388}"/>
               </a:ext>
             </a:extLst>
           </p:cNvPr>
@@ -4904,7 +4904,7 @@
           <p:cNvPr id="6" name="box-64">
             <a:extLst xmlns:a="http://schemas.openxmlformats.org/drawingml/2006/main">
               <a:ext uri="{FF2B5EF4-FFF2-40B4-BE49-F238E27FC236}">
-                <a16:creationId xmlns:a16="http://schemas.microsoft.com/office/drawing/2014/main" id="{E6E2586F-FA23-4DA8-817D-179AC1AC6991}"/>
+                <a16:creationId xmlns:a16="http://schemas.microsoft.com/office/drawing/2014/main" id="{8E81072C-3F07-4F2C-A142-2ACB840CEA80}"/>
               </a:ext>
             </a:extLst>
           </p:cNvPr>
@@ -4937,7 +4937,7 @@
           <p:cNvPr id="7" name="dot-65">
             <a:extLst xmlns:a="http://schemas.openxmlformats.org/drawingml/2006/main">
               <a:ext uri="{FF2B5EF4-FFF2-40B4-BE49-F238E27FC236}">
-                <a16:creationId xmlns:a16="http://schemas.microsoft.com/office/drawing/2014/main" id="{2E11607D-5B2E-47FB-AE14-D5432D3A6B83}"/>
+                <a16:creationId xmlns:a16="http://schemas.microsoft.com/office/drawing/2014/main" id="{3FE56057-690B-4D01-8721-3FAD65D37A0D}"/>
               </a:ext>
             </a:extLst>
           </p:cNvPr>
@@ -4968,7 +4968,7 @@
           <p:cNvPr id="8" name="text-66">
             <a:extLst xmlns:a="http://schemas.openxmlformats.org/drawingml/2006/main">
               <a:ext uri="{FF2B5EF4-FFF2-40B4-BE49-F238E27FC236}">
-                <a16:creationId xmlns:a16="http://schemas.microsoft.com/office/drawing/2014/main" id="{5C1630E7-4328-4BB9-AF8C-C307CD66F84E}"/>
+                <a16:creationId xmlns:a16="http://schemas.microsoft.com/office/drawing/2014/main" id="{58341DFA-2224-47A4-BC55-E765698D68E8}"/>
               </a:ext>
             </a:extLst>
           </p:cNvPr>
@@ -5024,7 +5024,7 @@
           <p:cNvPr id="9" name="text-67">
             <a:extLst xmlns:a="http://schemas.openxmlformats.org/drawingml/2006/main">
               <a:ext uri="{FF2B5EF4-FFF2-40B4-BE49-F238E27FC236}">
-                <a16:creationId xmlns:a16="http://schemas.microsoft.com/office/drawing/2014/main" id="{7540D09C-AD8B-49AD-B321-73190E790F2B}"/>
+                <a16:creationId xmlns:a16="http://schemas.microsoft.com/office/drawing/2014/main" id="{9B73D8C9-9F82-458C-858E-82DA6A26AD0E}"/>
               </a:ext>
             </a:extLst>
           </p:cNvPr>
@@ -5080,7 +5080,7 @@
           <p:cNvPr id="10" name="text-68">
             <a:extLst xmlns:a="http://schemas.openxmlformats.org/drawingml/2006/main">
               <a:ext uri="{FF2B5EF4-FFF2-40B4-BE49-F238E27FC236}">
-                <a16:creationId xmlns:a16="http://schemas.microsoft.com/office/drawing/2014/main" id="{E8CD00E2-9D2C-4A24-A431-2F48BFA5C892}"/>
+                <a16:creationId xmlns:a16="http://schemas.microsoft.com/office/drawing/2014/main" id="{DEC681D7-D6EF-4DDF-BD91-1AE55F33C4CA}"/>
               </a:ext>
             </a:extLst>
           </p:cNvPr>
@@ -5136,7 +5136,7 @@
           <p:cNvPr id="11" name="dot-69">
             <a:extLst xmlns:a="http://schemas.openxmlformats.org/drawingml/2006/main">
               <a:ext uri="{FF2B5EF4-FFF2-40B4-BE49-F238E27FC236}">
-                <a16:creationId xmlns:a16="http://schemas.microsoft.com/office/drawing/2014/main" id="{5588B9F4-A645-4A32-9BBA-BD99A11DF35F}"/>
+                <a16:creationId xmlns:a16="http://schemas.microsoft.com/office/drawing/2014/main" id="{A04C76ED-897D-4D7E-9787-A0D2CA2FB496}"/>
               </a:ext>
             </a:extLst>
           </p:cNvPr>
@@ -5167,7 +5167,7 @@
           <p:cNvPr id="12" name="text-70">
             <a:extLst xmlns:a="http://schemas.openxmlformats.org/drawingml/2006/main">
               <a:ext uri="{FF2B5EF4-FFF2-40B4-BE49-F238E27FC236}">
-                <a16:creationId xmlns:a16="http://schemas.microsoft.com/office/drawing/2014/main" id="{369A2C51-E9F9-4999-A45A-5F6F1A3B1500}"/>
+                <a16:creationId xmlns:a16="http://schemas.microsoft.com/office/drawing/2014/main" id="{F4B60B00-6520-4B83-8D03-27C3D20D7BB8}"/>
               </a:ext>
             </a:extLst>
           </p:cNvPr>
@@ -5223,7 +5223,7 @@
           <p:cNvPr id="13" name="text-71">
             <a:extLst xmlns:a="http://schemas.openxmlformats.org/drawingml/2006/main">
               <a:ext uri="{FF2B5EF4-FFF2-40B4-BE49-F238E27FC236}">
-                <a16:creationId xmlns:a16="http://schemas.microsoft.com/office/drawing/2014/main" id="{C8BCCEEE-8210-412B-BFCE-EA185A2BDE34}"/>
+                <a16:creationId xmlns:a16="http://schemas.microsoft.com/office/drawing/2014/main" id="{78BC3173-E398-477F-996B-F7C86BFC0847}"/>
               </a:ext>
             </a:extLst>
           </p:cNvPr>
@@ -5279,7 +5279,7 @@
           <p:cNvPr id="14" name="text-72">
             <a:extLst xmlns:a="http://schemas.openxmlformats.org/drawingml/2006/main">
               <a:ext uri="{FF2B5EF4-FFF2-40B4-BE49-F238E27FC236}">
-                <a16:creationId xmlns:a16="http://schemas.microsoft.com/office/drawing/2014/main" id="{DA6D9F14-2407-44F8-A2D3-4BF03348C1EB}"/>
+                <a16:creationId xmlns:a16="http://schemas.microsoft.com/office/drawing/2014/main" id="{7E1C5B7B-8E18-4A35-AE6A-25448E4F995B}"/>
               </a:ext>
             </a:extLst>
           </p:cNvPr>
@@ -5335,7 +5335,7 @@
           <p:cNvPr id="15" name="dot-73">
             <a:extLst xmlns:a="http://schemas.openxmlformats.org/drawingml/2006/main">
               <a:ext uri="{FF2B5EF4-FFF2-40B4-BE49-F238E27FC236}">
-                <a16:creationId xmlns:a16="http://schemas.microsoft.com/office/drawing/2014/main" id="{0817B2CA-FB61-4C5E-88E5-AE55C1B76A3A}"/>
+                <a16:creationId xmlns:a16="http://schemas.microsoft.com/office/drawing/2014/main" id="{9EA86E5F-2552-4DDC-8E74-1996A9B9DC49}"/>
               </a:ext>
             </a:extLst>
           </p:cNvPr>
@@ -5366,7 +5366,7 @@
           <p:cNvPr id="16" name="text-74">
             <a:extLst xmlns:a="http://schemas.openxmlformats.org/drawingml/2006/main">
               <a:ext uri="{FF2B5EF4-FFF2-40B4-BE49-F238E27FC236}">
-                <a16:creationId xmlns:a16="http://schemas.microsoft.com/office/drawing/2014/main" id="{638DAE33-A9FA-4B29-9086-A71203406D1E}"/>
+                <a16:creationId xmlns:a16="http://schemas.microsoft.com/office/drawing/2014/main" id="{86594EAB-00B6-4B70-BE71-F864D4B70879}"/>
               </a:ext>
             </a:extLst>
           </p:cNvPr>
@@ -5422,7 +5422,7 @@
           <p:cNvPr id="17" name="text-75">
             <a:extLst xmlns:a="http://schemas.openxmlformats.org/drawingml/2006/main">
               <a:ext uri="{FF2B5EF4-FFF2-40B4-BE49-F238E27FC236}">
-                <a16:creationId xmlns:a16="http://schemas.microsoft.com/office/drawing/2014/main" id="{B4F622A5-7BFD-4C27-B84E-0B65C1DB02E8}"/>
+                <a16:creationId xmlns:a16="http://schemas.microsoft.com/office/drawing/2014/main" id="{F29A1882-9FDC-48EF-890B-E5E125FFB001}"/>
               </a:ext>
             </a:extLst>
           </p:cNvPr>
@@ -5478,7 +5478,7 @@
           <p:cNvPr id="18" name="text-76">
             <a:extLst xmlns:a="http://schemas.openxmlformats.org/drawingml/2006/main">
               <a:ext uri="{FF2B5EF4-FFF2-40B4-BE49-F238E27FC236}">
-                <a16:creationId xmlns:a16="http://schemas.microsoft.com/office/drawing/2014/main" id="{81849F7A-D721-403D-AE51-CD6483CD9DA8}"/>
+                <a16:creationId xmlns:a16="http://schemas.microsoft.com/office/drawing/2014/main" id="{307BED5D-588E-4827-8E2C-05864517C03A}"/>
               </a:ext>
             </a:extLst>
           </p:cNvPr>
@@ -5534,7 +5534,7 @@
           <p:cNvPr id="19" name="box-77">
             <a:extLst xmlns:a="http://schemas.openxmlformats.org/drawingml/2006/main">
               <a:ext uri="{FF2B5EF4-FFF2-40B4-BE49-F238E27FC236}">
-                <a16:creationId xmlns:a16="http://schemas.microsoft.com/office/drawing/2014/main" id="{7442B0B6-FDFC-4AEC-8D0F-9CB83FD66D10}"/>
+                <a16:creationId xmlns:a16="http://schemas.microsoft.com/office/drawing/2014/main" id="{FF35AFEC-3DF5-40E4-81AC-9343839BE34A}"/>
               </a:ext>
             </a:extLst>
           </p:cNvPr>
@@ -5567,7 +5567,7 @@
           <p:cNvPr id="20" name="text-78">
             <a:extLst xmlns:a="http://schemas.openxmlformats.org/drawingml/2006/main">
               <a:ext uri="{FF2B5EF4-FFF2-40B4-BE49-F238E27FC236}">
-                <a16:creationId xmlns:a16="http://schemas.microsoft.com/office/drawing/2014/main" id="{00E03B86-B50A-40B4-A369-2F95930B5F90}"/>
+                <a16:creationId xmlns:a16="http://schemas.microsoft.com/office/drawing/2014/main" id="{4DD5A8A9-BFA1-48C2-95E0-1D8B65470785}"/>
               </a:ext>
             </a:extLst>
           </p:cNvPr>
@@ -5621,7 +5621,7 @@
     </p:spTree>
     <p:extLst>
       <p:ext uri="{BB962C8B-B14F-4D97-AF65-F5344CB8AC3E}">
-        <p14:creationId xmlns:p14="http://schemas.microsoft.com/office/powerpoint/2010/main" val="24272866"/>
+        <p14:creationId xmlns:p14="http://schemas.microsoft.com/office/powerpoint/2010/main" val="2093698254"/>
       </p:ext>
     </p:extLst>
   </p:cSld>
@@ -5652,7 +5652,7 @@
           <p:cNvPr id="18" name="box-79">
             <a:extLst xmlns:a="http://schemas.openxmlformats.org/drawingml/2006/main">
               <a:ext uri="{FF2B5EF4-FFF2-40B4-BE49-F238E27FC236}">
-                <a16:creationId xmlns:a16="http://schemas.microsoft.com/office/drawing/2014/main" id="{8FBEF8DC-6887-44E8-B0E3-48D8B032B860}"/>
+                <a16:creationId xmlns:a16="http://schemas.microsoft.com/office/drawing/2014/main" id="{6CE30EFD-E761-4899-9402-305B63FAC374}"/>
               </a:ext>
             </a:extLst>
           </p:cNvPr>
@@ -5685,7 +5685,7 @@
           <p:cNvPr id="2" name="text-80">
             <a:extLst xmlns:a="http://schemas.openxmlformats.org/drawingml/2006/main">
               <a:ext uri="{FF2B5EF4-FFF2-40B4-BE49-F238E27FC236}">
-                <a16:creationId xmlns:a16="http://schemas.microsoft.com/office/drawing/2014/main" id="{A0DB2917-D20F-4567-915B-740D059001C6}"/>
+                <a16:creationId xmlns:a16="http://schemas.microsoft.com/office/drawing/2014/main" id="{C61F8F24-87AD-4B6B-83BC-171425DCD7F3}"/>
               </a:ext>
             </a:extLst>
           </p:cNvPr>
@@ -5741,7 +5741,7 @@
           <p:cNvPr id="3" name="text-81">
             <a:extLst xmlns:a="http://schemas.openxmlformats.org/drawingml/2006/main">
               <a:ext uri="{FF2B5EF4-FFF2-40B4-BE49-F238E27FC236}">
-                <a16:creationId xmlns:a16="http://schemas.microsoft.com/office/drawing/2014/main" id="{A3D8948C-AA32-4C5E-B124-156B90FEB3F6}"/>
+                <a16:creationId xmlns:a16="http://schemas.microsoft.com/office/drawing/2014/main" id="{3E293390-3550-4A28-84D8-4EA0BA16357F}"/>
               </a:ext>
             </a:extLst>
           </p:cNvPr>
@@ -5797,7 +5797,7 @@
           <p:cNvPr id="4" name="text-82">
             <a:extLst xmlns:a="http://schemas.openxmlformats.org/drawingml/2006/main">
               <a:ext uri="{FF2B5EF4-FFF2-40B4-BE49-F238E27FC236}">
-                <a16:creationId xmlns:a16="http://schemas.microsoft.com/office/drawing/2014/main" id="{CCB92C04-27E5-480B-B0A7-B0764B95CD6F}"/>
+                <a16:creationId xmlns:a16="http://schemas.microsoft.com/office/drawing/2014/main" id="{2DD38D03-2E09-49F6-99CC-1E8BDA34EE46}"/>
               </a:ext>
             </a:extLst>
           </p:cNvPr>
@@ -5853,7 +5853,7 @@
           <p:cNvPr id="5" name="text-83">
             <a:extLst xmlns:a="http://schemas.openxmlformats.org/drawingml/2006/main">
               <a:ext uri="{FF2B5EF4-FFF2-40B4-BE49-F238E27FC236}">
-                <a16:creationId xmlns:a16="http://schemas.microsoft.com/office/drawing/2014/main" id="{0439FE51-DB95-465C-83BD-62254ED32AAC}"/>
+                <a16:creationId xmlns:a16="http://schemas.microsoft.com/office/drawing/2014/main" id="{868354DF-136E-425A-8E4E-FC8A8683290F}"/>
               </a:ext>
             </a:extLst>
           </p:cNvPr>
@@ -5909,7 +5909,7 @@
           <p:cNvPr id="6" name="text-84">
             <a:extLst xmlns:a="http://schemas.openxmlformats.org/drawingml/2006/main">
               <a:ext uri="{FF2B5EF4-FFF2-40B4-BE49-F238E27FC236}">
-                <a16:creationId xmlns:a16="http://schemas.microsoft.com/office/drawing/2014/main" id="{13416E18-271B-4022-9CEA-BF4689CE3975}"/>
+                <a16:creationId xmlns:a16="http://schemas.microsoft.com/office/drawing/2014/main" id="{908DA866-F89D-434C-BC20-E14598919DDC}"/>
               </a:ext>
             </a:extLst>
           </p:cNvPr>
@@ -5965,7 +5965,7 @@
           <p:cNvPr id="7" name="text-85">
             <a:extLst xmlns:a="http://schemas.openxmlformats.org/drawingml/2006/main">
               <a:ext uri="{FF2B5EF4-FFF2-40B4-BE49-F238E27FC236}">
-                <a16:creationId xmlns:a16="http://schemas.microsoft.com/office/drawing/2014/main" id="{A630F12E-52D5-4B4A-8183-053E937DCBD5}"/>
+                <a16:creationId xmlns:a16="http://schemas.microsoft.com/office/drawing/2014/main" id="{3ACA431A-66EA-4BF7-B7E8-D00549514EA7}"/>
               </a:ext>
             </a:extLst>
           </p:cNvPr>
@@ -6021,7 +6021,7 @@
           <p:cNvPr id="8" name="text-86">
             <a:extLst xmlns:a="http://schemas.openxmlformats.org/drawingml/2006/main">
               <a:ext uri="{FF2B5EF4-FFF2-40B4-BE49-F238E27FC236}">
-                <a16:creationId xmlns:a16="http://schemas.microsoft.com/office/drawing/2014/main" id="{A886E92A-63A9-4C85-93A1-606D62F32B64}"/>
+                <a16:creationId xmlns:a16="http://schemas.microsoft.com/office/drawing/2014/main" id="{6589C204-E743-4EDB-8D2B-2DCDAC368E4B}"/>
               </a:ext>
             </a:extLst>
           </p:cNvPr>
@@ -6067,7 +6067,7 @@
                 <a:ea typeface="Arial"/>
                 <a:cs typeface="Arial"/>
               </a:rPr>
-              <a:t>62 / 62</a:t>
+              <a:t>68 / 68</a:t>
             </a:r>
           </a:p>
         </p:txBody>
@@ -6077,7 +6077,7 @@
           <p:cNvPr id="9" name="text-87">
             <a:extLst xmlns:a="http://schemas.openxmlformats.org/drawingml/2006/main">
               <a:ext uri="{FF2B5EF4-FFF2-40B4-BE49-F238E27FC236}">
-                <a16:creationId xmlns:a16="http://schemas.microsoft.com/office/drawing/2014/main" id="{9CFCBADE-6F24-4659-B390-2A4B31F50A99}"/>
+                <a16:creationId xmlns:a16="http://schemas.microsoft.com/office/drawing/2014/main" id="{2CE44457-9E44-4946-862A-003E8DAE46F2}"/>
               </a:ext>
             </a:extLst>
           </p:cNvPr>
@@ -6133,7 +6133,7 @@
           <p:cNvPr id="10" name="text-88">
             <a:extLst xmlns:a="http://schemas.openxmlformats.org/drawingml/2006/main">
               <a:ext uri="{FF2B5EF4-FFF2-40B4-BE49-F238E27FC236}">
-                <a16:creationId xmlns:a16="http://schemas.microsoft.com/office/drawing/2014/main" id="{52023EF2-CD78-499F-BD26-CB8B262C224C}"/>
+                <a16:creationId xmlns:a16="http://schemas.microsoft.com/office/drawing/2014/main" id="{D57AE196-213D-4B2F-A922-C333CBF46179}"/>
               </a:ext>
             </a:extLst>
           </p:cNvPr>
@@ -6235,7 +6235,7 @@
           <p:cNvPr id="11" name="text-89">
             <a:extLst xmlns:a="http://schemas.openxmlformats.org/drawingml/2006/main">
               <a:ext uri="{FF2B5EF4-FFF2-40B4-BE49-F238E27FC236}">
-                <a16:creationId xmlns:a16="http://schemas.microsoft.com/office/drawing/2014/main" id="{38A0AF63-011E-4CFA-8D65-A42E74890E04}"/>
+                <a16:creationId xmlns:a16="http://schemas.microsoft.com/office/drawing/2014/main" id="{81C4383A-4138-4D6C-8E8D-AF45B836C460}"/>
               </a:ext>
             </a:extLst>
           </p:cNvPr>
@@ -6337,7 +6337,7 @@
           <p:cNvPr id="12" name="text-90">
             <a:extLst xmlns:a="http://schemas.openxmlformats.org/drawingml/2006/main">
               <a:ext uri="{FF2B5EF4-FFF2-40B4-BE49-F238E27FC236}">
-                <a16:creationId xmlns:a16="http://schemas.microsoft.com/office/drawing/2014/main" id="{CEBB8790-CFFB-4728-A8B2-77CC68890EC1}"/>
+                <a16:creationId xmlns:a16="http://schemas.microsoft.com/office/drawing/2014/main" id="{548A9D37-6C83-418F-ACC9-5D2A49F7A091}"/>
               </a:ext>
             </a:extLst>
           </p:cNvPr>
@@ -6439,7 +6439,7 @@
           <p:cNvPr id="13" name="box-91">
             <a:extLst xmlns:a="http://schemas.openxmlformats.org/drawingml/2006/main">
               <a:ext uri="{FF2B5EF4-FFF2-40B4-BE49-F238E27FC236}">
-                <a16:creationId xmlns:a16="http://schemas.microsoft.com/office/drawing/2014/main" id="{7DFC9F29-B2E6-496A-8D65-48381A89DBA2}"/>
+                <a16:creationId xmlns:a16="http://schemas.microsoft.com/office/drawing/2014/main" id="{25A8D1EB-7E4E-4FF0-A406-F8341745EEE0}"/>
               </a:ext>
             </a:extLst>
           </p:cNvPr>
@@ -6472,7 +6472,7 @@
           <p:cNvPr id="14" name="text-92">
             <a:extLst xmlns:a="http://schemas.openxmlformats.org/drawingml/2006/main">
               <a:ext uri="{FF2B5EF4-FFF2-40B4-BE49-F238E27FC236}">
-                <a16:creationId xmlns:a16="http://schemas.microsoft.com/office/drawing/2014/main" id="{7911B511-86C3-439E-8558-18D721D792BD}"/>
+                <a16:creationId xmlns:a16="http://schemas.microsoft.com/office/drawing/2014/main" id="{D2A93639-3E22-4B7A-BFEB-80D51F9070C7}"/>
               </a:ext>
             </a:extLst>
           </p:cNvPr>
@@ -6528,7 +6528,7 @@
           <p:cNvPr id="15" name="text-93">
             <a:extLst xmlns:a="http://schemas.openxmlformats.org/drawingml/2006/main">
               <a:ext uri="{FF2B5EF4-FFF2-40B4-BE49-F238E27FC236}">
-                <a16:creationId xmlns:a16="http://schemas.microsoft.com/office/drawing/2014/main" id="{2C584703-6F1A-4976-98C1-7524A165A06D}"/>
+                <a16:creationId xmlns:a16="http://schemas.microsoft.com/office/drawing/2014/main" id="{D7616857-0A1B-4BE0-A739-BFC04863C2E5}"/>
               </a:ext>
             </a:extLst>
           </p:cNvPr>
@@ -6574,7 +6574,7 @@
                 <a:ea typeface="Arial"/>
                 <a:cs typeface="Arial"/>
               </a:rPr>
-              <a:t>Windows 10/11 (x64) + macOS (Apple Silicon) — İndirme: github.com/Azizsekerdil/GermanCourseAI/releases (v1.1.0) · (özel repo)</a:t>
+              <a:t>Windows 10/11 (x64) + macOS (Apple Silicon) — İndirme: github.com/Azizsekerdil/GermanCourseAI/releases (v1.1.1) · (özel repo)</a:t>
             </a:r>
           </a:p>
         </p:txBody>
@@ -6584,7 +6584,7 @@
           <p:cNvPr id="16" name="text-94">
             <a:extLst xmlns:a="http://schemas.openxmlformats.org/drawingml/2006/main">
               <a:ext uri="{FF2B5EF4-FFF2-40B4-BE49-F238E27FC236}">
-                <a16:creationId xmlns:a16="http://schemas.microsoft.com/office/drawing/2014/main" id="{C4682A17-8C90-473F-A47F-B18A8E1D31AA}"/>
+                <a16:creationId xmlns:a16="http://schemas.microsoft.com/office/drawing/2014/main" id="{81EB301F-A4B7-4E76-A905-F7CC9F1E1985}"/>
               </a:ext>
             </a:extLst>
           </p:cNvPr>
@@ -6630,7 +6630,7 @@
                 <a:ea typeface="Arial"/>
                 <a:cs typeface="Arial"/>
               </a:rPr>
-              <a:t>Windows 10/11 (x64) &amp; macOS (Apple Silicon) — Download: GitHub Releases (v1.1.0)</a:t>
+              <a:t>Windows 10/11 (x64) &amp; macOS (Apple Silicon) — Download: GitHub Releases (v1.1.1)</a:t>
             </a:r>
           </a:p>
         </p:txBody>
@@ -6640,7 +6640,7 @@
           <p:cNvPr id="17" name="text-95">
             <a:extLst xmlns:a="http://schemas.openxmlformats.org/drawingml/2006/main">
               <a:ext uri="{FF2B5EF4-FFF2-40B4-BE49-F238E27FC236}">
-                <a16:creationId xmlns:a16="http://schemas.microsoft.com/office/drawing/2014/main" id="{CCD9FD5C-AAD9-4C61-858D-E4E76559ACF4}"/>
+                <a16:creationId xmlns:a16="http://schemas.microsoft.com/office/drawing/2014/main" id="{95099386-E50D-4DF4-BDC5-59316CD55CA9}"/>
               </a:ext>
             </a:extLst>
           </p:cNvPr>
@@ -6694,7 +6694,7 @@
     </p:spTree>
     <p:extLst>
       <p:ext uri="{BB962C8B-B14F-4D97-AF65-F5344CB8AC3E}">
-        <p14:creationId xmlns:p14="http://schemas.microsoft.com/office/powerpoint/2010/main" val="398875267"/>
+        <p14:creationId xmlns:p14="http://schemas.microsoft.com/office/powerpoint/2010/main" val="2103117465"/>
       </p:ext>
     </p:extLst>
   </p:cSld>

--- a/docs/presentation/German-Course-AI-Trilingual.pptx
+++ b/docs/presentation/German-Course-AI-Trilingual.pptx
@@ -2,18 +2,18 @@
 <file path=ppt/presentation.xml><?xml version="1.0" encoding="utf-8"?>
 <p:presentation xmlns:p="http://schemas.openxmlformats.org/presentationml/2006/main">
   <p:sldMasterIdLst>
-    <p:sldMasterId xmlns:r="http://schemas.openxmlformats.org/officeDocument/2006/relationships" id="2147483648" r:id="R548600bc01cf4bbc"/>
+    <p:sldMasterId xmlns:r="http://schemas.openxmlformats.org/officeDocument/2006/relationships" id="2147483648" r:id="R14c57ff539e24198"/>
   </p:sldMasterIdLst>
   <p:notesMasterIdLst>
-    <p:notesMasterId xmlns:r="http://schemas.openxmlformats.org/officeDocument/2006/relationships" r:id="Rf16d9462a49748c4"/>
+    <p:notesMasterId xmlns:r="http://schemas.openxmlformats.org/officeDocument/2006/relationships" r:id="R6fd61037b7d24fe0"/>
   </p:notesMasterIdLst>
   <p:sldIdLst>
-    <p:sldId xmlns:r="http://schemas.openxmlformats.org/officeDocument/2006/relationships" id="256" r:id="R22c3de62b0b34407"/>
-    <p:sldId xmlns:r="http://schemas.openxmlformats.org/officeDocument/2006/relationships" id="257" r:id="Rb8089c1bdb9846a8"/>
-    <p:sldId xmlns:r="http://schemas.openxmlformats.org/officeDocument/2006/relationships" id="258" r:id="R8e569ab685254e3c"/>
-    <p:sldId xmlns:r="http://schemas.openxmlformats.org/officeDocument/2006/relationships" id="259" r:id="R98b2cd1ea51946bd"/>
-    <p:sldId xmlns:r="http://schemas.openxmlformats.org/officeDocument/2006/relationships" id="260" r:id="R425b055be4ff453f"/>
-    <p:sldId xmlns:r="http://schemas.openxmlformats.org/officeDocument/2006/relationships" id="261" r:id="Rb97bfcfaceab4b04"/>
+    <p:sldId xmlns:r="http://schemas.openxmlformats.org/officeDocument/2006/relationships" id="256" r:id="R889e67e590fc420d"/>
+    <p:sldId xmlns:r="http://schemas.openxmlformats.org/officeDocument/2006/relationships" id="257" r:id="Re26b2e4e4ac74968"/>
+    <p:sldId xmlns:r="http://schemas.openxmlformats.org/officeDocument/2006/relationships" id="258" r:id="R7600acda1f1d483b"/>
+    <p:sldId xmlns:r="http://schemas.openxmlformats.org/officeDocument/2006/relationships" id="259" r:id="Rea40ac7185a1480b"/>
+    <p:sldId xmlns:r="http://schemas.openxmlformats.org/officeDocument/2006/relationships" id="260" r:id="R10ec942133944d27"/>
+    <p:sldId xmlns:r="http://schemas.openxmlformats.org/officeDocument/2006/relationships" id="261" r:id="R3ca0831b9419417d"/>
   </p:sldIdLst>
   <p:sldSz cx="12192000" cy="6858000"/>
   <p:notesSz cx="6858000" cy="9144000"/>
@@ -937,7 +937,7 @@
           </a:p>
           <a:p xmlns:a="http://schemas.openxmlformats.org/drawingml/2006/main">
             <a:r>
-              <a:t>- https://github.com/Azizsekerdil/GermanCourseAI/releases/tag/v1.1.1</a:t>
+              <a:t>- https://github.com/Azizsekerdil/GermanCourseAI/releases/tag/v1.1.2</a:t>
             </a:r>
           </a:p>
           <a:p xmlns:a="http://schemas.openxmlformats.org/drawingml/2006/main">
@@ -1010,7 +1010,7 @@
   </p:cSld>
   <p:clrMap bg1="lt1" tx1="dk1" bg2="lt2" tx2="dk2" accent1="accent1" accent2="accent2" accent3="accent3" accent4="accent4" accent5="accent5" accent6="accent6" hlink="hlink" folHlink="folHlink"/>
   <p:sldLayoutIdLst>
-    <p:sldLayoutId xmlns:r="http://schemas.openxmlformats.org/officeDocument/2006/relationships" id="2147483649" r:id="Rc10bdf3010b74189"/>
+    <p:sldLayoutId xmlns:r="http://schemas.openxmlformats.org/officeDocument/2006/relationships" id="2147483649" r:id="R3c7f7ed8b28a44c4"/>
   </p:sldLayoutIdLst>
   <p:txStyles>
     <p:titleStyle>
@@ -1561,7 +1561,7 @@
           <p:cNvPr id="13" name="box-1">
             <a:extLst xmlns:a="http://schemas.openxmlformats.org/drawingml/2006/main">
               <a:ext uri="{FF2B5EF4-FFF2-40B4-BE49-F238E27FC236}">
-                <a16:creationId xmlns:a16="http://schemas.microsoft.com/office/drawing/2014/main" id="{81F360CB-F245-47C0-BF1C-6838DDFB7D75}"/>
+                <a16:creationId xmlns:a16="http://schemas.microsoft.com/office/drawing/2014/main" id="{ECB7ADD2-8B1F-47DE-8224-AC132D1EEA2D}"/>
               </a:ext>
             </a:extLst>
           </p:cNvPr>
@@ -1594,7 +1594,7 @@
           <p:cNvPr id="2" name="text-2">
             <a:extLst xmlns:a="http://schemas.openxmlformats.org/drawingml/2006/main">
               <a:ext uri="{FF2B5EF4-FFF2-40B4-BE49-F238E27FC236}">
-                <a16:creationId xmlns:a16="http://schemas.microsoft.com/office/drawing/2014/main" id="{EB0525FE-B9EF-4F56-94E3-D3253F03DD7B}"/>
+                <a16:creationId xmlns:a16="http://schemas.microsoft.com/office/drawing/2014/main" id="{7302CB64-73C2-44F1-BAB8-F99C4DDCF8F5}"/>
               </a:ext>
             </a:extLst>
           </p:cNvPr>
@@ -1650,7 +1650,7 @@
           <p:cNvPr id="3" name="text-3">
             <a:extLst xmlns:a="http://schemas.openxmlformats.org/drawingml/2006/main">
               <a:ext uri="{FF2B5EF4-FFF2-40B4-BE49-F238E27FC236}">
-                <a16:creationId xmlns:a16="http://schemas.microsoft.com/office/drawing/2014/main" id="{8C381A21-F824-4D19-9B2B-7F2B1A5905C1}"/>
+                <a16:creationId xmlns:a16="http://schemas.microsoft.com/office/drawing/2014/main" id="{889B231D-FBE1-4545-B20A-F67F301D0A54}"/>
               </a:ext>
             </a:extLst>
           </p:cNvPr>
@@ -1706,7 +1706,7 @@
           <p:cNvPr id="4" name="text-4">
             <a:extLst xmlns:a="http://schemas.openxmlformats.org/drawingml/2006/main">
               <a:ext uri="{FF2B5EF4-FFF2-40B4-BE49-F238E27FC236}">
-                <a16:creationId xmlns:a16="http://schemas.microsoft.com/office/drawing/2014/main" id="{DC8C4126-1AE8-4567-8CFC-630A510F50AB}"/>
+                <a16:creationId xmlns:a16="http://schemas.microsoft.com/office/drawing/2014/main" id="{73D9CEFF-5718-499B-AB93-4489FF5A81EB}"/>
               </a:ext>
             </a:extLst>
           </p:cNvPr>
@@ -1762,7 +1762,7 @@
           <p:cNvPr id="5" name="text-5">
             <a:extLst xmlns:a="http://schemas.openxmlformats.org/drawingml/2006/main">
               <a:ext uri="{FF2B5EF4-FFF2-40B4-BE49-F238E27FC236}">
-                <a16:creationId xmlns:a16="http://schemas.microsoft.com/office/drawing/2014/main" id="{D2B01093-D142-4E98-A5DA-392F0727C86B}"/>
+                <a16:creationId xmlns:a16="http://schemas.microsoft.com/office/drawing/2014/main" id="{DD0F733A-811C-4445-80A3-3B0559D20492}"/>
               </a:ext>
             </a:extLst>
           </p:cNvPr>
@@ -1818,7 +1818,7 @@
           <p:cNvPr id="6" name="text-6">
             <a:extLst xmlns:a="http://schemas.openxmlformats.org/drawingml/2006/main">
               <a:ext uri="{FF2B5EF4-FFF2-40B4-BE49-F238E27FC236}">
-                <a16:creationId xmlns:a16="http://schemas.microsoft.com/office/drawing/2014/main" id="{E0CC9E1D-3FF3-4A82-9A63-0833341457C4}"/>
+                <a16:creationId xmlns:a16="http://schemas.microsoft.com/office/drawing/2014/main" id="{4B1DA49E-102E-4079-BA37-08EB976BAFFD}"/>
               </a:ext>
             </a:extLst>
           </p:cNvPr>
@@ -1874,7 +1874,7 @@
           <p:cNvPr id="7" name="text-7">
             <a:extLst xmlns:a="http://schemas.openxmlformats.org/drawingml/2006/main">
               <a:ext uri="{FF2B5EF4-FFF2-40B4-BE49-F238E27FC236}">
-                <a16:creationId xmlns:a16="http://schemas.microsoft.com/office/drawing/2014/main" id="{9DBF5995-F3CD-497F-8764-AF2CC67B860E}"/>
+                <a16:creationId xmlns:a16="http://schemas.microsoft.com/office/drawing/2014/main" id="{E5129634-B8A2-4C16-9BC6-6C80A205C3A6}"/>
               </a:ext>
             </a:extLst>
           </p:cNvPr>
@@ -1930,7 +1930,7 @@
           <p:cNvPr id="8" name="text-8">
             <a:extLst xmlns:a="http://schemas.openxmlformats.org/drawingml/2006/main">
               <a:ext uri="{FF2B5EF4-FFF2-40B4-BE49-F238E27FC236}">
-                <a16:creationId xmlns:a16="http://schemas.microsoft.com/office/drawing/2014/main" id="{E0CCFBD0-B7F1-488D-8576-764C8F14AC4D}"/>
+                <a16:creationId xmlns:a16="http://schemas.microsoft.com/office/drawing/2014/main" id="{1E76E612-1DDA-41CA-8003-2A4767B508F9}"/>
               </a:ext>
             </a:extLst>
           </p:cNvPr>
@@ -1986,7 +1986,7 @@
           <p:cNvPr id="9" name="text-9">
             <a:extLst xmlns:a="http://schemas.openxmlformats.org/drawingml/2006/main">
               <a:ext uri="{FF2B5EF4-FFF2-40B4-BE49-F238E27FC236}">
-                <a16:creationId xmlns:a16="http://schemas.microsoft.com/office/drawing/2014/main" id="{6C285D98-1C64-4C9D-AEF2-5878AF3E037F}"/>
+                <a16:creationId xmlns:a16="http://schemas.microsoft.com/office/drawing/2014/main" id="{8214512A-A2B3-40CB-9FE1-866BC6BB4A44}"/>
               </a:ext>
             </a:extLst>
           </p:cNvPr>
@@ -2042,7 +2042,7 @@
           <p:cNvPr id="10" name="box-10">
             <a:extLst xmlns:a="http://schemas.openxmlformats.org/drawingml/2006/main">
               <a:ext uri="{FF2B5EF4-FFF2-40B4-BE49-F238E27FC236}">
-                <a16:creationId xmlns:a16="http://schemas.microsoft.com/office/drawing/2014/main" id="{E449ED2E-2A73-4A37-841E-FD2C170BAD88}"/>
+                <a16:creationId xmlns:a16="http://schemas.microsoft.com/office/drawing/2014/main" id="{C9DEF490-F080-4962-9DE0-EE9767FDCFC7}"/>
               </a:ext>
             </a:extLst>
           </p:cNvPr>
@@ -2079,7 +2079,7 @@
           <p:nvPr/>
         </p:nvPicPr>
         <p:blipFill>
-          <a:blip xmlns:r="http://schemas.openxmlformats.org/officeDocument/2006/relationships" xmlns:a="http://schemas.openxmlformats.org/drawingml/2006/main" r:embed="Rc2c8495a8d724b27"/>
+          <a:blip xmlns:r="http://schemas.openxmlformats.org/officeDocument/2006/relationships" xmlns:a="http://schemas.openxmlformats.org/drawingml/2006/main" r:embed="Rec844ba0b74b4431"/>
           <a:stretch xmlns:a="http://schemas.openxmlformats.org/drawingml/2006/main"/>
         </p:blipFill>
         <p:spPr>
@@ -2097,7 +2097,7 @@
           <p:cNvPr id="12" name="text-11">
             <a:extLst xmlns:a="http://schemas.openxmlformats.org/drawingml/2006/main">
               <a:ext uri="{FF2B5EF4-FFF2-40B4-BE49-F238E27FC236}">
-                <a16:creationId xmlns:a16="http://schemas.microsoft.com/office/drawing/2014/main" id="{FE8EA043-F475-4F84-B0BB-0323BCD078EE}"/>
+                <a16:creationId xmlns:a16="http://schemas.microsoft.com/office/drawing/2014/main" id="{E5D7A53A-5A22-44D5-897C-828333CEDCB1}"/>
               </a:ext>
             </a:extLst>
           </p:cNvPr>
@@ -2151,7 +2151,7 @@
     </p:spTree>
     <p:extLst>
       <p:ext uri="{BB962C8B-B14F-4D97-AF65-F5344CB8AC3E}">
-        <p14:creationId xmlns:p14="http://schemas.microsoft.com/office/powerpoint/2010/main" val="783359272"/>
+        <p14:creationId xmlns:p14="http://schemas.microsoft.com/office/powerpoint/2010/main" val="1129890898"/>
       </p:ext>
     </p:extLst>
   </p:cSld>
@@ -2182,7 +2182,7 @@
           <p:cNvPr id="14" name="box-12">
             <a:extLst xmlns:a="http://schemas.openxmlformats.org/drawingml/2006/main">
               <a:ext uri="{FF2B5EF4-FFF2-40B4-BE49-F238E27FC236}">
-                <a16:creationId xmlns:a16="http://schemas.microsoft.com/office/drawing/2014/main" id="{5576D728-0841-4339-A34A-BCEF51E102DD}"/>
+                <a16:creationId xmlns:a16="http://schemas.microsoft.com/office/drawing/2014/main" id="{E33B1932-133A-44FA-A443-1A94B83B07A3}"/>
               </a:ext>
             </a:extLst>
           </p:cNvPr>
@@ -2215,7 +2215,7 @@
           <p:cNvPr id="2" name="text-13">
             <a:extLst xmlns:a="http://schemas.openxmlformats.org/drawingml/2006/main">
               <a:ext uri="{FF2B5EF4-FFF2-40B4-BE49-F238E27FC236}">
-                <a16:creationId xmlns:a16="http://schemas.microsoft.com/office/drawing/2014/main" id="{22A6F555-0A0C-4874-8BD9-4F97AE325476}"/>
+                <a16:creationId xmlns:a16="http://schemas.microsoft.com/office/drawing/2014/main" id="{081B716C-93F6-4377-A73E-843664E9AE13}"/>
               </a:ext>
             </a:extLst>
           </p:cNvPr>
@@ -2271,7 +2271,7 @@
           <p:cNvPr id="3" name="text-14">
             <a:extLst xmlns:a="http://schemas.openxmlformats.org/drawingml/2006/main">
               <a:ext uri="{FF2B5EF4-FFF2-40B4-BE49-F238E27FC236}">
-                <a16:creationId xmlns:a16="http://schemas.microsoft.com/office/drawing/2014/main" id="{A6F3167B-D030-4FC2-BCBE-638C2A41942C}"/>
+                <a16:creationId xmlns:a16="http://schemas.microsoft.com/office/drawing/2014/main" id="{A138C5E1-9AAC-4BFE-9766-3C1F1D730A3F}"/>
               </a:ext>
             </a:extLst>
           </p:cNvPr>
@@ -2327,7 +2327,7 @@
           <p:cNvPr id="4" name="text-15">
             <a:extLst xmlns:a="http://schemas.openxmlformats.org/drawingml/2006/main">
               <a:ext uri="{FF2B5EF4-FFF2-40B4-BE49-F238E27FC236}">
-                <a16:creationId xmlns:a16="http://schemas.microsoft.com/office/drawing/2014/main" id="{443D4EA4-6168-4240-AD82-F2BC42FD5806}"/>
+                <a16:creationId xmlns:a16="http://schemas.microsoft.com/office/drawing/2014/main" id="{E4DD800B-7EF2-4764-B050-D724F12D1384}"/>
               </a:ext>
             </a:extLst>
           </p:cNvPr>
@@ -2383,7 +2383,7 @@
           <p:cNvPr id="5" name="text-16">
             <a:extLst xmlns:a="http://schemas.openxmlformats.org/drawingml/2006/main">
               <a:ext uri="{FF2B5EF4-FFF2-40B4-BE49-F238E27FC236}">
-                <a16:creationId xmlns:a16="http://schemas.microsoft.com/office/drawing/2014/main" id="{BCA46E20-5155-48B9-B930-6C434EAABC52}"/>
+                <a16:creationId xmlns:a16="http://schemas.microsoft.com/office/drawing/2014/main" id="{2CC35216-935A-4D9F-9AFB-2917AFAFEDF3}"/>
               </a:ext>
             </a:extLst>
           </p:cNvPr>
@@ -2439,7 +2439,7 @@
           <p:cNvPr id="6" name="text-17">
             <a:extLst xmlns:a="http://schemas.openxmlformats.org/drawingml/2006/main">
               <a:ext uri="{FF2B5EF4-FFF2-40B4-BE49-F238E27FC236}">
-                <a16:creationId xmlns:a16="http://schemas.microsoft.com/office/drawing/2014/main" id="{CBB092C5-C263-422D-94FF-C3E1177DA2F2}"/>
+                <a16:creationId xmlns:a16="http://schemas.microsoft.com/office/drawing/2014/main" id="{3D092DFA-2DA5-49C7-924E-819F7662B4C8}"/>
               </a:ext>
             </a:extLst>
           </p:cNvPr>
@@ -2495,7 +2495,7 @@
           <p:cNvPr id="7" name="box-18">
             <a:extLst xmlns:a="http://schemas.openxmlformats.org/drawingml/2006/main">
               <a:ext uri="{FF2B5EF4-FFF2-40B4-BE49-F238E27FC236}">
-                <a16:creationId xmlns:a16="http://schemas.microsoft.com/office/drawing/2014/main" id="{3DB9ECEC-2D33-4B99-B799-21E29F1E9958}"/>
+                <a16:creationId xmlns:a16="http://schemas.microsoft.com/office/drawing/2014/main" id="{C9B1D16F-C3CE-4366-8A14-BD9954A220FF}"/>
               </a:ext>
             </a:extLst>
           </p:cNvPr>
@@ -2528,7 +2528,7 @@
           <p:cNvPr id="8" name="text-19">
             <a:extLst xmlns:a="http://schemas.openxmlformats.org/drawingml/2006/main">
               <a:ext uri="{FF2B5EF4-FFF2-40B4-BE49-F238E27FC236}">
-                <a16:creationId xmlns:a16="http://schemas.microsoft.com/office/drawing/2014/main" id="{34195245-61CA-47F1-80FC-37C8DC147836}"/>
+                <a16:creationId xmlns:a16="http://schemas.microsoft.com/office/drawing/2014/main" id="{1326D86C-5987-45BF-85DB-B099D3FA8FCC}"/>
               </a:ext>
             </a:extLst>
           </p:cNvPr>
@@ -2584,7 +2584,7 @@
           <p:cNvPr id="9" name="text-20">
             <a:extLst xmlns:a="http://schemas.openxmlformats.org/drawingml/2006/main">
               <a:ext uri="{FF2B5EF4-FFF2-40B4-BE49-F238E27FC236}">
-                <a16:creationId xmlns:a16="http://schemas.microsoft.com/office/drawing/2014/main" id="{A8611AF0-D060-4414-B3E0-E2FCE5737D1E}"/>
+                <a16:creationId xmlns:a16="http://schemas.microsoft.com/office/drawing/2014/main" id="{7D9643C4-81B4-40F6-9F9A-457DF404955E}"/>
               </a:ext>
             </a:extLst>
           </p:cNvPr>
@@ -2640,7 +2640,7 @@
           <p:cNvPr id="10" name="text-21">
             <a:extLst xmlns:a="http://schemas.openxmlformats.org/drawingml/2006/main">
               <a:ext uri="{FF2B5EF4-FFF2-40B4-BE49-F238E27FC236}">
-                <a16:creationId xmlns:a16="http://schemas.microsoft.com/office/drawing/2014/main" id="{C91E01AD-DDC5-4017-8A2F-55101A6D70F9}"/>
+                <a16:creationId xmlns:a16="http://schemas.microsoft.com/office/drawing/2014/main" id="{144CE648-4A8F-48F7-AA8E-760E4F666F7B}"/>
               </a:ext>
             </a:extLst>
           </p:cNvPr>
@@ -2696,7 +2696,7 @@
           <p:cNvPr id="11" name="box-22">
             <a:extLst xmlns:a="http://schemas.openxmlformats.org/drawingml/2006/main">
               <a:ext uri="{FF2B5EF4-FFF2-40B4-BE49-F238E27FC236}">
-                <a16:creationId xmlns:a16="http://schemas.microsoft.com/office/drawing/2014/main" id="{0F39A7B5-4590-4761-BF05-A4517B7CF578}"/>
+                <a16:creationId xmlns:a16="http://schemas.microsoft.com/office/drawing/2014/main" id="{C0D7AFB1-EF15-4B1C-B8EE-235D407960F0}"/>
               </a:ext>
             </a:extLst>
           </p:cNvPr>
@@ -2733,7 +2733,7 @@
           <p:nvPr/>
         </p:nvPicPr>
         <p:blipFill>
-          <a:blip xmlns:r="http://schemas.openxmlformats.org/officeDocument/2006/relationships" xmlns:a="http://schemas.openxmlformats.org/drawingml/2006/main" r:embed="R0c35db834f2048f5"/>
+          <a:blip xmlns:r="http://schemas.openxmlformats.org/officeDocument/2006/relationships" xmlns:a="http://schemas.openxmlformats.org/drawingml/2006/main" r:embed="R845ec1906a134e11"/>
           <a:stretch xmlns:a="http://schemas.openxmlformats.org/drawingml/2006/main"/>
         </p:blipFill>
         <p:spPr>
@@ -2751,7 +2751,7 @@
           <p:cNvPr id="13" name="text-23">
             <a:extLst xmlns:a="http://schemas.openxmlformats.org/drawingml/2006/main">
               <a:ext uri="{FF2B5EF4-FFF2-40B4-BE49-F238E27FC236}">
-                <a16:creationId xmlns:a16="http://schemas.microsoft.com/office/drawing/2014/main" id="{A58C3669-9383-4E7E-B900-DFF7357DBCE5}"/>
+                <a16:creationId xmlns:a16="http://schemas.microsoft.com/office/drawing/2014/main" id="{D42E335C-03E4-4397-BD70-A64862D364BD}"/>
               </a:ext>
             </a:extLst>
           </p:cNvPr>
@@ -2805,7 +2805,7 @@
     </p:spTree>
     <p:extLst>
       <p:ext uri="{BB962C8B-B14F-4D97-AF65-F5344CB8AC3E}">
-        <p14:creationId xmlns:p14="http://schemas.microsoft.com/office/powerpoint/2010/main" val="609993174"/>
+        <p14:creationId xmlns:p14="http://schemas.microsoft.com/office/powerpoint/2010/main" val="1610947352"/>
       </p:ext>
     </p:extLst>
   </p:cSld>
@@ -2836,7 +2836,7 @@
           <p:cNvPr id="19" name="box-24">
             <a:extLst xmlns:a="http://schemas.openxmlformats.org/drawingml/2006/main">
               <a:ext uri="{FF2B5EF4-FFF2-40B4-BE49-F238E27FC236}">
-                <a16:creationId xmlns:a16="http://schemas.microsoft.com/office/drawing/2014/main" id="{6FB6DBE0-82D5-4D64-8ED5-B48CC2A9EB28}"/>
+                <a16:creationId xmlns:a16="http://schemas.microsoft.com/office/drawing/2014/main" id="{A88D0937-249F-4209-91C4-D2134C584BEF}"/>
               </a:ext>
             </a:extLst>
           </p:cNvPr>
@@ -2869,7 +2869,7 @@
           <p:cNvPr id="2" name="text-25">
             <a:extLst xmlns:a="http://schemas.openxmlformats.org/drawingml/2006/main">
               <a:ext uri="{FF2B5EF4-FFF2-40B4-BE49-F238E27FC236}">
-                <a16:creationId xmlns:a16="http://schemas.microsoft.com/office/drawing/2014/main" id="{B4954BA7-7071-4656-89BF-41FEBCE51999}"/>
+                <a16:creationId xmlns:a16="http://schemas.microsoft.com/office/drawing/2014/main" id="{B453089A-B537-4CA7-AA7C-DA7E64A0214E}"/>
               </a:ext>
             </a:extLst>
           </p:cNvPr>
@@ -2925,7 +2925,7 @@
           <p:cNvPr id="3" name="text-26">
             <a:extLst xmlns:a="http://schemas.openxmlformats.org/drawingml/2006/main">
               <a:ext uri="{FF2B5EF4-FFF2-40B4-BE49-F238E27FC236}">
-                <a16:creationId xmlns:a16="http://schemas.microsoft.com/office/drawing/2014/main" id="{A0910647-0F3E-418D-B2B3-25F1420BCCF4}"/>
+                <a16:creationId xmlns:a16="http://schemas.microsoft.com/office/drawing/2014/main" id="{E701F1F3-90D8-4CDB-9646-031231630318}"/>
               </a:ext>
             </a:extLst>
           </p:cNvPr>
@@ -2981,7 +2981,7 @@
           <p:cNvPr id="4" name="text-27">
             <a:extLst xmlns:a="http://schemas.openxmlformats.org/drawingml/2006/main">
               <a:ext uri="{FF2B5EF4-FFF2-40B4-BE49-F238E27FC236}">
-                <a16:creationId xmlns:a16="http://schemas.microsoft.com/office/drawing/2014/main" id="{537B9348-3368-4D45-B079-497BACE86840}"/>
+                <a16:creationId xmlns:a16="http://schemas.microsoft.com/office/drawing/2014/main" id="{851F0671-2547-49EB-94C7-CE47DB92CFA7}"/>
               </a:ext>
             </a:extLst>
           </p:cNvPr>
@@ -3037,7 +3037,7 @@
           <p:cNvPr id="5" name="text-28">
             <a:extLst xmlns:a="http://schemas.openxmlformats.org/drawingml/2006/main">
               <a:ext uri="{FF2B5EF4-FFF2-40B4-BE49-F238E27FC236}">
-                <a16:creationId xmlns:a16="http://schemas.microsoft.com/office/drawing/2014/main" id="{C732B4A5-D049-4A7A-AC0A-DEA684D95987}"/>
+                <a16:creationId xmlns:a16="http://schemas.microsoft.com/office/drawing/2014/main" id="{39F4B3FC-A084-4218-BFF3-E7793807FAD2}"/>
               </a:ext>
             </a:extLst>
           </p:cNvPr>
@@ -3093,7 +3093,7 @@
           <p:cNvPr id="6" name="text-29">
             <a:extLst xmlns:a="http://schemas.openxmlformats.org/drawingml/2006/main">
               <a:ext uri="{FF2B5EF4-FFF2-40B4-BE49-F238E27FC236}">
-                <a16:creationId xmlns:a16="http://schemas.microsoft.com/office/drawing/2014/main" id="{E946BCDC-708D-4EDD-B088-38A38A74F002}"/>
+                <a16:creationId xmlns:a16="http://schemas.microsoft.com/office/drawing/2014/main" id="{402AFB21-D954-4E51-8B0E-98DADA9C01F6}"/>
               </a:ext>
             </a:extLst>
           </p:cNvPr>
@@ -3149,7 +3149,7 @@
           <p:cNvPr id="7" name="box-30">
             <a:extLst xmlns:a="http://schemas.openxmlformats.org/drawingml/2006/main">
               <a:ext uri="{FF2B5EF4-FFF2-40B4-BE49-F238E27FC236}">
-                <a16:creationId xmlns:a16="http://schemas.microsoft.com/office/drawing/2014/main" id="{608D1953-C335-4654-AC1E-A7ABC7714801}"/>
+                <a16:creationId xmlns:a16="http://schemas.microsoft.com/office/drawing/2014/main" id="{4711F673-DC15-47B8-8069-9D742E3EC82C}"/>
               </a:ext>
             </a:extLst>
           </p:cNvPr>
@@ -3182,7 +3182,7 @@
           <p:cNvPr id="8" name="text-31">
             <a:extLst xmlns:a="http://schemas.openxmlformats.org/drawingml/2006/main">
               <a:ext uri="{FF2B5EF4-FFF2-40B4-BE49-F238E27FC236}">
-                <a16:creationId xmlns:a16="http://schemas.microsoft.com/office/drawing/2014/main" id="{160EC7DA-4FDB-4ACD-8007-DE0D96EB284B}"/>
+                <a16:creationId xmlns:a16="http://schemas.microsoft.com/office/drawing/2014/main" id="{4C0FB158-D765-4B02-8D90-466B3767D756}"/>
               </a:ext>
             </a:extLst>
           </p:cNvPr>
@@ -3238,7 +3238,7 @@
           <p:cNvPr id="9" name="text-32">
             <a:extLst xmlns:a="http://schemas.openxmlformats.org/drawingml/2006/main">
               <a:ext uri="{FF2B5EF4-FFF2-40B4-BE49-F238E27FC236}">
-                <a16:creationId xmlns:a16="http://schemas.microsoft.com/office/drawing/2014/main" id="{319F383F-646D-4C09-9B98-DD78EF58342C}"/>
+                <a16:creationId xmlns:a16="http://schemas.microsoft.com/office/drawing/2014/main" id="{0719875C-0CA0-4036-BB23-AA0D46C8AEF8}"/>
               </a:ext>
             </a:extLst>
           </p:cNvPr>
@@ -3294,7 +3294,7 @@
           <p:cNvPr id="10" name="text-33">
             <a:extLst xmlns:a="http://schemas.openxmlformats.org/drawingml/2006/main">
               <a:ext uri="{FF2B5EF4-FFF2-40B4-BE49-F238E27FC236}">
-                <a16:creationId xmlns:a16="http://schemas.microsoft.com/office/drawing/2014/main" id="{62BF7118-48EF-4694-98E9-E14F052E9195}"/>
+                <a16:creationId xmlns:a16="http://schemas.microsoft.com/office/drawing/2014/main" id="{2EC1ECA7-3964-443B-825F-03345539AA4D}"/>
               </a:ext>
             </a:extLst>
           </p:cNvPr>
@@ -3350,7 +3350,7 @@
           <p:cNvPr id="11" name="box-34">
             <a:extLst xmlns:a="http://schemas.openxmlformats.org/drawingml/2006/main">
               <a:ext uri="{FF2B5EF4-FFF2-40B4-BE49-F238E27FC236}">
-                <a16:creationId xmlns:a16="http://schemas.microsoft.com/office/drawing/2014/main" id="{96CEB6BA-6696-4003-B163-DD2DC3EC64E9}"/>
+                <a16:creationId xmlns:a16="http://schemas.microsoft.com/office/drawing/2014/main" id="{E328E655-E96E-47D7-B280-49E0331E394E}"/>
               </a:ext>
             </a:extLst>
           </p:cNvPr>
@@ -3383,7 +3383,7 @@
           <p:cNvPr id="12" name="text-35">
             <a:extLst xmlns:a="http://schemas.openxmlformats.org/drawingml/2006/main">
               <a:ext uri="{FF2B5EF4-FFF2-40B4-BE49-F238E27FC236}">
-                <a16:creationId xmlns:a16="http://schemas.microsoft.com/office/drawing/2014/main" id="{A33B70D7-4BDF-455B-A60B-CD99CF166604}"/>
+                <a16:creationId xmlns:a16="http://schemas.microsoft.com/office/drawing/2014/main" id="{4D7E0A45-221A-4295-A139-5518B2224703}"/>
               </a:ext>
             </a:extLst>
           </p:cNvPr>
@@ -3439,7 +3439,7 @@
           <p:cNvPr id="13" name="text-36">
             <a:extLst xmlns:a="http://schemas.openxmlformats.org/drawingml/2006/main">
               <a:ext uri="{FF2B5EF4-FFF2-40B4-BE49-F238E27FC236}">
-                <a16:creationId xmlns:a16="http://schemas.microsoft.com/office/drawing/2014/main" id="{F40D4C2C-C5D2-48E1-9F75-BA59443C1551}"/>
+                <a16:creationId xmlns:a16="http://schemas.microsoft.com/office/drawing/2014/main" id="{63B6A9F0-FAC0-49C9-A1A0-DB67373BAC68}"/>
               </a:ext>
             </a:extLst>
           </p:cNvPr>
@@ -3495,7 +3495,7 @@
           <p:cNvPr id="14" name="text-37">
             <a:extLst xmlns:a="http://schemas.openxmlformats.org/drawingml/2006/main">
               <a:ext uri="{FF2B5EF4-FFF2-40B4-BE49-F238E27FC236}">
-                <a16:creationId xmlns:a16="http://schemas.microsoft.com/office/drawing/2014/main" id="{6629592E-453F-44C7-ADEA-47135C01EF47}"/>
+                <a16:creationId xmlns:a16="http://schemas.microsoft.com/office/drawing/2014/main" id="{54E79D31-6555-47D1-8E36-5033140A02BF}"/>
               </a:ext>
             </a:extLst>
           </p:cNvPr>
@@ -3551,7 +3551,7 @@
           <p:cNvPr id="15" name="box-38">
             <a:extLst xmlns:a="http://schemas.openxmlformats.org/drawingml/2006/main">
               <a:ext uri="{FF2B5EF4-FFF2-40B4-BE49-F238E27FC236}">
-                <a16:creationId xmlns:a16="http://schemas.microsoft.com/office/drawing/2014/main" id="{8FC5A985-9A64-4F4D-9277-542E4D3F239F}"/>
+                <a16:creationId xmlns:a16="http://schemas.microsoft.com/office/drawing/2014/main" id="{A390B7DF-C245-4074-8A4D-8E8C64544E60}"/>
               </a:ext>
             </a:extLst>
           </p:cNvPr>
@@ -3584,7 +3584,7 @@
           <p:cNvPr id="16" name="text-39">
             <a:extLst xmlns:a="http://schemas.openxmlformats.org/drawingml/2006/main">
               <a:ext uri="{FF2B5EF4-FFF2-40B4-BE49-F238E27FC236}">
-                <a16:creationId xmlns:a16="http://schemas.microsoft.com/office/drawing/2014/main" id="{836C5D1A-9B89-466B-BF2C-E1FCCA46206E}"/>
+                <a16:creationId xmlns:a16="http://schemas.microsoft.com/office/drawing/2014/main" id="{1F7A5F40-BAF3-4F18-98A6-3568D3EA3483}"/>
               </a:ext>
             </a:extLst>
           </p:cNvPr>
@@ -3640,7 +3640,7 @@
           <p:cNvPr id="17" name="text-40">
             <a:extLst xmlns:a="http://schemas.openxmlformats.org/drawingml/2006/main">
               <a:ext uri="{FF2B5EF4-FFF2-40B4-BE49-F238E27FC236}">
-                <a16:creationId xmlns:a16="http://schemas.microsoft.com/office/drawing/2014/main" id="{FD0220FF-A81F-4F79-BCDC-4BFE9D075615}"/>
+                <a16:creationId xmlns:a16="http://schemas.microsoft.com/office/drawing/2014/main" id="{7853B88D-B678-4ED1-9260-02945E0778D3}"/>
               </a:ext>
             </a:extLst>
           </p:cNvPr>
@@ -3696,7 +3696,7 @@
           <p:cNvPr id="18" name="text-41">
             <a:extLst xmlns:a="http://schemas.openxmlformats.org/drawingml/2006/main">
               <a:ext uri="{FF2B5EF4-FFF2-40B4-BE49-F238E27FC236}">
-                <a16:creationId xmlns:a16="http://schemas.microsoft.com/office/drawing/2014/main" id="{017FFD23-C791-4595-98FD-89BC5B398B97}"/>
+                <a16:creationId xmlns:a16="http://schemas.microsoft.com/office/drawing/2014/main" id="{7E05DE00-113F-4F39-BBBA-3D1BA1627F29}"/>
               </a:ext>
             </a:extLst>
           </p:cNvPr>
@@ -3750,7 +3750,7 @@
     </p:spTree>
     <p:extLst>
       <p:ext uri="{BB962C8B-B14F-4D97-AF65-F5344CB8AC3E}">
-        <p14:creationId xmlns:p14="http://schemas.microsoft.com/office/powerpoint/2010/main" val="1473192633"/>
+        <p14:creationId xmlns:p14="http://schemas.microsoft.com/office/powerpoint/2010/main" val="1728093575"/>
       </p:ext>
     </p:extLst>
   </p:cSld>
@@ -3781,7 +3781,7 @@
           <p:cNvPr id="18" name="box-42">
             <a:extLst xmlns:a="http://schemas.openxmlformats.org/drawingml/2006/main">
               <a:ext uri="{FF2B5EF4-FFF2-40B4-BE49-F238E27FC236}">
-                <a16:creationId xmlns:a16="http://schemas.microsoft.com/office/drawing/2014/main" id="{F1EA8EE1-1BA4-4BB7-BFE4-4E4FDB342FFD}"/>
+                <a16:creationId xmlns:a16="http://schemas.microsoft.com/office/drawing/2014/main" id="{09FD2316-D4D8-48EE-9483-A3C65DD6F881}"/>
               </a:ext>
             </a:extLst>
           </p:cNvPr>
@@ -3814,7 +3814,7 @@
           <p:cNvPr id="2" name="text-43">
             <a:extLst xmlns:a="http://schemas.openxmlformats.org/drawingml/2006/main">
               <a:ext uri="{FF2B5EF4-FFF2-40B4-BE49-F238E27FC236}">
-                <a16:creationId xmlns:a16="http://schemas.microsoft.com/office/drawing/2014/main" id="{73A78BEF-41F4-4101-8384-C4CBB469883D}"/>
+                <a16:creationId xmlns:a16="http://schemas.microsoft.com/office/drawing/2014/main" id="{B8D6BB38-8EF8-403C-89A6-2BA649AF6152}"/>
               </a:ext>
             </a:extLst>
           </p:cNvPr>
@@ -3870,7 +3870,7 @@
           <p:cNvPr id="3" name="text-44">
             <a:extLst xmlns:a="http://schemas.openxmlformats.org/drawingml/2006/main">
               <a:ext uri="{FF2B5EF4-FFF2-40B4-BE49-F238E27FC236}">
-                <a16:creationId xmlns:a16="http://schemas.microsoft.com/office/drawing/2014/main" id="{B1C29325-E632-47AB-A551-D1BDB5A1C943}"/>
+                <a16:creationId xmlns:a16="http://schemas.microsoft.com/office/drawing/2014/main" id="{AF3A3A66-3E2E-4458-9548-98232CFFF6BE}"/>
               </a:ext>
             </a:extLst>
           </p:cNvPr>
@@ -3926,7 +3926,7 @@
           <p:cNvPr id="4" name="text-45">
             <a:extLst xmlns:a="http://schemas.openxmlformats.org/drawingml/2006/main">
               <a:ext uri="{FF2B5EF4-FFF2-40B4-BE49-F238E27FC236}">
-                <a16:creationId xmlns:a16="http://schemas.microsoft.com/office/drawing/2014/main" id="{3384D07F-C00D-457E-B818-513D13ED5985}"/>
+                <a16:creationId xmlns:a16="http://schemas.microsoft.com/office/drawing/2014/main" id="{6D7DA84B-3ADB-4D77-BE93-3DB1739AAEE1}"/>
               </a:ext>
             </a:extLst>
           </p:cNvPr>
@@ -3982,7 +3982,7 @@
           <p:cNvPr id="5" name="text-46">
             <a:extLst xmlns:a="http://schemas.openxmlformats.org/drawingml/2006/main">
               <a:ext uri="{FF2B5EF4-FFF2-40B4-BE49-F238E27FC236}">
-                <a16:creationId xmlns:a16="http://schemas.microsoft.com/office/drawing/2014/main" id="{47E2A02E-02EF-40E3-ABC3-F716E7773EB4}"/>
+                <a16:creationId xmlns:a16="http://schemas.microsoft.com/office/drawing/2014/main" id="{1EBA72E3-09B7-40BE-9906-911293D8ACDA}"/>
               </a:ext>
             </a:extLst>
           </p:cNvPr>
@@ -4038,7 +4038,7 @@
           <p:cNvPr id="6" name="box-47">
             <a:extLst xmlns:a="http://schemas.openxmlformats.org/drawingml/2006/main">
               <a:ext uri="{FF2B5EF4-FFF2-40B4-BE49-F238E27FC236}">
-                <a16:creationId xmlns:a16="http://schemas.microsoft.com/office/drawing/2014/main" id="{0F9FD743-CE34-4C36-B9BA-FC0C52B9A14D}"/>
+                <a16:creationId xmlns:a16="http://schemas.microsoft.com/office/drawing/2014/main" id="{758E1A76-D95E-4ECC-83FA-32D184AD4DE8}"/>
               </a:ext>
             </a:extLst>
           </p:cNvPr>
@@ -4071,7 +4071,7 @@
           <p:cNvPr id="7" name="text-48">
             <a:extLst xmlns:a="http://schemas.openxmlformats.org/drawingml/2006/main">
               <a:ext uri="{FF2B5EF4-FFF2-40B4-BE49-F238E27FC236}">
-                <a16:creationId xmlns:a16="http://schemas.microsoft.com/office/drawing/2014/main" id="{6A7A53CF-A6A3-42E6-8256-6B999B3AD7CF}"/>
+                <a16:creationId xmlns:a16="http://schemas.microsoft.com/office/drawing/2014/main" id="{9A22E521-0E89-40B1-A9B3-CFF3D5B23EB9}"/>
               </a:ext>
             </a:extLst>
           </p:cNvPr>
@@ -4127,7 +4127,7 @@
           <p:cNvPr id="8" name="text-49">
             <a:extLst xmlns:a="http://schemas.openxmlformats.org/drawingml/2006/main">
               <a:ext uri="{FF2B5EF4-FFF2-40B4-BE49-F238E27FC236}">
-                <a16:creationId xmlns:a16="http://schemas.microsoft.com/office/drawing/2014/main" id="{5FF2C07A-97A6-4AAC-902F-D74599A5757E}"/>
+                <a16:creationId xmlns:a16="http://schemas.microsoft.com/office/drawing/2014/main" id="{301045D3-6FE6-4269-8236-4FE9BB3D8157}"/>
               </a:ext>
             </a:extLst>
           </p:cNvPr>
@@ -4183,7 +4183,7 @@
           <p:cNvPr id="9" name="box-50">
             <a:extLst xmlns:a="http://schemas.openxmlformats.org/drawingml/2006/main">
               <a:ext uri="{FF2B5EF4-FFF2-40B4-BE49-F238E27FC236}">
-                <a16:creationId xmlns:a16="http://schemas.microsoft.com/office/drawing/2014/main" id="{C31B7107-251C-4712-9393-F636DA907733}"/>
+                <a16:creationId xmlns:a16="http://schemas.microsoft.com/office/drawing/2014/main" id="{B4430621-3A8E-467B-84A8-A5F0AB257F13}"/>
               </a:ext>
             </a:extLst>
           </p:cNvPr>
@@ -4216,7 +4216,7 @@
           <p:cNvPr id="10" name="text-51">
             <a:extLst xmlns:a="http://schemas.openxmlformats.org/drawingml/2006/main">
               <a:ext uri="{FF2B5EF4-FFF2-40B4-BE49-F238E27FC236}">
-                <a16:creationId xmlns:a16="http://schemas.microsoft.com/office/drawing/2014/main" id="{668A5964-D75C-4559-A853-F573077B5937}"/>
+                <a16:creationId xmlns:a16="http://schemas.microsoft.com/office/drawing/2014/main" id="{A12E063A-A877-4757-956C-2D00C8FDF03C}"/>
               </a:ext>
             </a:extLst>
           </p:cNvPr>
@@ -4272,7 +4272,7 @@
           <p:cNvPr id="11" name="text-52">
             <a:extLst xmlns:a="http://schemas.openxmlformats.org/drawingml/2006/main">
               <a:ext uri="{FF2B5EF4-FFF2-40B4-BE49-F238E27FC236}">
-                <a16:creationId xmlns:a16="http://schemas.microsoft.com/office/drawing/2014/main" id="{146FFFC5-0DE8-49F6-B26B-3A063C2D5913}"/>
+                <a16:creationId xmlns:a16="http://schemas.microsoft.com/office/drawing/2014/main" id="{7E52C945-CE90-45BF-9B56-9AFF28055C7C}"/>
               </a:ext>
             </a:extLst>
           </p:cNvPr>
@@ -4328,7 +4328,7 @@
           <p:cNvPr id="12" name="box-53">
             <a:extLst xmlns:a="http://schemas.openxmlformats.org/drawingml/2006/main">
               <a:ext uri="{FF2B5EF4-FFF2-40B4-BE49-F238E27FC236}">
-                <a16:creationId xmlns:a16="http://schemas.microsoft.com/office/drawing/2014/main" id="{9EBB08A0-B35E-4C63-BB90-CB2B08A5C2B2}"/>
+                <a16:creationId xmlns:a16="http://schemas.microsoft.com/office/drawing/2014/main" id="{6846920C-6EDC-417C-BA64-C617D37952CD}"/>
               </a:ext>
             </a:extLst>
           </p:cNvPr>
@@ -4361,7 +4361,7 @@
           <p:cNvPr id="13" name="text-54">
             <a:extLst xmlns:a="http://schemas.openxmlformats.org/drawingml/2006/main">
               <a:ext uri="{FF2B5EF4-FFF2-40B4-BE49-F238E27FC236}">
-                <a16:creationId xmlns:a16="http://schemas.microsoft.com/office/drawing/2014/main" id="{F1F5444E-E382-49FF-B749-94130EFAB7D4}"/>
+                <a16:creationId xmlns:a16="http://schemas.microsoft.com/office/drawing/2014/main" id="{40E592CB-854B-4271-A240-BC9AAAA74A7F}"/>
               </a:ext>
             </a:extLst>
           </p:cNvPr>
@@ -4417,7 +4417,7 @@
           <p:cNvPr id="14" name="text-55">
             <a:extLst xmlns:a="http://schemas.openxmlformats.org/drawingml/2006/main">
               <a:ext uri="{FF2B5EF4-FFF2-40B4-BE49-F238E27FC236}">
-                <a16:creationId xmlns:a16="http://schemas.microsoft.com/office/drawing/2014/main" id="{3CE32CD1-AD16-4749-AFF1-8FAF1A014F84}"/>
+                <a16:creationId xmlns:a16="http://schemas.microsoft.com/office/drawing/2014/main" id="{94AA6685-E4B5-4D24-8480-708D59BE0B8E}"/>
               </a:ext>
             </a:extLst>
           </p:cNvPr>
@@ -4473,7 +4473,7 @@
           <p:cNvPr id="15" name="box-56">
             <a:extLst xmlns:a="http://schemas.openxmlformats.org/drawingml/2006/main">
               <a:ext uri="{FF2B5EF4-FFF2-40B4-BE49-F238E27FC236}">
-                <a16:creationId xmlns:a16="http://schemas.microsoft.com/office/drawing/2014/main" id="{15C21E6E-4812-4CB0-9144-C9B8956E0620}"/>
+                <a16:creationId xmlns:a16="http://schemas.microsoft.com/office/drawing/2014/main" id="{B07F4D49-F0B1-4675-A75F-25DC6158AF45}"/>
               </a:ext>
             </a:extLst>
           </p:cNvPr>
@@ -4506,7 +4506,7 @@
           <p:cNvPr id="16" name="text-57">
             <a:extLst xmlns:a="http://schemas.openxmlformats.org/drawingml/2006/main">
               <a:ext uri="{FF2B5EF4-FFF2-40B4-BE49-F238E27FC236}">
-                <a16:creationId xmlns:a16="http://schemas.microsoft.com/office/drawing/2014/main" id="{FDCAEB70-D605-46B9-8BB8-4DC6CFDB4B66}"/>
+                <a16:creationId xmlns:a16="http://schemas.microsoft.com/office/drawing/2014/main" id="{1C24CC5D-A433-4471-B361-ABA6C30AEB2E}"/>
               </a:ext>
             </a:extLst>
           </p:cNvPr>
@@ -4562,7 +4562,7 @@
           <p:cNvPr id="17" name="text-58">
             <a:extLst xmlns:a="http://schemas.openxmlformats.org/drawingml/2006/main">
               <a:ext uri="{FF2B5EF4-FFF2-40B4-BE49-F238E27FC236}">
-                <a16:creationId xmlns:a16="http://schemas.microsoft.com/office/drawing/2014/main" id="{F42E5636-71E0-42B0-9E7A-D010A3029FBD}"/>
+                <a16:creationId xmlns:a16="http://schemas.microsoft.com/office/drawing/2014/main" id="{3616D272-1819-4750-8F91-75E1E30FA13C}"/>
               </a:ext>
             </a:extLst>
           </p:cNvPr>
@@ -4616,7 +4616,7 @@
     </p:spTree>
     <p:extLst>
       <p:ext uri="{BB962C8B-B14F-4D97-AF65-F5344CB8AC3E}">
-        <p14:creationId xmlns:p14="http://schemas.microsoft.com/office/powerpoint/2010/main" val="1289268093"/>
+        <p14:creationId xmlns:p14="http://schemas.microsoft.com/office/powerpoint/2010/main" val="1875877072"/>
       </p:ext>
     </p:extLst>
   </p:cSld>
@@ -4647,7 +4647,7 @@
           <p:cNvPr id="21" name="box-59">
             <a:extLst xmlns:a="http://schemas.openxmlformats.org/drawingml/2006/main">
               <a:ext uri="{FF2B5EF4-FFF2-40B4-BE49-F238E27FC236}">
-                <a16:creationId xmlns:a16="http://schemas.microsoft.com/office/drawing/2014/main" id="{2D13435A-2ED0-4CCD-8538-F1D6B4FE3BB8}"/>
+                <a16:creationId xmlns:a16="http://schemas.microsoft.com/office/drawing/2014/main" id="{B030CE66-1C18-445D-9C1B-D8172376FD3C}"/>
               </a:ext>
             </a:extLst>
           </p:cNvPr>
@@ -4680,7 +4680,7 @@
           <p:cNvPr id="2" name="text-60">
             <a:extLst xmlns:a="http://schemas.openxmlformats.org/drawingml/2006/main">
               <a:ext uri="{FF2B5EF4-FFF2-40B4-BE49-F238E27FC236}">
-                <a16:creationId xmlns:a16="http://schemas.microsoft.com/office/drawing/2014/main" id="{DB47F362-F6A5-49CC-AA41-8B521F4D4410}"/>
+                <a16:creationId xmlns:a16="http://schemas.microsoft.com/office/drawing/2014/main" id="{0F30FB06-E096-4D72-9812-29DCBF62D47E}"/>
               </a:ext>
             </a:extLst>
           </p:cNvPr>
@@ -4736,7 +4736,7 @@
           <p:cNvPr id="3" name="text-61">
             <a:extLst xmlns:a="http://schemas.openxmlformats.org/drawingml/2006/main">
               <a:ext uri="{FF2B5EF4-FFF2-40B4-BE49-F238E27FC236}">
-                <a16:creationId xmlns:a16="http://schemas.microsoft.com/office/drawing/2014/main" id="{0795BA14-26A4-432B-9999-C6B7674F2972}"/>
+                <a16:creationId xmlns:a16="http://schemas.microsoft.com/office/drawing/2014/main" id="{C15DEB1D-CEA1-44A1-B8BA-23AB0F83700B}"/>
               </a:ext>
             </a:extLst>
           </p:cNvPr>
@@ -4792,7 +4792,7 @@
           <p:cNvPr id="4" name="text-62">
             <a:extLst xmlns:a="http://schemas.openxmlformats.org/drawingml/2006/main">
               <a:ext uri="{FF2B5EF4-FFF2-40B4-BE49-F238E27FC236}">
-                <a16:creationId xmlns:a16="http://schemas.microsoft.com/office/drawing/2014/main" id="{064DD05F-1241-48E6-BC98-7C1462FF463B}"/>
+                <a16:creationId xmlns:a16="http://schemas.microsoft.com/office/drawing/2014/main" id="{59EABAB4-753B-4F62-91EB-5197D5D1ED1C}"/>
               </a:ext>
             </a:extLst>
           </p:cNvPr>
@@ -4848,7 +4848,7 @@
           <p:cNvPr id="5" name="text-63">
             <a:extLst xmlns:a="http://schemas.openxmlformats.org/drawingml/2006/main">
               <a:ext uri="{FF2B5EF4-FFF2-40B4-BE49-F238E27FC236}">
-                <a16:creationId xmlns:a16="http://schemas.microsoft.com/office/drawing/2014/main" id="{C98DEFCF-E1F8-4C76-B816-B0F38B042388}"/>
+                <a16:creationId xmlns:a16="http://schemas.microsoft.com/office/drawing/2014/main" id="{FFCDD576-C7B9-49D9-965F-B7703F359A96}"/>
               </a:ext>
             </a:extLst>
           </p:cNvPr>
@@ -4904,7 +4904,7 @@
           <p:cNvPr id="6" name="box-64">
             <a:extLst xmlns:a="http://schemas.openxmlformats.org/drawingml/2006/main">
               <a:ext uri="{FF2B5EF4-FFF2-40B4-BE49-F238E27FC236}">
-                <a16:creationId xmlns:a16="http://schemas.microsoft.com/office/drawing/2014/main" id="{8E81072C-3F07-4F2C-A142-2ACB840CEA80}"/>
+                <a16:creationId xmlns:a16="http://schemas.microsoft.com/office/drawing/2014/main" id="{8617E585-5652-473B-9ADA-F4A05578C69E}"/>
               </a:ext>
             </a:extLst>
           </p:cNvPr>
@@ -4937,7 +4937,7 @@
           <p:cNvPr id="7" name="dot-65">
             <a:extLst xmlns:a="http://schemas.openxmlformats.org/drawingml/2006/main">
               <a:ext uri="{FF2B5EF4-FFF2-40B4-BE49-F238E27FC236}">
-                <a16:creationId xmlns:a16="http://schemas.microsoft.com/office/drawing/2014/main" id="{3FE56057-690B-4D01-8721-3FAD65D37A0D}"/>
+                <a16:creationId xmlns:a16="http://schemas.microsoft.com/office/drawing/2014/main" id="{DD64BE3C-76AD-4F7E-89F1-CDB9E31933E5}"/>
               </a:ext>
             </a:extLst>
           </p:cNvPr>
@@ -4968,7 +4968,7 @@
           <p:cNvPr id="8" name="text-66">
             <a:extLst xmlns:a="http://schemas.openxmlformats.org/drawingml/2006/main">
               <a:ext uri="{FF2B5EF4-FFF2-40B4-BE49-F238E27FC236}">
-                <a16:creationId xmlns:a16="http://schemas.microsoft.com/office/drawing/2014/main" id="{58341DFA-2224-47A4-BC55-E765698D68E8}"/>
+                <a16:creationId xmlns:a16="http://schemas.microsoft.com/office/drawing/2014/main" id="{6508250D-36B4-4F33-B406-E5649C387E26}"/>
               </a:ext>
             </a:extLst>
           </p:cNvPr>
@@ -5024,7 +5024,7 @@
           <p:cNvPr id="9" name="text-67">
             <a:extLst xmlns:a="http://schemas.openxmlformats.org/drawingml/2006/main">
               <a:ext uri="{FF2B5EF4-FFF2-40B4-BE49-F238E27FC236}">
-                <a16:creationId xmlns:a16="http://schemas.microsoft.com/office/drawing/2014/main" id="{9B73D8C9-9F82-458C-858E-82DA6A26AD0E}"/>
+                <a16:creationId xmlns:a16="http://schemas.microsoft.com/office/drawing/2014/main" id="{F0C12B2F-ECA6-4453-99C2-BB150A18BDA1}"/>
               </a:ext>
             </a:extLst>
           </p:cNvPr>
@@ -5080,7 +5080,7 @@
           <p:cNvPr id="10" name="text-68">
             <a:extLst xmlns:a="http://schemas.openxmlformats.org/drawingml/2006/main">
               <a:ext uri="{FF2B5EF4-FFF2-40B4-BE49-F238E27FC236}">
-                <a16:creationId xmlns:a16="http://schemas.microsoft.com/office/drawing/2014/main" id="{DEC681D7-D6EF-4DDF-BD91-1AE55F33C4CA}"/>
+                <a16:creationId xmlns:a16="http://schemas.microsoft.com/office/drawing/2014/main" id="{CE4796E1-8CAC-4EC9-975B-022AF295ADEF}"/>
               </a:ext>
             </a:extLst>
           </p:cNvPr>
@@ -5136,7 +5136,7 @@
           <p:cNvPr id="11" name="dot-69">
             <a:extLst xmlns:a="http://schemas.openxmlformats.org/drawingml/2006/main">
               <a:ext uri="{FF2B5EF4-FFF2-40B4-BE49-F238E27FC236}">
-                <a16:creationId xmlns:a16="http://schemas.microsoft.com/office/drawing/2014/main" id="{A04C76ED-897D-4D7E-9787-A0D2CA2FB496}"/>
+                <a16:creationId xmlns:a16="http://schemas.microsoft.com/office/drawing/2014/main" id="{0EBFDE20-1E68-4AA7-9FDC-5083FFE15976}"/>
               </a:ext>
             </a:extLst>
           </p:cNvPr>
@@ -5167,7 +5167,7 @@
           <p:cNvPr id="12" name="text-70">
             <a:extLst xmlns:a="http://schemas.openxmlformats.org/drawingml/2006/main">
               <a:ext uri="{FF2B5EF4-FFF2-40B4-BE49-F238E27FC236}">
-                <a16:creationId xmlns:a16="http://schemas.microsoft.com/office/drawing/2014/main" id="{F4B60B00-6520-4B83-8D03-27C3D20D7BB8}"/>
+                <a16:creationId xmlns:a16="http://schemas.microsoft.com/office/drawing/2014/main" id="{F0CBBF78-733E-4507-B3D9-A9F3B42843ED}"/>
               </a:ext>
             </a:extLst>
           </p:cNvPr>
@@ -5223,7 +5223,7 @@
           <p:cNvPr id="13" name="text-71">
             <a:extLst xmlns:a="http://schemas.openxmlformats.org/drawingml/2006/main">
               <a:ext uri="{FF2B5EF4-FFF2-40B4-BE49-F238E27FC236}">
-                <a16:creationId xmlns:a16="http://schemas.microsoft.com/office/drawing/2014/main" id="{78BC3173-E398-477F-996B-F7C86BFC0847}"/>
+                <a16:creationId xmlns:a16="http://schemas.microsoft.com/office/drawing/2014/main" id="{6D63AE65-4B38-4BA6-8B0E-BC3D8FC41E92}"/>
               </a:ext>
             </a:extLst>
           </p:cNvPr>
@@ -5279,7 +5279,7 @@
           <p:cNvPr id="14" name="text-72">
             <a:extLst xmlns:a="http://schemas.openxmlformats.org/drawingml/2006/main">
               <a:ext uri="{FF2B5EF4-FFF2-40B4-BE49-F238E27FC236}">
-                <a16:creationId xmlns:a16="http://schemas.microsoft.com/office/drawing/2014/main" id="{7E1C5B7B-8E18-4A35-AE6A-25448E4F995B}"/>
+                <a16:creationId xmlns:a16="http://schemas.microsoft.com/office/drawing/2014/main" id="{8B6AFCC9-3642-426C-8B67-20C5B042E660}"/>
               </a:ext>
             </a:extLst>
           </p:cNvPr>
@@ -5335,7 +5335,7 @@
           <p:cNvPr id="15" name="dot-73">
             <a:extLst xmlns:a="http://schemas.openxmlformats.org/drawingml/2006/main">
               <a:ext uri="{FF2B5EF4-FFF2-40B4-BE49-F238E27FC236}">
-                <a16:creationId xmlns:a16="http://schemas.microsoft.com/office/drawing/2014/main" id="{9EA86E5F-2552-4DDC-8E74-1996A9B9DC49}"/>
+                <a16:creationId xmlns:a16="http://schemas.microsoft.com/office/drawing/2014/main" id="{523BE894-F557-4105-ADB1-DB297951A04E}"/>
               </a:ext>
             </a:extLst>
           </p:cNvPr>
@@ -5366,7 +5366,7 @@
           <p:cNvPr id="16" name="text-74">
             <a:extLst xmlns:a="http://schemas.openxmlformats.org/drawingml/2006/main">
               <a:ext uri="{FF2B5EF4-FFF2-40B4-BE49-F238E27FC236}">
-                <a16:creationId xmlns:a16="http://schemas.microsoft.com/office/drawing/2014/main" id="{86594EAB-00B6-4B70-BE71-F864D4B70879}"/>
+                <a16:creationId xmlns:a16="http://schemas.microsoft.com/office/drawing/2014/main" id="{C58E37E3-3BE3-4C5A-84CD-7D823ED934D6}"/>
               </a:ext>
             </a:extLst>
           </p:cNvPr>
@@ -5422,7 +5422,7 @@
           <p:cNvPr id="17" name="text-75">
             <a:extLst xmlns:a="http://schemas.openxmlformats.org/drawingml/2006/main">
               <a:ext uri="{FF2B5EF4-FFF2-40B4-BE49-F238E27FC236}">
-                <a16:creationId xmlns:a16="http://schemas.microsoft.com/office/drawing/2014/main" id="{F29A1882-9FDC-48EF-890B-E5E125FFB001}"/>
+                <a16:creationId xmlns:a16="http://schemas.microsoft.com/office/drawing/2014/main" id="{77D50507-F297-47C0-9241-7A97D5D21DEC}"/>
               </a:ext>
             </a:extLst>
           </p:cNvPr>
@@ -5478,7 +5478,7 @@
           <p:cNvPr id="18" name="text-76">
             <a:extLst xmlns:a="http://schemas.openxmlformats.org/drawingml/2006/main">
               <a:ext uri="{FF2B5EF4-FFF2-40B4-BE49-F238E27FC236}">
-                <a16:creationId xmlns:a16="http://schemas.microsoft.com/office/drawing/2014/main" id="{307BED5D-588E-4827-8E2C-05864517C03A}"/>
+                <a16:creationId xmlns:a16="http://schemas.microsoft.com/office/drawing/2014/main" id="{083F3DC4-F88A-40A3-855C-0061AD311841}"/>
               </a:ext>
             </a:extLst>
           </p:cNvPr>
@@ -5534,7 +5534,7 @@
           <p:cNvPr id="19" name="box-77">
             <a:extLst xmlns:a="http://schemas.openxmlformats.org/drawingml/2006/main">
               <a:ext uri="{FF2B5EF4-FFF2-40B4-BE49-F238E27FC236}">
-                <a16:creationId xmlns:a16="http://schemas.microsoft.com/office/drawing/2014/main" id="{FF35AFEC-3DF5-40E4-81AC-9343839BE34A}"/>
+                <a16:creationId xmlns:a16="http://schemas.microsoft.com/office/drawing/2014/main" id="{EE833D58-1CC4-4D00-835E-88A42DC448F3}"/>
               </a:ext>
             </a:extLst>
           </p:cNvPr>
@@ -5567,7 +5567,7 @@
           <p:cNvPr id="20" name="text-78">
             <a:extLst xmlns:a="http://schemas.openxmlformats.org/drawingml/2006/main">
               <a:ext uri="{FF2B5EF4-FFF2-40B4-BE49-F238E27FC236}">
-                <a16:creationId xmlns:a16="http://schemas.microsoft.com/office/drawing/2014/main" id="{4DD5A8A9-BFA1-48C2-95E0-1D8B65470785}"/>
+                <a16:creationId xmlns:a16="http://schemas.microsoft.com/office/drawing/2014/main" id="{EDF00F7C-B7E8-4FA7-89CC-1A121B59AC75}"/>
               </a:ext>
             </a:extLst>
           </p:cNvPr>
@@ -5621,7 +5621,7 @@
     </p:spTree>
     <p:extLst>
       <p:ext uri="{BB962C8B-B14F-4D97-AF65-F5344CB8AC3E}">
-        <p14:creationId xmlns:p14="http://schemas.microsoft.com/office/powerpoint/2010/main" val="2093698254"/>
+        <p14:creationId xmlns:p14="http://schemas.microsoft.com/office/powerpoint/2010/main" val="737752390"/>
       </p:ext>
     </p:extLst>
   </p:cSld>
@@ -5652,7 +5652,7 @@
           <p:cNvPr id="18" name="box-79">
             <a:extLst xmlns:a="http://schemas.openxmlformats.org/drawingml/2006/main">
               <a:ext uri="{FF2B5EF4-FFF2-40B4-BE49-F238E27FC236}">
-                <a16:creationId xmlns:a16="http://schemas.microsoft.com/office/drawing/2014/main" id="{6CE30EFD-E761-4899-9402-305B63FAC374}"/>
+                <a16:creationId xmlns:a16="http://schemas.microsoft.com/office/drawing/2014/main" id="{008E3398-0B7C-487C-9FBA-B06C87D2E681}"/>
               </a:ext>
             </a:extLst>
           </p:cNvPr>
@@ -5685,7 +5685,7 @@
           <p:cNvPr id="2" name="text-80">
             <a:extLst xmlns:a="http://schemas.openxmlformats.org/drawingml/2006/main">
               <a:ext uri="{FF2B5EF4-FFF2-40B4-BE49-F238E27FC236}">
-                <a16:creationId xmlns:a16="http://schemas.microsoft.com/office/drawing/2014/main" id="{C61F8F24-87AD-4B6B-83BC-171425DCD7F3}"/>
+                <a16:creationId xmlns:a16="http://schemas.microsoft.com/office/drawing/2014/main" id="{8E43AB92-040D-4D87-AEEC-774E825442F7}"/>
               </a:ext>
             </a:extLst>
           </p:cNvPr>
@@ -5741,7 +5741,7 @@
           <p:cNvPr id="3" name="text-81">
             <a:extLst xmlns:a="http://schemas.openxmlformats.org/drawingml/2006/main">
               <a:ext uri="{FF2B5EF4-FFF2-40B4-BE49-F238E27FC236}">
-                <a16:creationId xmlns:a16="http://schemas.microsoft.com/office/drawing/2014/main" id="{3E293390-3550-4A28-84D8-4EA0BA16357F}"/>
+                <a16:creationId xmlns:a16="http://schemas.microsoft.com/office/drawing/2014/main" id="{D12E8566-4DBB-4CDC-9C16-64296B20991D}"/>
               </a:ext>
             </a:extLst>
           </p:cNvPr>
@@ -5797,7 +5797,7 @@
           <p:cNvPr id="4" name="text-82">
             <a:extLst xmlns:a="http://schemas.openxmlformats.org/drawingml/2006/main">
               <a:ext uri="{FF2B5EF4-FFF2-40B4-BE49-F238E27FC236}">
-                <a16:creationId xmlns:a16="http://schemas.microsoft.com/office/drawing/2014/main" id="{2DD38D03-2E09-49F6-99CC-1E8BDA34EE46}"/>
+                <a16:creationId xmlns:a16="http://schemas.microsoft.com/office/drawing/2014/main" id="{A75DE5CD-9352-4BA5-906A-FF235AD80A34}"/>
               </a:ext>
             </a:extLst>
           </p:cNvPr>
@@ -5853,7 +5853,7 @@
           <p:cNvPr id="5" name="text-83">
             <a:extLst xmlns:a="http://schemas.openxmlformats.org/drawingml/2006/main">
               <a:ext uri="{FF2B5EF4-FFF2-40B4-BE49-F238E27FC236}">
-                <a16:creationId xmlns:a16="http://schemas.microsoft.com/office/drawing/2014/main" id="{868354DF-136E-425A-8E4E-FC8A8683290F}"/>
+                <a16:creationId xmlns:a16="http://schemas.microsoft.com/office/drawing/2014/main" id="{6CC6BEC3-91AD-4C6B-82EE-B585B94A275F}"/>
               </a:ext>
             </a:extLst>
           </p:cNvPr>
@@ -5909,7 +5909,7 @@
           <p:cNvPr id="6" name="text-84">
             <a:extLst xmlns:a="http://schemas.openxmlformats.org/drawingml/2006/main">
               <a:ext uri="{FF2B5EF4-FFF2-40B4-BE49-F238E27FC236}">
-                <a16:creationId xmlns:a16="http://schemas.microsoft.com/office/drawing/2014/main" id="{908DA866-F89D-434C-BC20-E14598919DDC}"/>
+                <a16:creationId xmlns:a16="http://schemas.microsoft.com/office/drawing/2014/main" id="{270B6A19-47E4-40FB-B62A-8A95B0BC49EE}"/>
               </a:ext>
             </a:extLst>
           </p:cNvPr>
@@ -5965,7 +5965,7 @@
           <p:cNvPr id="7" name="text-85">
             <a:extLst xmlns:a="http://schemas.openxmlformats.org/drawingml/2006/main">
               <a:ext uri="{FF2B5EF4-FFF2-40B4-BE49-F238E27FC236}">
-                <a16:creationId xmlns:a16="http://schemas.microsoft.com/office/drawing/2014/main" id="{3ACA431A-66EA-4BF7-B7E8-D00549514EA7}"/>
+                <a16:creationId xmlns:a16="http://schemas.microsoft.com/office/drawing/2014/main" id="{43A0F352-429B-49D5-BE40-02B32662ACE9}"/>
               </a:ext>
             </a:extLst>
           </p:cNvPr>
@@ -6021,7 +6021,7 @@
           <p:cNvPr id="8" name="text-86">
             <a:extLst xmlns:a="http://schemas.openxmlformats.org/drawingml/2006/main">
               <a:ext uri="{FF2B5EF4-FFF2-40B4-BE49-F238E27FC236}">
-                <a16:creationId xmlns:a16="http://schemas.microsoft.com/office/drawing/2014/main" id="{6589C204-E743-4EDB-8D2B-2DCDAC368E4B}"/>
+                <a16:creationId xmlns:a16="http://schemas.microsoft.com/office/drawing/2014/main" id="{022E99E2-874D-48D7-95E4-49DD0FD51220}"/>
               </a:ext>
             </a:extLst>
           </p:cNvPr>
@@ -6067,7 +6067,7 @@
                 <a:ea typeface="Arial"/>
                 <a:cs typeface="Arial"/>
               </a:rPr>
-              <a:t>68 / 68</a:t>
+              <a:t>70 / 70</a:t>
             </a:r>
           </a:p>
         </p:txBody>
@@ -6077,7 +6077,7 @@
           <p:cNvPr id="9" name="text-87">
             <a:extLst xmlns:a="http://schemas.openxmlformats.org/drawingml/2006/main">
               <a:ext uri="{FF2B5EF4-FFF2-40B4-BE49-F238E27FC236}">
-                <a16:creationId xmlns:a16="http://schemas.microsoft.com/office/drawing/2014/main" id="{2CE44457-9E44-4946-862A-003E8DAE46F2}"/>
+                <a16:creationId xmlns:a16="http://schemas.microsoft.com/office/drawing/2014/main" id="{43FD3B3D-332F-4573-9A2F-14BD2346ECA0}"/>
               </a:ext>
             </a:extLst>
           </p:cNvPr>
@@ -6133,7 +6133,7 @@
           <p:cNvPr id="10" name="text-88">
             <a:extLst xmlns:a="http://schemas.openxmlformats.org/drawingml/2006/main">
               <a:ext uri="{FF2B5EF4-FFF2-40B4-BE49-F238E27FC236}">
-                <a16:creationId xmlns:a16="http://schemas.microsoft.com/office/drawing/2014/main" id="{D57AE196-213D-4B2F-A922-C333CBF46179}"/>
+                <a16:creationId xmlns:a16="http://schemas.microsoft.com/office/drawing/2014/main" id="{26340892-6CAB-4D83-85E4-FAA7E481B6F5}"/>
               </a:ext>
             </a:extLst>
           </p:cNvPr>
@@ -6235,7 +6235,7 @@
           <p:cNvPr id="11" name="text-89">
             <a:extLst xmlns:a="http://schemas.openxmlformats.org/drawingml/2006/main">
               <a:ext uri="{FF2B5EF4-FFF2-40B4-BE49-F238E27FC236}">
-                <a16:creationId xmlns:a16="http://schemas.microsoft.com/office/drawing/2014/main" id="{81C4383A-4138-4D6C-8E8D-AF45B836C460}"/>
+                <a16:creationId xmlns:a16="http://schemas.microsoft.com/office/drawing/2014/main" id="{CDF660C7-0A91-4F65-A7DF-F54B3EE50186}"/>
               </a:ext>
             </a:extLst>
           </p:cNvPr>
@@ -6337,7 +6337,7 @@
           <p:cNvPr id="12" name="text-90">
             <a:extLst xmlns:a="http://schemas.openxmlformats.org/drawingml/2006/main">
               <a:ext uri="{FF2B5EF4-FFF2-40B4-BE49-F238E27FC236}">
-                <a16:creationId xmlns:a16="http://schemas.microsoft.com/office/drawing/2014/main" id="{548A9D37-6C83-418F-ACC9-5D2A49F7A091}"/>
+                <a16:creationId xmlns:a16="http://schemas.microsoft.com/office/drawing/2014/main" id="{DC6C3574-DB9A-428A-84F8-72398D4C1DEA}"/>
               </a:ext>
             </a:extLst>
           </p:cNvPr>
@@ -6439,7 +6439,7 @@
           <p:cNvPr id="13" name="box-91">
             <a:extLst xmlns:a="http://schemas.openxmlformats.org/drawingml/2006/main">
               <a:ext uri="{FF2B5EF4-FFF2-40B4-BE49-F238E27FC236}">
-                <a16:creationId xmlns:a16="http://schemas.microsoft.com/office/drawing/2014/main" id="{25A8D1EB-7E4E-4FF0-A406-F8341745EEE0}"/>
+                <a16:creationId xmlns:a16="http://schemas.microsoft.com/office/drawing/2014/main" id="{26DBDBCB-53D6-4163-9174-6F0E737EB575}"/>
               </a:ext>
             </a:extLst>
           </p:cNvPr>
@@ -6472,7 +6472,7 @@
           <p:cNvPr id="14" name="text-92">
             <a:extLst xmlns:a="http://schemas.openxmlformats.org/drawingml/2006/main">
               <a:ext uri="{FF2B5EF4-FFF2-40B4-BE49-F238E27FC236}">
-                <a16:creationId xmlns:a16="http://schemas.microsoft.com/office/drawing/2014/main" id="{D2A93639-3E22-4B7A-BFEB-80D51F9070C7}"/>
+                <a16:creationId xmlns:a16="http://schemas.microsoft.com/office/drawing/2014/main" id="{6D421409-C49F-4A13-8AD5-C78F9C7DA902}"/>
               </a:ext>
             </a:extLst>
           </p:cNvPr>
@@ -6528,7 +6528,7 @@
           <p:cNvPr id="15" name="text-93">
             <a:extLst xmlns:a="http://schemas.openxmlformats.org/drawingml/2006/main">
               <a:ext uri="{FF2B5EF4-FFF2-40B4-BE49-F238E27FC236}">
-                <a16:creationId xmlns:a16="http://schemas.microsoft.com/office/drawing/2014/main" id="{D7616857-0A1B-4BE0-A739-BFC04863C2E5}"/>
+                <a16:creationId xmlns:a16="http://schemas.microsoft.com/office/drawing/2014/main" id="{486F4FA2-9D0D-46E3-9354-8F2906355D00}"/>
               </a:ext>
             </a:extLst>
           </p:cNvPr>
@@ -6574,7 +6574,7 @@
                 <a:ea typeface="Arial"/>
                 <a:cs typeface="Arial"/>
               </a:rPr>
-              <a:t>Windows 10/11 (x64) + macOS (Apple Silicon) — İndirme: github.com/Azizsekerdil/GermanCourseAI/releases (v1.1.1) · (özel repo)</a:t>
+              <a:t>Windows 10/11 (x64) + macOS (Apple Silicon) — İndirme: github.com/Azizsekerdil/GermanCourseAI/releases (v1.1.2) · (özel repo)</a:t>
             </a:r>
           </a:p>
         </p:txBody>
@@ -6584,7 +6584,7 @@
           <p:cNvPr id="16" name="text-94">
             <a:extLst xmlns:a="http://schemas.openxmlformats.org/drawingml/2006/main">
               <a:ext uri="{FF2B5EF4-FFF2-40B4-BE49-F238E27FC236}">
-                <a16:creationId xmlns:a16="http://schemas.microsoft.com/office/drawing/2014/main" id="{81EB301F-A4B7-4E76-A905-F7CC9F1E1985}"/>
+                <a16:creationId xmlns:a16="http://schemas.microsoft.com/office/drawing/2014/main" id="{7A9B7946-7959-4B3B-A558-2B643C46DA0B}"/>
               </a:ext>
             </a:extLst>
           </p:cNvPr>
@@ -6630,7 +6630,7 @@
                 <a:ea typeface="Arial"/>
                 <a:cs typeface="Arial"/>
               </a:rPr>
-              <a:t>Windows 10/11 (x64) &amp; macOS (Apple Silicon) — Download: GitHub Releases (v1.1.1)</a:t>
+              <a:t>Windows 10/11 (x64) &amp; macOS (Apple Silicon) — Download: GitHub Releases (v1.1.2)</a:t>
             </a:r>
           </a:p>
         </p:txBody>
@@ -6640,7 +6640,7 @@
           <p:cNvPr id="17" name="text-95">
             <a:extLst xmlns:a="http://schemas.openxmlformats.org/drawingml/2006/main">
               <a:ext uri="{FF2B5EF4-FFF2-40B4-BE49-F238E27FC236}">
-                <a16:creationId xmlns:a16="http://schemas.microsoft.com/office/drawing/2014/main" id="{95099386-E50D-4DF4-BDC5-59316CD55CA9}"/>
+                <a16:creationId xmlns:a16="http://schemas.microsoft.com/office/drawing/2014/main" id="{B5DE2CBA-0339-432E-9BAF-CEDBC5F4D955}"/>
               </a:ext>
             </a:extLst>
           </p:cNvPr>
@@ -6694,7 +6694,7 @@
     </p:spTree>
     <p:extLst>
       <p:ext uri="{BB962C8B-B14F-4D97-AF65-F5344CB8AC3E}">
-        <p14:creationId xmlns:p14="http://schemas.microsoft.com/office/powerpoint/2010/main" val="2103117465"/>
+        <p14:creationId xmlns:p14="http://schemas.microsoft.com/office/powerpoint/2010/main" val="1193501957"/>
       </p:ext>
     </p:extLst>
   </p:cSld>

--- a/docs/presentation/German-Course-AI-Trilingual.pptx
+++ b/docs/presentation/German-Course-AI-Trilingual.pptx
@@ -2,18 +2,18 @@
 <file path=ppt/presentation.xml><?xml version="1.0" encoding="utf-8"?>
 <p:presentation xmlns:p="http://schemas.openxmlformats.org/presentationml/2006/main">
   <p:sldMasterIdLst>
-    <p:sldMasterId xmlns:r="http://schemas.openxmlformats.org/officeDocument/2006/relationships" id="2147483648" r:id="R14c57ff539e24198"/>
+    <p:sldMasterId xmlns:r="http://schemas.openxmlformats.org/officeDocument/2006/relationships" id="2147483648" r:id="Rcbd384e84be040be"/>
   </p:sldMasterIdLst>
   <p:notesMasterIdLst>
-    <p:notesMasterId xmlns:r="http://schemas.openxmlformats.org/officeDocument/2006/relationships" r:id="R6fd61037b7d24fe0"/>
+    <p:notesMasterId xmlns:r="http://schemas.openxmlformats.org/officeDocument/2006/relationships" r:id="R68687a610da74c29"/>
   </p:notesMasterIdLst>
   <p:sldIdLst>
-    <p:sldId xmlns:r="http://schemas.openxmlformats.org/officeDocument/2006/relationships" id="256" r:id="R889e67e590fc420d"/>
-    <p:sldId xmlns:r="http://schemas.openxmlformats.org/officeDocument/2006/relationships" id="257" r:id="Re26b2e4e4ac74968"/>
-    <p:sldId xmlns:r="http://schemas.openxmlformats.org/officeDocument/2006/relationships" id="258" r:id="R7600acda1f1d483b"/>
-    <p:sldId xmlns:r="http://schemas.openxmlformats.org/officeDocument/2006/relationships" id="259" r:id="Rea40ac7185a1480b"/>
-    <p:sldId xmlns:r="http://schemas.openxmlformats.org/officeDocument/2006/relationships" id="260" r:id="R10ec942133944d27"/>
-    <p:sldId xmlns:r="http://schemas.openxmlformats.org/officeDocument/2006/relationships" id="261" r:id="R3ca0831b9419417d"/>
+    <p:sldId xmlns:r="http://schemas.openxmlformats.org/officeDocument/2006/relationships" id="256" r:id="R8c4826a347d14401"/>
+    <p:sldId xmlns:r="http://schemas.openxmlformats.org/officeDocument/2006/relationships" id="257" r:id="Rfaeaf785f87f4dd7"/>
+    <p:sldId xmlns:r="http://schemas.openxmlformats.org/officeDocument/2006/relationships" id="258" r:id="Rd54e1d0b8b6c476a"/>
+    <p:sldId xmlns:r="http://schemas.openxmlformats.org/officeDocument/2006/relationships" id="259" r:id="R0e83bf351a1c416c"/>
+    <p:sldId xmlns:r="http://schemas.openxmlformats.org/officeDocument/2006/relationships" id="260" r:id="Rd098d8f6b5cb4816"/>
+    <p:sldId xmlns:r="http://schemas.openxmlformats.org/officeDocument/2006/relationships" id="261" r:id="Rf7a6b883fad149a3"/>
   </p:sldIdLst>
   <p:sldSz cx="12192000" cy="6858000"/>
   <p:notesSz cx="6858000" cy="9144000"/>
@@ -937,7 +937,7 @@
           </a:p>
           <a:p xmlns:a="http://schemas.openxmlformats.org/drawingml/2006/main">
             <a:r>
-              <a:t>- https://github.com/Azizsekerdil/GermanCourseAI/releases/tag/v1.1.2</a:t>
+              <a:t>- https://github.com/Azizsekerdil/GermanCourseAI/releases/tag/v1.2.0</a:t>
             </a:r>
           </a:p>
           <a:p xmlns:a="http://schemas.openxmlformats.org/drawingml/2006/main">
@@ -1010,7 +1010,7 @@
   </p:cSld>
   <p:clrMap bg1="lt1" tx1="dk1" bg2="lt2" tx2="dk2" accent1="accent1" accent2="accent2" accent3="accent3" accent4="accent4" accent5="accent5" accent6="accent6" hlink="hlink" folHlink="folHlink"/>
   <p:sldLayoutIdLst>
-    <p:sldLayoutId xmlns:r="http://schemas.openxmlformats.org/officeDocument/2006/relationships" id="2147483649" r:id="R3c7f7ed8b28a44c4"/>
+    <p:sldLayoutId xmlns:r="http://schemas.openxmlformats.org/officeDocument/2006/relationships" id="2147483649" r:id="R582f8d2294ec437e"/>
   </p:sldLayoutIdLst>
   <p:txStyles>
     <p:titleStyle>
@@ -1561,7 +1561,7 @@
           <p:cNvPr id="13" name="box-1">
             <a:extLst xmlns:a="http://schemas.openxmlformats.org/drawingml/2006/main">
               <a:ext uri="{FF2B5EF4-FFF2-40B4-BE49-F238E27FC236}">
-                <a16:creationId xmlns:a16="http://schemas.microsoft.com/office/drawing/2014/main" id="{ECB7ADD2-8B1F-47DE-8224-AC132D1EEA2D}"/>
+                <a16:creationId xmlns:a16="http://schemas.microsoft.com/office/drawing/2014/main" id="{DB6DAC9F-4D84-478B-AE1B-23B78E9D6A07}"/>
               </a:ext>
             </a:extLst>
           </p:cNvPr>
@@ -1594,7 +1594,7 @@
           <p:cNvPr id="2" name="text-2">
             <a:extLst xmlns:a="http://schemas.openxmlformats.org/drawingml/2006/main">
               <a:ext uri="{FF2B5EF4-FFF2-40B4-BE49-F238E27FC236}">
-                <a16:creationId xmlns:a16="http://schemas.microsoft.com/office/drawing/2014/main" id="{7302CB64-73C2-44F1-BAB8-F99C4DDCF8F5}"/>
+                <a16:creationId xmlns:a16="http://schemas.microsoft.com/office/drawing/2014/main" id="{5267375E-2F47-4CC5-852F-D260E80DF7EB}"/>
               </a:ext>
             </a:extLst>
           </p:cNvPr>
@@ -1650,7 +1650,7 @@
           <p:cNvPr id="3" name="text-3">
             <a:extLst xmlns:a="http://schemas.openxmlformats.org/drawingml/2006/main">
               <a:ext uri="{FF2B5EF4-FFF2-40B4-BE49-F238E27FC236}">
-                <a16:creationId xmlns:a16="http://schemas.microsoft.com/office/drawing/2014/main" id="{889B231D-FBE1-4545-B20A-F67F301D0A54}"/>
+                <a16:creationId xmlns:a16="http://schemas.microsoft.com/office/drawing/2014/main" id="{04EE5129-C585-4EF0-BCAF-DBD8C0999771}"/>
               </a:ext>
             </a:extLst>
           </p:cNvPr>
@@ -1706,7 +1706,7 @@
           <p:cNvPr id="4" name="text-4">
             <a:extLst xmlns:a="http://schemas.openxmlformats.org/drawingml/2006/main">
               <a:ext uri="{FF2B5EF4-FFF2-40B4-BE49-F238E27FC236}">
-                <a16:creationId xmlns:a16="http://schemas.microsoft.com/office/drawing/2014/main" id="{73D9CEFF-5718-499B-AB93-4489FF5A81EB}"/>
+                <a16:creationId xmlns:a16="http://schemas.microsoft.com/office/drawing/2014/main" id="{09A12ED0-9573-4E32-BCA6-BA73E3E00C86}"/>
               </a:ext>
             </a:extLst>
           </p:cNvPr>
@@ -1762,7 +1762,7 @@
           <p:cNvPr id="5" name="text-5">
             <a:extLst xmlns:a="http://schemas.openxmlformats.org/drawingml/2006/main">
               <a:ext uri="{FF2B5EF4-FFF2-40B4-BE49-F238E27FC236}">
-                <a16:creationId xmlns:a16="http://schemas.microsoft.com/office/drawing/2014/main" id="{DD0F733A-811C-4445-80A3-3B0559D20492}"/>
+                <a16:creationId xmlns:a16="http://schemas.microsoft.com/office/drawing/2014/main" id="{BF419A2C-4FA1-45FF-A548-3B1FBEE0BCE4}"/>
               </a:ext>
             </a:extLst>
           </p:cNvPr>
@@ -1818,7 +1818,7 @@
           <p:cNvPr id="6" name="text-6">
             <a:extLst xmlns:a="http://schemas.openxmlformats.org/drawingml/2006/main">
               <a:ext uri="{FF2B5EF4-FFF2-40B4-BE49-F238E27FC236}">
-                <a16:creationId xmlns:a16="http://schemas.microsoft.com/office/drawing/2014/main" id="{4B1DA49E-102E-4079-BA37-08EB976BAFFD}"/>
+                <a16:creationId xmlns:a16="http://schemas.microsoft.com/office/drawing/2014/main" id="{1D325EB1-2955-40F5-93F8-C100445D97AC}"/>
               </a:ext>
             </a:extLst>
           </p:cNvPr>
@@ -1874,7 +1874,7 @@
           <p:cNvPr id="7" name="text-7">
             <a:extLst xmlns:a="http://schemas.openxmlformats.org/drawingml/2006/main">
               <a:ext uri="{FF2B5EF4-FFF2-40B4-BE49-F238E27FC236}">
-                <a16:creationId xmlns:a16="http://schemas.microsoft.com/office/drawing/2014/main" id="{E5129634-B8A2-4C16-9BC6-6C80A205C3A6}"/>
+                <a16:creationId xmlns:a16="http://schemas.microsoft.com/office/drawing/2014/main" id="{53FB5070-83D6-4E2C-8624-F0AADDB3C377}"/>
               </a:ext>
             </a:extLst>
           </p:cNvPr>
@@ -1930,7 +1930,7 @@
           <p:cNvPr id="8" name="text-8">
             <a:extLst xmlns:a="http://schemas.openxmlformats.org/drawingml/2006/main">
               <a:ext uri="{FF2B5EF4-FFF2-40B4-BE49-F238E27FC236}">
-                <a16:creationId xmlns:a16="http://schemas.microsoft.com/office/drawing/2014/main" id="{1E76E612-1DDA-41CA-8003-2A4767B508F9}"/>
+                <a16:creationId xmlns:a16="http://schemas.microsoft.com/office/drawing/2014/main" id="{C7213DFD-D89C-437A-A289-800D23C8EA8D}"/>
               </a:ext>
             </a:extLst>
           </p:cNvPr>
@@ -1986,7 +1986,7 @@
           <p:cNvPr id="9" name="text-9">
             <a:extLst xmlns:a="http://schemas.openxmlformats.org/drawingml/2006/main">
               <a:ext uri="{FF2B5EF4-FFF2-40B4-BE49-F238E27FC236}">
-                <a16:creationId xmlns:a16="http://schemas.microsoft.com/office/drawing/2014/main" id="{8214512A-A2B3-40CB-9FE1-866BC6BB4A44}"/>
+                <a16:creationId xmlns:a16="http://schemas.microsoft.com/office/drawing/2014/main" id="{BBB86E68-240A-4D36-903B-6EA7684430B8}"/>
               </a:ext>
             </a:extLst>
           </p:cNvPr>
@@ -2042,7 +2042,7 @@
           <p:cNvPr id="10" name="box-10">
             <a:extLst xmlns:a="http://schemas.openxmlformats.org/drawingml/2006/main">
               <a:ext uri="{FF2B5EF4-FFF2-40B4-BE49-F238E27FC236}">
-                <a16:creationId xmlns:a16="http://schemas.microsoft.com/office/drawing/2014/main" id="{C9DEF490-F080-4962-9DE0-EE9767FDCFC7}"/>
+                <a16:creationId xmlns:a16="http://schemas.microsoft.com/office/drawing/2014/main" id="{AC528F4E-A01C-42AF-BF51-5EC33242F7E2}"/>
               </a:ext>
             </a:extLst>
           </p:cNvPr>
@@ -2079,7 +2079,7 @@
           <p:nvPr/>
         </p:nvPicPr>
         <p:blipFill>
-          <a:blip xmlns:r="http://schemas.openxmlformats.org/officeDocument/2006/relationships" xmlns:a="http://schemas.openxmlformats.org/drawingml/2006/main" r:embed="Rec844ba0b74b4431"/>
+          <a:blip xmlns:r="http://schemas.openxmlformats.org/officeDocument/2006/relationships" xmlns:a="http://schemas.openxmlformats.org/drawingml/2006/main" r:embed="R908af25a4a6840ef"/>
           <a:stretch xmlns:a="http://schemas.openxmlformats.org/drawingml/2006/main"/>
         </p:blipFill>
         <p:spPr>
@@ -2097,7 +2097,7 @@
           <p:cNvPr id="12" name="text-11">
             <a:extLst xmlns:a="http://schemas.openxmlformats.org/drawingml/2006/main">
               <a:ext uri="{FF2B5EF4-FFF2-40B4-BE49-F238E27FC236}">
-                <a16:creationId xmlns:a16="http://schemas.microsoft.com/office/drawing/2014/main" id="{E5D7A53A-5A22-44D5-897C-828333CEDCB1}"/>
+                <a16:creationId xmlns:a16="http://schemas.microsoft.com/office/drawing/2014/main" id="{A7FD873E-C7CC-465B-9B83-69E3DB059C61}"/>
               </a:ext>
             </a:extLst>
           </p:cNvPr>
@@ -2151,7 +2151,7 @@
     </p:spTree>
     <p:extLst>
       <p:ext uri="{BB962C8B-B14F-4D97-AF65-F5344CB8AC3E}">
-        <p14:creationId xmlns:p14="http://schemas.microsoft.com/office/powerpoint/2010/main" val="1129890898"/>
+        <p14:creationId xmlns:p14="http://schemas.microsoft.com/office/powerpoint/2010/main" val="596872282"/>
       </p:ext>
     </p:extLst>
   </p:cSld>
@@ -2182,7 +2182,7 @@
           <p:cNvPr id="14" name="box-12">
             <a:extLst xmlns:a="http://schemas.openxmlformats.org/drawingml/2006/main">
               <a:ext uri="{FF2B5EF4-FFF2-40B4-BE49-F238E27FC236}">
-                <a16:creationId xmlns:a16="http://schemas.microsoft.com/office/drawing/2014/main" id="{E33B1932-133A-44FA-A443-1A94B83B07A3}"/>
+                <a16:creationId xmlns:a16="http://schemas.microsoft.com/office/drawing/2014/main" id="{8F62D3B4-19A0-4BD7-B956-45BD498488AF}"/>
               </a:ext>
             </a:extLst>
           </p:cNvPr>
@@ -2215,7 +2215,7 @@
           <p:cNvPr id="2" name="text-13">
             <a:extLst xmlns:a="http://schemas.openxmlformats.org/drawingml/2006/main">
               <a:ext uri="{FF2B5EF4-FFF2-40B4-BE49-F238E27FC236}">
-                <a16:creationId xmlns:a16="http://schemas.microsoft.com/office/drawing/2014/main" id="{081B716C-93F6-4377-A73E-843664E9AE13}"/>
+                <a16:creationId xmlns:a16="http://schemas.microsoft.com/office/drawing/2014/main" id="{EE12E12A-6723-493D-8DFA-3BF24045E547}"/>
               </a:ext>
             </a:extLst>
           </p:cNvPr>
@@ -2271,7 +2271,7 @@
           <p:cNvPr id="3" name="text-14">
             <a:extLst xmlns:a="http://schemas.openxmlformats.org/drawingml/2006/main">
               <a:ext uri="{FF2B5EF4-FFF2-40B4-BE49-F238E27FC236}">
-                <a16:creationId xmlns:a16="http://schemas.microsoft.com/office/drawing/2014/main" id="{A138C5E1-9AAC-4BFE-9766-3C1F1D730A3F}"/>
+                <a16:creationId xmlns:a16="http://schemas.microsoft.com/office/drawing/2014/main" id="{4E0A44FC-6AEB-46C4-B904-594FC9FB59F4}"/>
               </a:ext>
             </a:extLst>
           </p:cNvPr>
@@ -2327,7 +2327,7 @@
           <p:cNvPr id="4" name="text-15">
             <a:extLst xmlns:a="http://schemas.openxmlformats.org/drawingml/2006/main">
               <a:ext uri="{FF2B5EF4-FFF2-40B4-BE49-F238E27FC236}">
-                <a16:creationId xmlns:a16="http://schemas.microsoft.com/office/drawing/2014/main" id="{E4DD800B-7EF2-4764-B050-D724F12D1384}"/>
+                <a16:creationId xmlns:a16="http://schemas.microsoft.com/office/drawing/2014/main" id="{3152F943-7428-440C-8301-8748BE221DAF}"/>
               </a:ext>
             </a:extLst>
           </p:cNvPr>
@@ -2383,7 +2383,7 @@
           <p:cNvPr id="5" name="text-16">
             <a:extLst xmlns:a="http://schemas.openxmlformats.org/drawingml/2006/main">
               <a:ext uri="{FF2B5EF4-FFF2-40B4-BE49-F238E27FC236}">
-                <a16:creationId xmlns:a16="http://schemas.microsoft.com/office/drawing/2014/main" id="{2CC35216-935A-4D9F-9AFB-2917AFAFEDF3}"/>
+                <a16:creationId xmlns:a16="http://schemas.microsoft.com/office/drawing/2014/main" id="{36F9F73A-23DD-4EBE-9F2D-F2C8A588BA6D}"/>
               </a:ext>
             </a:extLst>
           </p:cNvPr>
@@ -2439,7 +2439,7 @@
           <p:cNvPr id="6" name="text-17">
             <a:extLst xmlns:a="http://schemas.openxmlformats.org/drawingml/2006/main">
               <a:ext uri="{FF2B5EF4-FFF2-40B4-BE49-F238E27FC236}">
-                <a16:creationId xmlns:a16="http://schemas.microsoft.com/office/drawing/2014/main" id="{3D092DFA-2DA5-49C7-924E-819F7662B4C8}"/>
+                <a16:creationId xmlns:a16="http://schemas.microsoft.com/office/drawing/2014/main" id="{6FE164FC-EB88-4107-9653-B3696323DE14}"/>
               </a:ext>
             </a:extLst>
           </p:cNvPr>
@@ -2495,7 +2495,7 @@
           <p:cNvPr id="7" name="box-18">
             <a:extLst xmlns:a="http://schemas.openxmlformats.org/drawingml/2006/main">
               <a:ext uri="{FF2B5EF4-FFF2-40B4-BE49-F238E27FC236}">
-                <a16:creationId xmlns:a16="http://schemas.microsoft.com/office/drawing/2014/main" id="{C9B1D16F-C3CE-4366-8A14-BD9954A220FF}"/>
+                <a16:creationId xmlns:a16="http://schemas.microsoft.com/office/drawing/2014/main" id="{BBAA5C99-C839-4B24-BA9C-2B6BF460CC5B}"/>
               </a:ext>
             </a:extLst>
           </p:cNvPr>
@@ -2528,7 +2528,7 @@
           <p:cNvPr id="8" name="text-19">
             <a:extLst xmlns:a="http://schemas.openxmlformats.org/drawingml/2006/main">
               <a:ext uri="{FF2B5EF4-FFF2-40B4-BE49-F238E27FC236}">
-                <a16:creationId xmlns:a16="http://schemas.microsoft.com/office/drawing/2014/main" id="{1326D86C-5987-45BF-85DB-B099D3FA8FCC}"/>
+                <a16:creationId xmlns:a16="http://schemas.microsoft.com/office/drawing/2014/main" id="{A949F6EE-1794-46EF-B194-E94371D58923}"/>
               </a:ext>
             </a:extLst>
           </p:cNvPr>
@@ -2574,7 +2574,7 @@
                 <a:ea typeface="Arial"/>
                 <a:cs typeface="Arial"/>
               </a:rPr>
-              <a:t>18 Bereiche verbinden Wiederholung, Wortschatz, ein zweisprachiges Wörterbuch DE-EN, Prüfung, Grammatik und Praxis in einem ruhigen Windows-Arbeitsraum.</a:t>
+              <a:t>18 Bereiche verbinden Wiederholung, Wortschatz, ein dreisprachiges Wörterbuch DE-EN-TR, Prüfung, Grammatik und Praxis in einem ruhigen Windows-Arbeitsraum.</a:t>
             </a:r>
           </a:p>
         </p:txBody>
@@ -2584,7 +2584,7 @@
           <p:cNvPr id="9" name="text-20">
             <a:extLst xmlns:a="http://schemas.openxmlformats.org/drawingml/2006/main">
               <a:ext uri="{FF2B5EF4-FFF2-40B4-BE49-F238E27FC236}">
-                <a16:creationId xmlns:a16="http://schemas.microsoft.com/office/drawing/2014/main" id="{7D9643C4-81B4-40F6-9F9A-457DF404955E}"/>
+                <a16:creationId xmlns:a16="http://schemas.microsoft.com/office/drawing/2014/main" id="{B41CFA2D-A119-410C-8190-9567E433D3B0}"/>
               </a:ext>
             </a:extLst>
           </p:cNvPr>
@@ -2640,7 +2640,7 @@
           <p:cNvPr id="10" name="text-21">
             <a:extLst xmlns:a="http://schemas.openxmlformats.org/drawingml/2006/main">
               <a:ext uri="{FF2B5EF4-FFF2-40B4-BE49-F238E27FC236}">
-                <a16:creationId xmlns:a16="http://schemas.microsoft.com/office/drawing/2014/main" id="{144CE648-4A8F-48F7-AA8E-760E4F666F7B}"/>
+                <a16:creationId xmlns:a16="http://schemas.microsoft.com/office/drawing/2014/main" id="{4DA67DD5-62C1-4B4C-BA36-00E266DBAB9A}"/>
               </a:ext>
             </a:extLst>
           </p:cNvPr>
@@ -2696,7 +2696,7 @@
           <p:cNvPr id="11" name="box-22">
             <a:extLst xmlns:a="http://schemas.openxmlformats.org/drawingml/2006/main">
               <a:ext uri="{FF2B5EF4-FFF2-40B4-BE49-F238E27FC236}">
-                <a16:creationId xmlns:a16="http://schemas.microsoft.com/office/drawing/2014/main" id="{C0D7AFB1-EF15-4B1C-B8EE-235D407960F0}"/>
+                <a16:creationId xmlns:a16="http://schemas.microsoft.com/office/drawing/2014/main" id="{B5DA10AF-23F3-4C66-93A1-69748DBB34F6}"/>
               </a:ext>
             </a:extLst>
           </p:cNvPr>
@@ -2733,7 +2733,7 @@
           <p:nvPr/>
         </p:nvPicPr>
         <p:blipFill>
-          <a:blip xmlns:r="http://schemas.openxmlformats.org/officeDocument/2006/relationships" xmlns:a="http://schemas.openxmlformats.org/drawingml/2006/main" r:embed="R845ec1906a134e11"/>
+          <a:blip xmlns:r="http://schemas.openxmlformats.org/officeDocument/2006/relationships" xmlns:a="http://schemas.openxmlformats.org/drawingml/2006/main" r:embed="Rd5cefa8cbcf14da2"/>
           <a:stretch xmlns:a="http://schemas.openxmlformats.org/drawingml/2006/main"/>
         </p:blipFill>
         <p:spPr>
@@ -2751,7 +2751,7 @@
           <p:cNvPr id="13" name="text-23">
             <a:extLst xmlns:a="http://schemas.openxmlformats.org/drawingml/2006/main">
               <a:ext uri="{FF2B5EF4-FFF2-40B4-BE49-F238E27FC236}">
-                <a16:creationId xmlns:a16="http://schemas.microsoft.com/office/drawing/2014/main" id="{D42E335C-03E4-4397-BD70-A64862D364BD}"/>
+                <a16:creationId xmlns:a16="http://schemas.microsoft.com/office/drawing/2014/main" id="{5E9C3962-EEAD-4EE7-A790-78DA06BE945F}"/>
               </a:ext>
             </a:extLst>
           </p:cNvPr>
@@ -2805,7 +2805,7 @@
     </p:spTree>
     <p:extLst>
       <p:ext uri="{BB962C8B-B14F-4D97-AF65-F5344CB8AC3E}">
-        <p14:creationId xmlns:p14="http://schemas.microsoft.com/office/powerpoint/2010/main" val="1610947352"/>
+        <p14:creationId xmlns:p14="http://schemas.microsoft.com/office/powerpoint/2010/main" val="594986275"/>
       </p:ext>
     </p:extLst>
   </p:cSld>
@@ -2836,7 +2836,7 @@
           <p:cNvPr id="19" name="box-24">
             <a:extLst xmlns:a="http://schemas.openxmlformats.org/drawingml/2006/main">
               <a:ext uri="{FF2B5EF4-FFF2-40B4-BE49-F238E27FC236}">
-                <a16:creationId xmlns:a16="http://schemas.microsoft.com/office/drawing/2014/main" id="{A88D0937-249F-4209-91C4-D2134C584BEF}"/>
+                <a16:creationId xmlns:a16="http://schemas.microsoft.com/office/drawing/2014/main" id="{92A34BA2-05AF-4406-AFE7-A1CF9759D3CE}"/>
               </a:ext>
             </a:extLst>
           </p:cNvPr>
@@ -2869,7 +2869,7 @@
           <p:cNvPr id="2" name="text-25">
             <a:extLst xmlns:a="http://schemas.openxmlformats.org/drawingml/2006/main">
               <a:ext uri="{FF2B5EF4-FFF2-40B4-BE49-F238E27FC236}">
-                <a16:creationId xmlns:a16="http://schemas.microsoft.com/office/drawing/2014/main" id="{B453089A-B537-4CA7-AA7C-DA7E64A0214E}"/>
+                <a16:creationId xmlns:a16="http://schemas.microsoft.com/office/drawing/2014/main" id="{94B9B308-B488-4FC7-B2C9-7D5162A86BB0}"/>
               </a:ext>
             </a:extLst>
           </p:cNvPr>
@@ -2925,7 +2925,7 @@
           <p:cNvPr id="3" name="text-26">
             <a:extLst xmlns:a="http://schemas.openxmlformats.org/drawingml/2006/main">
               <a:ext uri="{FF2B5EF4-FFF2-40B4-BE49-F238E27FC236}">
-                <a16:creationId xmlns:a16="http://schemas.microsoft.com/office/drawing/2014/main" id="{E701F1F3-90D8-4CDB-9646-031231630318}"/>
+                <a16:creationId xmlns:a16="http://schemas.microsoft.com/office/drawing/2014/main" id="{EC84F5A9-52A9-44EB-BB0D-6156BF47D6A5}"/>
               </a:ext>
             </a:extLst>
           </p:cNvPr>
@@ -2981,7 +2981,7 @@
           <p:cNvPr id="4" name="text-27">
             <a:extLst xmlns:a="http://schemas.openxmlformats.org/drawingml/2006/main">
               <a:ext uri="{FF2B5EF4-FFF2-40B4-BE49-F238E27FC236}">
-                <a16:creationId xmlns:a16="http://schemas.microsoft.com/office/drawing/2014/main" id="{851F0671-2547-49EB-94C7-CE47DB92CFA7}"/>
+                <a16:creationId xmlns:a16="http://schemas.microsoft.com/office/drawing/2014/main" id="{E7D5C448-EA7D-4433-8501-6977A4C85CD3}"/>
               </a:ext>
             </a:extLst>
           </p:cNvPr>
@@ -3037,7 +3037,7 @@
           <p:cNvPr id="5" name="text-28">
             <a:extLst xmlns:a="http://schemas.openxmlformats.org/drawingml/2006/main">
               <a:ext uri="{FF2B5EF4-FFF2-40B4-BE49-F238E27FC236}">
-                <a16:creationId xmlns:a16="http://schemas.microsoft.com/office/drawing/2014/main" id="{39F4B3FC-A084-4218-BFF3-E7793807FAD2}"/>
+                <a16:creationId xmlns:a16="http://schemas.microsoft.com/office/drawing/2014/main" id="{D851E3E4-8D2B-4C3C-B944-E3EB0C9BE3EC}"/>
               </a:ext>
             </a:extLst>
           </p:cNvPr>
@@ -3093,7 +3093,7 @@
           <p:cNvPr id="6" name="text-29">
             <a:extLst xmlns:a="http://schemas.openxmlformats.org/drawingml/2006/main">
               <a:ext uri="{FF2B5EF4-FFF2-40B4-BE49-F238E27FC236}">
-                <a16:creationId xmlns:a16="http://schemas.microsoft.com/office/drawing/2014/main" id="{402AFB21-D954-4E51-8B0E-98DADA9C01F6}"/>
+                <a16:creationId xmlns:a16="http://schemas.microsoft.com/office/drawing/2014/main" id="{F60C1993-8D31-4C34-ABDA-463D5BFF2E05}"/>
               </a:ext>
             </a:extLst>
           </p:cNvPr>
@@ -3149,7 +3149,7 @@
           <p:cNvPr id="7" name="box-30">
             <a:extLst xmlns:a="http://schemas.openxmlformats.org/drawingml/2006/main">
               <a:ext uri="{FF2B5EF4-FFF2-40B4-BE49-F238E27FC236}">
-                <a16:creationId xmlns:a16="http://schemas.microsoft.com/office/drawing/2014/main" id="{4711F673-DC15-47B8-8069-9D742E3EC82C}"/>
+                <a16:creationId xmlns:a16="http://schemas.microsoft.com/office/drawing/2014/main" id="{872CA90A-72D3-412E-9524-581AED41D333}"/>
               </a:ext>
             </a:extLst>
           </p:cNvPr>
@@ -3182,7 +3182,7 @@
           <p:cNvPr id="8" name="text-31">
             <a:extLst xmlns:a="http://schemas.openxmlformats.org/drawingml/2006/main">
               <a:ext uri="{FF2B5EF4-FFF2-40B4-BE49-F238E27FC236}">
-                <a16:creationId xmlns:a16="http://schemas.microsoft.com/office/drawing/2014/main" id="{4C0FB158-D765-4B02-8D90-466B3767D756}"/>
+                <a16:creationId xmlns:a16="http://schemas.microsoft.com/office/drawing/2014/main" id="{10E1E981-6D60-4881-8BE0-8F301BA1DC35}"/>
               </a:ext>
             </a:extLst>
           </p:cNvPr>
@@ -3238,7 +3238,7 @@
           <p:cNvPr id="9" name="text-32">
             <a:extLst xmlns:a="http://schemas.openxmlformats.org/drawingml/2006/main">
               <a:ext uri="{FF2B5EF4-FFF2-40B4-BE49-F238E27FC236}">
-                <a16:creationId xmlns:a16="http://schemas.microsoft.com/office/drawing/2014/main" id="{0719875C-0CA0-4036-BB23-AA0D46C8AEF8}"/>
+                <a16:creationId xmlns:a16="http://schemas.microsoft.com/office/drawing/2014/main" id="{88E9C127-BFBB-4858-B0A9-4B19F7C6ACA8}"/>
               </a:ext>
             </a:extLst>
           </p:cNvPr>
@@ -3294,7 +3294,7 @@
           <p:cNvPr id="10" name="text-33">
             <a:extLst xmlns:a="http://schemas.openxmlformats.org/drawingml/2006/main">
               <a:ext uri="{FF2B5EF4-FFF2-40B4-BE49-F238E27FC236}">
-                <a16:creationId xmlns:a16="http://schemas.microsoft.com/office/drawing/2014/main" id="{2EC1ECA7-3964-443B-825F-03345539AA4D}"/>
+                <a16:creationId xmlns:a16="http://schemas.microsoft.com/office/drawing/2014/main" id="{42241732-D5D6-4EB1-AB7C-2293C41B3348}"/>
               </a:ext>
             </a:extLst>
           </p:cNvPr>
@@ -3350,7 +3350,7 @@
           <p:cNvPr id="11" name="box-34">
             <a:extLst xmlns:a="http://schemas.openxmlformats.org/drawingml/2006/main">
               <a:ext uri="{FF2B5EF4-FFF2-40B4-BE49-F238E27FC236}">
-                <a16:creationId xmlns:a16="http://schemas.microsoft.com/office/drawing/2014/main" id="{E328E655-E96E-47D7-B280-49E0331E394E}"/>
+                <a16:creationId xmlns:a16="http://schemas.microsoft.com/office/drawing/2014/main" id="{A95F438F-AB83-4483-9C0C-E4E5C13BD05C}"/>
               </a:ext>
             </a:extLst>
           </p:cNvPr>
@@ -3383,7 +3383,7 @@
           <p:cNvPr id="12" name="text-35">
             <a:extLst xmlns:a="http://schemas.openxmlformats.org/drawingml/2006/main">
               <a:ext uri="{FF2B5EF4-FFF2-40B4-BE49-F238E27FC236}">
-                <a16:creationId xmlns:a16="http://schemas.microsoft.com/office/drawing/2014/main" id="{4D7E0A45-221A-4295-A139-5518B2224703}"/>
+                <a16:creationId xmlns:a16="http://schemas.microsoft.com/office/drawing/2014/main" id="{0CFD4A77-47B1-4655-80AC-7EAF0161448B}"/>
               </a:ext>
             </a:extLst>
           </p:cNvPr>
@@ -3439,7 +3439,7 @@
           <p:cNvPr id="13" name="text-36">
             <a:extLst xmlns:a="http://schemas.openxmlformats.org/drawingml/2006/main">
               <a:ext uri="{FF2B5EF4-FFF2-40B4-BE49-F238E27FC236}">
-                <a16:creationId xmlns:a16="http://schemas.microsoft.com/office/drawing/2014/main" id="{63B6A9F0-FAC0-49C9-A1A0-DB67373BAC68}"/>
+                <a16:creationId xmlns:a16="http://schemas.microsoft.com/office/drawing/2014/main" id="{1CDA6CAA-F3E7-4F3E-B16A-E3F6570025B1}"/>
               </a:ext>
             </a:extLst>
           </p:cNvPr>
@@ -3485,7 +3485,7 @@
                 <a:ea typeface="Arial"/>
                 <a:cs typeface="Arial"/>
               </a:rPr>
-              <a:t>160 A1 entries, a 1,260-entry DE-EN dictionary, strict spelling, exams, favorites and mistakes share one SQLite record.</a:t>
+              <a:t>160 A1 entries, a 1,260-entry DE-EN-TR dictionary with selectable direction, strict spelling, exams, favorites and mistakes share one SQLite record.</a:t>
             </a:r>
           </a:p>
         </p:txBody>
@@ -3495,7 +3495,7 @@
           <p:cNvPr id="14" name="text-37">
             <a:extLst xmlns:a="http://schemas.openxmlformats.org/drawingml/2006/main">
               <a:ext uri="{FF2B5EF4-FFF2-40B4-BE49-F238E27FC236}">
-                <a16:creationId xmlns:a16="http://schemas.microsoft.com/office/drawing/2014/main" id="{54E79D31-6555-47D1-8E36-5033140A02BF}"/>
+                <a16:creationId xmlns:a16="http://schemas.microsoft.com/office/drawing/2014/main" id="{5D3B49BA-4446-4DDF-8F3A-85B871FEC381}"/>
               </a:ext>
             </a:extLst>
           </p:cNvPr>
@@ -3551,7 +3551,7 @@
           <p:cNvPr id="15" name="box-38">
             <a:extLst xmlns:a="http://schemas.openxmlformats.org/drawingml/2006/main">
               <a:ext uri="{FF2B5EF4-FFF2-40B4-BE49-F238E27FC236}">
-                <a16:creationId xmlns:a16="http://schemas.microsoft.com/office/drawing/2014/main" id="{A390B7DF-C245-4074-8A4D-8E8C64544E60}"/>
+                <a16:creationId xmlns:a16="http://schemas.microsoft.com/office/drawing/2014/main" id="{61EC830C-DC89-488F-97CF-246C16FA5FFD}"/>
               </a:ext>
             </a:extLst>
           </p:cNvPr>
@@ -3584,7 +3584,7 @@
           <p:cNvPr id="16" name="text-39">
             <a:extLst xmlns:a="http://schemas.openxmlformats.org/drawingml/2006/main">
               <a:ext uri="{FF2B5EF4-FFF2-40B4-BE49-F238E27FC236}">
-                <a16:creationId xmlns:a16="http://schemas.microsoft.com/office/drawing/2014/main" id="{1F7A5F40-BAF3-4F18-98A6-3568D3EA3483}"/>
+                <a16:creationId xmlns:a16="http://schemas.microsoft.com/office/drawing/2014/main" id="{998F8535-9117-4711-81E5-A3945CB8EF08}"/>
               </a:ext>
             </a:extLst>
           </p:cNvPr>
@@ -3640,7 +3640,7 @@
           <p:cNvPr id="17" name="text-40">
             <a:extLst xmlns:a="http://schemas.openxmlformats.org/drawingml/2006/main">
               <a:ext uri="{FF2B5EF4-FFF2-40B4-BE49-F238E27FC236}">
-                <a16:creationId xmlns:a16="http://schemas.microsoft.com/office/drawing/2014/main" id="{7853B88D-B678-4ED1-9260-02945E0778D3}"/>
+                <a16:creationId xmlns:a16="http://schemas.microsoft.com/office/drawing/2014/main" id="{3A3A2EAA-F046-4E4C-AFE3-296AE88C3951}"/>
               </a:ext>
             </a:extLst>
           </p:cNvPr>
@@ -3696,7 +3696,7 @@
           <p:cNvPr id="18" name="text-41">
             <a:extLst xmlns:a="http://schemas.openxmlformats.org/drawingml/2006/main">
               <a:ext uri="{FF2B5EF4-FFF2-40B4-BE49-F238E27FC236}">
-                <a16:creationId xmlns:a16="http://schemas.microsoft.com/office/drawing/2014/main" id="{7E05DE00-113F-4F39-BBBA-3D1BA1627F29}"/>
+                <a16:creationId xmlns:a16="http://schemas.microsoft.com/office/drawing/2014/main" id="{A5F87B11-377E-4EF5-9602-82ABDF57AE31}"/>
               </a:ext>
             </a:extLst>
           </p:cNvPr>
@@ -3750,7 +3750,7 @@
     </p:spTree>
     <p:extLst>
       <p:ext uri="{BB962C8B-B14F-4D97-AF65-F5344CB8AC3E}">
-        <p14:creationId xmlns:p14="http://schemas.microsoft.com/office/powerpoint/2010/main" val="1728093575"/>
+        <p14:creationId xmlns:p14="http://schemas.microsoft.com/office/powerpoint/2010/main" val="129713678"/>
       </p:ext>
     </p:extLst>
   </p:cSld>
@@ -3781,7 +3781,7 @@
           <p:cNvPr id="18" name="box-42">
             <a:extLst xmlns:a="http://schemas.openxmlformats.org/drawingml/2006/main">
               <a:ext uri="{FF2B5EF4-FFF2-40B4-BE49-F238E27FC236}">
-                <a16:creationId xmlns:a16="http://schemas.microsoft.com/office/drawing/2014/main" id="{09FD2316-D4D8-48EE-9483-A3C65DD6F881}"/>
+                <a16:creationId xmlns:a16="http://schemas.microsoft.com/office/drawing/2014/main" id="{97C55A65-1C79-4059-962C-02D21191DB79}"/>
               </a:ext>
             </a:extLst>
           </p:cNvPr>
@@ -3814,7 +3814,7 @@
           <p:cNvPr id="2" name="text-43">
             <a:extLst xmlns:a="http://schemas.openxmlformats.org/drawingml/2006/main">
               <a:ext uri="{FF2B5EF4-FFF2-40B4-BE49-F238E27FC236}">
-                <a16:creationId xmlns:a16="http://schemas.microsoft.com/office/drawing/2014/main" id="{B8D6BB38-8EF8-403C-89A6-2BA649AF6152}"/>
+                <a16:creationId xmlns:a16="http://schemas.microsoft.com/office/drawing/2014/main" id="{3CA18004-B494-4C76-B0F7-00F3127F3CD5}"/>
               </a:ext>
             </a:extLst>
           </p:cNvPr>
@@ -3870,7 +3870,7 @@
           <p:cNvPr id="3" name="text-44">
             <a:extLst xmlns:a="http://schemas.openxmlformats.org/drawingml/2006/main">
               <a:ext uri="{FF2B5EF4-FFF2-40B4-BE49-F238E27FC236}">
-                <a16:creationId xmlns:a16="http://schemas.microsoft.com/office/drawing/2014/main" id="{AF3A3A66-3E2E-4458-9548-98232CFFF6BE}"/>
+                <a16:creationId xmlns:a16="http://schemas.microsoft.com/office/drawing/2014/main" id="{82D30C58-BE95-4055-8C29-6D6B02724E90}"/>
               </a:ext>
             </a:extLst>
           </p:cNvPr>
@@ -3926,7 +3926,7 @@
           <p:cNvPr id="4" name="text-45">
             <a:extLst xmlns:a="http://schemas.openxmlformats.org/drawingml/2006/main">
               <a:ext uri="{FF2B5EF4-FFF2-40B4-BE49-F238E27FC236}">
-                <a16:creationId xmlns:a16="http://schemas.microsoft.com/office/drawing/2014/main" id="{6D7DA84B-3ADB-4D77-BE93-3DB1739AAEE1}"/>
+                <a16:creationId xmlns:a16="http://schemas.microsoft.com/office/drawing/2014/main" id="{348C1204-FF34-45EA-9A3E-242512EED031}"/>
               </a:ext>
             </a:extLst>
           </p:cNvPr>
@@ -3982,7 +3982,7 @@
           <p:cNvPr id="5" name="text-46">
             <a:extLst xmlns:a="http://schemas.openxmlformats.org/drawingml/2006/main">
               <a:ext uri="{FF2B5EF4-FFF2-40B4-BE49-F238E27FC236}">
-                <a16:creationId xmlns:a16="http://schemas.microsoft.com/office/drawing/2014/main" id="{1EBA72E3-09B7-40BE-9906-911293D8ACDA}"/>
+                <a16:creationId xmlns:a16="http://schemas.microsoft.com/office/drawing/2014/main" id="{05D79A9E-4BD7-45FE-A1ED-98BD91878563}"/>
               </a:ext>
             </a:extLst>
           </p:cNvPr>
@@ -4038,7 +4038,7 @@
           <p:cNvPr id="6" name="box-47">
             <a:extLst xmlns:a="http://schemas.openxmlformats.org/drawingml/2006/main">
               <a:ext uri="{FF2B5EF4-FFF2-40B4-BE49-F238E27FC236}">
-                <a16:creationId xmlns:a16="http://schemas.microsoft.com/office/drawing/2014/main" id="{758E1A76-D95E-4ECC-83FA-32D184AD4DE8}"/>
+                <a16:creationId xmlns:a16="http://schemas.microsoft.com/office/drawing/2014/main" id="{1A0DD97D-DE24-42BE-8AE9-5CFF7A720814}"/>
               </a:ext>
             </a:extLst>
           </p:cNvPr>
@@ -4071,7 +4071,7 @@
           <p:cNvPr id="7" name="text-48">
             <a:extLst xmlns:a="http://schemas.openxmlformats.org/drawingml/2006/main">
               <a:ext uri="{FF2B5EF4-FFF2-40B4-BE49-F238E27FC236}">
-                <a16:creationId xmlns:a16="http://schemas.microsoft.com/office/drawing/2014/main" id="{9A22E521-0E89-40B1-A9B3-CFF3D5B23EB9}"/>
+                <a16:creationId xmlns:a16="http://schemas.microsoft.com/office/drawing/2014/main" id="{0D3F467A-7B55-4A08-93BC-E4393579A1B8}"/>
               </a:ext>
             </a:extLst>
           </p:cNvPr>
@@ -4127,7 +4127,7 @@
           <p:cNvPr id="8" name="text-49">
             <a:extLst xmlns:a="http://schemas.openxmlformats.org/drawingml/2006/main">
               <a:ext uri="{FF2B5EF4-FFF2-40B4-BE49-F238E27FC236}">
-                <a16:creationId xmlns:a16="http://schemas.microsoft.com/office/drawing/2014/main" id="{301045D3-6FE6-4269-8236-4FE9BB3D8157}"/>
+                <a16:creationId xmlns:a16="http://schemas.microsoft.com/office/drawing/2014/main" id="{DB02D4B7-AD1D-480A-B0C2-886223FD4E0C}"/>
               </a:ext>
             </a:extLst>
           </p:cNvPr>
@@ -4183,7 +4183,7 @@
           <p:cNvPr id="9" name="box-50">
             <a:extLst xmlns:a="http://schemas.openxmlformats.org/drawingml/2006/main">
               <a:ext uri="{FF2B5EF4-FFF2-40B4-BE49-F238E27FC236}">
-                <a16:creationId xmlns:a16="http://schemas.microsoft.com/office/drawing/2014/main" id="{B4430621-3A8E-467B-84A8-A5F0AB257F13}"/>
+                <a16:creationId xmlns:a16="http://schemas.microsoft.com/office/drawing/2014/main" id="{F67D3A52-A3C3-4B49-9B24-3041D0D1BED3}"/>
               </a:ext>
             </a:extLst>
           </p:cNvPr>
@@ -4216,7 +4216,7 @@
           <p:cNvPr id="10" name="text-51">
             <a:extLst xmlns:a="http://schemas.openxmlformats.org/drawingml/2006/main">
               <a:ext uri="{FF2B5EF4-FFF2-40B4-BE49-F238E27FC236}">
-                <a16:creationId xmlns:a16="http://schemas.microsoft.com/office/drawing/2014/main" id="{A12E063A-A877-4757-956C-2D00C8FDF03C}"/>
+                <a16:creationId xmlns:a16="http://schemas.microsoft.com/office/drawing/2014/main" id="{034868B8-543B-4CF7-AF7A-0A3B2267F0C6}"/>
               </a:ext>
             </a:extLst>
           </p:cNvPr>
@@ -4272,7 +4272,7 @@
           <p:cNvPr id="11" name="text-52">
             <a:extLst xmlns:a="http://schemas.openxmlformats.org/drawingml/2006/main">
               <a:ext uri="{FF2B5EF4-FFF2-40B4-BE49-F238E27FC236}">
-                <a16:creationId xmlns:a16="http://schemas.microsoft.com/office/drawing/2014/main" id="{7E52C945-CE90-45BF-9B56-9AFF28055C7C}"/>
+                <a16:creationId xmlns:a16="http://schemas.microsoft.com/office/drawing/2014/main" id="{C6CF868F-CE9D-43C3-8A24-97F162B7CD7F}"/>
               </a:ext>
             </a:extLst>
           </p:cNvPr>
@@ -4328,7 +4328,7 @@
           <p:cNvPr id="12" name="box-53">
             <a:extLst xmlns:a="http://schemas.openxmlformats.org/drawingml/2006/main">
               <a:ext uri="{FF2B5EF4-FFF2-40B4-BE49-F238E27FC236}">
-                <a16:creationId xmlns:a16="http://schemas.microsoft.com/office/drawing/2014/main" id="{6846920C-6EDC-417C-BA64-C617D37952CD}"/>
+                <a16:creationId xmlns:a16="http://schemas.microsoft.com/office/drawing/2014/main" id="{0BA21ABF-B321-44BC-AE19-56FF8A089CAD}"/>
               </a:ext>
             </a:extLst>
           </p:cNvPr>
@@ -4361,7 +4361,7 @@
           <p:cNvPr id="13" name="text-54">
             <a:extLst xmlns:a="http://schemas.openxmlformats.org/drawingml/2006/main">
               <a:ext uri="{FF2B5EF4-FFF2-40B4-BE49-F238E27FC236}">
-                <a16:creationId xmlns:a16="http://schemas.microsoft.com/office/drawing/2014/main" id="{40E592CB-854B-4271-A240-BC9AAAA74A7F}"/>
+                <a16:creationId xmlns:a16="http://schemas.microsoft.com/office/drawing/2014/main" id="{BE699737-8986-4D3D-BE7B-1848D55FE462}"/>
               </a:ext>
             </a:extLst>
           </p:cNvPr>
@@ -4417,7 +4417,7 @@
           <p:cNvPr id="14" name="text-55">
             <a:extLst xmlns:a="http://schemas.openxmlformats.org/drawingml/2006/main">
               <a:ext uri="{FF2B5EF4-FFF2-40B4-BE49-F238E27FC236}">
-                <a16:creationId xmlns:a16="http://schemas.microsoft.com/office/drawing/2014/main" id="{94AA6685-E4B5-4D24-8480-708D59BE0B8E}"/>
+                <a16:creationId xmlns:a16="http://schemas.microsoft.com/office/drawing/2014/main" id="{09F8DF43-0D19-484D-9E9B-956155A5C655}"/>
               </a:ext>
             </a:extLst>
           </p:cNvPr>
@@ -4473,7 +4473,7 @@
           <p:cNvPr id="15" name="box-56">
             <a:extLst xmlns:a="http://schemas.openxmlformats.org/drawingml/2006/main">
               <a:ext uri="{FF2B5EF4-FFF2-40B4-BE49-F238E27FC236}">
-                <a16:creationId xmlns:a16="http://schemas.microsoft.com/office/drawing/2014/main" id="{B07F4D49-F0B1-4675-A75F-25DC6158AF45}"/>
+                <a16:creationId xmlns:a16="http://schemas.microsoft.com/office/drawing/2014/main" id="{0E441D89-8F20-4297-87A6-78E782759395}"/>
               </a:ext>
             </a:extLst>
           </p:cNvPr>
@@ -4506,7 +4506,7 @@
           <p:cNvPr id="16" name="text-57">
             <a:extLst xmlns:a="http://schemas.openxmlformats.org/drawingml/2006/main">
               <a:ext uri="{FF2B5EF4-FFF2-40B4-BE49-F238E27FC236}">
-                <a16:creationId xmlns:a16="http://schemas.microsoft.com/office/drawing/2014/main" id="{1C24CC5D-A433-4471-B361-ABA6C30AEB2E}"/>
+                <a16:creationId xmlns:a16="http://schemas.microsoft.com/office/drawing/2014/main" id="{1FA414CB-5370-46E1-8F03-BF869738348F}"/>
               </a:ext>
             </a:extLst>
           </p:cNvPr>
@@ -4562,7 +4562,7 @@
           <p:cNvPr id="17" name="text-58">
             <a:extLst xmlns:a="http://schemas.openxmlformats.org/drawingml/2006/main">
               <a:ext uri="{FF2B5EF4-FFF2-40B4-BE49-F238E27FC236}">
-                <a16:creationId xmlns:a16="http://schemas.microsoft.com/office/drawing/2014/main" id="{3616D272-1819-4750-8F91-75E1E30FA13C}"/>
+                <a16:creationId xmlns:a16="http://schemas.microsoft.com/office/drawing/2014/main" id="{226B3944-B5BE-4A4B-A596-3173E2C1D8B8}"/>
               </a:ext>
             </a:extLst>
           </p:cNvPr>
@@ -4608,7 +4608,7 @@
                 <a:ea typeface="Arial"/>
                 <a:cs typeface="Arial"/>
               </a:rPr>
-              <a:t>Sözlük çoğuldan tekili bulur · dictionary resolves plurals · Wörterbuch findet den Singular</a:t>
+              <a:t>Sözlük DE↔EN↔TR yön seçimli · dictionary DE/EN/TR with direction switch · Wörterbuch DE/EN/TR mit Richtungswahl</a:t>
             </a:r>
           </a:p>
         </p:txBody>
@@ -4616,7 +4616,7 @@
     </p:spTree>
     <p:extLst>
       <p:ext uri="{BB962C8B-B14F-4D97-AF65-F5344CB8AC3E}">
-        <p14:creationId xmlns:p14="http://schemas.microsoft.com/office/powerpoint/2010/main" val="1875877072"/>
+        <p14:creationId xmlns:p14="http://schemas.microsoft.com/office/powerpoint/2010/main" val="1262386143"/>
       </p:ext>
     </p:extLst>
   </p:cSld>
@@ -4647,7 +4647,7 @@
           <p:cNvPr id="21" name="box-59">
             <a:extLst xmlns:a="http://schemas.openxmlformats.org/drawingml/2006/main">
               <a:ext uri="{FF2B5EF4-FFF2-40B4-BE49-F238E27FC236}">
-                <a16:creationId xmlns:a16="http://schemas.microsoft.com/office/drawing/2014/main" id="{B030CE66-1C18-445D-9C1B-D8172376FD3C}"/>
+                <a16:creationId xmlns:a16="http://schemas.microsoft.com/office/drawing/2014/main" id="{CC8872A3-4FCA-4CE6-A9EB-2B9A2777E1B2}"/>
               </a:ext>
             </a:extLst>
           </p:cNvPr>
@@ -4680,7 +4680,7 @@
           <p:cNvPr id="2" name="text-60">
             <a:extLst xmlns:a="http://schemas.openxmlformats.org/drawingml/2006/main">
               <a:ext uri="{FF2B5EF4-FFF2-40B4-BE49-F238E27FC236}">
-                <a16:creationId xmlns:a16="http://schemas.microsoft.com/office/drawing/2014/main" id="{0F30FB06-E096-4D72-9812-29DCBF62D47E}"/>
+                <a16:creationId xmlns:a16="http://schemas.microsoft.com/office/drawing/2014/main" id="{07A915D4-B064-484F-83B3-51EB19AC66CB}"/>
               </a:ext>
             </a:extLst>
           </p:cNvPr>
@@ -4736,7 +4736,7 @@
           <p:cNvPr id="3" name="text-61">
             <a:extLst xmlns:a="http://schemas.openxmlformats.org/drawingml/2006/main">
               <a:ext uri="{FF2B5EF4-FFF2-40B4-BE49-F238E27FC236}">
-                <a16:creationId xmlns:a16="http://schemas.microsoft.com/office/drawing/2014/main" id="{C15DEB1D-CEA1-44A1-B8BA-23AB0F83700B}"/>
+                <a16:creationId xmlns:a16="http://schemas.microsoft.com/office/drawing/2014/main" id="{213FBECB-FE92-4731-B056-3A9EACC07477}"/>
               </a:ext>
             </a:extLst>
           </p:cNvPr>
@@ -4792,7 +4792,7 @@
           <p:cNvPr id="4" name="text-62">
             <a:extLst xmlns:a="http://schemas.openxmlformats.org/drawingml/2006/main">
               <a:ext uri="{FF2B5EF4-FFF2-40B4-BE49-F238E27FC236}">
-                <a16:creationId xmlns:a16="http://schemas.microsoft.com/office/drawing/2014/main" id="{59EABAB4-753B-4F62-91EB-5197D5D1ED1C}"/>
+                <a16:creationId xmlns:a16="http://schemas.microsoft.com/office/drawing/2014/main" id="{9EE46C01-5EEE-4A58-B211-C2813C937C82}"/>
               </a:ext>
             </a:extLst>
           </p:cNvPr>
@@ -4848,7 +4848,7 @@
           <p:cNvPr id="5" name="text-63">
             <a:extLst xmlns:a="http://schemas.openxmlformats.org/drawingml/2006/main">
               <a:ext uri="{FF2B5EF4-FFF2-40B4-BE49-F238E27FC236}">
-                <a16:creationId xmlns:a16="http://schemas.microsoft.com/office/drawing/2014/main" id="{FFCDD576-C7B9-49D9-965F-B7703F359A96}"/>
+                <a16:creationId xmlns:a16="http://schemas.microsoft.com/office/drawing/2014/main" id="{863C23BD-119E-4B57-837F-3253D2AFD7BF}"/>
               </a:ext>
             </a:extLst>
           </p:cNvPr>
@@ -4904,7 +4904,7 @@
           <p:cNvPr id="6" name="box-64">
             <a:extLst xmlns:a="http://schemas.openxmlformats.org/drawingml/2006/main">
               <a:ext uri="{FF2B5EF4-FFF2-40B4-BE49-F238E27FC236}">
-                <a16:creationId xmlns:a16="http://schemas.microsoft.com/office/drawing/2014/main" id="{8617E585-5652-473B-9ADA-F4A05578C69E}"/>
+                <a16:creationId xmlns:a16="http://schemas.microsoft.com/office/drawing/2014/main" id="{2222045F-6A9C-4BF1-AEFF-FB96522A75C4}"/>
               </a:ext>
             </a:extLst>
           </p:cNvPr>
@@ -4937,7 +4937,7 @@
           <p:cNvPr id="7" name="dot-65">
             <a:extLst xmlns:a="http://schemas.openxmlformats.org/drawingml/2006/main">
               <a:ext uri="{FF2B5EF4-FFF2-40B4-BE49-F238E27FC236}">
-                <a16:creationId xmlns:a16="http://schemas.microsoft.com/office/drawing/2014/main" id="{DD64BE3C-76AD-4F7E-89F1-CDB9E31933E5}"/>
+                <a16:creationId xmlns:a16="http://schemas.microsoft.com/office/drawing/2014/main" id="{11BABC0B-8AEC-456D-BA83-38635110A94D}"/>
               </a:ext>
             </a:extLst>
           </p:cNvPr>
@@ -4968,7 +4968,7 @@
           <p:cNvPr id="8" name="text-66">
             <a:extLst xmlns:a="http://schemas.openxmlformats.org/drawingml/2006/main">
               <a:ext uri="{FF2B5EF4-FFF2-40B4-BE49-F238E27FC236}">
-                <a16:creationId xmlns:a16="http://schemas.microsoft.com/office/drawing/2014/main" id="{6508250D-36B4-4F33-B406-E5649C387E26}"/>
+                <a16:creationId xmlns:a16="http://schemas.microsoft.com/office/drawing/2014/main" id="{3FDDED3F-1593-4E3D-93AC-A2659275256B}"/>
               </a:ext>
             </a:extLst>
           </p:cNvPr>
@@ -5024,7 +5024,7 @@
           <p:cNvPr id="9" name="text-67">
             <a:extLst xmlns:a="http://schemas.openxmlformats.org/drawingml/2006/main">
               <a:ext uri="{FF2B5EF4-FFF2-40B4-BE49-F238E27FC236}">
-                <a16:creationId xmlns:a16="http://schemas.microsoft.com/office/drawing/2014/main" id="{F0C12B2F-ECA6-4453-99C2-BB150A18BDA1}"/>
+                <a16:creationId xmlns:a16="http://schemas.microsoft.com/office/drawing/2014/main" id="{2EBF4B4C-F216-45C7-AADB-9C422E3B2A45}"/>
               </a:ext>
             </a:extLst>
           </p:cNvPr>
@@ -5080,7 +5080,7 @@
           <p:cNvPr id="10" name="text-68">
             <a:extLst xmlns:a="http://schemas.openxmlformats.org/drawingml/2006/main">
               <a:ext uri="{FF2B5EF4-FFF2-40B4-BE49-F238E27FC236}">
-                <a16:creationId xmlns:a16="http://schemas.microsoft.com/office/drawing/2014/main" id="{CE4796E1-8CAC-4EC9-975B-022AF295ADEF}"/>
+                <a16:creationId xmlns:a16="http://schemas.microsoft.com/office/drawing/2014/main" id="{657BC802-353C-4437-8D3F-92E7BA336C95}"/>
               </a:ext>
             </a:extLst>
           </p:cNvPr>
@@ -5136,7 +5136,7 @@
           <p:cNvPr id="11" name="dot-69">
             <a:extLst xmlns:a="http://schemas.openxmlformats.org/drawingml/2006/main">
               <a:ext uri="{FF2B5EF4-FFF2-40B4-BE49-F238E27FC236}">
-                <a16:creationId xmlns:a16="http://schemas.microsoft.com/office/drawing/2014/main" id="{0EBFDE20-1E68-4AA7-9FDC-5083FFE15976}"/>
+                <a16:creationId xmlns:a16="http://schemas.microsoft.com/office/drawing/2014/main" id="{0122CF94-D0F0-432F-86BE-12A78D44CE50}"/>
               </a:ext>
             </a:extLst>
           </p:cNvPr>
@@ -5167,7 +5167,7 @@
           <p:cNvPr id="12" name="text-70">
             <a:extLst xmlns:a="http://schemas.openxmlformats.org/drawingml/2006/main">
               <a:ext uri="{FF2B5EF4-FFF2-40B4-BE49-F238E27FC236}">
-                <a16:creationId xmlns:a16="http://schemas.microsoft.com/office/drawing/2014/main" id="{F0CBBF78-733E-4507-B3D9-A9F3B42843ED}"/>
+                <a16:creationId xmlns:a16="http://schemas.microsoft.com/office/drawing/2014/main" id="{11CB8F24-9DE3-4619-9FAA-CBCFC79B2B74}"/>
               </a:ext>
             </a:extLst>
           </p:cNvPr>
@@ -5223,7 +5223,7 @@
           <p:cNvPr id="13" name="text-71">
             <a:extLst xmlns:a="http://schemas.openxmlformats.org/drawingml/2006/main">
               <a:ext uri="{FF2B5EF4-FFF2-40B4-BE49-F238E27FC236}">
-                <a16:creationId xmlns:a16="http://schemas.microsoft.com/office/drawing/2014/main" id="{6D63AE65-4B38-4BA6-8B0E-BC3D8FC41E92}"/>
+                <a16:creationId xmlns:a16="http://schemas.microsoft.com/office/drawing/2014/main" id="{A4148DEB-BE20-4D5A-805B-C2715DB7F9EA}"/>
               </a:ext>
             </a:extLst>
           </p:cNvPr>
@@ -5279,7 +5279,7 @@
           <p:cNvPr id="14" name="text-72">
             <a:extLst xmlns:a="http://schemas.openxmlformats.org/drawingml/2006/main">
               <a:ext uri="{FF2B5EF4-FFF2-40B4-BE49-F238E27FC236}">
-                <a16:creationId xmlns:a16="http://schemas.microsoft.com/office/drawing/2014/main" id="{8B6AFCC9-3642-426C-8B67-20C5B042E660}"/>
+                <a16:creationId xmlns:a16="http://schemas.microsoft.com/office/drawing/2014/main" id="{6FB89C06-1EF8-4D90-8057-DD2394F39D2E}"/>
               </a:ext>
             </a:extLst>
           </p:cNvPr>
@@ -5335,7 +5335,7 @@
           <p:cNvPr id="15" name="dot-73">
             <a:extLst xmlns:a="http://schemas.openxmlformats.org/drawingml/2006/main">
               <a:ext uri="{FF2B5EF4-FFF2-40B4-BE49-F238E27FC236}">
-                <a16:creationId xmlns:a16="http://schemas.microsoft.com/office/drawing/2014/main" id="{523BE894-F557-4105-ADB1-DB297951A04E}"/>
+                <a16:creationId xmlns:a16="http://schemas.microsoft.com/office/drawing/2014/main" id="{0607C023-7AC8-4F9E-B7A6-4188FD94BE00}"/>
               </a:ext>
             </a:extLst>
           </p:cNvPr>
@@ -5366,7 +5366,7 @@
           <p:cNvPr id="16" name="text-74">
             <a:extLst xmlns:a="http://schemas.openxmlformats.org/drawingml/2006/main">
               <a:ext uri="{FF2B5EF4-FFF2-40B4-BE49-F238E27FC236}">
-                <a16:creationId xmlns:a16="http://schemas.microsoft.com/office/drawing/2014/main" id="{C58E37E3-3BE3-4C5A-84CD-7D823ED934D6}"/>
+                <a16:creationId xmlns:a16="http://schemas.microsoft.com/office/drawing/2014/main" id="{8C3A3089-7C04-430C-9978-6DDA158CF503}"/>
               </a:ext>
             </a:extLst>
           </p:cNvPr>
@@ -5422,7 +5422,7 @@
           <p:cNvPr id="17" name="text-75">
             <a:extLst xmlns:a="http://schemas.openxmlformats.org/drawingml/2006/main">
               <a:ext uri="{FF2B5EF4-FFF2-40B4-BE49-F238E27FC236}">
-                <a16:creationId xmlns:a16="http://schemas.microsoft.com/office/drawing/2014/main" id="{77D50507-F297-47C0-9241-7A97D5D21DEC}"/>
+                <a16:creationId xmlns:a16="http://schemas.microsoft.com/office/drawing/2014/main" id="{FD9A7182-60EA-44D5-8DDB-A3FE0494E5DA}"/>
               </a:ext>
             </a:extLst>
           </p:cNvPr>
@@ -5478,7 +5478,7 @@
           <p:cNvPr id="18" name="text-76">
             <a:extLst xmlns:a="http://schemas.openxmlformats.org/drawingml/2006/main">
               <a:ext uri="{FF2B5EF4-FFF2-40B4-BE49-F238E27FC236}">
-                <a16:creationId xmlns:a16="http://schemas.microsoft.com/office/drawing/2014/main" id="{083F3DC4-F88A-40A3-855C-0061AD311841}"/>
+                <a16:creationId xmlns:a16="http://schemas.microsoft.com/office/drawing/2014/main" id="{1CAB923D-193F-4207-9B1A-2DEF2CE3A609}"/>
               </a:ext>
             </a:extLst>
           </p:cNvPr>
@@ -5534,7 +5534,7 @@
           <p:cNvPr id="19" name="box-77">
             <a:extLst xmlns:a="http://schemas.openxmlformats.org/drawingml/2006/main">
               <a:ext uri="{FF2B5EF4-FFF2-40B4-BE49-F238E27FC236}">
-                <a16:creationId xmlns:a16="http://schemas.microsoft.com/office/drawing/2014/main" id="{EE833D58-1CC4-4D00-835E-88A42DC448F3}"/>
+                <a16:creationId xmlns:a16="http://schemas.microsoft.com/office/drawing/2014/main" id="{7063F775-887A-4FDF-AA44-E7EA54212294}"/>
               </a:ext>
             </a:extLst>
           </p:cNvPr>
@@ -5567,7 +5567,7 @@
           <p:cNvPr id="20" name="text-78">
             <a:extLst xmlns:a="http://schemas.openxmlformats.org/drawingml/2006/main">
               <a:ext uri="{FF2B5EF4-FFF2-40B4-BE49-F238E27FC236}">
-                <a16:creationId xmlns:a16="http://schemas.microsoft.com/office/drawing/2014/main" id="{EDF00F7C-B7E8-4FA7-89CC-1A121B59AC75}"/>
+                <a16:creationId xmlns:a16="http://schemas.microsoft.com/office/drawing/2014/main" id="{AF9FC780-281C-482C-A160-5B219F0017B3}"/>
               </a:ext>
             </a:extLst>
           </p:cNvPr>
@@ -5621,7 +5621,7 @@
     </p:spTree>
     <p:extLst>
       <p:ext uri="{BB962C8B-B14F-4D97-AF65-F5344CB8AC3E}">
-        <p14:creationId xmlns:p14="http://schemas.microsoft.com/office/powerpoint/2010/main" val="737752390"/>
+        <p14:creationId xmlns:p14="http://schemas.microsoft.com/office/powerpoint/2010/main" val="1592586532"/>
       </p:ext>
     </p:extLst>
   </p:cSld>
@@ -5652,7 +5652,7 @@
           <p:cNvPr id="18" name="box-79">
             <a:extLst xmlns:a="http://schemas.openxmlformats.org/drawingml/2006/main">
               <a:ext uri="{FF2B5EF4-FFF2-40B4-BE49-F238E27FC236}">
-                <a16:creationId xmlns:a16="http://schemas.microsoft.com/office/drawing/2014/main" id="{008E3398-0B7C-487C-9FBA-B06C87D2E681}"/>
+                <a16:creationId xmlns:a16="http://schemas.microsoft.com/office/drawing/2014/main" id="{9BF2063D-965C-44A5-BAFE-44A43D4F4EB7}"/>
               </a:ext>
             </a:extLst>
           </p:cNvPr>
@@ -5685,7 +5685,7 @@
           <p:cNvPr id="2" name="text-80">
             <a:extLst xmlns:a="http://schemas.openxmlformats.org/drawingml/2006/main">
               <a:ext uri="{FF2B5EF4-FFF2-40B4-BE49-F238E27FC236}">
-                <a16:creationId xmlns:a16="http://schemas.microsoft.com/office/drawing/2014/main" id="{8E43AB92-040D-4D87-AEEC-774E825442F7}"/>
+                <a16:creationId xmlns:a16="http://schemas.microsoft.com/office/drawing/2014/main" id="{D56A71AE-8550-4032-B568-5831F62ED6A0}"/>
               </a:ext>
             </a:extLst>
           </p:cNvPr>
@@ -5741,7 +5741,7 @@
           <p:cNvPr id="3" name="text-81">
             <a:extLst xmlns:a="http://schemas.openxmlformats.org/drawingml/2006/main">
               <a:ext uri="{FF2B5EF4-FFF2-40B4-BE49-F238E27FC236}">
-                <a16:creationId xmlns:a16="http://schemas.microsoft.com/office/drawing/2014/main" id="{D12E8566-4DBB-4CDC-9C16-64296B20991D}"/>
+                <a16:creationId xmlns:a16="http://schemas.microsoft.com/office/drawing/2014/main" id="{FFA29013-99EA-49A3-BFD5-87E6EAD0DA16}"/>
               </a:ext>
             </a:extLst>
           </p:cNvPr>
@@ -5797,7 +5797,7 @@
           <p:cNvPr id="4" name="text-82">
             <a:extLst xmlns:a="http://schemas.openxmlformats.org/drawingml/2006/main">
               <a:ext uri="{FF2B5EF4-FFF2-40B4-BE49-F238E27FC236}">
-                <a16:creationId xmlns:a16="http://schemas.microsoft.com/office/drawing/2014/main" id="{A75DE5CD-9352-4BA5-906A-FF235AD80A34}"/>
+                <a16:creationId xmlns:a16="http://schemas.microsoft.com/office/drawing/2014/main" id="{B599A8D4-F59C-4240-A667-52DF5B0065A8}"/>
               </a:ext>
             </a:extLst>
           </p:cNvPr>
@@ -5853,7 +5853,7 @@
           <p:cNvPr id="5" name="text-83">
             <a:extLst xmlns:a="http://schemas.openxmlformats.org/drawingml/2006/main">
               <a:ext uri="{FF2B5EF4-FFF2-40B4-BE49-F238E27FC236}">
-                <a16:creationId xmlns:a16="http://schemas.microsoft.com/office/drawing/2014/main" id="{6CC6BEC3-91AD-4C6B-82EE-B585B94A275F}"/>
+                <a16:creationId xmlns:a16="http://schemas.microsoft.com/office/drawing/2014/main" id="{52D78FF0-B093-47E4-8B25-4CEC47770C9B}"/>
               </a:ext>
             </a:extLst>
           </p:cNvPr>
@@ -5909,7 +5909,7 @@
           <p:cNvPr id="6" name="text-84">
             <a:extLst xmlns:a="http://schemas.openxmlformats.org/drawingml/2006/main">
               <a:ext uri="{FF2B5EF4-FFF2-40B4-BE49-F238E27FC236}">
-                <a16:creationId xmlns:a16="http://schemas.microsoft.com/office/drawing/2014/main" id="{270B6A19-47E4-40FB-B62A-8A95B0BC49EE}"/>
+                <a16:creationId xmlns:a16="http://schemas.microsoft.com/office/drawing/2014/main" id="{835E659D-C50C-489D-AEDF-926E923A1CB5}"/>
               </a:ext>
             </a:extLst>
           </p:cNvPr>
@@ -5965,7 +5965,7 @@
           <p:cNvPr id="7" name="text-85">
             <a:extLst xmlns:a="http://schemas.openxmlformats.org/drawingml/2006/main">
               <a:ext uri="{FF2B5EF4-FFF2-40B4-BE49-F238E27FC236}">
-                <a16:creationId xmlns:a16="http://schemas.microsoft.com/office/drawing/2014/main" id="{43A0F352-429B-49D5-BE40-02B32662ACE9}"/>
+                <a16:creationId xmlns:a16="http://schemas.microsoft.com/office/drawing/2014/main" id="{3CE6A196-E2B0-4130-83C2-81A3DAE0A5D7}"/>
               </a:ext>
             </a:extLst>
           </p:cNvPr>
@@ -6021,7 +6021,7 @@
           <p:cNvPr id="8" name="text-86">
             <a:extLst xmlns:a="http://schemas.openxmlformats.org/drawingml/2006/main">
               <a:ext uri="{FF2B5EF4-FFF2-40B4-BE49-F238E27FC236}">
-                <a16:creationId xmlns:a16="http://schemas.microsoft.com/office/drawing/2014/main" id="{022E99E2-874D-48D7-95E4-49DD0FD51220}"/>
+                <a16:creationId xmlns:a16="http://schemas.microsoft.com/office/drawing/2014/main" id="{5515909F-271E-481C-BE41-B16DDE1DBFB3}"/>
               </a:ext>
             </a:extLst>
           </p:cNvPr>
@@ -6067,7 +6067,7 @@
                 <a:ea typeface="Arial"/>
                 <a:cs typeface="Arial"/>
               </a:rPr>
-              <a:t>70 / 70</a:t>
+              <a:t>86 / 86</a:t>
             </a:r>
           </a:p>
         </p:txBody>
@@ -6077,7 +6077,7 @@
           <p:cNvPr id="9" name="text-87">
             <a:extLst xmlns:a="http://schemas.openxmlformats.org/drawingml/2006/main">
               <a:ext uri="{FF2B5EF4-FFF2-40B4-BE49-F238E27FC236}">
-                <a16:creationId xmlns:a16="http://schemas.microsoft.com/office/drawing/2014/main" id="{43FD3B3D-332F-4573-9A2F-14BD2346ECA0}"/>
+                <a16:creationId xmlns:a16="http://schemas.microsoft.com/office/drawing/2014/main" id="{4D5BF624-9651-412A-9AC7-6846EBA2380D}"/>
               </a:ext>
             </a:extLst>
           </p:cNvPr>
@@ -6133,7 +6133,7 @@
           <p:cNvPr id="10" name="text-88">
             <a:extLst xmlns:a="http://schemas.openxmlformats.org/drawingml/2006/main">
               <a:ext uri="{FF2B5EF4-FFF2-40B4-BE49-F238E27FC236}">
-                <a16:creationId xmlns:a16="http://schemas.microsoft.com/office/drawing/2014/main" id="{26340892-6CAB-4D83-85E4-FAA7E481B6F5}"/>
+                <a16:creationId xmlns:a16="http://schemas.microsoft.com/office/drawing/2014/main" id="{1FA0FBBB-93A0-4CCE-9B9F-E57E22C78CAB}"/>
               </a:ext>
             </a:extLst>
           </p:cNvPr>
@@ -6235,7 +6235,7 @@
           <p:cNvPr id="11" name="text-89">
             <a:extLst xmlns:a="http://schemas.openxmlformats.org/drawingml/2006/main">
               <a:ext uri="{FF2B5EF4-FFF2-40B4-BE49-F238E27FC236}">
-                <a16:creationId xmlns:a16="http://schemas.microsoft.com/office/drawing/2014/main" id="{CDF660C7-0A91-4F65-A7DF-F54B3EE50186}"/>
+                <a16:creationId xmlns:a16="http://schemas.microsoft.com/office/drawing/2014/main" id="{2D7AE4AF-ABA1-4CDE-ADAD-6E101001E89E}"/>
               </a:ext>
             </a:extLst>
           </p:cNvPr>
@@ -6337,7 +6337,7 @@
           <p:cNvPr id="12" name="text-90">
             <a:extLst xmlns:a="http://schemas.openxmlformats.org/drawingml/2006/main">
               <a:ext uri="{FF2B5EF4-FFF2-40B4-BE49-F238E27FC236}">
-                <a16:creationId xmlns:a16="http://schemas.microsoft.com/office/drawing/2014/main" id="{DC6C3574-DB9A-428A-84F8-72398D4C1DEA}"/>
+                <a16:creationId xmlns:a16="http://schemas.microsoft.com/office/drawing/2014/main" id="{8EC2E6C2-6FB4-44D9-9A0C-EF14C4223A7E}"/>
               </a:ext>
             </a:extLst>
           </p:cNvPr>
@@ -6439,7 +6439,7 @@
           <p:cNvPr id="13" name="box-91">
             <a:extLst xmlns:a="http://schemas.openxmlformats.org/drawingml/2006/main">
               <a:ext uri="{FF2B5EF4-FFF2-40B4-BE49-F238E27FC236}">
-                <a16:creationId xmlns:a16="http://schemas.microsoft.com/office/drawing/2014/main" id="{26DBDBCB-53D6-4163-9174-6F0E737EB575}"/>
+                <a16:creationId xmlns:a16="http://schemas.microsoft.com/office/drawing/2014/main" id="{B32C322C-414A-4678-902B-1A6ED941C958}"/>
               </a:ext>
             </a:extLst>
           </p:cNvPr>
@@ -6472,7 +6472,7 @@
           <p:cNvPr id="14" name="text-92">
             <a:extLst xmlns:a="http://schemas.openxmlformats.org/drawingml/2006/main">
               <a:ext uri="{FF2B5EF4-FFF2-40B4-BE49-F238E27FC236}">
-                <a16:creationId xmlns:a16="http://schemas.microsoft.com/office/drawing/2014/main" id="{6D421409-C49F-4A13-8AD5-C78F9C7DA902}"/>
+                <a16:creationId xmlns:a16="http://schemas.microsoft.com/office/drawing/2014/main" id="{26B2B46D-A0C8-49C3-A33B-43DED751D20F}"/>
               </a:ext>
             </a:extLst>
           </p:cNvPr>
@@ -6528,7 +6528,7 @@
           <p:cNvPr id="15" name="text-93">
             <a:extLst xmlns:a="http://schemas.openxmlformats.org/drawingml/2006/main">
               <a:ext uri="{FF2B5EF4-FFF2-40B4-BE49-F238E27FC236}">
-                <a16:creationId xmlns:a16="http://schemas.microsoft.com/office/drawing/2014/main" id="{486F4FA2-9D0D-46E3-9354-8F2906355D00}"/>
+                <a16:creationId xmlns:a16="http://schemas.microsoft.com/office/drawing/2014/main" id="{EA0FE66C-E5F3-4770-8476-F51FB78F88BA}"/>
               </a:ext>
             </a:extLst>
           </p:cNvPr>
@@ -6574,7 +6574,7 @@
                 <a:ea typeface="Arial"/>
                 <a:cs typeface="Arial"/>
               </a:rPr>
-              <a:t>Windows 10/11 (x64) + macOS (Apple Silicon) — İndirme: github.com/Azizsekerdil/GermanCourseAI/releases (v1.1.2) · (özel repo)</a:t>
+              <a:t>Windows 10/11 (x64) + macOS (Apple Silicon) — İndirme: github.com/Azizsekerdil/GermanCourseAI/releases (v1.2.0) · (özel repo)</a:t>
             </a:r>
           </a:p>
         </p:txBody>
@@ -6584,7 +6584,7 @@
           <p:cNvPr id="16" name="text-94">
             <a:extLst xmlns:a="http://schemas.openxmlformats.org/drawingml/2006/main">
               <a:ext uri="{FF2B5EF4-FFF2-40B4-BE49-F238E27FC236}">
-                <a16:creationId xmlns:a16="http://schemas.microsoft.com/office/drawing/2014/main" id="{7A9B7946-7959-4B3B-A558-2B643C46DA0B}"/>
+                <a16:creationId xmlns:a16="http://schemas.microsoft.com/office/drawing/2014/main" id="{6A096659-B102-4B26-840E-DC6539D95958}"/>
               </a:ext>
             </a:extLst>
           </p:cNvPr>
@@ -6630,7 +6630,7 @@
                 <a:ea typeface="Arial"/>
                 <a:cs typeface="Arial"/>
               </a:rPr>
-              <a:t>Windows 10/11 (x64) &amp; macOS (Apple Silicon) — Download: GitHub Releases (v1.1.2)</a:t>
+              <a:t>Windows 10/11 (x64) &amp; macOS (Apple Silicon) — Download: GitHub Releases (v1.2.0)</a:t>
             </a:r>
           </a:p>
         </p:txBody>
@@ -6640,7 +6640,7 @@
           <p:cNvPr id="17" name="text-95">
             <a:extLst xmlns:a="http://schemas.openxmlformats.org/drawingml/2006/main">
               <a:ext uri="{FF2B5EF4-FFF2-40B4-BE49-F238E27FC236}">
-                <a16:creationId xmlns:a16="http://schemas.microsoft.com/office/drawing/2014/main" id="{B5DE2CBA-0339-432E-9BAF-CEDBC5F4D955}"/>
+                <a16:creationId xmlns:a16="http://schemas.microsoft.com/office/drawing/2014/main" id="{5729A71B-508E-4089-9045-D872A2523B78}"/>
               </a:ext>
             </a:extLst>
           </p:cNvPr>
@@ -6694,7 +6694,7 @@
     </p:spTree>
     <p:extLst>
       <p:ext uri="{BB962C8B-B14F-4D97-AF65-F5344CB8AC3E}">
-        <p14:creationId xmlns:p14="http://schemas.microsoft.com/office/powerpoint/2010/main" val="1193501957"/>
+        <p14:creationId xmlns:p14="http://schemas.microsoft.com/office/powerpoint/2010/main" val="658931556"/>
       </p:ext>
     </p:extLst>
   </p:cSld>

--- a/docs/presentation/German-Course-AI-Trilingual.pptx
+++ b/docs/presentation/German-Course-AI-Trilingual.pptx
@@ -2,18 +2,18 @@
 <file path=ppt/presentation.xml><?xml version="1.0" encoding="utf-8"?>
 <p:presentation xmlns:p="http://schemas.openxmlformats.org/presentationml/2006/main">
   <p:sldMasterIdLst>
-    <p:sldMasterId xmlns:r="http://schemas.openxmlformats.org/officeDocument/2006/relationships" id="2147483648" r:id="Rcbd384e84be040be"/>
+    <p:sldMasterId xmlns:r="http://schemas.openxmlformats.org/officeDocument/2006/relationships" id="2147483648" r:id="Re358ece5affd4ade"/>
   </p:sldMasterIdLst>
   <p:notesMasterIdLst>
-    <p:notesMasterId xmlns:r="http://schemas.openxmlformats.org/officeDocument/2006/relationships" r:id="R68687a610da74c29"/>
+    <p:notesMasterId xmlns:r="http://schemas.openxmlformats.org/officeDocument/2006/relationships" r:id="Reb202cd08b7b48e4"/>
   </p:notesMasterIdLst>
   <p:sldIdLst>
-    <p:sldId xmlns:r="http://schemas.openxmlformats.org/officeDocument/2006/relationships" id="256" r:id="R8c4826a347d14401"/>
-    <p:sldId xmlns:r="http://schemas.openxmlformats.org/officeDocument/2006/relationships" id="257" r:id="Rfaeaf785f87f4dd7"/>
-    <p:sldId xmlns:r="http://schemas.openxmlformats.org/officeDocument/2006/relationships" id="258" r:id="Rd54e1d0b8b6c476a"/>
-    <p:sldId xmlns:r="http://schemas.openxmlformats.org/officeDocument/2006/relationships" id="259" r:id="R0e83bf351a1c416c"/>
-    <p:sldId xmlns:r="http://schemas.openxmlformats.org/officeDocument/2006/relationships" id="260" r:id="Rd098d8f6b5cb4816"/>
-    <p:sldId xmlns:r="http://schemas.openxmlformats.org/officeDocument/2006/relationships" id="261" r:id="Rf7a6b883fad149a3"/>
+    <p:sldId xmlns:r="http://schemas.openxmlformats.org/officeDocument/2006/relationships" id="256" r:id="R5affc5769c914c3a"/>
+    <p:sldId xmlns:r="http://schemas.openxmlformats.org/officeDocument/2006/relationships" id="257" r:id="R75ea97c7114f456c"/>
+    <p:sldId xmlns:r="http://schemas.openxmlformats.org/officeDocument/2006/relationships" id="258" r:id="R1ff8e132df464c2b"/>
+    <p:sldId xmlns:r="http://schemas.openxmlformats.org/officeDocument/2006/relationships" id="259" r:id="R98786711e9b442bb"/>
+    <p:sldId xmlns:r="http://schemas.openxmlformats.org/officeDocument/2006/relationships" id="260" r:id="R3fd73e6011b045b4"/>
+    <p:sldId xmlns:r="http://schemas.openxmlformats.org/officeDocument/2006/relationships" id="261" r:id="R451262457a3f433d"/>
   </p:sldIdLst>
   <p:sldSz cx="12192000" cy="6858000"/>
   <p:notesSz cx="6858000" cy="9144000"/>
@@ -937,7 +937,7 @@
           </a:p>
           <a:p xmlns:a="http://schemas.openxmlformats.org/drawingml/2006/main">
             <a:r>
-              <a:t>- https://github.com/Azizsekerdil/GermanCourseAI/releases/tag/v1.2.0</a:t>
+              <a:t>- https://github.com/Azizsekerdil/GermanCourseAI/releases/tag/v1.2.1</a:t>
             </a:r>
           </a:p>
           <a:p xmlns:a="http://schemas.openxmlformats.org/drawingml/2006/main">
@@ -1010,7 +1010,7 @@
   </p:cSld>
   <p:clrMap bg1="lt1" tx1="dk1" bg2="lt2" tx2="dk2" accent1="accent1" accent2="accent2" accent3="accent3" accent4="accent4" accent5="accent5" accent6="accent6" hlink="hlink" folHlink="folHlink"/>
   <p:sldLayoutIdLst>
-    <p:sldLayoutId xmlns:r="http://schemas.openxmlformats.org/officeDocument/2006/relationships" id="2147483649" r:id="R582f8d2294ec437e"/>
+    <p:sldLayoutId xmlns:r="http://schemas.openxmlformats.org/officeDocument/2006/relationships" id="2147483649" r:id="Rf03c2eb47eb04ce3"/>
   </p:sldLayoutIdLst>
   <p:txStyles>
     <p:titleStyle>
@@ -1561,7 +1561,7 @@
           <p:cNvPr id="13" name="box-1">
             <a:extLst xmlns:a="http://schemas.openxmlformats.org/drawingml/2006/main">
               <a:ext uri="{FF2B5EF4-FFF2-40B4-BE49-F238E27FC236}">
-                <a16:creationId xmlns:a16="http://schemas.microsoft.com/office/drawing/2014/main" id="{DB6DAC9F-4D84-478B-AE1B-23B78E9D6A07}"/>
+                <a16:creationId xmlns:a16="http://schemas.microsoft.com/office/drawing/2014/main" id="{D185A3FD-89D1-4702-994B-5BD5ECECCAFC}"/>
               </a:ext>
             </a:extLst>
           </p:cNvPr>
@@ -1594,7 +1594,7 @@
           <p:cNvPr id="2" name="text-2">
             <a:extLst xmlns:a="http://schemas.openxmlformats.org/drawingml/2006/main">
               <a:ext uri="{FF2B5EF4-FFF2-40B4-BE49-F238E27FC236}">
-                <a16:creationId xmlns:a16="http://schemas.microsoft.com/office/drawing/2014/main" id="{5267375E-2F47-4CC5-852F-D260E80DF7EB}"/>
+                <a16:creationId xmlns:a16="http://schemas.microsoft.com/office/drawing/2014/main" id="{9438853F-A2CE-4223-A978-0B7EADF92985}"/>
               </a:ext>
             </a:extLst>
           </p:cNvPr>
@@ -1650,7 +1650,7 @@
           <p:cNvPr id="3" name="text-3">
             <a:extLst xmlns:a="http://schemas.openxmlformats.org/drawingml/2006/main">
               <a:ext uri="{FF2B5EF4-FFF2-40B4-BE49-F238E27FC236}">
-                <a16:creationId xmlns:a16="http://schemas.microsoft.com/office/drawing/2014/main" id="{04EE5129-C585-4EF0-BCAF-DBD8C0999771}"/>
+                <a16:creationId xmlns:a16="http://schemas.microsoft.com/office/drawing/2014/main" id="{51834263-BE91-489C-9720-28B5668BC986}"/>
               </a:ext>
             </a:extLst>
           </p:cNvPr>
@@ -1706,7 +1706,7 @@
           <p:cNvPr id="4" name="text-4">
             <a:extLst xmlns:a="http://schemas.openxmlformats.org/drawingml/2006/main">
               <a:ext uri="{FF2B5EF4-FFF2-40B4-BE49-F238E27FC236}">
-                <a16:creationId xmlns:a16="http://schemas.microsoft.com/office/drawing/2014/main" id="{09A12ED0-9573-4E32-BCA6-BA73E3E00C86}"/>
+                <a16:creationId xmlns:a16="http://schemas.microsoft.com/office/drawing/2014/main" id="{F93AAA44-947E-45DA-8352-ECEB8686B48A}"/>
               </a:ext>
             </a:extLst>
           </p:cNvPr>
@@ -1762,7 +1762,7 @@
           <p:cNvPr id="5" name="text-5">
             <a:extLst xmlns:a="http://schemas.openxmlformats.org/drawingml/2006/main">
               <a:ext uri="{FF2B5EF4-FFF2-40B4-BE49-F238E27FC236}">
-                <a16:creationId xmlns:a16="http://schemas.microsoft.com/office/drawing/2014/main" id="{BF419A2C-4FA1-45FF-A548-3B1FBEE0BCE4}"/>
+                <a16:creationId xmlns:a16="http://schemas.microsoft.com/office/drawing/2014/main" id="{4FDDD9F2-1C3C-4D15-AC3E-A7811B14E178}"/>
               </a:ext>
             </a:extLst>
           </p:cNvPr>
@@ -1818,7 +1818,7 @@
           <p:cNvPr id="6" name="text-6">
             <a:extLst xmlns:a="http://schemas.openxmlformats.org/drawingml/2006/main">
               <a:ext uri="{FF2B5EF4-FFF2-40B4-BE49-F238E27FC236}">
-                <a16:creationId xmlns:a16="http://schemas.microsoft.com/office/drawing/2014/main" id="{1D325EB1-2955-40F5-93F8-C100445D97AC}"/>
+                <a16:creationId xmlns:a16="http://schemas.microsoft.com/office/drawing/2014/main" id="{9BAB606D-B095-4302-B4A5-FD540D0EB542}"/>
               </a:ext>
             </a:extLst>
           </p:cNvPr>
@@ -1874,7 +1874,7 @@
           <p:cNvPr id="7" name="text-7">
             <a:extLst xmlns:a="http://schemas.openxmlformats.org/drawingml/2006/main">
               <a:ext uri="{FF2B5EF4-FFF2-40B4-BE49-F238E27FC236}">
-                <a16:creationId xmlns:a16="http://schemas.microsoft.com/office/drawing/2014/main" id="{53FB5070-83D6-4E2C-8624-F0AADDB3C377}"/>
+                <a16:creationId xmlns:a16="http://schemas.microsoft.com/office/drawing/2014/main" id="{140B51A5-C10C-40DE-BD1B-EAB77780CE53}"/>
               </a:ext>
             </a:extLst>
           </p:cNvPr>
@@ -1930,7 +1930,7 @@
           <p:cNvPr id="8" name="text-8">
             <a:extLst xmlns:a="http://schemas.openxmlformats.org/drawingml/2006/main">
               <a:ext uri="{FF2B5EF4-FFF2-40B4-BE49-F238E27FC236}">
-                <a16:creationId xmlns:a16="http://schemas.microsoft.com/office/drawing/2014/main" id="{C7213DFD-D89C-437A-A289-800D23C8EA8D}"/>
+                <a16:creationId xmlns:a16="http://schemas.microsoft.com/office/drawing/2014/main" id="{A41ACCD0-912F-4256-9983-5DA9E60AA076}"/>
               </a:ext>
             </a:extLst>
           </p:cNvPr>
@@ -1986,7 +1986,7 @@
           <p:cNvPr id="9" name="text-9">
             <a:extLst xmlns:a="http://schemas.openxmlformats.org/drawingml/2006/main">
               <a:ext uri="{FF2B5EF4-FFF2-40B4-BE49-F238E27FC236}">
-                <a16:creationId xmlns:a16="http://schemas.microsoft.com/office/drawing/2014/main" id="{BBB86E68-240A-4D36-903B-6EA7684430B8}"/>
+                <a16:creationId xmlns:a16="http://schemas.microsoft.com/office/drawing/2014/main" id="{F3F480A2-B63A-4A6A-98AB-AA02E978A84F}"/>
               </a:ext>
             </a:extLst>
           </p:cNvPr>
@@ -2042,7 +2042,7 @@
           <p:cNvPr id="10" name="box-10">
             <a:extLst xmlns:a="http://schemas.openxmlformats.org/drawingml/2006/main">
               <a:ext uri="{FF2B5EF4-FFF2-40B4-BE49-F238E27FC236}">
-                <a16:creationId xmlns:a16="http://schemas.microsoft.com/office/drawing/2014/main" id="{AC528F4E-A01C-42AF-BF51-5EC33242F7E2}"/>
+                <a16:creationId xmlns:a16="http://schemas.microsoft.com/office/drawing/2014/main" id="{9F069B1B-7148-4A2A-B932-68652FAC8513}"/>
               </a:ext>
             </a:extLst>
           </p:cNvPr>
@@ -2079,7 +2079,7 @@
           <p:nvPr/>
         </p:nvPicPr>
         <p:blipFill>
-          <a:blip xmlns:r="http://schemas.openxmlformats.org/officeDocument/2006/relationships" xmlns:a="http://schemas.openxmlformats.org/drawingml/2006/main" r:embed="R908af25a4a6840ef"/>
+          <a:blip xmlns:r="http://schemas.openxmlformats.org/officeDocument/2006/relationships" xmlns:a="http://schemas.openxmlformats.org/drawingml/2006/main" r:embed="R5bd7f3fd10754239"/>
           <a:stretch xmlns:a="http://schemas.openxmlformats.org/drawingml/2006/main"/>
         </p:blipFill>
         <p:spPr>
@@ -2097,7 +2097,7 @@
           <p:cNvPr id="12" name="text-11">
             <a:extLst xmlns:a="http://schemas.openxmlformats.org/drawingml/2006/main">
               <a:ext uri="{FF2B5EF4-FFF2-40B4-BE49-F238E27FC236}">
-                <a16:creationId xmlns:a16="http://schemas.microsoft.com/office/drawing/2014/main" id="{A7FD873E-C7CC-465B-9B83-69E3DB059C61}"/>
+                <a16:creationId xmlns:a16="http://schemas.microsoft.com/office/drawing/2014/main" id="{8EACBFB9-EF57-443B-9EDC-FF3E5F1886CB}"/>
               </a:ext>
             </a:extLst>
           </p:cNvPr>
@@ -2151,7 +2151,7 @@
     </p:spTree>
     <p:extLst>
       <p:ext uri="{BB962C8B-B14F-4D97-AF65-F5344CB8AC3E}">
-        <p14:creationId xmlns:p14="http://schemas.microsoft.com/office/powerpoint/2010/main" val="596872282"/>
+        <p14:creationId xmlns:p14="http://schemas.microsoft.com/office/powerpoint/2010/main" val="431353230"/>
       </p:ext>
     </p:extLst>
   </p:cSld>
@@ -2182,7 +2182,7 @@
           <p:cNvPr id="14" name="box-12">
             <a:extLst xmlns:a="http://schemas.openxmlformats.org/drawingml/2006/main">
               <a:ext uri="{FF2B5EF4-FFF2-40B4-BE49-F238E27FC236}">
-                <a16:creationId xmlns:a16="http://schemas.microsoft.com/office/drawing/2014/main" id="{8F62D3B4-19A0-4BD7-B956-45BD498488AF}"/>
+                <a16:creationId xmlns:a16="http://schemas.microsoft.com/office/drawing/2014/main" id="{2BF97F7D-DD76-40E5-B670-D03A61C6F533}"/>
               </a:ext>
             </a:extLst>
           </p:cNvPr>
@@ -2215,7 +2215,7 @@
           <p:cNvPr id="2" name="text-13">
             <a:extLst xmlns:a="http://schemas.openxmlformats.org/drawingml/2006/main">
               <a:ext uri="{FF2B5EF4-FFF2-40B4-BE49-F238E27FC236}">
-                <a16:creationId xmlns:a16="http://schemas.microsoft.com/office/drawing/2014/main" id="{EE12E12A-6723-493D-8DFA-3BF24045E547}"/>
+                <a16:creationId xmlns:a16="http://schemas.microsoft.com/office/drawing/2014/main" id="{D2DFCBE1-DABE-4BB6-96C4-34B23B49E778}"/>
               </a:ext>
             </a:extLst>
           </p:cNvPr>
@@ -2271,7 +2271,7 @@
           <p:cNvPr id="3" name="text-14">
             <a:extLst xmlns:a="http://schemas.openxmlformats.org/drawingml/2006/main">
               <a:ext uri="{FF2B5EF4-FFF2-40B4-BE49-F238E27FC236}">
-                <a16:creationId xmlns:a16="http://schemas.microsoft.com/office/drawing/2014/main" id="{4E0A44FC-6AEB-46C4-B904-594FC9FB59F4}"/>
+                <a16:creationId xmlns:a16="http://schemas.microsoft.com/office/drawing/2014/main" id="{C10040D0-63D6-4019-95D8-D8B8E3ABC4F3}"/>
               </a:ext>
             </a:extLst>
           </p:cNvPr>
@@ -2327,7 +2327,7 @@
           <p:cNvPr id="4" name="text-15">
             <a:extLst xmlns:a="http://schemas.openxmlformats.org/drawingml/2006/main">
               <a:ext uri="{FF2B5EF4-FFF2-40B4-BE49-F238E27FC236}">
-                <a16:creationId xmlns:a16="http://schemas.microsoft.com/office/drawing/2014/main" id="{3152F943-7428-440C-8301-8748BE221DAF}"/>
+                <a16:creationId xmlns:a16="http://schemas.microsoft.com/office/drawing/2014/main" id="{DAF56BD5-39E6-4B10-B214-99E0D9F752B2}"/>
               </a:ext>
             </a:extLst>
           </p:cNvPr>
@@ -2383,7 +2383,7 @@
           <p:cNvPr id="5" name="text-16">
             <a:extLst xmlns:a="http://schemas.openxmlformats.org/drawingml/2006/main">
               <a:ext uri="{FF2B5EF4-FFF2-40B4-BE49-F238E27FC236}">
-                <a16:creationId xmlns:a16="http://schemas.microsoft.com/office/drawing/2014/main" id="{36F9F73A-23DD-4EBE-9F2D-F2C8A588BA6D}"/>
+                <a16:creationId xmlns:a16="http://schemas.microsoft.com/office/drawing/2014/main" id="{B0BFC62E-038D-441C-AC4F-0CF8F542909E}"/>
               </a:ext>
             </a:extLst>
           </p:cNvPr>
@@ -2439,7 +2439,7 @@
           <p:cNvPr id="6" name="text-17">
             <a:extLst xmlns:a="http://schemas.openxmlformats.org/drawingml/2006/main">
               <a:ext uri="{FF2B5EF4-FFF2-40B4-BE49-F238E27FC236}">
-                <a16:creationId xmlns:a16="http://schemas.microsoft.com/office/drawing/2014/main" id="{6FE164FC-EB88-4107-9653-B3696323DE14}"/>
+                <a16:creationId xmlns:a16="http://schemas.microsoft.com/office/drawing/2014/main" id="{D22674FD-7962-4247-A9F7-1751CA281738}"/>
               </a:ext>
             </a:extLst>
           </p:cNvPr>
@@ -2495,7 +2495,7 @@
           <p:cNvPr id="7" name="box-18">
             <a:extLst xmlns:a="http://schemas.openxmlformats.org/drawingml/2006/main">
               <a:ext uri="{FF2B5EF4-FFF2-40B4-BE49-F238E27FC236}">
-                <a16:creationId xmlns:a16="http://schemas.microsoft.com/office/drawing/2014/main" id="{BBAA5C99-C839-4B24-BA9C-2B6BF460CC5B}"/>
+                <a16:creationId xmlns:a16="http://schemas.microsoft.com/office/drawing/2014/main" id="{B405E268-BB44-4CF0-A926-56176A7D0F3B}"/>
               </a:ext>
             </a:extLst>
           </p:cNvPr>
@@ -2528,7 +2528,7 @@
           <p:cNvPr id="8" name="text-19">
             <a:extLst xmlns:a="http://schemas.openxmlformats.org/drawingml/2006/main">
               <a:ext uri="{FF2B5EF4-FFF2-40B4-BE49-F238E27FC236}">
-                <a16:creationId xmlns:a16="http://schemas.microsoft.com/office/drawing/2014/main" id="{A949F6EE-1794-46EF-B194-E94371D58923}"/>
+                <a16:creationId xmlns:a16="http://schemas.microsoft.com/office/drawing/2014/main" id="{FAABA3D5-727B-44F5-8164-B3136E7A5F55}"/>
               </a:ext>
             </a:extLst>
           </p:cNvPr>
@@ -2584,7 +2584,7 @@
           <p:cNvPr id="9" name="text-20">
             <a:extLst xmlns:a="http://schemas.openxmlformats.org/drawingml/2006/main">
               <a:ext uri="{FF2B5EF4-FFF2-40B4-BE49-F238E27FC236}">
-                <a16:creationId xmlns:a16="http://schemas.microsoft.com/office/drawing/2014/main" id="{B41CFA2D-A119-410C-8190-9567E433D3B0}"/>
+                <a16:creationId xmlns:a16="http://schemas.microsoft.com/office/drawing/2014/main" id="{85AB5257-3E79-4706-9552-07900E4AE81F}"/>
               </a:ext>
             </a:extLst>
           </p:cNvPr>
@@ -2640,7 +2640,7 @@
           <p:cNvPr id="10" name="text-21">
             <a:extLst xmlns:a="http://schemas.openxmlformats.org/drawingml/2006/main">
               <a:ext uri="{FF2B5EF4-FFF2-40B4-BE49-F238E27FC236}">
-                <a16:creationId xmlns:a16="http://schemas.microsoft.com/office/drawing/2014/main" id="{4DA67DD5-62C1-4B4C-BA36-00E266DBAB9A}"/>
+                <a16:creationId xmlns:a16="http://schemas.microsoft.com/office/drawing/2014/main" id="{B7652D7A-A6A7-46CC-952E-0892F2E58E42}"/>
               </a:ext>
             </a:extLst>
           </p:cNvPr>
@@ -2696,7 +2696,7 @@
           <p:cNvPr id="11" name="box-22">
             <a:extLst xmlns:a="http://schemas.openxmlformats.org/drawingml/2006/main">
               <a:ext uri="{FF2B5EF4-FFF2-40B4-BE49-F238E27FC236}">
-                <a16:creationId xmlns:a16="http://schemas.microsoft.com/office/drawing/2014/main" id="{B5DA10AF-23F3-4C66-93A1-69748DBB34F6}"/>
+                <a16:creationId xmlns:a16="http://schemas.microsoft.com/office/drawing/2014/main" id="{E6292307-0832-4887-BFFB-26867ED30A47}"/>
               </a:ext>
             </a:extLst>
           </p:cNvPr>
@@ -2733,7 +2733,7 @@
           <p:nvPr/>
         </p:nvPicPr>
         <p:blipFill>
-          <a:blip xmlns:r="http://schemas.openxmlformats.org/officeDocument/2006/relationships" xmlns:a="http://schemas.openxmlformats.org/drawingml/2006/main" r:embed="Rd5cefa8cbcf14da2"/>
+          <a:blip xmlns:r="http://schemas.openxmlformats.org/officeDocument/2006/relationships" xmlns:a="http://schemas.openxmlformats.org/drawingml/2006/main" r:embed="R80f9d0006ab94b0c"/>
           <a:stretch xmlns:a="http://schemas.openxmlformats.org/drawingml/2006/main"/>
         </p:blipFill>
         <p:spPr>
@@ -2751,7 +2751,7 @@
           <p:cNvPr id="13" name="text-23">
             <a:extLst xmlns:a="http://schemas.openxmlformats.org/drawingml/2006/main">
               <a:ext uri="{FF2B5EF4-FFF2-40B4-BE49-F238E27FC236}">
-                <a16:creationId xmlns:a16="http://schemas.microsoft.com/office/drawing/2014/main" id="{5E9C3962-EEAD-4EE7-A790-78DA06BE945F}"/>
+                <a16:creationId xmlns:a16="http://schemas.microsoft.com/office/drawing/2014/main" id="{E9B2F5C0-EA61-45F3-BB75-7CA6DFD451F5}"/>
               </a:ext>
             </a:extLst>
           </p:cNvPr>
@@ -2805,7 +2805,7 @@
     </p:spTree>
     <p:extLst>
       <p:ext uri="{BB962C8B-B14F-4D97-AF65-F5344CB8AC3E}">
-        <p14:creationId xmlns:p14="http://schemas.microsoft.com/office/powerpoint/2010/main" val="594986275"/>
+        <p14:creationId xmlns:p14="http://schemas.microsoft.com/office/powerpoint/2010/main" val="1377405219"/>
       </p:ext>
     </p:extLst>
   </p:cSld>
@@ -2836,7 +2836,7 @@
           <p:cNvPr id="19" name="box-24">
             <a:extLst xmlns:a="http://schemas.openxmlformats.org/drawingml/2006/main">
               <a:ext uri="{FF2B5EF4-FFF2-40B4-BE49-F238E27FC236}">
-                <a16:creationId xmlns:a16="http://schemas.microsoft.com/office/drawing/2014/main" id="{92A34BA2-05AF-4406-AFE7-A1CF9759D3CE}"/>
+                <a16:creationId xmlns:a16="http://schemas.microsoft.com/office/drawing/2014/main" id="{148282E3-FE6A-4B65-8C8B-08BF8CB4DD6B}"/>
               </a:ext>
             </a:extLst>
           </p:cNvPr>
@@ -2869,7 +2869,7 @@
           <p:cNvPr id="2" name="text-25">
             <a:extLst xmlns:a="http://schemas.openxmlformats.org/drawingml/2006/main">
               <a:ext uri="{FF2B5EF4-FFF2-40B4-BE49-F238E27FC236}">
-                <a16:creationId xmlns:a16="http://schemas.microsoft.com/office/drawing/2014/main" id="{94B9B308-B488-4FC7-B2C9-7D5162A86BB0}"/>
+                <a16:creationId xmlns:a16="http://schemas.microsoft.com/office/drawing/2014/main" id="{988458DD-0EF9-4D6D-BAF7-F39213919FC2}"/>
               </a:ext>
             </a:extLst>
           </p:cNvPr>
@@ -2925,7 +2925,7 @@
           <p:cNvPr id="3" name="text-26">
             <a:extLst xmlns:a="http://schemas.openxmlformats.org/drawingml/2006/main">
               <a:ext uri="{FF2B5EF4-FFF2-40B4-BE49-F238E27FC236}">
-                <a16:creationId xmlns:a16="http://schemas.microsoft.com/office/drawing/2014/main" id="{EC84F5A9-52A9-44EB-BB0D-6156BF47D6A5}"/>
+                <a16:creationId xmlns:a16="http://schemas.microsoft.com/office/drawing/2014/main" id="{44C0A7F7-8D82-49F7-B5F8-F4455CDAE82C}"/>
               </a:ext>
             </a:extLst>
           </p:cNvPr>
@@ -2981,7 +2981,7 @@
           <p:cNvPr id="4" name="text-27">
             <a:extLst xmlns:a="http://schemas.openxmlformats.org/drawingml/2006/main">
               <a:ext uri="{FF2B5EF4-FFF2-40B4-BE49-F238E27FC236}">
-                <a16:creationId xmlns:a16="http://schemas.microsoft.com/office/drawing/2014/main" id="{E7D5C448-EA7D-4433-8501-6977A4C85CD3}"/>
+                <a16:creationId xmlns:a16="http://schemas.microsoft.com/office/drawing/2014/main" id="{76267574-6310-4C32-8109-72D7D8A80525}"/>
               </a:ext>
             </a:extLst>
           </p:cNvPr>
@@ -3037,7 +3037,7 @@
           <p:cNvPr id="5" name="text-28">
             <a:extLst xmlns:a="http://schemas.openxmlformats.org/drawingml/2006/main">
               <a:ext uri="{FF2B5EF4-FFF2-40B4-BE49-F238E27FC236}">
-                <a16:creationId xmlns:a16="http://schemas.microsoft.com/office/drawing/2014/main" id="{D851E3E4-8D2B-4C3C-B944-E3EB0C9BE3EC}"/>
+                <a16:creationId xmlns:a16="http://schemas.microsoft.com/office/drawing/2014/main" id="{58A3FDFB-360E-4270-8123-2B4CC891AEC3}"/>
               </a:ext>
             </a:extLst>
           </p:cNvPr>
@@ -3093,7 +3093,7 @@
           <p:cNvPr id="6" name="text-29">
             <a:extLst xmlns:a="http://schemas.openxmlformats.org/drawingml/2006/main">
               <a:ext uri="{FF2B5EF4-FFF2-40B4-BE49-F238E27FC236}">
-                <a16:creationId xmlns:a16="http://schemas.microsoft.com/office/drawing/2014/main" id="{F60C1993-8D31-4C34-ABDA-463D5BFF2E05}"/>
+                <a16:creationId xmlns:a16="http://schemas.microsoft.com/office/drawing/2014/main" id="{D0DA7B17-63A0-47DF-931D-84E242926A77}"/>
               </a:ext>
             </a:extLst>
           </p:cNvPr>
@@ -3149,7 +3149,7 @@
           <p:cNvPr id="7" name="box-30">
             <a:extLst xmlns:a="http://schemas.openxmlformats.org/drawingml/2006/main">
               <a:ext uri="{FF2B5EF4-FFF2-40B4-BE49-F238E27FC236}">
-                <a16:creationId xmlns:a16="http://schemas.microsoft.com/office/drawing/2014/main" id="{872CA90A-72D3-412E-9524-581AED41D333}"/>
+                <a16:creationId xmlns:a16="http://schemas.microsoft.com/office/drawing/2014/main" id="{8A16FB5D-CD82-4FBB-B5ED-91B056B7B05D}"/>
               </a:ext>
             </a:extLst>
           </p:cNvPr>
@@ -3182,7 +3182,7 @@
           <p:cNvPr id="8" name="text-31">
             <a:extLst xmlns:a="http://schemas.openxmlformats.org/drawingml/2006/main">
               <a:ext uri="{FF2B5EF4-FFF2-40B4-BE49-F238E27FC236}">
-                <a16:creationId xmlns:a16="http://schemas.microsoft.com/office/drawing/2014/main" id="{10E1E981-6D60-4881-8BE0-8F301BA1DC35}"/>
+                <a16:creationId xmlns:a16="http://schemas.microsoft.com/office/drawing/2014/main" id="{6C3042D8-6B96-47AD-81B6-9D1A0016C729}"/>
               </a:ext>
             </a:extLst>
           </p:cNvPr>
@@ -3238,7 +3238,7 @@
           <p:cNvPr id="9" name="text-32">
             <a:extLst xmlns:a="http://schemas.openxmlformats.org/drawingml/2006/main">
               <a:ext uri="{FF2B5EF4-FFF2-40B4-BE49-F238E27FC236}">
-                <a16:creationId xmlns:a16="http://schemas.microsoft.com/office/drawing/2014/main" id="{88E9C127-BFBB-4858-B0A9-4B19F7C6ACA8}"/>
+                <a16:creationId xmlns:a16="http://schemas.microsoft.com/office/drawing/2014/main" id="{EF4B57A6-A186-4493-85D4-F98778E63857}"/>
               </a:ext>
             </a:extLst>
           </p:cNvPr>
@@ -3294,7 +3294,7 @@
           <p:cNvPr id="10" name="text-33">
             <a:extLst xmlns:a="http://schemas.openxmlformats.org/drawingml/2006/main">
               <a:ext uri="{FF2B5EF4-FFF2-40B4-BE49-F238E27FC236}">
-                <a16:creationId xmlns:a16="http://schemas.microsoft.com/office/drawing/2014/main" id="{42241732-D5D6-4EB1-AB7C-2293C41B3348}"/>
+                <a16:creationId xmlns:a16="http://schemas.microsoft.com/office/drawing/2014/main" id="{67F7879D-EED0-47E1-8129-3FEE2BFCF80D}"/>
               </a:ext>
             </a:extLst>
           </p:cNvPr>
@@ -3350,7 +3350,7 @@
           <p:cNvPr id="11" name="box-34">
             <a:extLst xmlns:a="http://schemas.openxmlformats.org/drawingml/2006/main">
               <a:ext uri="{FF2B5EF4-FFF2-40B4-BE49-F238E27FC236}">
-                <a16:creationId xmlns:a16="http://schemas.microsoft.com/office/drawing/2014/main" id="{A95F438F-AB83-4483-9C0C-E4E5C13BD05C}"/>
+                <a16:creationId xmlns:a16="http://schemas.microsoft.com/office/drawing/2014/main" id="{A24CC4F6-4361-4ADC-A305-895BB22F2EC2}"/>
               </a:ext>
             </a:extLst>
           </p:cNvPr>
@@ -3383,7 +3383,7 @@
           <p:cNvPr id="12" name="text-35">
             <a:extLst xmlns:a="http://schemas.openxmlformats.org/drawingml/2006/main">
               <a:ext uri="{FF2B5EF4-FFF2-40B4-BE49-F238E27FC236}">
-                <a16:creationId xmlns:a16="http://schemas.microsoft.com/office/drawing/2014/main" id="{0CFD4A77-47B1-4655-80AC-7EAF0161448B}"/>
+                <a16:creationId xmlns:a16="http://schemas.microsoft.com/office/drawing/2014/main" id="{463253A9-B555-4A01-9D62-E94E72FA1E3B}"/>
               </a:ext>
             </a:extLst>
           </p:cNvPr>
@@ -3439,7 +3439,7 @@
           <p:cNvPr id="13" name="text-36">
             <a:extLst xmlns:a="http://schemas.openxmlformats.org/drawingml/2006/main">
               <a:ext uri="{FF2B5EF4-FFF2-40B4-BE49-F238E27FC236}">
-                <a16:creationId xmlns:a16="http://schemas.microsoft.com/office/drawing/2014/main" id="{1CDA6CAA-F3E7-4F3E-B16A-E3F6570025B1}"/>
+                <a16:creationId xmlns:a16="http://schemas.microsoft.com/office/drawing/2014/main" id="{71C9124C-54D3-44C8-81F4-09CD371A639A}"/>
               </a:ext>
             </a:extLst>
           </p:cNvPr>
@@ -3495,7 +3495,7 @@
           <p:cNvPr id="14" name="text-37">
             <a:extLst xmlns:a="http://schemas.openxmlformats.org/drawingml/2006/main">
               <a:ext uri="{FF2B5EF4-FFF2-40B4-BE49-F238E27FC236}">
-                <a16:creationId xmlns:a16="http://schemas.microsoft.com/office/drawing/2014/main" id="{5D3B49BA-4446-4DDF-8F3A-85B871FEC381}"/>
+                <a16:creationId xmlns:a16="http://schemas.microsoft.com/office/drawing/2014/main" id="{CB6997E2-AFC6-470A-8D60-85C630BE7E7F}"/>
               </a:ext>
             </a:extLst>
           </p:cNvPr>
@@ -3551,7 +3551,7 @@
           <p:cNvPr id="15" name="box-38">
             <a:extLst xmlns:a="http://schemas.openxmlformats.org/drawingml/2006/main">
               <a:ext uri="{FF2B5EF4-FFF2-40B4-BE49-F238E27FC236}">
-                <a16:creationId xmlns:a16="http://schemas.microsoft.com/office/drawing/2014/main" id="{61EC830C-DC89-488F-97CF-246C16FA5FFD}"/>
+                <a16:creationId xmlns:a16="http://schemas.microsoft.com/office/drawing/2014/main" id="{4004C836-4D2D-43C6-BC4D-55AD1481213E}"/>
               </a:ext>
             </a:extLst>
           </p:cNvPr>
@@ -3584,7 +3584,7 @@
           <p:cNvPr id="16" name="text-39">
             <a:extLst xmlns:a="http://schemas.openxmlformats.org/drawingml/2006/main">
               <a:ext uri="{FF2B5EF4-FFF2-40B4-BE49-F238E27FC236}">
-                <a16:creationId xmlns:a16="http://schemas.microsoft.com/office/drawing/2014/main" id="{998F8535-9117-4711-81E5-A3945CB8EF08}"/>
+                <a16:creationId xmlns:a16="http://schemas.microsoft.com/office/drawing/2014/main" id="{CAD9820A-EEE5-481E-A778-BDF99A49334D}"/>
               </a:ext>
             </a:extLst>
           </p:cNvPr>
@@ -3640,7 +3640,7 @@
           <p:cNvPr id="17" name="text-40">
             <a:extLst xmlns:a="http://schemas.openxmlformats.org/drawingml/2006/main">
               <a:ext uri="{FF2B5EF4-FFF2-40B4-BE49-F238E27FC236}">
-                <a16:creationId xmlns:a16="http://schemas.microsoft.com/office/drawing/2014/main" id="{3A3A2EAA-F046-4E4C-AFE3-296AE88C3951}"/>
+                <a16:creationId xmlns:a16="http://schemas.microsoft.com/office/drawing/2014/main" id="{4FD07DE3-5941-4715-98BB-BE9E18C17069}"/>
               </a:ext>
             </a:extLst>
           </p:cNvPr>
@@ -3696,7 +3696,7 @@
           <p:cNvPr id="18" name="text-41">
             <a:extLst xmlns:a="http://schemas.openxmlformats.org/drawingml/2006/main">
               <a:ext uri="{FF2B5EF4-FFF2-40B4-BE49-F238E27FC236}">
-                <a16:creationId xmlns:a16="http://schemas.microsoft.com/office/drawing/2014/main" id="{A5F87B11-377E-4EF5-9602-82ABDF57AE31}"/>
+                <a16:creationId xmlns:a16="http://schemas.microsoft.com/office/drawing/2014/main" id="{E7E0165F-7B4A-4748-AC8F-3C90E3EF2D0D}"/>
               </a:ext>
             </a:extLst>
           </p:cNvPr>
@@ -3750,7 +3750,7 @@
     </p:spTree>
     <p:extLst>
       <p:ext uri="{BB962C8B-B14F-4D97-AF65-F5344CB8AC3E}">
-        <p14:creationId xmlns:p14="http://schemas.microsoft.com/office/powerpoint/2010/main" val="129713678"/>
+        <p14:creationId xmlns:p14="http://schemas.microsoft.com/office/powerpoint/2010/main" val="1587611945"/>
       </p:ext>
     </p:extLst>
   </p:cSld>
@@ -3781,7 +3781,7 @@
           <p:cNvPr id="18" name="box-42">
             <a:extLst xmlns:a="http://schemas.openxmlformats.org/drawingml/2006/main">
               <a:ext uri="{FF2B5EF4-FFF2-40B4-BE49-F238E27FC236}">
-                <a16:creationId xmlns:a16="http://schemas.microsoft.com/office/drawing/2014/main" id="{97C55A65-1C79-4059-962C-02D21191DB79}"/>
+                <a16:creationId xmlns:a16="http://schemas.microsoft.com/office/drawing/2014/main" id="{ADDCDB2E-812A-45B1-A457-42DA256D6DC7}"/>
               </a:ext>
             </a:extLst>
           </p:cNvPr>
@@ -3814,7 +3814,7 @@
           <p:cNvPr id="2" name="text-43">
             <a:extLst xmlns:a="http://schemas.openxmlformats.org/drawingml/2006/main">
               <a:ext uri="{FF2B5EF4-FFF2-40B4-BE49-F238E27FC236}">
-                <a16:creationId xmlns:a16="http://schemas.microsoft.com/office/drawing/2014/main" id="{3CA18004-B494-4C76-B0F7-00F3127F3CD5}"/>
+                <a16:creationId xmlns:a16="http://schemas.microsoft.com/office/drawing/2014/main" id="{1A904967-3E1A-4371-BA2B-612845D0859C}"/>
               </a:ext>
             </a:extLst>
           </p:cNvPr>
@@ -3870,7 +3870,7 @@
           <p:cNvPr id="3" name="text-44">
             <a:extLst xmlns:a="http://schemas.openxmlformats.org/drawingml/2006/main">
               <a:ext uri="{FF2B5EF4-FFF2-40B4-BE49-F238E27FC236}">
-                <a16:creationId xmlns:a16="http://schemas.microsoft.com/office/drawing/2014/main" id="{82D30C58-BE95-4055-8C29-6D6B02724E90}"/>
+                <a16:creationId xmlns:a16="http://schemas.microsoft.com/office/drawing/2014/main" id="{565FAEF2-DAE6-475C-868C-447E265E9132}"/>
               </a:ext>
             </a:extLst>
           </p:cNvPr>
@@ -3926,7 +3926,7 @@
           <p:cNvPr id="4" name="text-45">
             <a:extLst xmlns:a="http://schemas.openxmlformats.org/drawingml/2006/main">
               <a:ext uri="{FF2B5EF4-FFF2-40B4-BE49-F238E27FC236}">
-                <a16:creationId xmlns:a16="http://schemas.microsoft.com/office/drawing/2014/main" id="{348C1204-FF34-45EA-9A3E-242512EED031}"/>
+                <a16:creationId xmlns:a16="http://schemas.microsoft.com/office/drawing/2014/main" id="{CD360BCB-5164-44A4-A4BD-A959E84940B4}"/>
               </a:ext>
             </a:extLst>
           </p:cNvPr>
@@ -3982,7 +3982,7 @@
           <p:cNvPr id="5" name="text-46">
             <a:extLst xmlns:a="http://schemas.openxmlformats.org/drawingml/2006/main">
               <a:ext uri="{FF2B5EF4-FFF2-40B4-BE49-F238E27FC236}">
-                <a16:creationId xmlns:a16="http://schemas.microsoft.com/office/drawing/2014/main" id="{05D79A9E-4BD7-45FE-A1ED-98BD91878563}"/>
+                <a16:creationId xmlns:a16="http://schemas.microsoft.com/office/drawing/2014/main" id="{2FC0B685-A5E8-46AC-B62F-0C645170F137}"/>
               </a:ext>
             </a:extLst>
           </p:cNvPr>
@@ -4038,7 +4038,7 @@
           <p:cNvPr id="6" name="box-47">
             <a:extLst xmlns:a="http://schemas.openxmlformats.org/drawingml/2006/main">
               <a:ext uri="{FF2B5EF4-FFF2-40B4-BE49-F238E27FC236}">
-                <a16:creationId xmlns:a16="http://schemas.microsoft.com/office/drawing/2014/main" id="{1A0DD97D-DE24-42BE-8AE9-5CFF7A720814}"/>
+                <a16:creationId xmlns:a16="http://schemas.microsoft.com/office/drawing/2014/main" id="{EBE1CBBF-08B6-4AAA-91A7-75CF5372E38C}"/>
               </a:ext>
             </a:extLst>
           </p:cNvPr>
@@ -4071,7 +4071,7 @@
           <p:cNvPr id="7" name="text-48">
             <a:extLst xmlns:a="http://schemas.openxmlformats.org/drawingml/2006/main">
               <a:ext uri="{FF2B5EF4-FFF2-40B4-BE49-F238E27FC236}">
-                <a16:creationId xmlns:a16="http://schemas.microsoft.com/office/drawing/2014/main" id="{0D3F467A-7B55-4A08-93BC-E4393579A1B8}"/>
+                <a16:creationId xmlns:a16="http://schemas.microsoft.com/office/drawing/2014/main" id="{8EA80A6D-5DEE-4D53-AB21-18731CA66FD4}"/>
               </a:ext>
             </a:extLst>
           </p:cNvPr>
@@ -4127,7 +4127,7 @@
           <p:cNvPr id="8" name="text-49">
             <a:extLst xmlns:a="http://schemas.openxmlformats.org/drawingml/2006/main">
               <a:ext uri="{FF2B5EF4-FFF2-40B4-BE49-F238E27FC236}">
-                <a16:creationId xmlns:a16="http://schemas.microsoft.com/office/drawing/2014/main" id="{DB02D4B7-AD1D-480A-B0C2-886223FD4E0C}"/>
+                <a16:creationId xmlns:a16="http://schemas.microsoft.com/office/drawing/2014/main" id="{82F204C9-E6B3-4892-93A6-EA7C98AA7492}"/>
               </a:ext>
             </a:extLst>
           </p:cNvPr>
@@ -4183,7 +4183,7 @@
           <p:cNvPr id="9" name="box-50">
             <a:extLst xmlns:a="http://schemas.openxmlformats.org/drawingml/2006/main">
               <a:ext uri="{FF2B5EF4-FFF2-40B4-BE49-F238E27FC236}">
-                <a16:creationId xmlns:a16="http://schemas.microsoft.com/office/drawing/2014/main" id="{F67D3A52-A3C3-4B49-9B24-3041D0D1BED3}"/>
+                <a16:creationId xmlns:a16="http://schemas.microsoft.com/office/drawing/2014/main" id="{D793E842-CE00-49E4-B12B-1A2E920557EB}"/>
               </a:ext>
             </a:extLst>
           </p:cNvPr>
@@ -4216,7 +4216,7 @@
           <p:cNvPr id="10" name="text-51">
             <a:extLst xmlns:a="http://schemas.openxmlformats.org/drawingml/2006/main">
               <a:ext uri="{FF2B5EF4-FFF2-40B4-BE49-F238E27FC236}">
-                <a16:creationId xmlns:a16="http://schemas.microsoft.com/office/drawing/2014/main" id="{034868B8-543B-4CF7-AF7A-0A3B2267F0C6}"/>
+                <a16:creationId xmlns:a16="http://schemas.microsoft.com/office/drawing/2014/main" id="{E675869F-54DF-4C4C-B41A-1B9B6F2CDD59}"/>
               </a:ext>
             </a:extLst>
           </p:cNvPr>
@@ -4272,7 +4272,7 @@
           <p:cNvPr id="11" name="text-52">
             <a:extLst xmlns:a="http://schemas.openxmlformats.org/drawingml/2006/main">
               <a:ext uri="{FF2B5EF4-FFF2-40B4-BE49-F238E27FC236}">
-                <a16:creationId xmlns:a16="http://schemas.microsoft.com/office/drawing/2014/main" id="{C6CF868F-CE9D-43C3-8A24-97F162B7CD7F}"/>
+                <a16:creationId xmlns:a16="http://schemas.microsoft.com/office/drawing/2014/main" id="{9032FF64-F3F9-403C-8770-E89B4FC73C45}"/>
               </a:ext>
             </a:extLst>
           </p:cNvPr>
@@ -4328,7 +4328,7 @@
           <p:cNvPr id="12" name="box-53">
             <a:extLst xmlns:a="http://schemas.openxmlformats.org/drawingml/2006/main">
               <a:ext uri="{FF2B5EF4-FFF2-40B4-BE49-F238E27FC236}">
-                <a16:creationId xmlns:a16="http://schemas.microsoft.com/office/drawing/2014/main" id="{0BA21ABF-B321-44BC-AE19-56FF8A089CAD}"/>
+                <a16:creationId xmlns:a16="http://schemas.microsoft.com/office/drawing/2014/main" id="{255C5798-8AF9-471E-9F0C-F439F6020A7C}"/>
               </a:ext>
             </a:extLst>
           </p:cNvPr>
@@ -4361,7 +4361,7 @@
           <p:cNvPr id="13" name="text-54">
             <a:extLst xmlns:a="http://schemas.openxmlformats.org/drawingml/2006/main">
               <a:ext uri="{FF2B5EF4-FFF2-40B4-BE49-F238E27FC236}">
-                <a16:creationId xmlns:a16="http://schemas.microsoft.com/office/drawing/2014/main" id="{BE699737-8986-4D3D-BE7B-1848D55FE462}"/>
+                <a16:creationId xmlns:a16="http://schemas.microsoft.com/office/drawing/2014/main" id="{69A46D39-179F-48AD-B12A-0621EFAF2DE4}"/>
               </a:ext>
             </a:extLst>
           </p:cNvPr>
@@ -4417,7 +4417,7 @@
           <p:cNvPr id="14" name="text-55">
             <a:extLst xmlns:a="http://schemas.openxmlformats.org/drawingml/2006/main">
               <a:ext uri="{FF2B5EF4-FFF2-40B4-BE49-F238E27FC236}">
-                <a16:creationId xmlns:a16="http://schemas.microsoft.com/office/drawing/2014/main" id="{09F8DF43-0D19-484D-9E9B-956155A5C655}"/>
+                <a16:creationId xmlns:a16="http://schemas.microsoft.com/office/drawing/2014/main" id="{F4899B01-B5C9-4D43-A270-042C8A7E34E7}"/>
               </a:ext>
             </a:extLst>
           </p:cNvPr>
@@ -4473,7 +4473,7 @@
           <p:cNvPr id="15" name="box-56">
             <a:extLst xmlns:a="http://schemas.openxmlformats.org/drawingml/2006/main">
               <a:ext uri="{FF2B5EF4-FFF2-40B4-BE49-F238E27FC236}">
-                <a16:creationId xmlns:a16="http://schemas.microsoft.com/office/drawing/2014/main" id="{0E441D89-8F20-4297-87A6-78E782759395}"/>
+                <a16:creationId xmlns:a16="http://schemas.microsoft.com/office/drawing/2014/main" id="{294272C2-3142-4EDD-A728-0C5570DC8962}"/>
               </a:ext>
             </a:extLst>
           </p:cNvPr>
@@ -4506,7 +4506,7 @@
           <p:cNvPr id="16" name="text-57">
             <a:extLst xmlns:a="http://schemas.openxmlformats.org/drawingml/2006/main">
               <a:ext uri="{FF2B5EF4-FFF2-40B4-BE49-F238E27FC236}">
-                <a16:creationId xmlns:a16="http://schemas.microsoft.com/office/drawing/2014/main" id="{1FA414CB-5370-46E1-8F03-BF869738348F}"/>
+                <a16:creationId xmlns:a16="http://schemas.microsoft.com/office/drawing/2014/main" id="{81A2F3AB-2D51-41AE-91E7-8D67FE8EF8CD}"/>
               </a:ext>
             </a:extLst>
           </p:cNvPr>
@@ -4562,7 +4562,7 @@
           <p:cNvPr id="17" name="text-58">
             <a:extLst xmlns:a="http://schemas.openxmlformats.org/drawingml/2006/main">
               <a:ext uri="{FF2B5EF4-FFF2-40B4-BE49-F238E27FC236}">
-                <a16:creationId xmlns:a16="http://schemas.microsoft.com/office/drawing/2014/main" id="{226B3944-B5BE-4A4B-A596-3173E2C1D8B8}"/>
+                <a16:creationId xmlns:a16="http://schemas.microsoft.com/office/drawing/2014/main" id="{6B57BFB9-FE77-421F-A6BF-995446304695}"/>
               </a:ext>
             </a:extLst>
           </p:cNvPr>
@@ -4616,7 +4616,7 @@
     </p:spTree>
     <p:extLst>
       <p:ext uri="{BB962C8B-B14F-4D97-AF65-F5344CB8AC3E}">
-        <p14:creationId xmlns:p14="http://schemas.microsoft.com/office/powerpoint/2010/main" val="1262386143"/>
+        <p14:creationId xmlns:p14="http://schemas.microsoft.com/office/powerpoint/2010/main" val="1601620390"/>
       </p:ext>
     </p:extLst>
   </p:cSld>
@@ -4647,7 +4647,7 @@
           <p:cNvPr id="21" name="box-59">
             <a:extLst xmlns:a="http://schemas.openxmlformats.org/drawingml/2006/main">
               <a:ext uri="{FF2B5EF4-FFF2-40B4-BE49-F238E27FC236}">
-                <a16:creationId xmlns:a16="http://schemas.microsoft.com/office/drawing/2014/main" id="{CC8872A3-4FCA-4CE6-A9EB-2B9A2777E1B2}"/>
+                <a16:creationId xmlns:a16="http://schemas.microsoft.com/office/drawing/2014/main" id="{5519298A-0DC7-4A45-97D8-88D49983F079}"/>
               </a:ext>
             </a:extLst>
           </p:cNvPr>
@@ -4680,7 +4680,7 @@
           <p:cNvPr id="2" name="text-60">
             <a:extLst xmlns:a="http://schemas.openxmlformats.org/drawingml/2006/main">
               <a:ext uri="{FF2B5EF4-FFF2-40B4-BE49-F238E27FC236}">
-                <a16:creationId xmlns:a16="http://schemas.microsoft.com/office/drawing/2014/main" id="{07A915D4-B064-484F-83B3-51EB19AC66CB}"/>
+                <a16:creationId xmlns:a16="http://schemas.microsoft.com/office/drawing/2014/main" id="{A6B7036D-127F-4A52-8E7C-79187BB026F5}"/>
               </a:ext>
             </a:extLst>
           </p:cNvPr>
@@ -4736,7 +4736,7 @@
           <p:cNvPr id="3" name="text-61">
             <a:extLst xmlns:a="http://schemas.openxmlformats.org/drawingml/2006/main">
               <a:ext uri="{FF2B5EF4-FFF2-40B4-BE49-F238E27FC236}">
-                <a16:creationId xmlns:a16="http://schemas.microsoft.com/office/drawing/2014/main" id="{213FBECB-FE92-4731-B056-3A9EACC07477}"/>
+                <a16:creationId xmlns:a16="http://schemas.microsoft.com/office/drawing/2014/main" id="{690B924C-A5D4-45C0-A5A3-6FA835B279D9}"/>
               </a:ext>
             </a:extLst>
           </p:cNvPr>
@@ -4792,7 +4792,7 @@
           <p:cNvPr id="4" name="text-62">
             <a:extLst xmlns:a="http://schemas.openxmlformats.org/drawingml/2006/main">
               <a:ext uri="{FF2B5EF4-FFF2-40B4-BE49-F238E27FC236}">
-                <a16:creationId xmlns:a16="http://schemas.microsoft.com/office/drawing/2014/main" id="{9EE46C01-5EEE-4A58-B211-C2813C937C82}"/>
+                <a16:creationId xmlns:a16="http://schemas.microsoft.com/office/drawing/2014/main" id="{055EB272-107F-4B31-937D-3B8082B5997A}"/>
               </a:ext>
             </a:extLst>
           </p:cNvPr>
@@ -4848,7 +4848,7 @@
           <p:cNvPr id="5" name="text-63">
             <a:extLst xmlns:a="http://schemas.openxmlformats.org/drawingml/2006/main">
               <a:ext uri="{FF2B5EF4-FFF2-40B4-BE49-F238E27FC236}">
-                <a16:creationId xmlns:a16="http://schemas.microsoft.com/office/drawing/2014/main" id="{863C23BD-119E-4B57-837F-3253D2AFD7BF}"/>
+                <a16:creationId xmlns:a16="http://schemas.microsoft.com/office/drawing/2014/main" id="{999CCA0E-3FA6-42BB-91A7-9D847428CB58}"/>
               </a:ext>
             </a:extLst>
           </p:cNvPr>
@@ -4904,7 +4904,7 @@
           <p:cNvPr id="6" name="box-64">
             <a:extLst xmlns:a="http://schemas.openxmlformats.org/drawingml/2006/main">
               <a:ext uri="{FF2B5EF4-FFF2-40B4-BE49-F238E27FC236}">
-                <a16:creationId xmlns:a16="http://schemas.microsoft.com/office/drawing/2014/main" id="{2222045F-6A9C-4BF1-AEFF-FB96522A75C4}"/>
+                <a16:creationId xmlns:a16="http://schemas.microsoft.com/office/drawing/2014/main" id="{8F72A320-EBC7-4A9E-A492-48A96CFE0F13}"/>
               </a:ext>
             </a:extLst>
           </p:cNvPr>
@@ -4937,7 +4937,7 @@
           <p:cNvPr id="7" name="dot-65">
             <a:extLst xmlns:a="http://schemas.openxmlformats.org/drawingml/2006/main">
               <a:ext uri="{FF2B5EF4-FFF2-40B4-BE49-F238E27FC236}">
-                <a16:creationId xmlns:a16="http://schemas.microsoft.com/office/drawing/2014/main" id="{11BABC0B-8AEC-456D-BA83-38635110A94D}"/>
+                <a16:creationId xmlns:a16="http://schemas.microsoft.com/office/drawing/2014/main" id="{C52A4A40-A061-4081-BDF5-CB22DCEFDBE9}"/>
               </a:ext>
             </a:extLst>
           </p:cNvPr>
@@ -4968,7 +4968,7 @@
           <p:cNvPr id="8" name="text-66">
             <a:extLst xmlns:a="http://schemas.openxmlformats.org/drawingml/2006/main">
               <a:ext uri="{FF2B5EF4-FFF2-40B4-BE49-F238E27FC236}">
-                <a16:creationId xmlns:a16="http://schemas.microsoft.com/office/drawing/2014/main" id="{3FDDED3F-1593-4E3D-93AC-A2659275256B}"/>
+                <a16:creationId xmlns:a16="http://schemas.microsoft.com/office/drawing/2014/main" id="{513F109B-AADD-4A74-8270-90BC07C52451}"/>
               </a:ext>
             </a:extLst>
           </p:cNvPr>
@@ -5024,7 +5024,7 @@
           <p:cNvPr id="9" name="text-67">
             <a:extLst xmlns:a="http://schemas.openxmlformats.org/drawingml/2006/main">
               <a:ext uri="{FF2B5EF4-FFF2-40B4-BE49-F238E27FC236}">
-                <a16:creationId xmlns:a16="http://schemas.microsoft.com/office/drawing/2014/main" id="{2EBF4B4C-F216-45C7-AADB-9C422E3B2A45}"/>
+                <a16:creationId xmlns:a16="http://schemas.microsoft.com/office/drawing/2014/main" id="{C8863DE8-B8FD-4A45-A58F-0011DAE94274}"/>
               </a:ext>
             </a:extLst>
           </p:cNvPr>
@@ -5080,7 +5080,7 @@
           <p:cNvPr id="10" name="text-68">
             <a:extLst xmlns:a="http://schemas.openxmlformats.org/drawingml/2006/main">
               <a:ext uri="{FF2B5EF4-FFF2-40B4-BE49-F238E27FC236}">
-                <a16:creationId xmlns:a16="http://schemas.microsoft.com/office/drawing/2014/main" id="{657BC802-353C-4437-8D3F-92E7BA336C95}"/>
+                <a16:creationId xmlns:a16="http://schemas.microsoft.com/office/drawing/2014/main" id="{59A6B182-849D-45DC-BA72-B024EC0032A9}"/>
               </a:ext>
             </a:extLst>
           </p:cNvPr>
@@ -5136,7 +5136,7 @@
           <p:cNvPr id="11" name="dot-69">
             <a:extLst xmlns:a="http://schemas.openxmlformats.org/drawingml/2006/main">
               <a:ext uri="{FF2B5EF4-FFF2-40B4-BE49-F238E27FC236}">
-                <a16:creationId xmlns:a16="http://schemas.microsoft.com/office/drawing/2014/main" id="{0122CF94-D0F0-432F-86BE-12A78D44CE50}"/>
+                <a16:creationId xmlns:a16="http://schemas.microsoft.com/office/drawing/2014/main" id="{57F14011-C9F4-4F62-AC87-4798E4ABFE48}"/>
               </a:ext>
             </a:extLst>
           </p:cNvPr>
@@ -5167,7 +5167,7 @@
           <p:cNvPr id="12" name="text-70">
             <a:extLst xmlns:a="http://schemas.openxmlformats.org/drawingml/2006/main">
               <a:ext uri="{FF2B5EF4-FFF2-40B4-BE49-F238E27FC236}">
-                <a16:creationId xmlns:a16="http://schemas.microsoft.com/office/drawing/2014/main" id="{11CB8F24-9DE3-4619-9FAA-CBCFC79B2B74}"/>
+                <a16:creationId xmlns:a16="http://schemas.microsoft.com/office/drawing/2014/main" id="{25EB872C-DDFD-40DC-AC03-FAE5C4EA0E5E}"/>
               </a:ext>
             </a:extLst>
           </p:cNvPr>
@@ -5223,7 +5223,7 @@
           <p:cNvPr id="13" name="text-71">
             <a:extLst xmlns:a="http://schemas.openxmlformats.org/drawingml/2006/main">
               <a:ext uri="{FF2B5EF4-FFF2-40B4-BE49-F238E27FC236}">
-                <a16:creationId xmlns:a16="http://schemas.microsoft.com/office/drawing/2014/main" id="{A4148DEB-BE20-4D5A-805B-C2715DB7F9EA}"/>
+                <a16:creationId xmlns:a16="http://schemas.microsoft.com/office/drawing/2014/main" id="{592078A7-3B54-41DB-B103-AE887FE223CE}"/>
               </a:ext>
             </a:extLst>
           </p:cNvPr>
@@ -5279,7 +5279,7 @@
           <p:cNvPr id="14" name="text-72">
             <a:extLst xmlns:a="http://schemas.openxmlformats.org/drawingml/2006/main">
               <a:ext uri="{FF2B5EF4-FFF2-40B4-BE49-F238E27FC236}">
-                <a16:creationId xmlns:a16="http://schemas.microsoft.com/office/drawing/2014/main" id="{6FB89C06-1EF8-4D90-8057-DD2394F39D2E}"/>
+                <a16:creationId xmlns:a16="http://schemas.microsoft.com/office/drawing/2014/main" id="{9FF08B2D-5546-4738-96FB-DD0E73628204}"/>
               </a:ext>
             </a:extLst>
           </p:cNvPr>
@@ -5335,7 +5335,7 @@
           <p:cNvPr id="15" name="dot-73">
             <a:extLst xmlns:a="http://schemas.openxmlformats.org/drawingml/2006/main">
               <a:ext uri="{FF2B5EF4-FFF2-40B4-BE49-F238E27FC236}">
-                <a16:creationId xmlns:a16="http://schemas.microsoft.com/office/drawing/2014/main" id="{0607C023-7AC8-4F9E-B7A6-4188FD94BE00}"/>
+                <a16:creationId xmlns:a16="http://schemas.microsoft.com/office/drawing/2014/main" id="{50F73B97-A4F0-4EA3-AE67-CAA7B10AE5FF}"/>
               </a:ext>
             </a:extLst>
           </p:cNvPr>
@@ -5366,7 +5366,7 @@
           <p:cNvPr id="16" name="text-74">
             <a:extLst xmlns:a="http://schemas.openxmlformats.org/drawingml/2006/main">
               <a:ext uri="{FF2B5EF4-FFF2-40B4-BE49-F238E27FC236}">
-                <a16:creationId xmlns:a16="http://schemas.microsoft.com/office/drawing/2014/main" id="{8C3A3089-7C04-430C-9978-6DDA158CF503}"/>
+                <a16:creationId xmlns:a16="http://schemas.microsoft.com/office/drawing/2014/main" id="{A2A433DC-FA36-4C15-83DA-FB77E1D9D8D6}"/>
               </a:ext>
             </a:extLst>
           </p:cNvPr>
@@ -5422,7 +5422,7 @@
           <p:cNvPr id="17" name="text-75">
             <a:extLst xmlns:a="http://schemas.openxmlformats.org/drawingml/2006/main">
               <a:ext uri="{FF2B5EF4-FFF2-40B4-BE49-F238E27FC236}">
-                <a16:creationId xmlns:a16="http://schemas.microsoft.com/office/drawing/2014/main" id="{FD9A7182-60EA-44D5-8DDB-A3FE0494E5DA}"/>
+                <a16:creationId xmlns:a16="http://schemas.microsoft.com/office/drawing/2014/main" id="{563217A6-C4A7-4ED9-9D66-8C6C3AEF82A0}"/>
               </a:ext>
             </a:extLst>
           </p:cNvPr>
@@ -5478,7 +5478,7 @@
           <p:cNvPr id="18" name="text-76">
             <a:extLst xmlns:a="http://schemas.openxmlformats.org/drawingml/2006/main">
               <a:ext uri="{FF2B5EF4-FFF2-40B4-BE49-F238E27FC236}">
-                <a16:creationId xmlns:a16="http://schemas.microsoft.com/office/drawing/2014/main" id="{1CAB923D-193F-4207-9B1A-2DEF2CE3A609}"/>
+                <a16:creationId xmlns:a16="http://schemas.microsoft.com/office/drawing/2014/main" id="{D8B686BE-8ABE-4E5F-8E8C-18DCB63EFA0A}"/>
               </a:ext>
             </a:extLst>
           </p:cNvPr>
@@ -5534,7 +5534,7 @@
           <p:cNvPr id="19" name="box-77">
             <a:extLst xmlns:a="http://schemas.openxmlformats.org/drawingml/2006/main">
               <a:ext uri="{FF2B5EF4-FFF2-40B4-BE49-F238E27FC236}">
-                <a16:creationId xmlns:a16="http://schemas.microsoft.com/office/drawing/2014/main" id="{7063F775-887A-4FDF-AA44-E7EA54212294}"/>
+                <a16:creationId xmlns:a16="http://schemas.microsoft.com/office/drawing/2014/main" id="{51A37D2C-2F6E-41B8-9B74-7D3C7ADF84A2}"/>
               </a:ext>
             </a:extLst>
           </p:cNvPr>
@@ -5567,7 +5567,7 @@
           <p:cNvPr id="20" name="text-78">
             <a:extLst xmlns:a="http://schemas.openxmlformats.org/drawingml/2006/main">
               <a:ext uri="{FF2B5EF4-FFF2-40B4-BE49-F238E27FC236}">
-                <a16:creationId xmlns:a16="http://schemas.microsoft.com/office/drawing/2014/main" id="{AF9FC780-281C-482C-A160-5B219F0017B3}"/>
+                <a16:creationId xmlns:a16="http://schemas.microsoft.com/office/drawing/2014/main" id="{0C9BA9C1-ABE7-484B-9B5A-CB42A16F6F4E}"/>
               </a:ext>
             </a:extLst>
           </p:cNvPr>
@@ -5621,7 +5621,7 @@
     </p:spTree>
     <p:extLst>
       <p:ext uri="{BB962C8B-B14F-4D97-AF65-F5344CB8AC3E}">
-        <p14:creationId xmlns:p14="http://schemas.microsoft.com/office/powerpoint/2010/main" val="1592586532"/>
+        <p14:creationId xmlns:p14="http://schemas.microsoft.com/office/powerpoint/2010/main" val="1157522057"/>
       </p:ext>
     </p:extLst>
   </p:cSld>
@@ -5652,7 +5652,7 @@
           <p:cNvPr id="18" name="box-79">
             <a:extLst xmlns:a="http://schemas.openxmlformats.org/drawingml/2006/main">
               <a:ext uri="{FF2B5EF4-FFF2-40B4-BE49-F238E27FC236}">
-                <a16:creationId xmlns:a16="http://schemas.microsoft.com/office/drawing/2014/main" id="{9BF2063D-965C-44A5-BAFE-44A43D4F4EB7}"/>
+                <a16:creationId xmlns:a16="http://schemas.microsoft.com/office/drawing/2014/main" id="{99ACF86A-CB78-4B05-A8A6-C713618A1E49}"/>
               </a:ext>
             </a:extLst>
           </p:cNvPr>
@@ -5685,7 +5685,7 @@
           <p:cNvPr id="2" name="text-80">
             <a:extLst xmlns:a="http://schemas.openxmlformats.org/drawingml/2006/main">
               <a:ext uri="{FF2B5EF4-FFF2-40B4-BE49-F238E27FC236}">
-                <a16:creationId xmlns:a16="http://schemas.microsoft.com/office/drawing/2014/main" id="{D56A71AE-8550-4032-B568-5831F62ED6A0}"/>
+                <a16:creationId xmlns:a16="http://schemas.microsoft.com/office/drawing/2014/main" id="{613F8D87-66CF-446C-BEFA-CCBC8E5056DE}"/>
               </a:ext>
             </a:extLst>
           </p:cNvPr>
@@ -5741,7 +5741,7 @@
           <p:cNvPr id="3" name="text-81">
             <a:extLst xmlns:a="http://schemas.openxmlformats.org/drawingml/2006/main">
               <a:ext uri="{FF2B5EF4-FFF2-40B4-BE49-F238E27FC236}">
-                <a16:creationId xmlns:a16="http://schemas.microsoft.com/office/drawing/2014/main" id="{FFA29013-99EA-49A3-BFD5-87E6EAD0DA16}"/>
+                <a16:creationId xmlns:a16="http://schemas.microsoft.com/office/drawing/2014/main" id="{984C7774-A46B-4462-8122-82D8FD8DC77A}"/>
               </a:ext>
             </a:extLst>
           </p:cNvPr>
@@ -5797,7 +5797,7 @@
           <p:cNvPr id="4" name="text-82">
             <a:extLst xmlns:a="http://schemas.openxmlformats.org/drawingml/2006/main">
               <a:ext uri="{FF2B5EF4-FFF2-40B4-BE49-F238E27FC236}">
-                <a16:creationId xmlns:a16="http://schemas.microsoft.com/office/drawing/2014/main" id="{B599A8D4-F59C-4240-A667-52DF5B0065A8}"/>
+                <a16:creationId xmlns:a16="http://schemas.microsoft.com/office/drawing/2014/main" id="{E225FBB2-5849-4D9F-8DF8-2240C5279E05}"/>
               </a:ext>
             </a:extLst>
           </p:cNvPr>
@@ -5853,7 +5853,7 @@
           <p:cNvPr id="5" name="text-83">
             <a:extLst xmlns:a="http://schemas.openxmlformats.org/drawingml/2006/main">
               <a:ext uri="{FF2B5EF4-FFF2-40B4-BE49-F238E27FC236}">
-                <a16:creationId xmlns:a16="http://schemas.microsoft.com/office/drawing/2014/main" id="{52D78FF0-B093-47E4-8B25-4CEC47770C9B}"/>
+                <a16:creationId xmlns:a16="http://schemas.microsoft.com/office/drawing/2014/main" id="{E25A373F-7296-47D7-896F-2847D3B7BCC8}"/>
               </a:ext>
             </a:extLst>
           </p:cNvPr>
@@ -5909,7 +5909,7 @@
           <p:cNvPr id="6" name="text-84">
             <a:extLst xmlns:a="http://schemas.openxmlformats.org/drawingml/2006/main">
               <a:ext uri="{FF2B5EF4-FFF2-40B4-BE49-F238E27FC236}">
-                <a16:creationId xmlns:a16="http://schemas.microsoft.com/office/drawing/2014/main" id="{835E659D-C50C-489D-AEDF-926E923A1CB5}"/>
+                <a16:creationId xmlns:a16="http://schemas.microsoft.com/office/drawing/2014/main" id="{8A6C5795-9070-48FE-B0BC-B9D14313688C}"/>
               </a:ext>
             </a:extLst>
           </p:cNvPr>
@@ -5965,7 +5965,7 @@
           <p:cNvPr id="7" name="text-85">
             <a:extLst xmlns:a="http://schemas.openxmlformats.org/drawingml/2006/main">
               <a:ext uri="{FF2B5EF4-FFF2-40B4-BE49-F238E27FC236}">
-                <a16:creationId xmlns:a16="http://schemas.microsoft.com/office/drawing/2014/main" id="{3CE6A196-E2B0-4130-83C2-81A3DAE0A5D7}"/>
+                <a16:creationId xmlns:a16="http://schemas.microsoft.com/office/drawing/2014/main" id="{A546D8D0-465A-40C6-A63F-529FB1DDAD77}"/>
               </a:ext>
             </a:extLst>
           </p:cNvPr>
@@ -6021,7 +6021,7 @@
           <p:cNvPr id="8" name="text-86">
             <a:extLst xmlns:a="http://schemas.openxmlformats.org/drawingml/2006/main">
               <a:ext uri="{FF2B5EF4-FFF2-40B4-BE49-F238E27FC236}">
-                <a16:creationId xmlns:a16="http://schemas.microsoft.com/office/drawing/2014/main" id="{5515909F-271E-481C-BE41-B16DDE1DBFB3}"/>
+                <a16:creationId xmlns:a16="http://schemas.microsoft.com/office/drawing/2014/main" id="{CADEA91F-6239-4313-8D64-36B98B599D63}"/>
               </a:ext>
             </a:extLst>
           </p:cNvPr>
@@ -6067,7 +6067,7 @@
                 <a:ea typeface="Arial"/>
                 <a:cs typeface="Arial"/>
               </a:rPr>
-              <a:t>86 / 86</a:t>
+              <a:t>88 / 88</a:t>
             </a:r>
           </a:p>
         </p:txBody>
@@ -6077,7 +6077,7 @@
           <p:cNvPr id="9" name="text-87">
             <a:extLst xmlns:a="http://schemas.openxmlformats.org/drawingml/2006/main">
               <a:ext uri="{FF2B5EF4-FFF2-40B4-BE49-F238E27FC236}">
-                <a16:creationId xmlns:a16="http://schemas.microsoft.com/office/drawing/2014/main" id="{4D5BF624-9651-412A-9AC7-6846EBA2380D}"/>
+                <a16:creationId xmlns:a16="http://schemas.microsoft.com/office/drawing/2014/main" id="{5D9897D5-98E5-40B4-8B60-0B05AE3028B9}"/>
               </a:ext>
             </a:extLst>
           </p:cNvPr>
@@ -6133,7 +6133,7 @@
           <p:cNvPr id="10" name="text-88">
             <a:extLst xmlns:a="http://schemas.openxmlformats.org/drawingml/2006/main">
               <a:ext uri="{FF2B5EF4-FFF2-40B4-BE49-F238E27FC236}">
-                <a16:creationId xmlns:a16="http://schemas.microsoft.com/office/drawing/2014/main" id="{1FA0FBBB-93A0-4CCE-9B9F-E57E22C78CAB}"/>
+                <a16:creationId xmlns:a16="http://schemas.microsoft.com/office/drawing/2014/main" id="{5A27F241-021F-4D38-9821-F6F18BA47B49}"/>
               </a:ext>
             </a:extLst>
           </p:cNvPr>
@@ -6235,7 +6235,7 @@
           <p:cNvPr id="11" name="text-89">
             <a:extLst xmlns:a="http://schemas.openxmlformats.org/drawingml/2006/main">
               <a:ext uri="{FF2B5EF4-FFF2-40B4-BE49-F238E27FC236}">
-                <a16:creationId xmlns:a16="http://schemas.microsoft.com/office/drawing/2014/main" id="{2D7AE4AF-ABA1-4CDE-ADAD-6E101001E89E}"/>
+                <a16:creationId xmlns:a16="http://schemas.microsoft.com/office/drawing/2014/main" id="{4A6E79E0-9C08-4032-B68B-9FFD73EA6B63}"/>
               </a:ext>
             </a:extLst>
           </p:cNvPr>
@@ -6337,7 +6337,7 @@
           <p:cNvPr id="12" name="text-90">
             <a:extLst xmlns:a="http://schemas.openxmlformats.org/drawingml/2006/main">
               <a:ext uri="{FF2B5EF4-FFF2-40B4-BE49-F238E27FC236}">
-                <a16:creationId xmlns:a16="http://schemas.microsoft.com/office/drawing/2014/main" id="{8EC2E6C2-6FB4-44D9-9A0C-EF14C4223A7E}"/>
+                <a16:creationId xmlns:a16="http://schemas.microsoft.com/office/drawing/2014/main" id="{E423EBF3-CE9A-43DA-80F1-BC4A62B4FE68}"/>
               </a:ext>
             </a:extLst>
           </p:cNvPr>
@@ -6439,7 +6439,7 @@
           <p:cNvPr id="13" name="box-91">
             <a:extLst xmlns:a="http://schemas.openxmlformats.org/drawingml/2006/main">
               <a:ext uri="{FF2B5EF4-FFF2-40B4-BE49-F238E27FC236}">
-                <a16:creationId xmlns:a16="http://schemas.microsoft.com/office/drawing/2014/main" id="{B32C322C-414A-4678-902B-1A6ED941C958}"/>
+                <a16:creationId xmlns:a16="http://schemas.microsoft.com/office/drawing/2014/main" id="{B1E859C8-9D03-4D27-94C9-3A1BD12DE996}"/>
               </a:ext>
             </a:extLst>
           </p:cNvPr>
@@ -6472,7 +6472,7 @@
           <p:cNvPr id="14" name="text-92">
             <a:extLst xmlns:a="http://schemas.openxmlformats.org/drawingml/2006/main">
               <a:ext uri="{FF2B5EF4-FFF2-40B4-BE49-F238E27FC236}">
-                <a16:creationId xmlns:a16="http://schemas.microsoft.com/office/drawing/2014/main" id="{26B2B46D-A0C8-49C3-A33B-43DED751D20F}"/>
+                <a16:creationId xmlns:a16="http://schemas.microsoft.com/office/drawing/2014/main" id="{AEF57CE6-208D-4B77-AF09-430114189666}"/>
               </a:ext>
             </a:extLst>
           </p:cNvPr>
@@ -6528,7 +6528,7 @@
           <p:cNvPr id="15" name="text-93">
             <a:extLst xmlns:a="http://schemas.openxmlformats.org/drawingml/2006/main">
               <a:ext uri="{FF2B5EF4-FFF2-40B4-BE49-F238E27FC236}">
-                <a16:creationId xmlns:a16="http://schemas.microsoft.com/office/drawing/2014/main" id="{EA0FE66C-E5F3-4770-8476-F51FB78F88BA}"/>
+                <a16:creationId xmlns:a16="http://schemas.microsoft.com/office/drawing/2014/main" id="{4DB9C382-E3BE-4188-83E8-339939021520}"/>
               </a:ext>
             </a:extLst>
           </p:cNvPr>
@@ -6574,7 +6574,7 @@
                 <a:ea typeface="Arial"/>
                 <a:cs typeface="Arial"/>
               </a:rPr>
-              <a:t>Windows 10/11 (x64) + macOS (Apple Silicon) — İndirme: github.com/Azizsekerdil/GermanCourseAI/releases (v1.2.0) · (özel repo)</a:t>
+              <a:t>Windows 10/11 (x64) + macOS (Apple Silicon) — İndirme: github.com/Azizsekerdil/GermanCourseAI/releases (v1.2.1) · (özel repo)</a:t>
             </a:r>
           </a:p>
         </p:txBody>
@@ -6584,7 +6584,7 @@
           <p:cNvPr id="16" name="text-94">
             <a:extLst xmlns:a="http://schemas.openxmlformats.org/drawingml/2006/main">
               <a:ext uri="{FF2B5EF4-FFF2-40B4-BE49-F238E27FC236}">
-                <a16:creationId xmlns:a16="http://schemas.microsoft.com/office/drawing/2014/main" id="{6A096659-B102-4B26-840E-DC6539D95958}"/>
+                <a16:creationId xmlns:a16="http://schemas.microsoft.com/office/drawing/2014/main" id="{AA557BB1-C1A2-4C50-8F02-B6013274F8A5}"/>
               </a:ext>
             </a:extLst>
           </p:cNvPr>
@@ -6630,7 +6630,7 @@
                 <a:ea typeface="Arial"/>
                 <a:cs typeface="Arial"/>
               </a:rPr>
-              <a:t>Windows 10/11 (x64) &amp; macOS (Apple Silicon) — Download: GitHub Releases (v1.2.0)</a:t>
+              <a:t>Windows 10/11 (x64) &amp; macOS (Apple Silicon) — Download: GitHub Releases (v1.2.1)</a:t>
             </a:r>
           </a:p>
         </p:txBody>
@@ -6640,7 +6640,7 @@
           <p:cNvPr id="17" name="text-95">
             <a:extLst xmlns:a="http://schemas.openxmlformats.org/drawingml/2006/main">
               <a:ext uri="{FF2B5EF4-FFF2-40B4-BE49-F238E27FC236}">
-                <a16:creationId xmlns:a16="http://schemas.microsoft.com/office/drawing/2014/main" id="{5729A71B-508E-4089-9045-D872A2523B78}"/>
+                <a16:creationId xmlns:a16="http://schemas.microsoft.com/office/drawing/2014/main" id="{E98D75A7-FFE4-4843-B93C-5662E5FEDCC0}"/>
               </a:ext>
             </a:extLst>
           </p:cNvPr>
@@ -6694,7 +6694,7 @@
     </p:spTree>
     <p:extLst>
       <p:ext uri="{BB962C8B-B14F-4D97-AF65-F5344CB8AC3E}">
-        <p14:creationId xmlns:p14="http://schemas.microsoft.com/office/powerpoint/2010/main" val="658931556"/>
+        <p14:creationId xmlns:p14="http://schemas.microsoft.com/office/powerpoint/2010/main" val="1474435480"/>
       </p:ext>
     </p:extLst>
   </p:cSld>

--- a/docs/presentation/German-Course-AI-Trilingual.pptx
+++ b/docs/presentation/German-Course-AI-Trilingual.pptx
@@ -2,18 +2,18 @@
 <file path=ppt/presentation.xml><?xml version="1.0" encoding="utf-8"?>
 <p:presentation xmlns:p="http://schemas.openxmlformats.org/presentationml/2006/main">
   <p:sldMasterIdLst>
-    <p:sldMasterId xmlns:r="http://schemas.openxmlformats.org/officeDocument/2006/relationships" id="2147483648" r:id="Re358ece5affd4ade"/>
+    <p:sldMasterId xmlns:r="http://schemas.openxmlformats.org/officeDocument/2006/relationships" id="2147483648" r:id="Rfb6470800ee049a6"/>
   </p:sldMasterIdLst>
   <p:notesMasterIdLst>
-    <p:notesMasterId xmlns:r="http://schemas.openxmlformats.org/officeDocument/2006/relationships" r:id="Reb202cd08b7b48e4"/>
+    <p:notesMasterId xmlns:r="http://schemas.openxmlformats.org/officeDocument/2006/relationships" r:id="R22b27a76ee1b4203"/>
   </p:notesMasterIdLst>
   <p:sldIdLst>
-    <p:sldId xmlns:r="http://schemas.openxmlformats.org/officeDocument/2006/relationships" id="256" r:id="R5affc5769c914c3a"/>
-    <p:sldId xmlns:r="http://schemas.openxmlformats.org/officeDocument/2006/relationships" id="257" r:id="R75ea97c7114f456c"/>
-    <p:sldId xmlns:r="http://schemas.openxmlformats.org/officeDocument/2006/relationships" id="258" r:id="R1ff8e132df464c2b"/>
-    <p:sldId xmlns:r="http://schemas.openxmlformats.org/officeDocument/2006/relationships" id="259" r:id="R98786711e9b442bb"/>
-    <p:sldId xmlns:r="http://schemas.openxmlformats.org/officeDocument/2006/relationships" id="260" r:id="R3fd73e6011b045b4"/>
-    <p:sldId xmlns:r="http://schemas.openxmlformats.org/officeDocument/2006/relationships" id="261" r:id="R451262457a3f433d"/>
+    <p:sldId xmlns:r="http://schemas.openxmlformats.org/officeDocument/2006/relationships" id="256" r:id="Rc294c8a4ed3e4522"/>
+    <p:sldId xmlns:r="http://schemas.openxmlformats.org/officeDocument/2006/relationships" id="257" r:id="Rbac37d11e1cd489f"/>
+    <p:sldId xmlns:r="http://schemas.openxmlformats.org/officeDocument/2006/relationships" id="258" r:id="R0ea24a5d0aea4245"/>
+    <p:sldId xmlns:r="http://schemas.openxmlformats.org/officeDocument/2006/relationships" id="259" r:id="Rb552dd27045248c1"/>
+    <p:sldId xmlns:r="http://schemas.openxmlformats.org/officeDocument/2006/relationships" id="260" r:id="R83e0d5ce3aab47c5"/>
+    <p:sldId xmlns:r="http://schemas.openxmlformats.org/officeDocument/2006/relationships" id="261" r:id="R1cd0d593b6344050"/>
   </p:sldIdLst>
   <p:sldSz cx="12192000" cy="6858000"/>
   <p:notesSz cx="6858000" cy="9144000"/>
@@ -462,7 +462,7 @@
           </a:p>
           <a:p xmlns:a="http://schemas.openxmlformats.org/drawingml/2006/main">
             <a:r>
-              <a:t>- Original icon generated for this project: D:/GE_FR/GermanCourseAI/assets/app-final.png</a:t>
+              <a:t>- Original icon generated for this project: D:\GE_FR\GermanCourseAI\assets\app-final.png</a:t>
             </a:r>
           </a:p>
           <a:p xmlns:a="http://schemas.openxmlformats.org/drawingml/2006/main">
@@ -552,7 +552,7 @@
           </a:p>
           <a:p xmlns:a="http://schemas.openxmlformats.org/drawingml/2006/main">
             <a:r>
-              <a:t>- Product screenshot: D:/GE_FR/GermanCourseAI/docs/presentation/assets/german-course-ai-screenshot.jpg</a:t>
+              <a:t>- Product screenshot: D:\GE_FR\GermanCourseAI\docs\presentation\assets\german-course-ai-screenshot.jpg</a:t>
             </a:r>
           </a:p>
           <a:p xmlns:a="http://schemas.openxmlformats.org/drawingml/2006/main">
@@ -1010,7 +1010,7 @@
   </p:cSld>
   <p:clrMap bg1="lt1" tx1="dk1" bg2="lt2" tx2="dk2" accent1="accent1" accent2="accent2" accent3="accent3" accent4="accent4" accent5="accent5" accent6="accent6" hlink="hlink" folHlink="folHlink"/>
   <p:sldLayoutIdLst>
-    <p:sldLayoutId xmlns:r="http://schemas.openxmlformats.org/officeDocument/2006/relationships" id="2147483649" r:id="Rf03c2eb47eb04ce3"/>
+    <p:sldLayoutId xmlns:r="http://schemas.openxmlformats.org/officeDocument/2006/relationships" id="2147483649" r:id="R35b16748b00a4f6d"/>
   </p:sldLayoutIdLst>
   <p:txStyles>
     <p:titleStyle>
@@ -1561,7 +1561,7 @@
           <p:cNvPr id="13" name="box-1">
             <a:extLst xmlns:a="http://schemas.openxmlformats.org/drawingml/2006/main">
               <a:ext uri="{FF2B5EF4-FFF2-40B4-BE49-F238E27FC236}">
-                <a16:creationId xmlns:a16="http://schemas.microsoft.com/office/drawing/2014/main" id="{D185A3FD-89D1-4702-994B-5BD5ECECCAFC}"/>
+                <a16:creationId xmlns:a16="http://schemas.microsoft.com/office/drawing/2014/main" id="{14B3D6B9-445D-44A2-8E97-01E5AAE518BB}"/>
               </a:ext>
             </a:extLst>
           </p:cNvPr>
@@ -1594,7 +1594,7 @@
           <p:cNvPr id="2" name="text-2">
             <a:extLst xmlns:a="http://schemas.openxmlformats.org/drawingml/2006/main">
               <a:ext uri="{FF2B5EF4-FFF2-40B4-BE49-F238E27FC236}">
-                <a16:creationId xmlns:a16="http://schemas.microsoft.com/office/drawing/2014/main" id="{9438853F-A2CE-4223-A978-0B7EADF92985}"/>
+                <a16:creationId xmlns:a16="http://schemas.microsoft.com/office/drawing/2014/main" id="{26F36264-7935-4793-835F-CA26DDC3B683}"/>
               </a:ext>
             </a:extLst>
           </p:cNvPr>
@@ -1650,7 +1650,7 @@
           <p:cNvPr id="3" name="text-3">
             <a:extLst xmlns:a="http://schemas.openxmlformats.org/drawingml/2006/main">
               <a:ext uri="{FF2B5EF4-FFF2-40B4-BE49-F238E27FC236}">
-                <a16:creationId xmlns:a16="http://schemas.microsoft.com/office/drawing/2014/main" id="{51834263-BE91-489C-9720-28B5668BC986}"/>
+                <a16:creationId xmlns:a16="http://schemas.microsoft.com/office/drawing/2014/main" id="{7C3E0754-363D-46A5-9BE2-FBEC91C4C887}"/>
               </a:ext>
             </a:extLst>
           </p:cNvPr>
@@ -1706,7 +1706,7 @@
           <p:cNvPr id="4" name="text-4">
             <a:extLst xmlns:a="http://schemas.openxmlformats.org/drawingml/2006/main">
               <a:ext uri="{FF2B5EF4-FFF2-40B4-BE49-F238E27FC236}">
-                <a16:creationId xmlns:a16="http://schemas.microsoft.com/office/drawing/2014/main" id="{F93AAA44-947E-45DA-8352-ECEB8686B48A}"/>
+                <a16:creationId xmlns:a16="http://schemas.microsoft.com/office/drawing/2014/main" id="{2992156B-1D8C-490A-85F7-D266AC191D6B}"/>
               </a:ext>
             </a:extLst>
           </p:cNvPr>
@@ -1762,7 +1762,7 @@
           <p:cNvPr id="5" name="text-5">
             <a:extLst xmlns:a="http://schemas.openxmlformats.org/drawingml/2006/main">
               <a:ext uri="{FF2B5EF4-FFF2-40B4-BE49-F238E27FC236}">
-                <a16:creationId xmlns:a16="http://schemas.microsoft.com/office/drawing/2014/main" id="{4FDDD9F2-1C3C-4D15-AC3E-A7811B14E178}"/>
+                <a16:creationId xmlns:a16="http://schemas.microsoft.com/office/drawing/2014/main" id="{2C76A826-1646-4BEF-9EEC-C81BB9909573}"/>
               </a:ext>
             </a:extLst>
           </p:cNvPr>
@@ -1818,7 +1818,7 @@
           <p:cNvPr id="6" name="text-6">
             <a:extLst xmlns:a="http://schemas.openxmlformats.org/drawingml/2006/main">
               <a:ext uri="{FF2B5EF4-FFF2-40B4-BE49-F238E27FC236}">
-                <a16:creationId xmlns:a16="http://schemas.microsoft.com/office/drawing/2014/main" id="{9BAB606D-B095-4302-B4A5-FD540D0EB542}"/>
+                <a16:creationId xmlns:a16="http://schemas.microsoft.com/office/drawing/2014/main" id="{83F30FBD-50E9-4C41-9F42-489BABED353D}"/>
               </a:ext>
             </a:extLst>
           </p:cNvPr>
@@ -1874,7 +1874,7 @@
           <p:cNvPr id="7" name="text-7">
             <a:extLst xmlns:a="http://schemas.openxmlformats.org/drawingml/2006/main">
               <a:ext uri="{FF2B5EF4-FFF2-40B4-BE49-F238E27FC236}">
-                <a16:creationId xmlns:a16="http://schemas.microsoft.com/office/drawing/2014/main" id="{140B51A5-C10C-40DE-BD1B-EAB77780CE53}"/>
+                <a16:creationId xmlns:a16="http://schemas.microsoft.com/office/drawing/2014/main" id="{ABEFD817-614D-46EC-84CB-9366A05749A6}"/>
               </a:ext>
             </a:extLst>
           </p:cNvPr>
@@ -1930,7 +1930,7 @@
           <p:cNvPr id="8" name="text-8">
             <a:extLst xmlns:a="http://schemas.openxmlformats.org/drawingml/2006/main">
               <a:ext uri="{FF2B5EF4-FFF2-40B4-BE49-F238E27FC236}">
-                <a16:creationId xmlns:a16="http://schemas.microsoft.com/office/drawing/2014/main" id="{A41ACCD0-912F-4256-9983-5DA9E60AA076}"/>
+                <a16:creationId xmlns:a16="http://schemas.microsoft.com/office/drawing/2014/main" id="{FB12C3F3-F292-4678-8E9C-3EF1278D287C}"/>
               </a:ext>
             </a:extLst>
           </p:cNvPr>
@@ -1986,7 +1986,7 @@
           <p:cNvPr id="9" name="text-9">
             <a:extLst xmlns:a="http://schemas.openxmlformats.org/drawingml/2006/main">
               <a:ext uri="{FF2B5EF4-FFF2-40B4-BE49-F238E27FC236}">
-                <a16:creationId xmlns:a16="http://schemas.microsoft.com/office/drawing/2014/main" id="{F3F480A2-B63A-4A6A-98AB-AA02E978A84F}"/>
+                <a16:creationId xmlns:a16="http://schemas.microsoft.com/office/drawing/2014/main" id="{EFCCA83D-1DAE-4FEE-B746-62CD87EC71A5}"/>
               </a:ext>
             </a:extLst>
           </p:cNvPr>
@@ -2042,7 +2042,7 @@
           <p:cNvPr id="10" name="box-10">
             <a:extLst xmlns:a="http://schemas.openxmlformats.org/drawingml/2006/main">
               <a:ext uri="{FF2B5EF4-FFF2-40B4-BE49-F238E27FC236}">
-                <a16:creationId xmlns:a16="http://schemas.microsoft.com/office/drawing/2014/main" id="{9F069B1B-7148-4A2A-B932-68652FAC8513}"/>
+                <a16:creationId xmlns:a16="http://schemas.microsoft.com/office/drawing/2014/main" id="{A0C8CAD1-5429-4DAD-AC14-C0174E8AC8DF}"/>
               </a:ext>
             </a:extLst>
           </p:cNvPr>
@@ -2079,7 +2079,7 @@
           <p:nvPr/>
         </p:nvPicPr>
         <p:blipFill>
-          <a:blip xmlns:r="http://schemas.openxmlformats.org/officeDocument/2006/relationships" xmlns:a="http://schemas.openxmlformats.org/drawingml/2006/main" r:embed="R5bd7f3fd10754239"/>
+          <a:blip xmlns:r="http://schemas.openxmlformats.org/officeDocument/2006/relationships" xmlns:a="http://schemas.openxmlformats.org/drawingml/2006/main" r:embed="Rf6151f74836145f1"/>
           <a:stretch xmlns:a="http://schemas.openxmlformats.org/drawingml/2006/main"/>
         </p:blipFill>
         <p:spPr>
@@ -2097,7 +2097,7 @@
           <p:cNvPr id="12" name="text-11">
             <a:extLst xmlns:a="http://schemas.openxmlformats.org/drawingml/2006/main">
               <a:ext uri="{FF2B5EF4-FFF2-40B4-BE49-F238E27FC236}">
-                <a16:creationId xmlns:a16="http://schemas.microsoft.com/office/drawing/2014/main" id="{8EACBFB9-EF57-443B-9EDC-FF3E5F1886CB}"/>
+                <a16:creationId xmlns:a16="http://schemas.microsoft.com/office/drawing/2014/main" id="{B7E74536-D7B9-438F-83AB-2B3ADD919F03}"/>
               </a:ext>
             </a:extLst>
           </p:cNvPr>
@@ -2151,7 +2151,7 @@
     </p:spTree>
     <p:extLst>
       <p:ext uri="{BB962C8B-B14F-4D97-AF65-F5344CB8AC3E}">
-        <p14:creationId xmlns:p14="http://schemas.microsoft.com/office/powerpoint/2010/main" val="431353230"/>
+        <p14:creationId xmlns:p14="http://schemas.microsoft.com/office/powerpoint/2010/main" val="982415255"/>
       </p:ext>
     </p:extLst>
   </p:cSld>
@@ -2182,7 +2182,7 @@
           <p:cNvPr id="14" name="box-12">
             <a:extLst xmlns:a="http://schemas.openxmlformats.org/drawingml/2006/main">
               <a:ext uri="{FF2B5EF4-FFF2-40B4-BE49-F238E27FC236}">
-                <a16:creationId xmlns:a16="http://schemas.microsoft.com/office/drawing/2014/main" id="{2BF97F7D-DD76-40E5-B670-D03A61C6F533}"/>
+                <a16:creationId xmlns:a16="http://schemas.microsoft.com/office/drawing/2014/main" id="{42438EEE-29B1-4573-8C2C-D6442AF9D500}"/>
               </a:ext>
             </a:extLst>
           </p:cNvPr>
@@ -2215,7 +2215,7 @@
           <p:cNvPr id="2" name="text-13">
             <a:extLst xmlns:a="http://schemas.openxmlformats.org/drawingml/2006/main">
               <a:ext uri="{FF2B5EF4-FFF2-40B4-BE49-F238E27FC236}">
-                <a16:creationId xmlns:a16="http://schemas.microsoft.com/office/drawing/2014/main" id="{D2DFCBE1-DABE-4BB6-96C4-34B23B49E778}"/>
+                <a16:creationId xmlns:a16="http://schemas.microsoft.com/office/drawing/2014/main" id="{BFD603E9-4E08-4D49-A964-AA7F7A485651}"/>
               </a:ext>
             </a:extLst>
           </p:cNvPr>
@@ -2271,7 +2271,7 @@
           <p:cNvPr id="3" name="text-14">
             <a:extLst xmlns:a="http://schemas.openxmlformats.org/drawingml/2006/main">
               <a:ext uri="{FF2B5EF4-FFF2-40B4-BE49-F238E27FC236}">
-                <a16:creationId xmlns:a16="http://schemas.microsoft.com/office/drawing/2014/main" id="{C10040D0-63D6-4019-95D8-D8B8E3ABC4F3}"/>
+                <a16:creationId xmlns:a16="http://schemas.microsoft.com/office/drawing/2014/main" id="{89F96673-1B5D-4394-8262-EEC28AA40D9C}"/>
               </a:ext>
             </a:extLst>
           </p:cNvPr>
@@ -2327,7 +2327,7 @@
           <p:cNvPr id="4" name="text-15">
             <a:extLst xmlns:a="http://schemas.openxmlformats.org/drawingml/2006/main">
               <a:ext uri="{FF2B5EF4-FFF2-40B4-BE49-F238E27FC236}">
-                <a16:creationId xmlns:a16="http://schemas.microsoft.com/office/drawing/2014/main" id="{DAF56BD5-39E6-4B10-B214-99E0D9F752B2}"/>
+                <a16:creationId xmlns:a16="http://schemas.microsoft.com/office/drawing/2014/main" id="{B74143F6-CB24-4C00-8C6A-D89D999D7C5F}"/>
               </a:ext>
             </a:extLst>
           </p:cNvPr>
@@ -2383,7 +2383,7 @@
           <p:cNvPr id="5" name="text-16">
             <a:extLst xmlns:a="http://schemas.openxmlformats.org/drawingml/2006/main">
               <a:ext uri="{FF2B5EF4-FFF2-40B4-BE49-F238E27FC236}">
-                <a16:creationId xmlns:a16="http://schemas.microsoft.com/office/drawing/2014/main" id="{B0BFC62E-038D-441C-AC4F-0CF8F542909E}"/>
+                <a16:creationId xmlns:a16="http://schemas.microsoft.com/office/drawing/2014/main" id="{7A0F68E7-D3BC-41CB-B192-81633A42EFFC}"/>
               </a:ext>
             </a:extLst>
           </p:cNvPr>
@@ -2439,7 +2439,7 @@
           <p:cNvPr id="6" name="text-17">
             <a:extLst xmlns:a="http://schemas.openxmlformats.org/drawingml/2006/main">
               <a:ext uri="{FF2B5EF4-FFF2-40B4-BE49-F238E27FC236}">
-                <a16:creationId xmlns:a16="http://schemas.microsoft.com/office/drawing/2014/main" id="{D22674FD-7962-4247-A9F7-1751CA281738}"/>
+                <a16:creationId xmlns:a16="http://schemas.microsoft.com/office/drawing/2014/main" id="{B9FFE249-2901-4126-A312-17B32819EFF7}"/>
               </a:ext>
             </a:extLst>
           </p:cNvPr>
@@ -2495,7 +2495,7 @@
           <p:cNvPr id="7" name="box-18">
             <a:extLst xmlns:a="http://schemas.openxmlformats.org/drawingml/2006/main">
               <a:ext uri="{FF2B5EF4-FFF2-40B4-BE49-F238E27FC236}">
-                <a16:creationId xmlns:a16="http://schemas.microsoft.com/office/drawing/2014/main" id="{B405E268-BB44-4CF0-A926-56176A7D0F3B}"/>
+                <a16:creationId xmlns:a16="http://schemas.microsoft.com/office/drawing/2014/main" id="{97F44F56-2F73-4F2D-97CE-3AB4901EE6F2}"/>
               </a:ext>
             </a:extLst>
           </p:cNvPr>
@@ -2528,7 +2528,7 @@
           <p:cNvPr id="8" name="text-19">
             <a:extLst xmlns:a="http://schemas.openxmlformats.org/drawingml/2006/main">
               <a:ext uri="{FF2B5EF4-FFF2-40B4-BE49-F238E27FC236}">
-                <a16:creationId xmlns:a16="http://schemas.microsoft.com/office/drawing/2014/main" id="{FAABA3D5-727B-44F5-8164-B3136E7A5F55}"/>
+                <a16:creationId xmlns:a16="http://schemas.microsoft.com/office/drawing/2014/main" id="{0A728414-F0E9-4D07-A100-D752B5148313}"/>
               </a:ext>
             </a:extLst>
           </p:cNvPr>
@@ -2584,7 +2584,7 @@
           <p:cNvPr id="9" name="text-20">
             <a:extLst xmlns:a="http://schemas.openxmlformats.org/drawingml/2006/main">
               <a:ext uri="{FF2B5EF4-FFF2-40B4-BE49-F238E27FC236}">
-                <a16:creationId xmlns:a16="http://schemas.microsoft.com/office/drawing/2014/main" id="{85AB5257-3E79-4706-9552-07900E4AE81F}"/>
+                <a16:creationId xmlns:a16="http://schemas.microsoft.com/office/drawing/2014/main" id="{B4FC1561-B7B1-49BF-AD8E-7AB060D0639B}"/>
               </a:ext>
             </a:extLst>
           </p:cNvPr>
@@ -2640,7 +2640,7 @@
           <p:cNvPr id="10" name="text-21">
             <a:extLst xmlns:a="http://schemas.openxmlformats.org/drawingml/2006/main">
               <a:ext uri="{FF2B5EF4-FFF2-40B4-BE49-F238E27FC236}">
-                <a16:creationId xmlns:a16="http://schemas.microsoft.com/office/drawing/2014/main" id="{B7652D7A-A6A7-46CC-952E-0892F2E58E42}"/>
+                <a16:creationId xmlns:a16="http://schemas.microsoft.com/office/drawing/2014/main" id="{1DF0A915-1A13-465F-9F71-A86A851CE052}"/>
               </a:ext>
             </a:extLst>
           </p:cNvPr>
@@ -2696,7 +2696,7 @@
           <p:cNvPr id="11" name="box-22">
             <a:extLst xmlns:a="http://schemas.openxmlformats.org/drawingml/2006/main">
               <a:ext uri="{FF2B5EF4-FFF2-40B4-BE49-F238E27FC236}">
-                <a16:creationId xmlns:a16="http://schemas.microsoft.com/office/drawing/2014/main" id="{E6292307-0832-4887-BFFB-26867ED30A47}"/>
+                <a16:creationId xmlns:a16="http://schemas.microsoft.com/office/drawing/2014/main" id="{D053B184-1606-48C2-B7BC-C00FCC9ABC48}"/>
               </a:ext>
             </a:extLst>
           </p:cNvPr>
@@ -2733,7 +2733,7 @@
           <p:nvPr/>
         </p:nvPicPr>
         <p:blipFill>
-          <a:blip xmlns:r="http://schemas.openxmlformats.org/officeDocument/2006/relationships" xmlns:a="http://schemas.openxmlformats.org/drawingml/2006/main" r:embed="R80f9d0006ab94b0c"/>
+          <a:blip xmlns:r="http://schemas.openxmlformats.org/officeDocument/2006/relationships" xmlns:a="http://schemas.openxmlformats.org/drawingml/2006/main" r:embed="R13b1114ad79141b2"/>
           <a:stretch xmlns:a="http://schemas.openxmlformats.org/drawingml/2006/main"/>
         </p:blipFill>
         <p:spPr>
@@ -2751,7 +2751,7 @@
           <p:cNvPr id="13" name="text-23">
             <a:extLst xmlns:a="http://schemas.openxmlformats.org/drawingml/2006/main">
               <a:ext uri="{FF2B5EF4-FFF2-40B4-BE49-F238E27FC236}">
-                <a16:creationId xmlns:a16="http://schemas.microsoft.com/office/drawing/2014/main" id="{E9B2F5C0-EA61-45F3-BB75-7CA6DFD451F5}"/>
+                <a16:creationId xmlns:a16="http://schemas.microsoft.com/office/drawing/2014/main" id="{528F09C7-C1DC-4DB9-8589-6F29E88DFCD9}"/>
               </a:ext>
             </a:extLst>
           </p:cNvPr>
@@ -2805,7 +2805,7 @@
     </p:spTree>
     <p:extLst>
       <p:ext uri="{BB962C8B-B14F-4D97-AF65-F5344CB8AC3E}">
-        <p14:creationId xmlns:p14="http://schemas.microsoft.com/office/powerpoint/2010/main" val="1377405219"/>
+        <p14:creationId xmlns:p14="http://schemas.microsoft.com/office/powerpoint/2010/main" val="598463627"/>
       </p:ext>
     </p:extLst>
   </p:cSld>
@@ -2836,7 +2836,7 @@
           <p:cNvPr id="19" name="box-24">
             <a:extLst xmlns:a="http://schemas.openxmlformats.org/drawingml/2006/main">
               <a:ext uri="{FF2B5EF4-FFF2-40B4-BE49-F238E27FC236}">
-                <a16:creationId xmlns:a16="http://schemas.microsoft.com/office/drawing/2014/main" id="{148282E3-FE6A-4B65-8C8B-08BF8CB4DD6B}"/>
+                <a16:creationId xmlns:a16="http://schemas.microsoft.com/office/drawing/2014/main" id="{93D295DC-2744-40D3-A1AE-ABB0BCC6D18C}"/>
               </a:ext>
             </a:extLst>
           </p:cNvPr>
@@ -2869,7 +2869,7 @@
           <p:cNvPr id="2" name="text-25">
             <a:extLst xmlns:a="http://schemas.openxmlformats.org/drawingml/2006/main">
               <a:ext uri="{FF2B5EF4-FFF2-40B4-BE49-F238E27FC236}">
-                <a16:creationId xmlns:a16="http://schemas.microsoft.com/office/drawing/2014/main" id="{988458DD-0EF9-4D6D-BAF7-F39213919FC2}"/>
+                <a16:creationId xmlns:a16="http://schemas.microsoft.com/office/drawing/2014/main" id="{EBDA4538-9D1B-4257-A719-AD96CA216CAD}"/>
               </a:ext>
             </a:extLst>
           </p:cNvPr>
@@ -2925,7 +2925,7 @@
           <p:cNvPr id="3" name="text-26">
             <a:extLst xmlns:a="http://schemas.openxmlformats.org/drawingml/2006/main">
               <a:ext uri="{FF2B5EF4-FFF2-40B4-BE49-F238E27FC236}">
-                <a16:creationId xmlns:a16="http://schemas.microsoft.com/office/drawing/2014/main" id="{44C0A7F7-8D82-49F7-B5F8-F4455CDAE82C}"/>
+                <a16:creationId xmlns:a16="http://schemas.microsoft.com/office/drawing/2014/main" id="{66637E16-B2C0-4F75-A681-6B533439D946}"/>
               </a:ext>
             </a:extLst>
           </p:cNvPr>
@@ -2981,7 +2981,7 @@
           <p:cNvPr id="4" name="text-27">
             <a:extLst xmlns:a="http://schemas.openxmlformats.org/drawingml/2006/main">
               <a:ext uri="{FF2B5EF4-FFF2-40B4-BE49-F238E27FC236}">
-                <a16:creationId xmlns:a16="http://schemas.microsoft.com/office/drawing/2014/main" id="{76267574-6310-4C32-8109-72D7D8A80525}"/>
+                <a16:creationId xmlns:a16="http://schemas.microsoft.com/office/drawing/2014/main" id="{77CCFC61-D883-4819-BA9F-001AD4BC555A}"/>
               </a:ext>
             </a:extLst>
           </p:cNvPr>
@@ -3037,7 +3037,7 @@
           <p:cNvPr id="5" name="text-28">
             <a:extLst xmlns:a="http://schemas.openxmlformats.org/drawingml/2006/main">
               <a:ext uri="{FF2B5EF4-FFF2-40B4-BE49-F238E27FC236}">
-                <a16:creationId xmlns:a16="http://schemas.microsoft.com/office/drawing/2014/main" id="{58A3FDFB-360E-4270-8123-2B4CC891AEC3}"/>
+                <a16:creationId xmlns:a16="http://schemas.microsoft.com/office/drawing/2014/main" id="{4FCEFEBE-7797-445F-87B2-1392693E0C98}"/>
               </a:ext>
             </a:extLst>
           </p:cNvPr>
@@ -3093,7 +3093,7 @@
           <p:cNvPr id="6" name="text-29">
             <a:extLst xmlns:a="http://schemas.openxmlformats.org/drawingml/2006/main">
               <a:ext uri="{FF2B5EF4-FFF2-40B4-BE49-F238E27FC236}">
-                <a16:creationId xmlns:a16="http://schemas.microsoft.com/office/drawing/2014/main" id="{D0DA7B17-63A0-47DF-931D-84E242926A77}"/>
+                <a16:creationId xmlns:a16="http://schemas.microsoft.com/office/drawing/2014/main" id="{E7D9BB4A-47C9-48C9-9B5B-F42F7F5F0F9B}"/>
               </a:ext>
             </a:extLst>
           </p:cNvPr>
@@ -3149,7 +3149,7 @@
           <p:cNvPr id="7" name="box-30">
             <a:extLst xmlns:a="http://schemas.openxmlformats.org/drawingml/2006/main">
               <a:ext uri="{FF2B5EF4-FFF2-40B4-BE49-F238E27FC236}">
-                <a16:creationId xmlns:a16="http://schemas.microsoft.com/office/drawing/2014/main" id="{8A16FB5D-CD82-4FBB-B5ED-91B056B7B05D}"/>
+                <a16:creationId xmlns:a16="http://schemas.microsoft.com/office/drawing/2014/main" id="{297CA754-41C0-4DAE-8F41-48C6C6029889}"/>
               </a:ext>
             </a:extLst>
           </p:cNvPr>
@@ -3182,7 +3182,7 @@
           <p:cNvPr id="8" name="text-31">
             <a:extLst xmlns:a="http://schemas.openxmlformats.org/drawingml/2006/main">
               <a:ext uri="{FF2B5EF4-FFF2-40B4-BE49-F238E27FC236}">
-                <a16:creationId xmlns:a16="http://schemas.microsoft.com/office/drawing/2014/main" id="{6C3042D8-6B96-47AD-81B6-9D1A0016C729}"/>
+                <a16:creationId xmlns:a16="http://schemas.microsoft.com/office/drawing/2014/main" id="{985684D5-BBB3-4E7C-9C8F-0173FFA886FF}"/>
               </a:ext>
             </a:extLst>
           </p:cNvPr>
@@ -3238,7 +3238,7 @@
           <p:cNvPr id="9" name="text-32">
             <a:extLst xmlns:a="http://schemas.openxmlformats.org/drawingml/2006/main">
               <a:ext uri="{FF2B5EF4-FFF2-40B4-BE49-F238E27FC236}">
-                <a16:creationId xmlns:a16="http://schemas.microsoft.com/office/drawing/2014/main" id="{EF4B57A6-A186-4493-85D4-F98778E63857}"/>
+                <a16:creationId xmlns:a16="http://schemas.microsoft.com/office/drawing/2014/main" id="{C480357B-28DE-47CB-AE7C-8CE403CBD8A2}"/>
               </a:ext>
             </a:extLst>
           </p:cNvPr>
@@ -3294,7 +3294,7 @@
           <p:cNvPr id="10" name="text-33">
             <a:extLst xmlns:a="http://schemas.openxmlformats.org/drawingml/2006/main">
               <a:ext uri="{FF2B5EF4-FFF2-40B4-BE49-F238E27FC236}">
-                <a16:creationId xmlns:a16="http://schemas.microsoft.com/office/drawing/2014/main" id="{67F7879D-EED0-47E1-8129-3FEE2BFCF80D}"/>
+                <a16:creationId xmlns:a16="http://schemas.microsoft.com/office/drawing/2014/main" id="{833B86D7-DB85-418D-ACBC-B9CD3D34844C}"/>
               </a:ext>
             </a:extLst>
           </p:cNvPr>
@@ -3350,7 +3350,7 @@
           <p:cNvPr id="11" name="box-34">
             <a:extLst xmlns:a="http://schemas.openxmlformats.org/drawingml/2006/main">
               <a:ext uri="{FF2B5EF4-FFF2-40B4-BE49-F238E27FC236}">
-                <a16:creationId xmlns:a16="http://schemas.microsoft.com/office/drawing/2014/main" id="{A24CC4F6-4361-4ADC-A305-895BB22F2EC2}"/>
+                <a16:creationId xmlns:a16="http://schemas.microsoft.com/office/drawing/2014/main" id="{6A5F78D2-7FEF-4898-BBAA-AF6297861FDD}"/>
               </a:ext>
             </a:extLst>
           </p:cNvPr>
@@ -3383,7 +3383,7 @@
           <p:cNvPr id="12" name="text-35">
             <a:extLst xmlns:a="http://schemas.openxmlformats.org/drawingml/2006/main">
               <a:ext uri="{FF2B5EF4-FFF2-40B4-BE49-F238E27FC236}">
-                <a16:creationId xmlns:a16="http://schemas.microsoft.com/office/drawing/2014/main" id="{463253A9-B555-4A01-9D62-E94E72FA1E3B}"/>
+                <a16:creationId xmlns:a16="http://schemas.microsoft.com/office/drawing/2014/main" id="{D2577201-57C3-404F-B86A-96B9A04F00F1}"/>
               </a:ext>
             </a:extLst>
           </p:cNvPr>
@@ -3439,7 +3439,7 @@
           <p:cNvPr id="13" name="text-36">
             <a:extLst xmlns:a="http://schemas.openxmlformats.org/drawingml/2006/main">
               <a:ext uri="{FF2B5EF4-FFF2-40B4-BE49-F238E27FC236}">
-                <a16:creationId xmlns:a16="http://schemas.microsoft.com/office/drawing/2014/main" id="{71C9124C-54D3-44C8-81F4-09CD371A639A}"/>
+                <a16:creationId xmlns:a16="http://schemas.microsoft.com/office/drawing/2014/main" id="{BA37C997-8B33-4B17-92CE-7F061160A8F5}"/>
               </a:ext>
             </a:extLst>
           </p:cNvPr>
@@ -3495,7 +3495,7 @@
           <p:cNvPr id="14" name="text-37">
             <a:extLst xmlns:a="http://schemas.openxmlformats.org/drawingml/2006/main">
               <a:ext uri="{FF2B5EF4-FFF2-40B4-BE49-F238E27FC236}">
-                <a16:creationId xmlns:a16="http://schemas.microsoft.com/office/drawing/2014/main" id="{CB6997E2-AFC6-470A-8D60-85C630BE7E7F}"/>
+                <a16:creationId xmlns:a16="http://schemas.microsoft.com/office/drawing/2014/main" id="{79558AED-B2A4-46FA-8DD1-25B0166C83B0}"/>
               </a:ext>
             </a:extLst>
           </p:cNvPr>
@@ -3551,7 +3551,7 @@
           <p:cNvPr id="15" name="box-38">
             <a:extLst xmlns:a="http://schemas.openxmlformats.org/drawingml/2006/main">
               <a:ext uri="{FF2B5EF4-FFF2-40B4-BE49-F238E27FC236}">
-                <a16:creationId xmlns:a16="http://schemas.microsoft.com/office/drawing/2014/main" id="{4004C836-4D2D-43C6-BC4D-55AD1481213E}"/>
+                <a16:creationId xmlns:a16="http://schemas.microsoft.com/office/drawing/2014/main" id="{2189682A-C0A6-467A-8FDB-68AF5C760D73}"/>
               </a:ext>
             </a:extLst>
           </p:cNvPr>
@@ -3584,7 +3584,7 @@
           <p:cNvPr id="16" name="text-39">
             <a:extLst xmlns:a="http://schemas.openxmlformats.org/drawingml/2006/main">
               <a:ext uri="{FF2B5EF4-FFF2-40B4-BE49-F238E27FC236}">
-                <a16:creationId xmlns:a16="http://schemas.microsoft.com/office/drawing/2014/main" id="{CAD9820A-EEE5-481E-A778-BDF99A49334D}"/>
+                <a16:creationId xmlns:a16="http://schemas.microsoft.com/office/drawing/2014/main" id="{4A6CB7C3-EB5E-4494-AEC7-29E380B9770F}"/>
               </a:ext>
             </a:extLst>
           </p:cNvPr>
@@ -3640,7 +3640,7 @@
           <p:cNvPr id="17" name="text-40">
             <a:extLst xmlns:a="http://schemas.openxmlformats.org/drawingml/2006/main">
               <a:ext uri="{FF2B5EF4-FFF2-40B4-BE49-F238E27FC236}">
-                <a16:creationId xmlns:a16="http://schemas.microsoft.com/office/drawing/2014/main" id="{4FD07DE3-5941-4715-98BB-BE9E18C17069}"/>
+                <a16:creationId xmlns:a16="http://schemas.microsoft.com/office/drawing/2014/main" id="{588AE6DA-74FB-43B1-81DE-C6D175BAD8B8}"/>
               </a:ext>
             </a:extLst>
           </p:cNvPr>
@@ -3696,7 +3696,7 @@
           <p:cNvPr id="18" name="text-41">
             <a:extLst xmlns:a="http://schemas.openxmlformats.org/drawingml/2006/main">
               <a:ext uri="{FF2B5EF4-FFF2-40B4-BE49-F238E27FC236}">
-                <a16:creationId xmlns:a16="http://schemas.microsoft.com/office/drawing/2014/main" id="{E7E0165F-7B4A-4748-AC8F-3C90E3EF2D0D}"/>
+                <a16:creationId xmlns:a16="http://schemas.microsoft.com/office/drawing/2014/main" id="{45BE4DD0-4D50-40CE-B4E0-9666D2196485}"/>
               </a:ext>
             </a:extLst>
           </p:cNvPr>
@@ -3750,7 +3750,7 @@
     </p:spTree>
     <p:extLst>
       <p:ext uri="{BB962C8B-B14F-4D97-AF65-F5344CB8AC3E}">
-        <p14:creationId xmlns:p14="http://schemas.microsoft.com/office/powerpoint/2010/main" val="1587611945"/>
+        <p14:creationId xmlns:p14="http://schemas.microsoft.com/office/powerpoint/2010/main" val="1722834686"/>
       </p:ext>
     </p:extLst>
   </p:cSld>
@@ -3781,7 +3781,7 @@
           <p:cNvPr id="18" name="box-42">
             <a:extLst xmlns:a="http://schemas.openxmlformats.org/drawingml/2006/main">
               <a:ext uri="{FF2B5EF4-FFF2-40B4-BE49-F238E27FC236}">
-                <a16:creationId xmlns:a16="http://schemas.microsoft.com/office/drawing/2014/main" id="{ADDCDB2E-812A-45B1-A457-42DA256D6DC7}"/>
+                <a16:creationId xmlns:a16="http://schemas.microsoft.com/office/drawing/2014/main" id="{30FDCB22-6D06-4B18-A53C-F8E25AF7B896}"/>
               </a:ext>
             </a:extLst>
           </p:cNvPr>
@@ -3814,7 +3814,7 @@
           <p:cNvPr id="2" name="text-43">
             <a:extLst xmlns:a="http://schemas.openxmlformats.org/drawingml/2006/main">
               <a:ext uri="{FF2B5EF4-FFF2-40B4-BE49-F238E27FC236}">
-                <a16:creationId xmlns:a16="http://schemas.microsoft.com/office/drawing/2014/main" id="{1A904967-3E1A-4371-BA2B-612845D0859C}"/>
+                <a16:creationId xmlns:a16="http://schemas.microsoft.com/office/drawing/2014/main" id="{8B3F5F92-50B9-4E9D-9843-FB499F2AED17}"/>
               </a:ext>
             </a:extLst>
           </p:cNvPr>
@@ -3870,7 +3870,7 @@
           <p:cNvPr id="3" name="text-44">
             <a:extLst xmlns:a="http://schemas.openxmlformats.org/drawingml/2006/main">
               <a:ext uri="{FF2B5EF4-FFF2-40B4-BE49-F238E27FC236}">
-                <a16:creationId xmlns:a16="http://schemas.microsoft.com/office/drawing/2014/main" id="{565FAEF2-DAE6-475C-868C-447E265E9132}"/>
+                <a16:creationId xmlns:a16="http://schemas.microsoft.com/office/drawing/2014/main" id="{AAD50183-F0FE-4E8B-850F-49FE56DE748D}"/>
               </a:ext>
             </a:extLst>
           </p:cNvPr>
@@ -3926,7 +3926,7 @@
           <p:cNvPr id="4" name="text-45">
             <a:extLst xmlns:a="http://schemas.openxmlformats.org/drawingml/2006/main">
               <a:ext uri="{FF2B5EF4-FFF2-40B4-BE49-F238E27FC236}">
-                <a16:creationId xmlns:a16="http://schemas.microsoft.com/office/drawing/2014/main" id="{CD360BCB-5164-44A4-A4BD-A959E84940B4}"/>
+                <a16:creationId xmlns:a16="http://schemas.microsoft.com/office/drawing/2014/main" id="{F54EF8A0-CD9D-4301-8EC4-980446767DDA}"/>
               </a:ext>
             </a:extLst>
           </p:cNvPr>
@@ -3982,7 +3982,7 @@
           <p:cNvPr id="5" name="text-46">
             <a:extLst xmlns:a="http://schemas.openxmlformats.org/drawingml/2006/main">
               <a:ext uri="{FF2B5EF4-FFF2-40B4-BE49-F238E27FC236}">
-                <a16:creationId xmlns:a16="http://schemas.microsoft.com/office/drawing/2014/main" id="{2FC0B685-A5E8-46AC-B62F-0C645170F137}"/>
+                <a16:creationId xmlns:a16="http://schemas.microsoft.com/office/drawing/2014/main" id="{A7F9FC1F-A790-4F07-8811-F463F430BF90}"/>
               </a:ext>
             </a:extLst>
           </p:cNvPr>
@@ -4038,7 +4038,7 @@
           <p:cNvPr id="6" name="box-47">
             <a:extLst xmlns:a="http://schemas.openxmlformats.org/drawingml/2006/main">
               <a:ext uri="{FF2B5EF4-FFF2-40B4-BE49-F238E27FC236}">
-                <a16:creationId xmlns:a16="http://schemas.microsoft.com/office/drawing/2014/main" id="{EBE1CBBF-08B6-4AAA-91A7-75CF5372E38C}"/>
+                <a16:creationId xmlns:a16="http://schemas.microsoft.com/office/drawing/2014/main" id="{BE95A19A-3C68-4AEF-AD9F-C4B45C1590C5}"/>
               </a:ext>
             </a:extLst>
           </p:cNvPr>
@@ -4071,7 +4071,7 @@
           <p:cNvPr id="7" name="text-48">
             <a:extLst xmlns:a="http://schemas.openxmlformats.org/drawingml/2006/main">
               <a:ext uri="{FF2B5EF4-FFF2-40B4-BE49-F238E27FC236}">
-                <a16:creationId xmlns:a16="http://schemas.microsoft.com/office/drawing/2014/main" id="{8EA80A6D-5DEE-4D53-AB21-18731CA66FD4}"/>
+                <a16:creationId xmlns:a16="http://schemas.microsoft.com/office/drawing/2014/main" id="{40F90A27-B1B8-470B-8A47-501E84CBD128}"/>
               </a:ext>
             </a:extLst>
           </p:cNvPr>
@@ -4127,7 +4127,7 @@
           <p:cNvPr id="8" name="text-49">
             <a:extLst xmlns:a="http://schemas.openxmlformats.org/drawingml/2006/main">
               <a:ext uri="{FF2B5EF4-FFF2-40B4-BE49-F238E27FC236}">
-                <a16:creationId xmlns:a16="http://schemas.microsoft.com/office/drawing/2014/main" id="{82F204C9-E6B3-4892-93A6-EA7C98AA7492}"/>
+                <a16:creationId xmlns:a16="http://schemas.microsoft.com/office/drawing/2014/main" id="{3BD54691-50FF-45AA-A511-EB7003BCE2D7}"/>
               </a:ext>
             </a:extLst>
           </p:cNvPr>
@@ -4183,7 +4183,7 @@
           <p:cNvPr id="9" name="box-50">
             <a:extLst xmlns:a="http://schemas.openxmlformats.org/drawingml/2006/main">
               <a:ext uri="{FF2B5EF4-FFF2-40B4-BE49-F238E27FC236}">
-                <a16:creationId xmlns:a16="http://schemas.microsoft.com/office/drawing/2014/main" id="{D793E842-CE00-49E4-B12B-1A2E920557EB}"/>
+                <a16:creationId xmlns:a16="http://schemas.microsoft.com/office/drawing/2014/main" id="{49B8AFAA-2F40-4660-ADD5-261A990D23C9}"/>
               </a:ext>
             </a:extLst>
           </p:cNvPr>
@@ -4216,7 +4216,7 @@
           <p:cNvPr id="10" name="text-51">
             <a:extLst xmlns:a="http://schemas.openxmlformats.org/drawingml/2006/main">
               <a:ext uri="{FF2B5EF4-FFF2-40B4-BE49-F238E27FC236}">
-                <a16:creationId xmlns:a16="http://schemas.microsoft.com/office/drawing/2014/main" id="{E675869F-54DF-4C4C-B41A-1B9B6F2CDD59}"/>
+                <a16:creationId xmlns:a16="http://schemas.microsoft.com/office/drawing/2014/main" id="{6EFAD6DC-6C5C-4060-B8EF-7D79622361F1}"/>
               </a:ext>
             </a:extLst>
           </p:cNvPr>
@@ -4272,7 +4272,7 @@
           <p:cNvPr id="11" name="text-52">
             <a:extLst xmlns:a="http://schemas.openxmlformats.org/drawingml/2006/main">
               <a:ext uri="{FF2B5EF4-FFF2-40B4-BE49-F238E27FC236}">
-                <a16:creationId xmlns:a16="http://schemas.microsoft.com/office/drawing/2014/main" id="{9032FF64-F3F9-403C-8770-E89B4FC73C45}"/>
+                <a16:creationId xmlns:a16="http://schemas.microsoft.com/office/drawing/2014/main" id="{7C1AB7DA-3EA3-4A7A-A5EE-53674A46937A}"/>
               </a:ext>
             </a:extLst>
           </p:cNvPr>
@@ -4328,7 +4328,7 @@
           <p:cNvPr id="12" name="box-53">
             <a:extLst xmlns:a="http://schemas.openxmlformats.org/drawingml/2006/main">
               <a:ext uri="{FF2B5EF4-FFF2-40B4-BE49-F238E27FC236}">
-                <a16:creationId xmlns:a16="http://schemas.microsoft.com/office/drawing/2014/main" id="{255C5798-8AF9-471E-9F0C-F439F6020A7C}"/>
+                <a16:creationId xmlns:a16="http://schemas.microsoft.com/office/drawing/2014/main" id="{31615D10-ACE5-43AB-94E8-9DE787158115}"/>
               </a:ext>
             </a:extLst>
           </p:cNvPr>
@@ -4361,7 +4361,7 @@
           <p:cNvPr id="13" name="text-54">
             <a:extLst xmlns:a="http://schemas.openxmlformats.org/drawingml/2006/main">
               <a:ext uri="{FF2B5EF4-FFF2-40B4-BE49-F238E27FC236}">
-                <a16:creationId xmlns:a16="http://schemas.microsoft.com/office/drawing/2014/main" id="{69A46D39-179F-48AD-B12A-0621EFAF2DE4}"/>
+                <a16:creationId xmlns:a16="http://schemas.microsoft.com/office/drawing/2014/main" id="{ECC9440E-989A-4EFC-A3DA-F282C14C7302}"/>
               </a:ext>
             </a:extLst>
           </p:cNvPr>
@@ -4417,7 +4417,7 @@
           <p:cNvPr id="14" name="text-55">
             <a:extLst xmlns:a="http://schemas.openxmlformats.org/drawingml/2006/main">
               <a:ext uri="{FF2B5EF4-FFF2-40B4-BE49-F238E27FC236}">
-                <a16:creationId xmlns:a16="http://schemas.microsoft.com/office/drawing/2014/main" id="{F4899B01-B5C9-4D43-A270-042C8A7E34E7}"/>
+                <a16:creationId xmlns:a16="http://schemas.microsoft.com/office/drawing/2014/main" id="{0C658488-FE97-42A8-9AB7-4F0AC55EA415}"/>
               </a:ext>
             </a:extLst>
           </p:cNvPr>
@@ -4473,7 +4473,7 @@
           <p:cNvPr id="15" name="box-56">
             <a:extLst xmlns:a="http://schemas.openxmlformats.org/drawingml/2006/main">
               <a:ext uri="{FF2B5EF4-FFF2-40B4-BE49-F238E27FC236}">
-                <a16:creationId xmlns:a16="http://schemas.microsoft.com/office/drawing/2014/main" id="{294272C2-3142-4EDD-A728-0C5570DC8962}"/>
+                <a16:creationId xmlns:a16="http://schemas.microsoft.com/office/drawing/2014/main" id="{7CDAA0A1-D413-4DBA-8CDE-B1412FAB2C27}"/>
               </a:ext>
             </a:extLst>
           </p:cNvPr>
@@ -4506,7 +4506,7 @@
           <p:cNvPr id="16" name="text-57">
             <a:extLst xmlns:a="http://schemas.openxmlformats.org/drawingml/2006/main">
               <a:ext uri="{FF2B5EF4-FFF2-40B4-BE49-F238E27FC236}">
-                <a16:creationId xmlns:a16="http://schemas.microsoft.com/office/drawing/2014/main" id="{81A2F3AB-2D51-41AE-91E7-8D67FE8EF8CD}"/>
+                <a16:creationId xmlns:a16="http://schemas.microsoft.com/office/drawing/2014/main" id="{CD42D5FB-7B3A-4B4B-A23F-80120B895B46}"/>
               </a:ext>
             </a:extLst>
           </p:cNvPr>
@@ -4562,7 +4562,7 @@
           <p:cNvPr id="17" name="text-58">
             <a:extLst xmlns:a="http://schemas.openxmlformats.org/drawingml/2006/main">
               <a:ext uri="{FF2B5EF4-FFF2-40B4-BE49-F238E27FC236}">
-                <a16:creationId xmlns:a16="http://schemas.microsoft.com/office/drawing/2014/main" id="{6B57BFB9-FE77-421F-A6BF-995446304695}"/>
+                <a16:creationId xmlns:a16="http://schemas.microsoft.com/office/drawing/2014/main" id="{1EF74836-FB2C-4DBE-8611-764FBA999D8D}"/>
               </a:ext>
             </a:extLst>
           </p:cNvPr>
@@ -4616,7 +4616,7 @@
     </p:spTree>
     <p:extLst>
       <p:ext uri="{BB962C8B-B14F-4D97-AF65-F5344CB8AC3E}">
-        <p14:creationId xmlns:p14="http://schemas.microsoft.com/office/powerpoint/2010/main" val="1601620390"/>
+        <p14:creationId xmlns:p14="http://schemas.microsoft.com/office/powerpoint/2010/main" val="1439559969"/>
       </p:ext>
     </p:extLst>
   </p:cSld>
@@ -4647,7 +4647,7 @@
           <p:cNvPr id="21" name="box-59">
             <a:extLst xmlns:a="http://schemas.openxmlformats.org/drawingml/2006/main">
               <a:ext uri="{FF2B5EF4-FFF2-40B4-BE49-F238E27FC236}">
-                <a16:creationId xmlns:a16="http://schemas.microsoft.com/office/drawing/2014/main" id="{5519298A-0DC7-4A45-97D8-88D49983F079}"/>
+                <a16:creationId xmlns:a16="http://schemas.microsoft.com/office/drawing/2014/main" id="{FA656A7D-158F-4D57-9A5F-F24EBDC5B57B}"/>
               </a:ext>
             </a:extLst>
           </p:cNvPr>
@@ -4680,7 +4680,7 @@
           <p:cNvPr id="2" name="text-60">
             <a:extLst xmlns:a="http://schemas.openxmlformats.org/drawingml/2006/main">
               <a:ext uri="{FF2B5EF4-FFF2-40B4-BE49-F238E27FC236}">
-                <a16:creationId xmlns:a16="http://schemas.microsoft.com/office/drawing/2014/main" id="{A6B7036D-127F-4A52-8E7C-79187BB026F5}"/>
+                <a16:creationId xmlns:a16="http://schemas.microsoft.com/office/drawing/2014/main" id="{F5203EE4-91AE-428E-A27E-F6EF05FF115A}"/>
               </a:ext>
             </a:extLst>
           </p:cNvPr>
@@ -4736,7 +4736,7 @@
           <p:cNvPr id="3" name="text-61">
             <a:extLst xmlns:a="http://schemas.openxmlformats.org/drawingml/2006/main">
               <a:ext uri="{FF2B5EF4-FFF2-40B4-BE49-F238E27FC236}">
-                <a16:creationId xmlns:a16="http://schemas.microsoft.com/office/drawing/2014/main" id="{690B924C-A5D4-45C0-A5A3-6FA835B279D9}"/>
+                <a16:creationId xmlns:a16="http://schemas.microsoft.com/office/drawing/2014/main" id="{52D414B9-0AB1-46E7-B8A0-2D994596FAA2}"/>
               </a:ext>
             </a:extLst>
           </p:cNvPr>
@@ -4792,7 +4792,7 @@
           <p:cNvPr id="4" name="text-62">
             <a:extLst xmlns:a="http://schemas.openxmlformats.org/drawingml/2006/main">
               <a:ext uri="{FF2B5EF4-FFF2-40B4-BE49-F238E27FC236}">
-                <a16:creationId xmlns:a16="http://schemas.microsoft.com/office/drawing/2014/main" id="{055EB272-107F-4B31-937D-3B8082B5997A}"/>
+                <a16:creationId xmlns:a16="http://schemas.microsoft.com/office/drawing/2014/main" id="{EB61DE7F-4840-499E-A390-D7EA12D9AEC4}"/>
               </a:ext>
             </a:extLst>
           </p:cNvPr>
@@ -4848,7 +4848,7 @@
           <p:cNvPr id="5" name="text-63">
             <a:extLst xmlns:a="http://schemas.openxmlformats.org/drawingml/2006/main">
               <a:ext uri="{FF2B5EF4-FFF2-40B4-BE49-F238E27FC236}">
-                <a16:creationId xmlns:a16="http://schemas.microsoft.com/office/drawing/2014/main" id="{999CCA0E-3FA6-42BB-91A7-9D847428CB58}"/>
+                <a16:creationId xmlns:a16="http://schemas.microsoft.com/office/drawing/2014/main" id="{34DDE3CF-9772-431C-B65B-B5D12E9BB615}"/>
               </a:ext>
             </a:extLst>
           </p:cNvPr>
@@ -4904,7 +4904,7 @@
           <p:cNvPr id="6" name="box-64">
             <a:extLst xmlns:a="http://schemas.openxmlformats.org/drawingml/2006/main">
               <a:ext uri="{FF2B5EF4-FFF2-40B4-BE49-F238E27FC236}">
-                <a16:creationId xmlns:a16="http://schemas.microsoft.com/office/drawing/2014/main" id="{8F72A320-EBC7-4A9E-A492-48A96CFE0F13}"/>
+                <a16:creationId xmlns:a16="http://schemas.microsoft.com/office/drawing/2014/main" id="{40F538D9-D71A-4CC5-82DC-83F1A50D84F8}"/>
               </a:ext>
             </a:extLst>
           </p:cNvPr>
@@ -4937,7 +4937,7 @@
           <p:cNvPr id="7" name="dot-65">
             <a:extLst xmlns:a="http://schemas.openxmlformats.org/drawingml/2006/main">
               <a:ext uri="{FF2B5EF4-FFF2-40B4-BE49-F238E27FC236}">
-                <a16:creationId xmlns:a16="http://schemas.microsoft.com/office/drawing/2014/main" id="{C52A4A40-A061-4081-BDF5-CB22DCEFDBE9}"/>
+                <a16:creationId xmlns:a16="http://schemas.microsoft.com/office/drawing/2014/main" id="{CCDAC4FE-5A3F-4DE8-BADB-505BD4FCFD50}"/>
               </a:ext>
             </a:extLst>
           </p:cNvPr>
@@ -4968,7 +4968,7 @@
           <p:cNvPr id="8" name="text-66">
             <a:extLst xmlns:a="http://schemas.openxmlformats.org/drawingml/2006/main">
               <a:ext uri="{FF2B5EF4-FFF2-40B4-BE49-F238E27FC236}">
-                <a16:creationId xmlns:a16="http://schemas.microsoft.com/office/drawing/2014/main" id="{513F109B-AADD-4A74-8270-90BC07C52451}"/>
+                <a16:creationId xmlns:a16="http://schemas.microsoft.com/office/drawing/2014/main" id="{8B930659-438C-4236-B381-F57E4206E194}"/>
               </a:ext>
             </a:extLst>
           </p:cNvPr>
@@ -5024,7 +5024,7 @@
           <p:cNvPr id="9" name="text-67">
             <a:extLst xmlns:a="http://schemas.openxmlformats.org/drawingml/2006/main">
               <a:ext uri="{FF2B5EF4-FFF2-40B4-BE49-F238E27FC236}">
-                <a16:creationId xmlns:a16="http://schemas.microsoft.com/office/drawing/2014/main" id="{C8863DE8-B8FD-4A45-A58F-0011DAE94274}"/>
+                <a16:creationId xmlns:a16="http://schemas.microsoft.com/office/drawing/2014/main" id="{271F5E27-C093-4831-B12B-7C2CA8BB7F5F}"/>
               </a:ext>
             </a:extLst>
           </p:cNvPr>
@@ -5080,7 +5080,7 @@
           <p:cNvPr id="10" name="text-68">
             <a:extLst xmlns:a="http://schemas.openxmlformats.org/drawingml/2006/main">
               <a:ext uri="{FF2B5EF4-FFF2-40B4-BE49-F238E27FC236}">
-                <a16:creationId xmlns:a16="http://schemas.microsoft.com/office/drawing/2014/main" id="{59A6B182-849D-45DC-BA72-B024EC0032A9}"/>
+                <a16:creationId xmlns:a16="http://schemas.microsoft.com/office/drawing/2014/main" id="{805D8EB0-4D61-400C-930F-C2DA558C499A}"/>
               </a:ext>
             </a:extLst>
           </p:cNvPr>
@@ -5136,7 +5136,7 @@
           <p:cNvPr id="11" name="dot-69">
             <a:extLst xmlns:a="http://schemas.openxmlformats.org/drawingml/2006/main">
               <a:ext uri="{FF2B5EF4-FFF2-40B4-BE49-F238E27FC236}">
-                <a16:creationId xmlns:a16="http://schemas.microsoft.com/office/drawing/2014/main" id="{57F14011-C9F4-4F62-AC87-4798E4ABFE48}"/>
+                <a16:creationId xmlns:a16="http://schemas.microsoft.com/office/drawing/2014/main" id="{E183D36D-C7CF-4E13-9A9F-965ED9BDB073}"/>
               </a:ext>
             </a:extLst>
           </p:cNvPr>
@@ -5167,7 +5167,7 @@
           <p:cNvPr id="12" name="text-70">
             <a:extLst xmlns:a="http://schemas.openxmlformats.org/drawingml/2006/main">
               <a:ext uri="{FF2B5EF4-FFF2-40B4-BE49-F238E27FC236}">
-                <a16:creationId xmlns:a16="http://schemas.microsoft.com/office/drawing/2014/main" id="{25EB872C-DDFD-40DC-AC03-FAE5C4EA0E5E}"/>
+                <a16:creationId xmlns:a16="http://schemas.microsoft.com/office/drawing/2014/main" id="{5197C617-0E7E-46F6-A36E-606227DFBD06}"/>
               </a:ext>
             </a:extLst>
           </p:cNvPr>
@@ -5223,7 +5223,7 @@
           <p:cNvPr id="13" name="text-71">
             <a:extLst xmlns:a="http://schemas.openxmlformats.org/drawingml/2006/main">
               <a:ext uri="{FF2B5EF4-FFF2-40B4-BE49-F238E27FC236}">
-                <a16:creationId xmlns:a16="http://schemas.microsoft.com/office/drawing/2014/main" id="{592078A7-3B54-41DB-B103-AE887FE223CE}"/>
+                <a16:creationId xmlns:a16="http://schemas.microsoft.com/office/drawing/2014/main" id="{179B5E58-6B34-490A-A142-468BDE82BFAB}"/>
               </a:ext>
             </a:extLst>
           </p:cNvPr>
@@ -5279,7 +5279,7 @@
           <p:cNvPr id="14" name="text-72">
             <a:extLst xmlns:a="http://schemas.openxmlformats.org/drawingml/2006/main">
               <a:ext uri="{FF2B5EF4-FFF2-40B4-BE49-F238E27FC236}">
-                <a16:creationId xmlns:a16="http://schemas.microsoft.com/office/drawing/2014/main" id="{9FF08B2D-5546-4738-96FB-DD0E73628204}"/>
+                <a16:creationId xmlns:a16="http://schemas.microsoft.com/office/drawing/2014/main" id="{033D35BC-D5F5-4F24-B260-36D929755B6C}"/>
               </a:ext>
             </a:extLst>
           </p:cNvPr>
@@ -5335,7 +5335,7 @@
           <p:cNvPr id="15" name="dot-73">
             <a:extLst xmlns:a="http://schemas.openxmlformats.org/drawingml/2006/main">
               <a:ext uri="{FF2B5EF4-FFF2-40B4-BE49-F238E27FC236}">
-                <a16:creationId xmlns:a16="http://schemas.microsoft.com/office/drawing/2014/main" id="{50F73B97-A4F0-4EA3-AE67-CAA7B10AE5FF}"/>
+                <a16:creationId xmlns:a16="http://schemas.microsoft.com/office/drawing/2014/main" id="{E8204173-A4FE-4476-85B4-7596540E1C04}"/>
               </a:ext>
             </a:extLst>
           </p:cNvPr>
@@ -5366,7 +5366,7 @@
           <p:cNvPr id="16" name="text-74">
             <a:extLst xmlns:a="http://schemas.openxmlformats.org/drawingml/2006/main">
               <a:ext uri="{FF2B5EF4-FFF2-40B4-BE49-F238E27FC236}">
-                <a16:creationId xmlns:a16="http://schemas.microsoft.com/office/drawing/2014/main" id="{A2A433DC-FA36-4C15-83DA-FB77E1D9D8D6}"/>
+                <a16:creationId xmlns:a16="http://schemas.microsoft.com/office/drawing/2014/main" id="{F68F88E8-0166-4CBC-9329-C977444077A7}"/>
               </a:ext>
             </a:extLst>
           </p:cNvPr>
@@ -5422,7 +5422,7 @@
           <p:cNvPr id="17" name="text-75">
             <a:extLst xmlns:a="http://schemas.openxmlformats.org/drawingml/2006/main">
               <a:ext uri="{FF2B5EF4-FFF2-40B4-BE49-F238E27FC236}">
-                <a16:creationId xmlns:a16="http://schemas.microsoft.com/office/drawing/2014/main" id="{563217A6-C4A7-4ED9-9D66-8C6C3AEF82A0}"/>
+                <a16:creationId xmlns:a16="http://schemas.microsoft.com/office/drawing/2014/main" id="{853DE17F-1503-49CD-8A72-AE0470CA2455}"/>
               </a:ext>
             </a:extLst>
           </p:cNvPr>
@@ -5478,7 +5478,7 @@
           <p:cNvPr id="18" name="text-76">
             <a:extLst xmlns:a="http://schemas.openxmlformats.org/drawingml/2006/main">
               <a:ext uri="{FF2B5EF4-FFF2-40B4-BE49-F238E27FC236}">
-                <a16:creationId xmlns:a16="http://schemas.microsoft.com/office/drawing/2014/main" id="{D8B686BE-8ABE-4E5F-8E8C-18DCB63EFA0A}"/>
+                <a16:creationId xmlns:a16="http://schemas.microsoft.com/office/drawing/2014/main" id="{0A9C7909-4591-4AB3-9874-1500A7C6C981}"/>
               </a:ext>
             </a:extLst>
           </p:cNvPr>
@@ -5534,7 +5534,7 @@
           <p:cNvPr id="19" name="box-77">
             <a:extLst xmlns:a="http://schemas.openxmlformats.org/drawingml/2006/main">
               <a:ext uri="{FF2B5EF4-FFF2-40B4-BE49-F238E27FC236}">
-                <a16:creationId xmlns:a16="http://schemas.microsoft.com/office/drawing/2014/main" id="{51A37D2C-2F6E-41B8-9B74-7D3C7ADF84A2}"/>
+                <a16:creationId xmlns:a16="http://schemas.microsoft.com/office/drawing/2014/main" id="{ED686532-3FFB-4857-BBBF-73A9DF7DE57A}"/>
               </a:ext>
             </a:extLst>
           </p:cNvPr>
@@ -5567,7 +5567,7 @@
           <p:cNvPr id="20" name="text-78">
             <a:extLst xmlns:a="http://schemas.openxmlformats.org/drawingml/2006/main">
               <a:ext uri="{FF2B5EF4-FFF2-40B4-BE49-F238E27FC236}">
-                <a16:creationId xmlns:a16="http://schemas.microsoft.com/office/drawing/2014/main" id="{0C9BA9C1-ABE7-484B-9B5A-CB42A16F6F4E}"/>
+                <a16:creationId xmlns:a16="http://schemas.microsoft.com/office/drawing/2014/main" id="{590E123F-5E5E-4D1A-83BC-E9DC9530C903}"/>
               </a:ext>
             </a:extLst>
           </p:cNvPr>
@@ -5621,7 +5621,7 @@
     </p:spTree>
     <p:extLst>
       <p:ext uri="{BB962C8B-B14F-4D97-AF65-F5344CB8AC3E}">
-        <p14:creationId xmlns:p14="http://schemas.microsoft.com/office/powerpoint/2010/main" val="1157522057"/>
+        <p14:creationId xmlns:p14="http://schemas.microsoft.com/office/powerpoint/2010/main" val="1644576162"/>
       </p:ext>
     </p:extLst>
   </p:cSld>
@@ -5652,7 +5652,7 @@
           <p:cNvPr id="18" name="box-79">
             <a:extLst xmlns:a="http://schemas.openxmlformats.org/drawingml/2006/main">
               <a:ext uri="{FF2B5EF4-FFF2-40B4-BE49-F238E27FC236}">
-                <a16:creationId xmlns:a16="http://schemas.microsoft.com/office/drawing/2014/main" id="{99ACF86A-CB78-4B05-A8A6-C713618A1E49}"/>
+                <a16:creationId xmlns:a16="http://schemas.microsoft.com/office/drawing/2014/main" id="{0B6989CF-2FD0-45D7-BC6A-7AE4172C0C8B}"/>
               </a:ext>
             </a:extLst>
           </p:cNvPr>
@@ -5685,7 +5685,7 @@
           <p:cNvPr id="2" name="text-80">
             <a:extLst xmlns:a="http://schemas.openxmlformats.org/drawingml/2006/main">
               <a:ext uri="{FF2B5EF4-FFF2-40B4-BE49-F238E27FC236}">
-                <a16:creationId xmlns:a16="http://schemas.microsoft.com/office/drawing/2014/main" id="{613F8D87-66CF-446C-BEFA-CCBC8E5056DE}"/>
+                <a16:creationId xmlns:a16="http://schemas.microsoft.com/office/drawing/2014/main" id="{5BBE06BA-0015-4E72-B5ED-00D6FCD33844}"/>
               </a:ext>
             </a:extLst>
           </p:cNvPr>
@@ -5741,7 +5741,7 @@
           <p:cNvPr id="3" name="text-81">
             <a:extLst xmlns:a="http://schemas.openxmlformats.org/drawingml/2006/main">
               <a:ext uri="{FF2B5EF4-FFF2-40B4-BE49-F238E27FC236}">
-                <a16:creationId xmlns:a16="http://schemas.microsoft.com/office/drawing/2014/main" id="{984C7774-A46B-4462-8122-82D8FD8DC77A}"/>
+                <a16:creationId xmlns:a16="http://schemas.microsoft.com/office/drawing/2014/main" id="{941A5D76-84C5-4909-AF39-99C38F22C407}"/>
               </a:ext>
             </a:extLst>
           </p:cNvPr>
@@ -5797,7 +5797,7 @@
           <p:cNvPr id="4" name="text-82">
             <a:extLst xmlns:a="http://schemas.openxmlformats.org/drawingml/2006/main">
               <a:ext uri="{FF2B5EF4-FFF2-40B4-BE49-F238E27FC236}">
-                <a16:creationId xmlns:a16="http://schemas.microsoft.com/office/drawing/2014/main" id="{E225FBB2-5849-4D9F-8DF8-2240C5279E05}"/>
+                <a16:creationId xmlns:a16="http://schemas.microsoft.com/office/drawing/2014/main" id="{E17FDD47-4C3D-4CD5-B1D5-ACB5147CB14D}"/>
               </a:ext>
             </a:extLst>
           </p:cNvPr>
@@ -5853,7 +5853,7 @@
           <p:cNvPr id="5" name="text-83">
             <a:extLst xmlns:a="http://schemas.openxmlformats.org/drawingml/2006/main">
               <a:ext uri="{FF2B5EF4-FFF2-40B4-BE49-F238E27FC236}">
-                <a16:creationId xmlns:a16="http://schemas.microsoft.com/office/drawing/2014/main" id="{E25A373F-7296-47D7-896F-2847D3B7BCC8}"/>
+                <a16:creationId xmlns:a16="http://schemas.microsoft.com/office/drawing/2014/main" id="{A9771F7A-B5BC-4C51-B816-FF1DD576BF9A}"/>
               </a:ext>
             </a:extLst>
           </p:cNvPr>
@@ -5909,7 +5909,7 @@
           <p:cNvPr id="6" name="text-84">
             <a:extLst xmlns:a="http://schemas.openxmlformats.org/drawingml/2006/main">
               <a:ext uri="{FF2B5EF4-FFF2-40B4-BE49-F238E27FC236}">
-                <a16:creationId xmlns:a16="http://schemas.microsoft.com/office/drawing/2014/main" id="{8A6C5795-9070-48FE-B0BC-B9D14313688C}"/>
+                <a16:creationId xmlns:a16="http://schemas.microsoft.com/office/drawing/2014/main" id="{D5C31478-0F55-4BEB-9BE0-1709B10C2820}"/>
               </a:ext>
             </a:extLst>
           </p:cNvPr>
@@ -5965,7 +5965,7 @@
           <p:cNvPr id="7" name="text-85">
             <a:extLst xmlns:a="http://schemas.openxmlformats.org/drawingml/2006/main">
               <a:ext uri="{FF2B5EF4-FFF2-40B4-BE49-F238E27FC236}">
-                <a16:creationId xmlns:a16="http://schemas.microsoft.com/office/drawing/2014/main" id="{A546D8D0-465A-40C6-A63F-529FB1DDAD77}"/>
+                <a16:creationId xmlns:a16="http://schemas.microsoft.com/office/drawing/2014/main" id="{0C5BF47B-B7FF-4799-84EE-547F51FF0E29}"/>
               </a:ext>
             </a:extLst>
           </p:cNvPr>
@@ -6021,7 +6021,7 @@
           <p:cNvPr id="8" name="text-86">
             <a:extLst xmlns:a="http://schemas.openxmlformats.org/drawingml/2006/main">
               <a:ext uri="{FF2B5EF4-FFF2-40B4-BE49-F238E27FC236}">
-                <a16:creationId xmlns:a16="http://schemas.microsoft.com/office/drawing/2014/main" id="{CADEA91F-6239-4313-8D64-36B98B599D63}"/>
+                <a16:creationId xmlns:a16="http://schemas.microsoft.com/office/drawing/2014/main" id="{721292BA-AA72-4898-8E74-D2C4F8126503}"/>
               </a:ext>
             </a:extLst>
           </p:cNvPr>
@@ -6077,7 +6077,7 @@
           <p:cNvPr id="9" name="text-87">
             <a:extLst xmlns:a="http://schemas.openxmlformats.org/drawingml/2006/main">
               <a:ext uri="{FF2B5EF4-FFF2-40B4-BE49-F238E27FC236}">
-                <a16:creationId xmlns:a16="http://schemas.microsoft.com/office/drawing/2014/main" id="{5D9897D5-98E5-40B4-8B60-0B05AE3028B9}"/>
+                <a16:creationId xmlns:a16="http://schemas.microsoft.com/office/drawing/2014/main" id="{203477C4-7ACF-4A99-9E7C-4498FFFAAD38}"/>
               </a:ext>
             </a:extLst>
           </p:cNvPr>
@@ -6133,7 +6133,7 @@
           <p:cNvPr id="10" name="text-88">
             <a:extLst xmlns:a="http://schemas.openxmlformats.org/drawingml/2006/main">
               <a:ext uri="{FF2B5EF4-FFF2-40B4-BE49-F238E27FC236}">
-                <a16:creationId xmlns:a16="http://schemas.microsoft.com/office/drawing/2014/main" id="{5A27F241-021F-4D38-9821-F6F18BA47B49}"/>
+                <a16:creationId xmlns:a16="http://schemas.microsoft.com/office/drawing/2014/main" id="{847C50D9-9C68-4161-A79F-921E53B7E556}"/>
               </a:ext>
             </a:extLst>
           </p:cNvPr>
@@ -6235,7 +6235,7 @@
           <p:cNvPr id="11" name="text-89">
             <a:extLst xmlns:a="http://schemas.openxmlformats.org/drawingml/2006/main">
               <a:ext uri="{FF2B5EF4-FFF2-40B4-BE49-F238E27FC236}">
-                <a16:creationId xmlns:a16="http://schemas.microsoft.com/office/drawing/2014/main" id="{4A6E79E0-9C08-4032-B68B-9FFD73EA6B63}"/>
+                <a16:creationId xmlns:a16="http://schemas.microsoft.com/office/drawing/2014/main" id="{3FBD1B4A-7F01-4F0A-8216-935BD3E8ADEA}"/>
               </a:ext>
             </a:extLst>
           </p:cNvPr>
@@ -6337,7 +6337,7 @@
           <p:cNvPr id="12" name="text-90">
             <a:extLst xmlns:a="http://schemas.openxmlformats.org/drawingml/2006/main">
               <a:ext uri="{FF2B5EF4-FFF2-40B4-BE49-F238E27FC236}">
-                <a16:creationId xmlns:a16="http://schemas.microsoft.com/office/drawing/2014/main" id="{E423EBF3-CE9A-43DA-80F1-BC4A62B4FE68}"/>
+                <a16:creationId xmlns:a16="http://schemas.microsoft.com/office/drawing/2014/main" id="{5FC49AC6-4DC0-4FD5-9A9B-81DEFD3B9753}"/>
               </a:ext>
             </a:extLst>
           </p:cNvPr>
@@ -6439,7 +6439,7 @@
           <p:cNvPr id="13" name="box-91">
             <a:extLst xmlns:a="http://schemas.openxmlformats.org/drawingml/2006/main">
               <a:ext uri="{FF2B5EF4-FFF2-40B4-BE49-F238E27FC236}">
-                <a16:creationId xmlns:a16="http://schemas.microsoft.com/office/drawing/2014/main" id="{B1E859C8-9D03-4D27-94C9-3A1BD12DE996}"/>
+                <a16:creationId xmlns:a16="http://schemas.microsoft.com/office/drawing/2014/main" id="{E4B29603-FD8E-40F9-A492-704198F60A2B}"/>
               </a:ext>
             </a:extLst>
           </p:cNvPr>
@@ -6472,7 +6472,7 @@
           <p:cNvPr id="14" name="text-92">
             <a:extLst xmlns:a="http://schemas.openxmlformats.org/drawingml/2006/main">
               <a:ext uri="{FF2B5EF4-FFF2-40B4-BE49-F238E27FC236}">
-                <a16:creationId xmlns:a16="http://schemas.microsoft.com/office/drawing/2014/main" id="{AEF57CE6-208D-4B77-AF09-430114189666}"/>
+                <a16:creationId xmlns:a16="http://schemas.microsoft.com/office/drawing/2014/main" id="{557F7B03-803E-414D-B428-8A9B7121C6E5}"/>
               </a:ext>
             </a:extLst>
           </p:cNvPr>
@@ -6528,7 +6528,7 @@
           <p:cNvPr id="15" name="text-93">
             <a:extLst xmlns:a="http://schemas.openxmlformats.org/drawingml/2006/main">
               <a:ext uri="{FF2B5EF4-FFF2-40B4-BE49-F238E27FC236}">
-                <a16:creationId xmlns:a16="http://schemas.microsoft.com/office/drawing/2014/main" id="{4DB9C382-E3BE-4188-83E8-339939021520}"/>
+                <a16:creationId xmlns:a16="http://schemas.microsoft.com/office/drawing/2014/main" id="{A6F75BFC-1D8D-4B56-98A8-64287F05C7A2}"/>
               </a:ext>
             </a:extLst>
           </p:cNvPr>
@@ -6584,7 +6584,7 @@
           <p:cNvPr id="16" name="text-94">
             <a:extLst xmlns:a="http://schemas.openxmlformats.org/drawingml/2006/main">
               <a:ext uri="{FF2B5EF4-FFF2-40B4-BE49-F238E27FC236}">
-                <a16:creationId xmlns:a16="http://schemas.microsoft.com/office/drawing/2014/main" id="{AA557BB1-C1A2-4C50-8F02-B6013274F8A5}"/>
+                <a16:creationId xmlns:a16="http://schemas.microsoft.com/office/drawing/2014/main" id="{18B007AB-2277-4382-823C-D7C4143735ED}"/>
               </a:ext>
             </a:extLst>
           </p:cNvPr>
@@ -6640,7 +6640,7 @@
           <p:cNvPr id="17" name="text-95">
             <a:extLst xmlns:a="http://schemas.openxmlformats.org/drawingml/2006/main">
               <a:ext uri="{FF2B5EF4-FFF2-40B4-BE49-F238E27FC236}">
-                <a16:creationId xmlns:a16="http://schemas.microsoft.com/office/drawing/2014/main" id="{E98D75A7-FFE4-4843-B93C-5662E5FEDCC0}"/>
+                <a16:creationId xmlns:a16="http://schemas.microsoft.com/office/drawing/2014/main" id="{3846F6BC-F534-47DD-9F46-D01BDCC2B326}"/>
               </a:ext>
             </a:extLst>
           </p:cNvPr>
@@ -6694,7 +6694,7 @@
     </p:spTree>
     <p:extLst>
       <p:ext uri="{BB962C8B-B14F-4D97-AF65-F5344CB8AC3E}">
-        <p14:creationId xmlns:p14="http://schemas.microsoft.com/office/powerpoint/2010/main" val="1474435480"/>
+        <p14:creationId xmlns:p14="http://schemas.microsoft.com/office/powerpoint/2010/main" val="474193238"/>
       </p:ext>
     </p:extLst>
   </p:cSld>
